--- a/folien/dist/01-netzwerke-grundlagen.pptx
+++ b/folien/dist/01-netzwerke-grundlagen.pptx
@@ -38,9 +38,10 @@
     <p:sldId id="286" r:id="rId32"/>
     <p:sldId id="287" r:id="rId33"/>
     <p:sldId id="288" r:id="rId34"/>
+    <p:sldId id="289" r:id="rId35"/>
   </p:sldIdLst>
   <p:notesMasterIdLst>
-    <p:notesMasterId r:id="rId35"/>
+    <p:notesMasterId r:id="rId36"/>
   </p:notesMasterIdLst>
   <p:sldSz cx="9144000" cy="5143500"/>
   <p:notesSz cx="5143500" cy="9144000"/>
@@ -2846,6 +2847,94 @@
             <a:fld id="{F7021451-1387-4CA6-816F-3879F97B5CBC}" type="slidenum">
               <a:rPr lang="en-US"/>
               <a:t>33</a:t>
+            </a:fld>
+            <a:endParaRPr lang="en-US"/>
+          </a:p>
+        </p:txBody>
+      </p:sp>
+    </p:spTree>
+    <p:extLst>
+      <p:ext uri="{BB962C8B-B14F-4D97-AF65-F5344CB8AC3E}">
+        <p14:creationId xmlns:p14="http://schemas.microsoft.com/office/powerpoint/2010/main" val="1024086991"/>
+      </p:ext>
+    </p:extLst>
+  </p:cSld>
+  <p:clrMapOvr>
+    <a:masterClrMapping/>
+  </p:clrMapOvr>
+</p:notes>
+</file>
+
+<file path=ppt/notesSlides/notesSlide34.xml><?xml version="1.0" encoding="utf-8"?>
+<p:notes xmlns:a="http://schemas.openxmlformats.org/drawingml/2006/main" xmlns:r="http://schemas.openxmlformats.org/officeDocument/2006/relationships" xmlns:p="http://schemas.openxmlformats.org/presentationml/2006/main">
+  <p:cSld>
+    <p:spTree>
+      <p:nvGrpSpPr>
+        <p:cNvPr id="1" name=""/>
+        <p:cNvGrpSpPr/>
+        <p:nvPr/>
+      </p:nvGrpSpPr>
+      <p:grpSpPr>
+        <a:xfrm>
+          <a:off x="0" y="0"/>
+          <a:ext cx="0" cy="0"/>
+          <a:chOff x="0" y="0"/>
+          <a:chExt cx="0" cy="0"/>
+        </a:xfrm>
+      </p:grpSpPr>
+      <p:sp>
+        <p:nvSpPr>
+          <p:cNvPr id="2" name="Slide Image Placeholder 1"/>
+          <p:cNvSpPr>
+            <a:spLocks noGrp="1" noRot="1" noChangeAspect="1"/>
+          </p:cNvSpPr>
+          <p:nvPr>
+            <p:ph type="sldImg"/>
+          </p:nvPr>
+        </p:nvSpPr>
+        <p:spPr/>
+      </p:sp>
+      <p:sp>
+        <p:nvSpPr>
+          <p:cNvPr id="3" name="Notes Placeholder 2"/>
+          <p:cNvSpPr>
+            <a:spLocks noGrp="1"/>
+          </p:cNvSpPr>
+          <p:nvPr>
+            <p:ph type="body" idx="1"/>
+          </p:nvPr>
+        </p:nvSpPr>
+        <p:spPr/>
+        <p:txBody>
+          <a:bodyPr/>
+          <a:lstStyle/>
+          <a:p>
+            <a:r>
+              <a:rPr lang="en-US" dirty="0"/>
+              <a:t/>
+            </a:r>
+            <a:endParaRPr lang="en-US" dirty="0"/>
+          </a:p>
+        </p:txBody>
+      </p:sp>
+      <p:sp>
+        <p:nvSpPr>
+          <p:cNvPr id="4" name="Slide Number Placeholder 3"/>
+          <p:cNvSpPr>
+            <a:spLocks noGrp="1"/>
+          </p:cNvSpPr>
+          <p:nvPr>
+            <p:ph type="sldNum" sz="quarter" idx="10"/>
+          </p:nvPr>
+        </p:nvSpPr>
+        <p:spPr/>
+        <p:txBody>
+          <a:bodyPr/>
+          <a:lstStyle/>
+          <a:p>
+            <a:fld id="{F7021451-1387-4CA6-816F-3879F97B5CBC}" type="slidenum">
+              <a:rPr lang="en-US"/>
+              <a:t>34</a:t>
             </a:fld>
             <a:endParaRPr lang="en-US"/>
           </a:p>
@@ -5054,7 +5143,7 @@
                 <a:ea typeface="Arial" pitchFamily="34" charset="-122"/>
                 <a:cs typeface="Arial" pitchFamily="34" charset="-120"/>
               </a:rPr>
-              <a:t>7/26</a:t>
+              <a:t>7/27</a:t>
             </a:r>
             <a:endParaRPr lang="en-US" sz="1050" dirty="0"/>
           </a:p>
@@ -5946,7 +6035,7 @@
                 <a:ea typeface="Arial" pitchFamily="34" charset="-122"/>
                 <a:cs typeface="Arial" pitchFamily="34" charset="-120"/>
               </a:rPr>
-              <a:t>Prüfungsrelevant ist nicht das Bild, sondern die Folge: Welcher Ausfall legt wie viel lahm?</a:t>
+              <a:t>Wichtig ist nicht das Bild, sondern die Folge: Welcher Ausfall legt wie viel lahm?</a:t>
             </a:r>
             <a:endParaRPr lang="en-US" sz="1150" dirty="0"/>
           </a:p>
@@ -6047,7 +6136,7 @@
                 <a:ea typeface="Arial" pitchFamily="34" charset="-122"/>
                 <a:cs typeface="Arial" pitchFamily="34" charset="-120"/>
               </a:rPr>
-              <a:t>8/26</a:t>
+              <a:t>8/27</a:t>
             </a:r>
             <a:endParaRPr lang="en-US" sz="1050" dirty="0"/>
           </a:p>
@@ -6762,7 +6851,7 @@
                 <a:ea typeface="Arial" pitchFamily="34" charset="-122"/>
                 <a:cs typeface="Arial" pitchFamily="34" charset="-120"/>
               </a:rPr>
-              <a:t>9/26</a:t>
+              <a:t>9/27</a:t>
             </a:r>
             <a:endParaRPr lang="en-US" sz="1050" dirty="0"/>
           </a:p>
@@ -7876,7 +7965,7 @@
                 <a:ea typeface="Arial" pitchFamily="34" charset="-122"/>
                 <a:cs typeface="Arial" pitchFamily="34" charset="-120"/>
               </a:rPr>
-              <a:t>10/26</a:t>
+              <a:t>10/27</a:t>
             </a:r>
             <a:endParaRPr lang="en-US" sz="1050" dirty="0"/>
           </a:p>
@@ -8647,7 +8736,7 @@
                 <a:ea typeface="Arial" pitchFamily="34" charset="-122"/>
                 <a:cs typeface="Arial" pitchFamily="34" charset="-120"/>
               </a:rPr>
-              <a:t>11/26</a:t>
+              <a:t>11/27</a:t>
             </a:r>
             <a:endParaRPr lang="en-US" sz="1050" dirty="0"/>
           </a:p>
@@ -9429,7 +9518,7 @@
                 <a:ea typeface="Arial" pitchFamily="34" charset="-122"/>
                 <a:cs typeface="Arial" pitchFamily="34" charset="-120"/>
               </a:rPr>
-              <a:t>12/26</a:t>
+              <a:t>12/27</a:t>
             </a:r>
             <a:endParaRPr lang="en-US" sz="1050" dirty="0"/>
           </a:p>
@@ -10818,7 +10907,7 @@
                 <a:ea typeface="Arial" pitchFamily="34" charset="-122"/>
                 <a:cs typeface="Arial" pitchFamily="34" charset="-120"/>
               </a:rPr>
-              <a:t>13/26</a:t>
+              <a:t>13/27</a:t>
             </a:r>
             <a:endParaRPr lang="en-US" sz="1050" dirty="0"/>
           </a:p>
@@ -11694,7 +11783,7 @@
                 <a:ea typeface="Arial" pitchFamily="34" charset="-122"/>
                 <a:cs typeface="Arial" pitchFamily="34" charset="-120"/>
               </a:rPr>
-              <a:t>Faustregel für die Prüfung: OSI zum Erklären, TCP/IP zum Arbeiten.</a:t>
+              <a:t>Faustregel: OSI zum Erklären, TCP/IP zum Arbeiten.</a:t>
             </a:r>
             <a:endParaRPr lang="en-US" sz="1200" dirty="0"/>
           </a:p>
@@ -11795,7 +11884,7 @@
                 <a:ea typeface="Arial" pitchFamily="34" charset="-122"/>
                 <a:cs typeface="Arial" pitchFamily="34" charset="-120"/>
               </a:rPr>
-              <a:t>14/26</a:t>
+              <a:t>14/27</a:t>
             </a:r>
             <a:endParaRPr lang="en-US" sz="1050" dirty="0"/>
           </a:p>
@@ -12660,7 +12749,7 @@
                 <a:ea typeface="Arial" pitchFamily="34" charset="-122"/>
                 <a:cs typeface="Arial" pitchFamily="34" charset="-120"/>
               </a:rPr>
-              <a:t>15/26</a:t>
+              <a:t>15/27</a:t>
             </a:r>
             <a:endParaRPr lang="en-US" sz="1050" dirty="0"/>
           </a:p>
@@ -13064,7 +13153,7 @@
                 <a:ea typeface="Courier New" pitchFamily="34" charset="-122"/>
                 <a:cs typeface="Courier New" pitchFamily="34" charset="-120"/>
               </a:rPr>
-              <a:t>18:45</a:t>
+              <a:t>18:40</a:t>
             </a:r>
             <a:endParaRPr lang="en-US" sz="1050" dirty="0"/>
           </a:p>
@@ -13142,7 +13231,7 @@
                 <a:ea typeface="Courier New" pitchFamily="34" charset="-122"/>
                 <a:cs typeface="Courier New" pitchFamily="34" charset="-120"/>
               </a:rPr>
-              <a:t>19:00</a:t>
+              <a:t>18:55</a:t>
             </a:r>
             <a:endParaRPr lang="en-US" sz="1050" dirty="0"/>
           </a:p>
@@ -13240,7 +13329,7 @@
                 <a:ea typeface="Courier New" pitchFamily="34" charset="-122"/>
                 <a:cs typeface="Courier New" pitchFamily="34" charset="-120"/>
               </a:rPr>
-              <a:t>19:10</a:t>
+              <a:t>19:05</a:t>
             </a:r>
             <a:endParaRPr lang="en-US" sz="1050" dirty="0"/>
           </a:p>
@@ -13318,7 +13407,7 @@
                 <a:ea typeface="Courier New" pitchFamily="34" charset="-122"/>
                 <a:cs typeface="Courier New" pitchFamily="34" charset="-120"/>
               </a:rPr>
-              <a:t>19:30</a:t>
+              <a:t>19:25</a:t>
             </a:r>
             <a:endParaRPr lang="en-US" sz="1050" dirty="0"/>
           </a:p>
@@ -13416,7 +13505,7 @@
                 <a:ea typeface="Courier New" pitchFamily="34" charset="-122"/>
                 <a:cs typeface="Courier New" pitchFamily="34" charset="-120"/>
               </a:rPr>
-              <a:t>19:40</a:t>
+              <a:t>19:35</a:t>
             </a:r>
             <a:endParaRPr lang="en-US" sz="1050" dirty="0"/>
           </a:p>
@@ -13494,7 +13583,7 @@
                 <a:ea typeface="Courier New" pitchFamily="34" charset="-122"/>
                 <a:cs typeface="Courier New" pitchFamily="34" charset="-120"/>
               </a:rPr>
-              <a:t>20:20</a:t>
+              <a:t>20:25</a:t>
             </a:r>
             <a:endParaRPr lang="en-US" sz="1050" dirty="0"/>
           </a:p>
@@ -13592,7 +13681,7 @@
                 <a:ea typeface="Courier New" pitchFamily="34" charset="-122"/>
                 <a:cs typeface="Courier New" pitchFamily="34" charset="-120"/>
               </a:rPr>
-              <a:t>20:50</a:t>
+              <a:t>20:55</a:t>
             </a:r>
             <a:endParaRPr lang="en-US" sz="1050" dirty="0"/>
           </a:p>
@@ -13631,7 +13720,7 @@
                 <a:ea typeface="Arial" pitchFamily="34" charset="-122"/>
                 <a:cs typeface="Arial" pitchFamily="34" charset="-120"/>
               </a:rPr>
-              <a:t>Prüfungsbegriffe, Ausblick, offene Fragen</a:t>
+              <a:t>Ausblick und offene Fragen</a:t>
             </a:r>
             <a:endParaRPr lang="en-US" sz="1050" dirty="0"/>
           </a:p>
@@ -13791,7 +13880,7 @@
                 <a:ea typeface="Arial" pitchFamily="34" charset="-122"/>
                 <a:cs typeface="Arial" pitchFamily="34" charset="-120"/>
               </a:rPr>
-              <a:t>1/26</a:t>
+              <a:t>1/27</a:t>
             </a:r>
             <a:endParaRPr lang="en-US" sz="1050" dirty="0"/>
           </a:p>
@@ -13960,7 +14049,7 @@
                 <a:ea typeface="Arial" pitchFamily="34" charset="-122"/>
                 <a:cs typeface="Arial" pitchFamily="34" charset="-120"/>
               </a:rPr>
-              <a:t>Schichten sind kein Prüfungsstoff zum Auswendiglernen, sondern ein Suchraster.</a:t>
+              <a:t>Schichten sind nichts zum Auswendiglernen, sondern ein Suchraster für den Alltag.</a:t>
             </a:r>
             <a:endParaRPr lang="en-US" sz="1300" dirty="0"/>
           </a:p>
@@ -14483,7 +14572,7 @@
                 <a:ea typeface="Arial" pitchFamily="34" charset="-122"/>
                 <a:cs typeface="Arial" pitchFamily="34" charset="-120"/>
               </a:rPr>
-              <a:t>16/26</a:t>
+              <a:t>16/27</a:t>
             </a:r>
             <a:endParaRPr lang="en-US" sz="1050" dirty="0"/>
           </a:p>
@@ -15581,7 +15670,7 @@
                 <a:ea typeface="Arial" pitchFamily="34" charset="-122"/>
                 <a:cs typeface="Arial" pitchFamily="34" charset="-120"/>
               </a:rPr>
-              <a:t>17/26</a:t>
+              <a:t>17/27</a:t>
             </a:r>
             <a:endParaRPr lang="en-US" sz="1050" dirty="0"/>
           </a:p>
@@ -15790,7 +15879,7 @@
                 <a:ea typeface="Arial" pitchFamily="34" charset="-122"/>
                 <a:cs typeface="Arial" pitchFamily="34" charset="-120"/>
               </a:rPr>
-              <a:t>40 Minuten in Gruppen – euer eigener Rechner ist das Labor</a:t>
+              <a:t>50 Minuten in Gruppen – euer eigener Rechner ist das Labor</a:t>
             </a:r>
             <a:endParaRPr lang="en-US" sz="1350" dirty="0"/>
           </a:p>
@@ -15881,7 +15970,7 @@
                 <a:ea typeface="Arial" pitchFamily="34" charset="-122"/>
                 <a:cs typeface="Arial" pitchFamily="34" charset="-120"/>
               </a:rPr>
-              <a:t>BREAKOUT · 40 MINUTEN</a:t>
+              <a:t>BREAKOUT · 50 MINUTEN</a:t>
             </a:r>
             <a:endParaRPr lang="en-US" sz="1150" dirty="0"/>
           </a:p>
@@ -16498,7 +16587,7 @@
                 <a:ea typeface="Arial" pitchFamily="34" charset="-122"/>
                 <a:cs typeface="Arial" pitchFamily="34" charset="-120"/>
               </a:rPr>
-              <a:t>Station 3 ist die wichtigste – wenn die Zeit knapp wird, kürzt Station 2.</a:t>
+              <a:t>Station 3 ist die wichtigste. Wer früh fertig ist, bekommt die Kür in Station 4.</a:t>
             </a:r>
             <a:endParaRPr lang="en-US" sz="1200" dirty="0"/>
           </a:p>
@@ -16599,7 +16688,7 @@
                 <a:ea typeface="Arial" pitchFamily="34" charset="-122"/>
                 <a:cs typeface="Arial" pitchFamily="34" charset="-120"/>
               </a:rPr>
-              <a:t>18/26</a:t>
+              <a:t>18/27</a:t>
             </a:r>
             <a:endParaRPr lang="en-US" sz="1050" dirty="0"/>
           </a:p>
@@ -17134,7 +17223,7 @@
                 <a:ea typeface="Arial" pitchFamily="34" charset="-122"/>
                 <a:cs typeface="Arial" pitchFamily="34" charset="-120"/>
               </a:rPr>
-              <a:t>19/26</a:t>
+              <a:t>19/27</a:t>
             </a:r>
             <a:endParaRPr lang="en-US" sz="1050" dirty="0"/>
           </a:p>
@@ -17745,7 +17834,7 @@
                 <a:ea typeface="Arial" pitchFamily="34" charset="-122"/>
                 <a:cs typeface="Arial" pitchFamily="34" charset="-120"/>
               </a:rPr>
-              <a:t>20/26</a:t>
+              <a:t>20/27</a:t>
             </a:r>
             <a:endParaRPr lang="en-US" sz="1050" dirty="0"/>
           </a:p>
@@ -18288,7 +18377,7 @@
                 <a:ea typeface="Arial" pitchFamily="34" charset="-122"/>
                 <a:cs typeface="Arial" pitchFamily="34" charset="-120"/>
               </a:rPr>
-              <a:t>21/26</a:t>
+              <a:t>21/27</a:t>
             </a:r>
             <a:endParaRPr lang="en-US" sz="1050" dirty="0"/>
           </a:p>
@@ -18738,7 +18827,7 @@
                 <a:ea typeface="Arial" pitchFamily="34" charset="-122"/>
                 <a:cs typeface="Arial" pitchFamily="34" charset="-120"/>
               </a:rPr>
-              <a:t>Das ist genau das Aufgabenformat, das euch in der Prüfung begegnet.</a:t>
+              <a:t>Genau so landen diese Fälle im Job auf eurem Tisch – meist als „Internet geht nicht“.</a:t>
             </a:r>
             <a:endParaRPr lang="en-US" sz="1200" dirty="0"/>
           </a:p>
@@ -18839,7 +18928,7 @@
                 <a:ea typeface="Arial" pitchFamily="34" charset="-122"/>
                 <a:cs typeface="Arial" pitchFamily="34" charset="-120"/>
               </a:rPr>
-              <a:t>22/26</a:t>
+              <a:t>22/27</a:t>
             </a:r>
             <a:endParaRPr lang="en-US" sz="1050" dirty="0"/>
           </a:p>
@@ -18885,48 +18974,432 @@
         </p:nvSpPr>
         <p:spPr>
           <a:xfrm>
-            <a:off x="6355080" y="0"/>
-            <a:ext cx="2788920" cy="5143500"/>
+            <a:off x="566928" y="201168"/>
+            <a:ext cx="475488" cy="50292"/>
           </a:xfrm>
           <a:prstGeom prst="rect">
             <a:avLst/>
           </a:prstGeom>
           <a:solidFill>
-            <a:srgbClr val="EEF0FB"/>
+            <a:srgbClr val="9A6310"/>
           </a:solidFill>
           <a:ln/>
         </p:spPr>
       </p:sp>
       <p:sp>
         <p:nvSpPr>
-          <p:cNvPr id="3" name="Shape 1"/>
-          <p:cNvSpPr/>
-          <p:nvPr/>
-        </p:nvSpPr>
-        <p:spPr>
-          <a:xfrm>
-            <a:off x="6355080" y="0"/>
-            <a:ext cx="45720" cy="5143500"/>
+          <p:cNvPr id="3" name="Text 1"/>
+          <p:cNvSpPr/>
+          <p:nvPr/>
+        </p:nvSpPr>
+        <p:spPr>
+          <a:xfrm>
+            <a:off x="566928" y="384048"/>
+            <a:ext cx="8010144" cy="237744"/>
+          </a:xfrm>
+          <a:prstGeom prst="rect">
+            <a:avLst/>
+          </a:prstGeom>
+          <a:noFill/>
+          <a:ln/>
+        </p:spPr>
+        <p:txBody>
+          <a:bodyPr wrap="square" lIns="0" tIns="0" rIns="0" bIns="0" rtlCol="0" anchor="ctr"/>
+          <a:lstStyle/>
+          <a:p>
+            <a:pPr indent="0" marL="0">
+              <a:buNone/>
+            </a:pPr>
+            <a:r>
+              <a:rPr lang="en-US" sz="1150" b="1" spc="180" kern="0" dirty="0">
+                <a:solidFill>
+                  <a:srgbClr val="9A6310"/>
+                </a:solidFill>
+                <a:latin typeface="Arial" pitchFamily="34" charset="0"/>
+                <a:ea typeface="Arial" pitchFamily="34" charset="-122"/>
+                <a:cs typeface="Arial" pitchFamily="34" charset="-120"/>
+              </a:rPr>
+              <a:t>BREAKOUT · FÜR SCHNELLE</a:t>
+            </a:r>
+            <a:endParaRPr lang="en-US" sz="1150" dirty="0"/>
+          </a:p>
+        </p:txBody>
+      </p:sp>
+      <p:sp>
+        <p:nvSpPr>
+          <p:cNvPr id="4" name="Text 2"/>
+          <p:cNvSpPr/>
+          <p:nvPr/>
+        </p:nvSpPr>
+        <p:spPr>
+          <a:xfrm>
+            <a:off x="566928" y="731520"/>
+            <a:ext cx="8010144" cy="603504"/>
+          </a:xfrm>
+          <a:prstGeom prst="rect">
+            <a:avLst/>
+          </a:prstGeom>
+          <a:noFill/>
+          <a:ln/>
+        </p:spPr>
+        <p:txBody>
+          <a:bodyPr wrap="square" lIns="0" tIns="0" rIns="0" bIns="0" rtlCol="0" anchor="t"/>
+          <a:lstStyle/>
+          <a:p>
+            <a:pPr indent="0" marL="0">
+              <a:buNone/>
+            </a:pPr>
+            <a:r>
+              <a:rPr lang="en-US" sz="2600" b="1" dirty="0">
+                <a:solidFill>
+                  <a:srgbClr val="272E52"/>
+                </a:solidFill>
+                <a:latin typeface="Arial" pitchFamily="34" charset="0"/>
+                <a:ea typeface="Arial" pitchFamily="34" charset="-122"/>
+                <a:cs typeface="Arial" pitchFamily="34" charset="-120"/>
+              </a:rPr>
+              <a:t>Station 4 – die Kür: Wege vergleichen</a:t>
+            </a:r>
+            <a:endParaRPr lang="en-US" sz="2600" dirty="0"/>
+          </a:p>
+        </p:txBody>
+      </p:sp>
+      <p:sp>
+        <p:nvSpPr>
+          <p:cNvPr id="5" name="Text 3"/>
+          <p:cNvSpPr/>
+          <p:nvPr/>
+        </p:nvSpPr>
+        <p:spPr>
+          <a:xfrm>
+            <a:off x="566928" y="1444752"/>
+            <a:ext cx="8010144" cy="438912"/>
+          </a:xfrm>
+          <a:prstGeom prst="rect">
+            <a:avLst/>
+          </a:prstGeom>
+          <a:noFill/>
+          <a:ln/>
+        </p:spPr>
+        <p:txBody>
+          <a:bodyPr wrap="square" lIns="0" tIns="0" rIns="0" bIns="0" rtlCol="0" anchor="t"/>
+          <a:lstStyle/>
+          <a:p>
+            <a:pPr indent="0" marL="0">
+              <a:buNone/>
+            </a:pPr>
+            <a:r>
+              <a:rPr lang="en-US" sz="1300" dirty="0">
+                <a:solidFill>
+                  <a:srgbClr val="5C6377"/>
+                </a:solidFill>
+                <a:latin typeface="Arial" pitchFamily="34" charset="0"/>
+                <a:ea typeface="Arial" pitchFamily="34" charset="-122"/>
+                <a:cs typeface="Arial" pitchFamily="34" charset="-120"/>
+              </a:rPr>
+              <a:t>Wenn ihr früh fertig seid: Vergleicht eure Ausgaben von tracert untereinander.</a:t>
+            </a:r>
+            <a:endParaRPr lang="en-US" sz="1300" dirty="0"/>
+          </a:p>
+        </p:txBody>
+      </p:sp>
+      <p:sp>
+        <p:nvSpPr>
+          <p:cNvPr id="6" name="Text 4"/>
+          <p:cNvSpPr/>
+          <p:nvPr/>
+        </p:nvSpPr>
+        <p:spPr>
+          <a:xfrm>
+            <a:off x="566928" y="1975104"/>
+            <a:ext cx="8010144" cy="1691640"/>
+          </a:xfrm>
+          <a:prstGeom prst="rect">
+            <a:avLst/>
+          </a:prstGeom>
+          <a:noFill/>
+          <a:ln/>
+        </p:spPr>
+        <p:txBody>
+          <a:bodyPr wrap="square" lIns="0" tIns="0" rIns="0" bIns="0" rtlCol="0" anchor="t"/>
+          <a:lstStyle/>
+          <a:p>
+            <a:pPr indent="0" marL="0">
+              <a:lnSpc>
+                <a:spcPct val="92000"/>
+              </a:lnSpc>
+              <a:buNone/>
+            </a:pPr>
+            <a:r>
+              <a:rPr lang="en-US" sz="1250" b="1" dirty="0">
+                <a:solidFill>
+                  <a:srgbClr val="9A6310"/>
+                </a:solidFill>
+                <a:latin typeface="Arial" pitchFamily="34" charset="0"/>
+                <a:ea typeface="Arial" pitchFamily="34" charset="-122"/>
+                <a:cs typeface="Arial" pitchFamily="34" charset="-120"/>
+              </a:rPr>
+              <a:t>▸   </a:t>
+            </a:r>
+            <a:pPr indent="0" marL="0">
+              <a:lnSpc>
+                <a:spcPct val="92000"/>
+              </a:lnSpc>
+              <a:spcAft>
+                <a:spcPts val="900"/>
+              </a:spcAft>
+              <a:buNone/>
+            </a:pPr>
+            <a:r>
+              <a:rPr lang="en-US" sz="1250" dirty="0">
+                <a:solidFill>
+                  <a:srgbClr val="434A63"/>
+                </a:solidFill>
+                <a:latin typeface="Arial" pitchFamily="34" charset="0"/>
+                <a:ea typeface="Arial" pitchFamily="34" charset="-122"/>
+                <a:cs typeface="Arial" pitchFamily="34" charset="-120"/>
+              </a:rPr>
+              <a:t>Jeder führt tracert github.com aus und teilt die ersten fünf Zeilen.</a:t>
+            </a:r>
+            <a:endParaRPr lang="en-US" sz="1250" dirty="0"/>
+          </a:p>
+          <a:p>
+            <a:pPr indent="0" marL="0">
+              <a:lnSpc>
+                <a:spcPct val="92000"/>
+              </a:lnSpc>
+              <a:buNone/>
+            </a:pPr>
+            <a:r>
+              <a:rPr lang="en-US" sz="1250" b="1" dirty="0">
+                <a:solidFill>
+                  <a:srgbClr val="9A6310"/>
+                </a:solidFill>
+                <a:latin typeface="Arial" pitchFamily="34" charset="0"/>
+                <a:ea typeface="Arial" pitchFamily="34" charset="-122"/>
+                <a:cs typeface="Arial" pitchFamily="34" charset="-120"/>
+              </a:rPr>
+              <a:t>▸   </a:t>
+            </a:r>
+            <a:pPr indent="0" marL="0">
+              <a:lnSpc>
+                <a:spcPct val="92000"/>
+              </a:lnSpc>
+              <a:spcAft>
+                <a:spcPts val="900"/>
+              </a:spcAft>
+              <a:buNone/>
+            </a:pPr>
+            <a:r>
+              <a:rPr lang="en-US" sz="1250" dirty="0">
+                <a:solidFill>
+                  <a:srgbClr val="434A63"/>
+                </a:solidFill>
+                <a:latin typeface="Arial" pitchFamily="34" charset="0"/>
+                <a:ea typeface="Arial" pitchFamily="34" charset="-122"/>
+                <a:cs typeface="Arial" pitchFamily="34" charset="-120"/>
+              </a:rPr>
+              <a:t>Ab welchem Punkt sehen eure Wege gleich aus – und wo unterscheiden sie sich?</a:t>
+            </a:r>
+            <a:endParaRPr lang="en-US" sz="1250" dirty="0"/>
+          </a:p>
+          <a:p>
+            <a:pPr indent="0" marL="0">
+              <a:lnSpc>
+                <a:spcPct val="92000"/>
+              </a:lnSpc>
+              <a:buNone/>
+            </a:pPr>
+            <a:r>
+              <a:rPr lang="en-US" sz="1250" b="1" dirty="0">
+                <a:solidFill>
+                  <a:srgbClr val="9A6310"/>
+                </a:solidFill>
+                <a:latin typeface="Arial" pitchFamily="34" charset="0"/>
+                <a:ea typeface="Arial" pitchFamily="34" charset="-122"/>
+                <a:cs typeface="Arial" pitchFamily="34" charset="-120"/>
+              </a:rPr>
+              <a:t>▸   </a:t>
+            </a:r>
+            <a:pPr indent="0" marL="0">
+              <a:lnSpc>
+                <a:spcPct val="92000"/>
+              </a:lnSpc>
+              <a:spcAft>
+                <a:spcPts val="900"/>
+              </a:spcAft>
+              <a:buNone/>
+            </a:pPr>
+            <a:r>
+              <a:rPr lang="en-US" sz="1250" dirty="0">
+                <a:solidFill>
+                  <a:srgbClr val="434A63"/>
+                </a:solidFill>
+                <a:latin typeface="Arial" pitchFamily="34" charset="0"/>
+                <a:ea typeface="Arial" pitchFamily="34" charset="-122"/>
+                <a:cs typeface="Arial" pitchFamily="34" charset="-120"/>
+              </a:rPr>
+              <a:t>Welche Zeilen gehören noch zu eurem eigenen Netz, welche schon zum Anbieter?</a:t>
+            </a:r>
+            <a:endParaRPr lang="en-US" sz="1250" dirty="0"/>
+          </a:p>
+          <a:p>
+            <a:pPr indent="0" marL="0">
+              <a:lnSpc>
+                <a:spcPct val="92000"/>
+              </a:lnSpc>
+              <a:buNone/>
+            </a:pPr>
+            <a:r>
+              <a:rPr lang="en-US" sz="1250" b="1" dirty="0">
+                <a:solidFill>
+                  <a:srgbClr val="9A6310"/>
+                </a:solidFill>
+                <a:latin typeface="Arial" pitchFamily="34" charset="0"/>
+                <a:ea typeface="Arial" pitchFamily="34" charset="-122"/>
+                <a:cs typeface="Arial" pitchFamily="34" charset="-120"/>
+              </a:rPr>
+              <a:t>▸   </a:t>
+            </a:r>
+            <a:pPr indent="0" marL="0">
+              <a:lnSpc>
+                <a:spcPct val="92000"/>
+              </a:lnSpc>
+              <a:spcAft>
+                <a:spcPts val="900"/>
+              </a:spcAft>
+              <a:buNone/>
+            </a:pPr>
+            <a:r>
+              <a:rPr lang="en-US" sz="1250" dirty="0">
+                <a:solidFill>
+                  <a:srgbClr val="434A63"/>
+                </a:solidFill>
+                <a:latin typeface="Arial" pitchFamily="34" charset="0"/>
+                <a:ea typeface="Arial" pitchFamily="34" charset="-122"/>
+                <a:cs typeface="Arial" pitchFamily="34" charset="-120"/>
+              </a:rPr>
+              <a:t>Warum hat der erste Hop bei fast allen eine Adresse, die mit 192.168 beginnt?</a:t>
+            </a:r>
+            <a:endParaRPr lang="en-US" sz="1250" dirty="0"/>
+          </a:p>
+        </p:txBody>
+      </p:sp>
+      <p:sp>
+        <p:nvSpPr>
+          <p:cNvPr id="7" name="Shape 5"/>
+          <p:cNvSpPr/>
+          <p:nvPr/>
+        </p:nvSpPr>
+        <p:spPr>
+          <a:xfrm>
+            <a:off x="566928" y="3703320"/>
+            <a:ext cx="8010144" cy="731520"/>
           </a:xfrm>
           <a:prstGeom prst="rect">
             <a:avLst/>
           </a:prstGeom>
           <a:solidFill>
-            <a:srgbClr val="3843AF"/>
+            <a:srgbClr val="F5F6FC"/>
           </a:solidFill>
           <a:ln/>
         </p:spPr>
       </p:sp>
       <p:sp>
         <p:nvSpPr>
-          <p:cNvPr id="4" name="Text 2"/>
-          <p:cNvSpPr/>
-          <p:nvPr/>
-        </p:nvSpPr>
-        <p:spPr>
-          <a:xfrm>
-            <a:off x="6629400" y="1463040"/>
-            <a:ext cx="2194560" cy="1737360"/>
+          <p:cNvPr id="8" name="Shape 6"/>
+          <p:cNvSpPr/>
+          <p:nvPr/>
+        </p:nvSpPr>
+        <p:spPr>
+          <a:xfrm>
+            <a:off x="566928" y="3703320"/>
+            <a:ext cx="41148" cy="731520"/>
+          </a:xfrm>
+          <a:prstGeom prst="rect">
+            <a:avLst/>
+          </a:prstGeom>
+          <a:solidFill>
+            <a:srgbClr val="9A6310"/>
+          </a:solidFill>
+          <a:ln/>
+        </p:spPr>
+      </p:sp>
+      <p:sp>
+        <p:nvSpPr>
+          <p:cNvPr id="9" name="Text 7"/>
+          <p:cNvSpPr/>
+          <p:nvPr/>
+        </p:nvSpPr>
+        <p:spPr>
+          <a:xfrm>
+            <a:off x="804672" y="3849624"/>
+            <a:ext cx="7607808" cy="466344"/>
+          </a:xfrm>
+          <a:prstGeom prst="rect">
+            <a:avLst/>
+          </a:prstGeom>
+          <a:noFill/>
+          <a:ln/>
+        </p:spPr>
+        <p:txBody>
+          <a:bodyPr wrap="square" lIns="0" tIns="0" rIns="0" bIns="0" rtlCol="0" anchor="t"/>
+          <a:lstStyle/>
+          <a:p>
+            <a:pPr indent="0" marL="0">
+              <a:lnSpc>
+                <a:spcPct val="92000"/>
+              </a:lnSpc>
+              <a:buNone/>
+            </a:pPr>
+            <a:r>
+              <a:rPr lang="en-US" sz="1150" dirty="0">
+                <a:solidFill>
+                  <a:srgbClr val="434A63"/>
+                </a:solidFill>
+                <a:latin typeface="Arial" pitchFamily="34" charset="0"/>
+                <a:ea typeface="Arial" pitchFamily="34" charset="-122"/>
+                <a:cs typeface="Arial" pitchFamily="34" charset="-120"/>
+              </a:rPr>
+              <a:t>Der Gewinn dabei: Ihr seht an echten Daten, dass es keinen einen Weg ins Internet gibt – jeder von euch nimmt einen anderen, bis sie sich irgendwo treffen.</a:t>
+            </a:r>
+            <a:endParaRPr lang="en-US" sz="1150" dirty="0"/>
+          </a:p>
+        </p:txBody>
+      </p:sp>
+      <p:sp>
+        <p:nvSpPr>
+          <p:cNvPr id="10" name="Shape 8"/>
+          <p:cNvSpPr/>
+          <p:nvPr/>
+        </p:nvSpPr>
+        <p:spPr>
+          <a:xfrm>
+            <a:off x="566928" y="4631436"/>
+            <a:ext cx="8010144" cy="0"/>
+          </a:xfrm>
+          <a:prstGeom prst="line">
+            <a:avLst/>
+          </a:prstGeom>
+          <a:noFill/>
+          <a:ln w="9525">
+            <a:solidFill>
+              <a:srgbClr val="DFE3F0"/>
+            </a:solidFill>
+            <a:prstDash val="solid"/>
+          </a:ln>
+        </p:spPr>
+      </p:sp>
+      <p:sp>
+        <p:nvSpPr>
+          <p:cNvPr id="11" name="Text 9"/>
+          <p:cNvSpPr/>
+          <p:nvPr/>
+        </p:nvSpPr>
+        <p:spPr>
+          <a:xfrm>
+            <a:off x="566928" y="4722876"/>
+            <a:ext cx="5029200" cy="237744"/>
           </a:xfrm>
           <a:prstGeom prst="rect">
             <a:avLst/>
@@ -18938,109 +19411,11 @@
           <a:bodyPr wrap="square" lIns="0" tIns="0" rIns="0" bIns="0" rtlCol="0" anchor="ctr"/>
           <a:lstStyle/>
           <a:p>
-            <a:pPr algn="ctr" indent="0" marL="0">
-              <a:buNone/>
-            </a:pPr>
-            <a:r>
-              <a:rPr lang="en-US" sz="8400" b="1" dirty="0">
-                <a:solidFill>
-                  <a:srgbClr val="3843AF"/>
-                </a:solidFill>
-                <a:latin typeface="Arial" pitchFamily="34" charset="0"/>
-                <a:ea typeface="Arial" pitchFamily="34" charset="-122"/>
-                <a:cs typeface="Arial" pitchFamily="34" charset="-120"/>
-              </a:rPr>
-              <a:t>05</a:t>
-            </a:r>
-            <a:endParaRPr lang="en-US" sz="8400" dirty="0"/>
-          </a:p>
-        </p:txBody>
-      </p:sp>
-      <p:sp>
-        <p:nvSpPr>
-          <p:cNvPr id="5" name="Shape 3"/>
-          <p:cNvSpPr/>
-          <p:nvPr/>
-        </p:nvSpPr>
-        <p:spPr>
-          <a:xfrm>
-            <a:off x="566928" y="1883664"/>
-            <a:ext cx="475488" cy="50292"/>
-          </a:xfrm>
-          <a:prstGeom prst="rect">
-            <a:avLst/>
-          </a:prstGeom>
-          <a:solidFill>
-            <a:srgbClr val="3843AF"/>
-          </a:solidFill>
-          <a:ln/>
-        </p:spPr>
-      </p:sp>
-      <p:sp>
-        <p:nvSpPr>
-          <p:cNvPr id="6" name="Text 4"/>
-          <p:cNvSpPr/>
-          <p:nvPr/>
-        </p:nvSpPr>
-        <p:spPr>
-          <a:xfrm>
-            <a:off x="566928" y="2084832"/>
-            <a:ext cx="5394960" cy="868680"/>
-          </a:xfrm>
-          <a:prstGeom prst="rect">
-            <a:avLst/>
-          </a:prstGeom>
-          <a:noFill/>
-          <a:ln/>
-        </p:spPr>
-        <p:txBody>
-          <a:bodyPr wrap="square" lIns="0" tIns="0" rIns="0" bIns="0" rtlCol="0" anchor="t"/>
-          <a:lstStyle/>
-          <a:p>
-            <a:pPr indent="0" marL="0">
-              <a:buNone/>
-            </a:pPr>
-            <a:r>
-              <a:rPr lang="en-US" sz="3000" b="1" dirty="0">
-                <a:solidFill>
-                  <a:srgbClr val="272E52"/>
-                </a:solidFill>
-                <a:latin typeface="Arial" pitchFamily="34" charset="0"/>
-                <a:ea typeface="Arial" pitchFamily="34" charset="-122"/>
-                <a:cs typeface="Arial" pitchFamily="34" charset="-120"/>
-              </a:rPr>
-              <a:t>Zusammentragen</a:t>
-            </a:r>
-            <a:endParaRPr lang="en-US" sz="3000" dirty="0"/>
-          </a:p>
-        </p:txBody>
-      </p:sp>
-      <p:sp>
-        <p:nvSpPr>
-          <p:cNvPr id="7" name="Text 5"/>
-          <p:cNvSpPr/>
-          <p:nvPr/>
-        </p:nvSpPr>
-        <p:spPr>
-          <a:xfrm>
-            <a:off x="566928" y="3017520"/>
-            <a:ext cx="5394960" cy="548640"/>
-          </a:xfrm>
-          <a:prstGeom prst="rect">
-            <a:avLst/>
-          </a:prstGeom>
-          <a:noFill/>
-          <a:ln/>
-        </p:spPr>
-        <p:txBody>
-          <a:bodyPr wrap="square" lIns="0" tIns="0" rIns="0" bIns="0" rtlCol="0" anchor="t"/>
-          <a:lstStyle/>
-          <a:p>
-            <a:pPr indent="0" marL="0">
-              <a:buNone/>
-            </a:pPr>
-            <a:r>
-              <a:rPr lang="en-US" sz="1350" dirty="0">
+            <a:pPr indent="0" marL="0">
+              <a:buNone/>
+            </a:pPr>
+            <a:r>
+              <a:rPr lang="en-US" sz="1050" spc="30" kern="0" dirty="0">
                 <a:solidFill>
                   <a:srgbClr val="5C6377"/>
                 </a:solidFill>
@@ -19048,9 +19423,48 @@
                 <a:ea typeface="Arial" pitchFamily="34" charset="-122"/>
                 <a:cs typeface="Arial" pitchFamily="34" charset="-120"/>
               </a:rPr>
-              <a:t>Was habt ihr gefunden – und was hat euch überrascht?</a:t>
-            </a:r>
-            <a:endParaRPr lang="en-US" sz="1350" dirty="0"/>
+              <a:t>Breakout</a:t>
+            </a:r>
+            <a:endParaRPr lang="en-US" sz="1050" dirty="0"/>
+          </a:p>
+        </p:txBody>
+      </p:sp>
+      <p:sp>
+        <p:nvSpPr>
+          <p:cNvPr id="12" name="Text 10"/>
+          <p:cNvSpPr/>
+          <p:nvPr/>
+        </p:nvSpPr>
+        <p:spPr>
+          <a:xfrm>
+            <a:off x="8028432" y="4722876"/>
+            <a:ext cx="548640" cy="237744"/>
+          </a:xfrm>
+          <a:prstGeom prst="rect">
+            <a:avLst/>
+          </a:prstGeom>
+          <a:noFill/>
+          <a:ln/>
+        </p:spPr>
+        <p:txBody>
+          <a:bodyPr wrap="square" lIns="0" tIns="0" rIns="0" bIns="0" rtlCol="0" anchor="ctr"/>
+          <a:lstStyle/>
+          <a:p>
+            <a:pPr algn="r" indent="0" marL="0">
+              <a:buNone/>
+            </a:pPr>
+            <a:r>
+              <a:rPr lang="en-US" sz="1050" dirty="0">
+                <a:solidFill>
+                  <a:srgbClr val="5C6377"/>
+                </a:solidFill>
+                <a:latin typeface="Arial" pitchFamily="34" charset="0"/>
+                <a:ea typeface="Arial" pitchFamily="34" charset="-122"/>
+                <a:cs typeface="Arial" pitchFamily="34" charset="-120"/>
+              </a:rPr>
+              <a:t>23/27</a:t>
+            </a:r>
+            <a:endParaRPr lang="en-US" sz="1050" dirty="0"/>
           </a:p>
         </p:txBody>
       </p:sp>
@@ -19094,8 +19508,28 @@
         </p:nvSpPr>
         <p:spPr>
           <a:xfrm>
-            <a:off x="566928" y="201168"/>
-            <a:ext cx="475488" cy="50292"/>
+            <a:off x="6355080" y="0"/>
+            <a:ext cx="2788920" cy="5143500"/>
+          </a:xfrm>
+          <a:prstGeom prst="rect">
+            <a:avLst/>
+          </a:prstGeom>
+          <a:solidFill>
+            <a:srgbClr val="EEF0FB"/>
+          </a:solidFill>
+          <a:ln/>
+        </p:spPr>
+      </p:sp>
+      <p:sp>
+        <p:nvSpPr>
+          <p:cNvPr id="3" name="Shape 1"/>
+          <p:cNvSpPr/>
+          <p:nvPr/>
+        </p:nvSpPr>
+        <p:spPr>
+          <a:xfrm>
+            <a:off x="6355080" y="0"/>
+            <a:ext cx="45720" cy="5143500"/>
           </a:xfrm>
           <a:prstGeom prst="rect">
             <a:avLst/>
@@ -19108,14 +19542,14 @@
       </p:sp>
       <p:sp>
         <p:nvSpPr>
-          <p:cNvPr id="3" name="Text 1"/>
-          <p:cNvSpPr/>
-          <p:nvPr/>
-        </p:nvSpPr>
-        <p:spPr>
-          <a:xfrm>
-            <a:off x="566928" y="384048"/>
-            <a:ext cx="8010144" cy="237744"/>
+          <p:cNvPr id="4" name="Text 2"/>
+          <p:cNvSpPr/>
+          <p:nvPr/>
+        </p:nvSpPr>
+        <p:spPr>
+          <a:xfrm>
+            <a:off x="6629400" y="1463040"/>
+            <a:ext cx="2194560" cy="1737360"/>
           </a:xfrm>
           <a:prstGeom prst="rect">
             <a:avLst/>
@@ -19127,11 +19561,11 @@
           <a:bodyPr wrap="square" lIns="0" tIns="0" rIns="0" bIns="0" rtlCol="0" anchor="ctr"/>
           <a:lstStyle/>
           <a:p>
-            <a:pPr indent="0" marL="0">
-              <a:buNone/>
-            </a:pPr>
-            <a:r>
-              <a:rPr lang="en-US" sz="1150" b="1" spc="180" kern="0" dirty="0">
+            <a:pPr algn="ctr" indent="0" marL="0">
+              <a:buNone/>
+            </a:pPr>
+            <a:r>
+              <a:rPr lang="en-US" sz="8400" b="1" dirty="0">
                 <a:solidFill>
                   <a:srgbClr val="3843AF"/>
                 </a:solidFill>
@@ -19139,48 +19573,9 @@
                 <a:ea typeface="Arial" pitchFamily="34" charset="-122"/>
                 <a:cs typeface="Arial" pitchFamily="34" charset="-120"/>
               </a:rPr>
-              <a:t>AUSWERTUNG · 30 MINUTEN</a:t>
-            </a:r>
-            <a:endParaRPr lang="en-US" sz="1150" dirty="0"/>
-          </a:p>
-        </p:txBody>
-      </p:sp>
-      <p:sp>
-        <p:nvSpPr>
-          <p:cNvPr id="4" name="Text 2"/>
-          <p:cNvSpPr/>
-          <p:nvPr/>
-        </p:nvSpPr>
-        <p:spPr>
-          <a:xfrm>
-            <a:off x="566928" y="731520"/>
-            <a:ext cx="8010144" cy="603504"/>
-          </a:xfrm>
-          <a:prstGeom prst="rect">
-            <a:avLst/>
-          </a:prstGeom>
-          <a:noFill/>
-          <a:ln/>
-        </p:spPr>
-        <p:txBody>
-          <a:bodyPr wrap="square" lIns="0" tIns="0" rIns="0" bIns="0" rtlCol="0" anchor="t"/>
-          <a:lstStyle/>
-          <a:p>
-            <a:pPr indent="0" marL="0">
-              <a:buNone/>
-            </a:pPr>
-            <a:r>
-              <a:rPr lang="en-US" sz="2600" b="1" dirty="0">
-                <a:solidFill>
-                  <a:srgbClr val="272E52"/>
-                </a:solidFill>
-                <a:latin typeface="Arial" pitchFamily="34" charset="0"/>
-                <a:ea typeface="Arial" pitchFamily="34" charset="-122"/>
-                <a:cs typeface="Arial" pitchFamily="34" charset="-120"/>
-              </a:rPr>
-              <a:t>Das gehen wir gemeinsam durch</a:t>
-            </a:r>
-            <a:endParaRPr lang="en-US" sz="2600" dirty="0"/>
+              <a:t>05</a:t>
+            </a:r>
+            <a:endParaRPr lang="en-US" sz="8400" dirty="0"/>
           </a:p>
         </p:txBody>
       </p:sp>
@@ -19192,478 +19587,8 @@
         </p:nvSpPr>
         <p:spPr>
           <a:xfrm>
-            <a:off x="438912" y="1737360"/>
-            <a:ext cx="8266176" cy="384048"/>
-          </a:xfrm>
-          <a:prstGeom prst="rect">
-            <a:avLst/>
-          </a:prstGeom>
-          <a:solidFill>
-            <a:srgbClr val="F5F6FC"/>
-          </a:solidFill>
-          <a:ln/>
-        </p:spPr>
-      </p:sp>
-      <p:sp>
-        <p:nvSpPr>
-          <p:cNvPr id="6" name="Text 4"/>
-          <p:cNvSpPr/>
-          <p:nvPr/>
-        </p:nvSpPr>
-        <p:spPr>
-          <a:xfrm>
-            <a:off x="566928" y="1737360"/>
-            <a:ext cx="411480" cy="384048"/>
-          </a:xfrm>
-          <a:prstGeom prst="rect">
-            <a:avLst/>
-          </a:prstGeom>
-          <a:noFill/>
-          <a:ln/>
-        </p:spPr>
-        <p:txBody>
-          <a:bodyPr wrap="square" lIns="0" tIns="0" rIns="0" bIns="0" rtlCol="0" anchor="ctr"/>
-          <a:lstStyle/>
-          <a:p>
-            <a:pPr indent="0" marL="0">
-              <a:buNone/>
-            </a:pPr>
-            <a:r>
-              <a:rPr lang="en-US" sz="1200" b="1" dirty="0">
-                <a:solidFill>
-                  <a:srgbClr val="3843AF"/>
-                </a:solidFill>
-                <a:latin typeface="Courier New" pitchFamily="34" charset="0"/>
-                <a:ea typeface="Courier New" pitchFamily="34" charset="-122"/>
-                <a:cs typeface="Courier New" pitchFamily="34" charset="-120"/>
-              </a:rPr>
-              <a:t>1</a:t>
-            </a:r>
-            <a:endParaRPr lang="en-US" sz="1200" dirty="0"/>
-          </a:p>
-        </p:txBody>
-      </p:sp>
-      <p:sp>
-        <p:nvSpPr>
-          <p:cNvPr id="7" name="Text 5"/>
-          <p:cNvSpPr/>
-          <p:nvPr/>
-        </p:nvSpPr>
-        <p:spPr>
-          <a:xfrm>
-            <a:off x="978408" y="1737360"/>
-            <a:ext cx="7598664" cy="384048"/>
-          </a:xfrm>
-          <a:prstGeom prst="rect">
-            <a:avLst/>
-          </a:prstGeom>
-          <a:noFill/>
-          <a:ln/>
-        </p:spPr>
-        <p:txBody>
-          <a:bodyPr wrap="square" lIns="0" tIns="0" rIns="0" bIns="0" rtlCol="0" anchor="ctr"/>
-          <a:lstStyle/>
-          <a:p>
-            <a:pPr indent="0" marL="0">
-              <a:buNone/>
-            </a:pPr>
-            <a:r>
-              <a:rPr lang="en-US" sz="1200" dirty="0">
-                <a:solidFill>
-                  <a:srgbClr val="434A63"/>
-                </a:solidFill>
-                <a:latin typeface="Arial" pitchFamily="34" charset="0"/>
-                <a:ea typeface="Arial" pitchFamily="34" charset="-122"/>
-                <a:cs typeface="Arial" pitchFamily="34" charset="-120"/>
-              </a:rPr>
-              <a:t>Reihum: eine Gruppe zeigt ihren Steckbrief, die anderen ergänzen</a:t>
-            </a:r>
-            <a:endParaRPr lang="en-US" sz="1200" dirty="0"/>
-          </a:p>
-        </p:txBody>
-      </p:sp>
-      <p:sp>
-        <p:nvSpPr>
-          <p:cNvPr id="8" name="Text 6"/>
-          <p:cNvSpPr/>
-          <p:nvPr/>
-        </p:nvSpPr>
-        <p:spPr>
-          <a:xfrm>
-            <a:off x="566928" y="2121408"/>
-            <a:ext cx="411480" cy="384048"/>
-          </a:xfrm>
-          <a:prstGeom prst="rect">
-            <a:avLst/>
-          </a:prstGeom>
-          <a:noFill/>
-          <a:ln/>
-        </p:spPr>
-        <p:txBody>
-          <a:bodyPr wrap="square" lIns="0" tIns="0" rIns="0" bIns="0" rtlCol="0" anchor="ctr"/>
-          <a:lstStyle/>
-          <a:p>
-            <a:pPr indent="0" marL="0">
-              <a:buNone/>
-            </a:pPr>
-            <a:r>
-              <a:rPr lang="en-US" sz="1200" b="1" dirty="0">
-                <a:solidFill>
-                  <a:srgbClr val="3843AF"/>
-                </a:solidFill>
-                <a:latin typeface="Courier New" pitchFamily="34" charset="0"/>
-                <a:ea typeface="Courier New" pitchFamily="34" charset="-122"/>
-                <a:cs typeface="Courier New" pitchFamily="34" charset="-120"/>
-              </a:rPr>
-              <a:t>2</a:t>
-            </a:r>
-            <a:endParaRPr lang="en-US" sz="1200" dirty="0"/>
-          </a:p>
-        </p:txBody>
-      </p:sp>
-      <p:sp>
-        <p:nvSpPr>
-          <p:cNvPr id="9" name="Text 7"/>
-          <p:cNvSpPr/>
-          <p:nvPr/>
-        </p:nvSpPr>
-        <p:spPr>
-          <a:xfrm>
-            <a:off x="978408" y="2121408"/>
-            <a:ext cx="7598664" cy="384048"/>
-          </a:xfrm>
-          <a:prstGeom prst="rect">
-            <a:avLst/>
-          </a:prstGeom>
-          <a:noFill/>
-          <a:ln/>
-        </p:spPr>
-        <p:txBody>
-          <a:bodyPr wrap="square" lIns="0" tIns="0" rIns="0" bIns="0" rtlCol="0" anchor="ctr"/>
-          <a:lstStyle/>
-          <a:p>
-            <a:pPr indent="0" marL="0">
-              <a:buNone/>
-            </a:pPr>
-            <a:r>
-              <a:rPr lang="en-US" sz="1200" dirty="0">
-                <a:solidFill>
-                  <a:srgbClr val="434A63"/>
-                </a:solidFill>
-                <a:latin typeface="Arial" pitchFamily="34" charset="0"/>
-                <a:ea typeface="Arial" pitchFamily="34" charset="-122"/>
-                <a:cs typeface="Arial" pitchFamily="34" charset="-120"/>
-              </a:rPr>
-              <a:t>Warum hat fast jeder eine 192.168er-Adresse? – private Adressbereiche</a:t>
-            </a:r>
-            <a:endParaRPr lang="en-US" sz="1200" dirty="0"/>
-          </a:p>
-        </p:txBody>
-      </p:sp>
-      <p:sp>
-        <p:nvSpPr>
-          <p:cNvPr id="10" name="Shape 8"/>
-          <p:cNvSpPr/>
-          <p:nvPr/>
-        </p:nvSpPr>
-        <p:spPr>
-          <a:xfrm>
-            <a:off x="438912" y="2505456"/>
-            <a:ext cx="8266176" cy="384048"/>
-          </a:xfrm>
-          <a:prstGeom prst="rect">
-            <a:avLst/>
-          </a:prstGeom>
-          <a:solidFill>
-            <a:srgbClr val="F5F6FC"/>
-          </a:solidFill>
-          <a:ln/>
-        </p:spPr>
-      </p:sp>
-      <p:sp>
-        <p:nvSpPr>
-          <p:cNvPr id="11" name="Text 9"/>
-          <p:cNvSpPr/>
-          <p:nvPr/>
-        </p:nvSpPr>
-        <p:spPr>
-          <a:xfrm>
-            <a:off x="566928" y="2505456"/>
-            <a:ext cx="411480" cy="384048"/>
-          </a:xfrm>
-          <a:prstGeom prst="rect">
-            <a:avLst/>
-          </a:prstGeom>
-          <a:noFill/>
-          <a:ln/>
-        </p:spPr>
-        <p:txBody>
-          <a:bodyPr wrap="square" lIns="0" tIns="0" rIns="0" bIns="0" rtlCol="0" anchor="ctr"/>
-          <a:lstStyle/>
-          <a:p>
-            <a:pPr indent="0" marL="0">
-              <a:buNone/>
-            </a:pPr>
-            <a:r>
-              <a:rPr lang="en-US" sz="1200" b="1" dirty="0">
-                <a:solidFill>
-                  <a:srgbClr val="3843AF"/>
-                </a:solidFill>
-                <a:latin typeface="Courier New" pitchFamily="34" charset="0"/>
-                <a:ea typeface="Courier New" pitchFamily="34" charset="-122"/>
-                <a:cs typeface="Courier New" pitchFamily="34" charset="-120"/>
-              </a:rPr>
-              <a:t>3</a:t>
-            </a:r>
-            <a:endParaRPr lang="en-US" sz="1200" dirty="0"/>
-          </a:p>
-        </p:txBody>
-      </p:sp>
-      <p:sp>
-        <p:nvSpPr>
-          <p:cNvPr id="12" name="Text 10"/>
-          <p:cNvSpPr/>
-          <p:nvPr/>
-        </p:nvSpPr>
-        <p:spPr>
-          <a:xfrm>
-            <a:off x="978408" y="2505456"/>
-            <a:ext cx="7598664" cy="384048"/>
-          </a:xfrm>
-          <a:prstGeom prst="rect">
-            <a:avLst/>
-          </a:prstGeom>
-          <a:noFill/>
-          <a:ln/>
-        </p:spPr>
-        <p:txBody>
-          <a:bodyPr wrap="square" lIns="0" tIns="0" rIns="0" bIns="0" rtlCol="0" anchor="ctr"/>
-          <a:lstStyle/>
-          <a:p>
-            <a:pPr indent="0" marL="0">
-              <a:buNone/>
-            </a:pPr>
-            <a:r>
-              <a:rPr lang="en-US" sz="1200" dirty="0">
-                <a:solidFill>
-                  <a:srgbClr val="434A63"/>
-                </a:solidFill>
-                <a:latin typeface="Arial" pitchFamily="34" charset="0"/>
-                <a:ea typeface="Arial" pitchFamily="34" charset="-122"/>
-                <a:cs typeface="Arial" pitchFamily="34" charset="-120"/>
-              </a:rPr>
-              <a:t>Die fünf Befehle, jeder einer Schicht zugeordnet</a:t>
-            </a:r>
-            <a:endParaRPr lang="en-US" sz="1200" dirty="0"/>
-          </a:p>
-        </p:txBody>
-      </p:sp>
-      <p:sp>
-        <p:nvSpPr>
-          <p:cNvPr id="13" name="Text 11"/>
-          <p:cNvSpPr/>
-          <p:nvPr/>
-        </p:nvSpPr>
-        <p:spPr>
-          <a:xfrm>
-            <a:off x="566928" y="2889504"/>
-            <a:ext cx="411480" cy="384048"/>
-          </a:xfrm>
-          <a:prstGeom prst="rect">
-            <a:avLst/>
-          </a:prstGeom>
-          <a:noFill/>
-          <a:ln/>
-        </p:spPr>
-        <p:txBody>
-          <a:bodyPr wrap="square" lIns="0" tIns="0" rIns="0" bIns="0" rtlCol="0" anchor="ctr"/>
-          <a:lstStyle/>
-          <a:p>
-            <a:pPr indent="0" marL="0">
-              <a:buNone/>
-            </a:pPr>
-            <a:r>
-              <a:rPr lang="en-US" sz="1200" b="1" dirty="0">
-                <a:solidFill>
-                  <a:srgbClr val="3843AF"/>
-                </a:solidFill>
-                <a:latin typeface="Courier New" pitchFamily="34" charset="0"/>
-                <a:ea typeface="Courier New" pitchFamily="34" charset="-122"/>
-                <a:cs typeface="Courier New" pitchFamily="34" charset="-120"/>
-              </a:rPr>
-              <a:t>4</a:t>
-            </a:r>
-            <a:endParaRPr lang="en-US" sz="1200" dirty="0"/>
-          </a:p>
-        </p:txBody>
-      </p:sp>
-      <p:sp>
-        <p:nvSpPr>
-          <p:cNvPr id="14" name="Text 12"/>
-          <p:cNvSpPr/>
-          <p:nvPr/>
-        </p:nvSpPr>
-        <p:spPr>
-          <a:xfrm>
-            <a:off x="978408" y="2889504"/>
-            <a:ext cx="7598664" cy="384048"/>
-          </a:xfrm>
-          <a:prstGeom prst="rect">
-            <a:avLst/>
-          </a:prstGeom>
-          <a:noFill/>
-          <a:ln/>
-        </p:spPr>
-        <p:txBody>
-          <a:bodyPr wrap="square" lIns="0" tIns="0" rIns="0" bIns="0" rtlCol="0" anchor="ctr"/>
-          <a:lstStyle/>
-          <a:p>
-            <a:pPr indent="0" marL="0">
-              <a:buNone/>
-            </a:pPr>
-            <a:r>
-              <a:rPr lang="en-US" sz="1200" dirty="0">
-                <a:solidFill>
-                  <a:srgbClr val="434A63"/>
-                </a:solidFill>
-                <a:latin typeface="Arial" pitchFamily="34" charset="0"/>
-                <a:ea typeface="Arial" pitchFamily="34" charset="-122"/>
-                <a:cs typeface="Arial" pitchFamily="34" charset="-120"/>
-              </a:rPr>
-              <a:t>Die fünf Störungen – auflösen und begründen</a:t>
-            </a:r>
-            <a:endParaRPr lang="en-US" sz="1200" dirty="0"/>
-          </a:p>
-        </p:txBody>
-      </p:sp>
-      <p:sp>
-        <p:nvSpPr>
-          <p:cNvPr id="15" name="Shape 13"/>
-          <p:cNvSpPr/>
-          <p:nvPr/>
-        </p:nvSpPr>
-        <p:spPr>
-          <a:xfrm>
-            <a:off x="438912" y="3273552"/>
-            <a:ext cx="8266176" cy="384048"/>
-          </a:xfrm>
-          <a:prstGeom prst="rect">
-            <a:avLst/>
-          </a:prstGeom>
-          <a:solidFill>
-            <a:srgbClr val="F5F6FC"/>
-          </a:solidFill>
-          <a:ln/>
-        </p:spPr>
-      </p:sp>
-      <p:sp>
-        <p:nvSpPr>
-          <p:cNvPr id="16" name="Text 14"/>
-          <p:cNvSpPr/>
-          <p:nvPr/>
-        </p:nvSpPr>
-        <p:spPr>
-          <a:xfrm>
-            <a:off x="566928" y="3273552"/>
-            <a:ext cx="411480" cy="384048"/>
-          </a:xfrm>
-          <a:prstGeom prst="rect">
-            <a:avLst/>
-          </a:prstGeom>
-          <a:noFill/>
-          <a:ln/>
-        </p:spPr>
-        <p:txBody>
-          <a:bodyPr wrap="square" lIns="0" tIns="0" rIns="0" bIns="0" rtlCol="0" anchor="ctr"/>
-          <a:lstStyle/>
-          <a:p>
-            <a:pPr indent="0" marL="0">
-              <a:buNone/>
-            </a:pPr>
-            <a:r>
-              <a:rPr lang="en-US" sz="1200" b="1" dirty="0">
-                <a:solidFill>
-                  <a:srgbClr val="3843AF"/>
-                </a:solidFill>
-                <a:latin typeface="Courier New" pitchFamily="34" charset="0"/>
-                <a:ea typeface="Courier New" pitchFamily="34" charset="-122"/>
-                <a:cs typeface="Courier New" pitchFamily="34" charset="-120"/>
-              </a:rPr>
-              <a:t>5</a:t>
-            </a:r>
-            <a:endParaRPr lang="en-US" sz="1200" dirty="0"/>
-          </a:p>
-        </p:txBody>
-      </p:sp>
-      <p:sp>
-        <p:nvSpPr>
-          <p:cNvPr id="17" name="Text 15"/>
-          <p:cNvSpPr/>
-          <p:nvPr/>
-        </p:nvSpPr>
-        <p:spPr>
-          <a:xfrm>
-            <a:off x="978408" y="3273552"/>
-            <a:ext cx="7598664" cy="384048"/>
-          </a:xfrm>
-          <a:prstGeom prst="rect">
-            <a:avLst/>
-          </a:prstGeom>
-          <a:noFill/>
-          <a:ln/>
-        </p:spPr>
-        <p:txBody>
-          <a:bodyPr wrap="square" lIns="0" tIns="0" rIns="0" bIns="0" rtlCol="0" anchor="ctr"/>
-          <a:lstStyle/>
-          <a:p>
-            <a:pPr indent="0" marL="0">
-              <a:buNone/>
-            </a:pPr>
-            <a:r>
-              <a:rPr lang="en-US" sz="1200" dirty="0">
-                <a:solidFill>
-                  <a:srgbClr val="434A63"/>
-                </a:solidFill>
-                <a:latin typeface="Arial" pitchFamily="34" charset="0"/>
-                <a:ea typeface="Arial" pitchFamily="34" charset="-122"/>
-                <a:cs typeface="Arial" pitchFamily="34" charset="-120"/>
-              </a:rPr>
-              <a:t>Was war unerwartet? Woran seid ihr hängengeblieben?</a:t>
-            </a:r>
-            <a:endParaRPr lang="en-US" sz="1200" dirty="0"/>
-          </a:p>
-        </p:txBody>
-      </p:sp>
-      <p:sp>
-        <p:nvSpPr>
-          <p:cNvPr id="18" name="Shape 16"/>
-          <p:cNvSpPr/>
-          <p:nvPr/>
-        </p:nvSpPr>
-        <p:spPr>
-          <a:xfrm>
-            <a:off x="566928" y="3703320"/>
-            <a:ext cx="8010144" cy="713232"/>
-          </a:xfrm>
-          <a:prstGeom prst="rect">
-            <a:avLst/>
-          </a:prstGeom>
-          <a:solidFill>
-            <a:srgbClr val="EEF0FB"/>
-          </a:solidFill>
-          <a:ln/>
-        </p:spPr>
-      </p:sp>
-      <p:sp>
-        <p:nvSpPr>
-          <p:cNvPr id="19" name="Shape 17"/>
-          <p:cNvSpPr/>
-          <p:nvPr/>
-        </p:nvSpPr>
-        <p:spPr>
-          <a:xfrm>
-            <a:off x="566928" y="3703320"/>
-            <a:ext cx="41148" cy="713232"/>
+            <a:off x="566928" y="1883664"/>
+            <a:ext cx="475488" cy="50292"/>
           </a:xfrm>
           <a:prstGeom prst="rect">
             <a:avLst/>
@@ -19676,14 +19601,14 @@
       </p:sp>
       <p:sp>
         <p:nvSpPr>
-          <p:cNvPr id="20" name="Text 18"/>
-          <p:cNvSpPr/>
-          <p:nvPr/>
-        </p:nvSpPr>
-        <p:spPr>
-          <a:xfrm>
-            <a:off x="804672" y="3849624"/>
-            <a:ext cx="7607808" cy="448056"/>
+          <p:cNvPr id="6" name="Text 4"/>
+          <p:cNvSpPr/>
+          <p:nvPr/>
+        </p:nvSpPr>
+        <p:spPr>
+          <a:xfrm>
+            <a:off x="566928" y="2084832"/>
+            <a:ext cx="5394960" cy="868680"/>
           </a:xfrm>
           <a:prstGeom prst="rect">
             <a:avLst/>
@@ -19696,75 +19621,49 @@
           <a:lstStyle/>
           <a:p>
             <a:pPr indent="0" marL="0">
-              <a:lnSpc>
-                <a:spcPct val="92000"/>
-              </a:lnSpc>
-              <a:buNone/>
-            </a:pPr>
-            <a:r>
-              <a:rPr lang="en-US" sz="1150" dirty="0">
-                <a:solidFill>
-                  <a:srgbClr val="434A63"/>
-                </a:solidFill>
-                <a:latin typeface="Arial" pitchFamily="34" charset="0"/>
-                <a:ea typeface="Arial" pitchFamily="34" charset="-122"/>
-                <a:cs typeface="Arial" pitchFamily="34" charset="-120"/>
-              </a:rPr>
-              <a:t>Wichtiger als die richtige Antwort ist die Begründung: Woran habt ihr die Schicht erkannt? Genau danach fragt die Prüfung.</a:t>
-            </a:r>
-            <a:endParaRPr lang="en-US" sz="1150" dirty="0"/>
-          </a:p>
-        </p:txBody>
-      </p:sp>
-      <p:sp>
-        <p:nvSpPr>
-          <p:cNvPr id="21" name="Shape 19"/>
-          <p:cNvSpPr/>
-          <p:nvPr/>
-        </p:nvSpPr>
-        <p:spPr>
-          <a:xfrm>
-            <a:off x="566928" y="4631436"/>
-            <a:ext cx="8010144" cy="0"/>
-          </a:xfrm>
-          <a:prstGeom prst="line">
-            <a:avLst/>
-          </a:prstGeom>
-          <a:noFill/>
-          <a:ln w="9525">
-            <a:solidFill>
-              <a:srgbClr val="DFE3F0"/>
-            </a:solidFill>
-            <a:prstDash val="solid"/>
-          </a:ln>
-        </p:spPr>
-      </p:sp>
-      <p:sp>
-        <p:nvSpPr>
-          <p:cNvPr id="22" name="Text 20"/>
-          <p:cNvSpPr/>
-          <p:nvPr/>
-        </p:nvSpPr>
-        <p:spPr>
-          <a:xfrm>
-            <a:off x="566928" y="4722876"/>
-            <a:ext cx="5029200" cy="237744"/>
-          </a:xfrm>
-          <a:prstGeom prst="rect">
-            <a:avLst/>
-          </a:prstGeom>
-          <a:noFill/>
-          <a:ln/>
-        </p:spPr>
-        <p:txBody>
-          <a:bodyPr wrap="square" lIns="0" tIns="0" rIns="0" bIns="0" rtlCol="0" anchor="ctr"/>
-          <a:lstStyle/>
-          <a:p>
-            <a:pPr indent="0" marL="0">
-              <a:buNone/>
-            </a:pPr>
-            <a:r>
-              <a:rPr lang="en-US" sz="1050" spc="30" kern="0" dirty="0">
+              <a:buNone/>
+            </a:pPr>
+            <a:r>
+              <a:rPr lang="en-US" sz="3000" b="1" dirty="0">
+                <a:solidFill>
+                  <a:srgbClr val="272E52"/>
+                </a:solidFill>
+                <a:latin typeface="Arial" pitchFamily="34" charset="0"/>
+                <a:ea typeface="Arial" pitchFamily="34" charset="-122"/>
+                <a:cs typeface="Arial" pitchFamily="34" charset="-120"/>
+              </a:rPr>
+              <a:t>Zusammentragen</a:t>
+            </a:r>
+            <a:endParaRPr lang="en-US" sz="3000" dirty="0"/>
+          </a:p>
+        </p:txBody>
+      </p:sp>
+      <p:sp>
+        <p:nvSpPr>
+          <p:cNvPr id="7" name="Text 5"/>
+          <p:cNvSpPr/>
+          <p:nvPr/>
+        </p:nvSpPr>
+        <p:spPr>
+          <a:xfrm>
+            <a:off x="566928" y="3017520"/>
+            <a:ext cx="5394960" cy="548640"/>
+          </a:xfrm>
+          <a:prstGeom prst="rect">
+            <a:avLst/>
+          </a:prstGeom>
+          <a:noFill/>
+          <a:ln/>
+        </p:spPr>
+        <p:txBody>
+          <a:bodyPr wrap="square" lIns="0" tIns="0" rIns="0" bIns="0" rtlCol="0" anchor="t"/>
+          <a:lstStyle/>
+          <a:p>
+            <a:pPr indent="0" marL="0">
+              <a:buNone/>
+            </a:pPr>
+            <a:r>
+              <a:rPr lang="en-US" sz="1350" dirty="0">
                 <a:solidFill>
                   <a:srgbClr val="5C6377"/>
                 </a:solidFill>
@@ -19772,48 +19671,9 @@
                 <a:ea typeface="Arial" pitchFamily="34" charset="-122"/>
                 <a:cs typeface="Arial" pitchFamily="34" charset="-120"/>
               </a:rPr>
-              <a:t>Auswertung</a:t>
-            </a:r>
-            <a:endParaRPr lang="en-US" sz="1050" dirty="0"/>
-          </a:p>
-        </p:txBody>
-      </p:sp>
-      <p:sp>
-        <p:nvSpPr>
-          <p:cNvPr id="23" name="Text 21"/>
-          <p:cNvSpPr/>
-          <p:nvPr/>
-        </p:nvSpPr>
-        <p:spPr>
-          <a:xfrm>
-            <a:off x="8028432" y="4722876"/>
-            <a:ext cx="548640" cy="237744"/>
-          </a:xfrm>
-          <a:prstGeom prst="rect">
-            <a:avLst/>
-          </a:prstGeom>
-          <a:noFill/>
-          <a:ln/>
-        </p:spPr>
-        <p:txBody>
-          <a:bodyPr wrap="square" lIns="0" tIns="0" rIns="0" bIns="0" rtlCol="0" anchor="ctr"/>
-          <a:lstStyle/>
-          <a:p>
-            <a:pPr algn="r" indent="0" marL="0">
-              <a:buNone/>
-            </a:pPr>
-            <a:r>
-              <a:rPr lang="en-US" sz="1050" dirty="0">
-                <a:solidFill>
-                  <a:srgbClr val="5C6377"/>
-                </a:solidFill>
-                <a:latin typeface="Arial" pitchFamily="34" charset="0"/>
-                <a:ea typeface="Arial" pitchFamily="34" charset="-122"/>
-                <a:cs typeface="Arial" pitchFamily="34" charset="-120"/>
-              </a:rPr>
-              <a:t>23/26</a:t>
-            </a:r>
-            <a:endParaRPr lang="en-US" sz="1050" dirty="0"/>
+              <a:t>Was habt ihr gefunden – und was hat euch überrascht?</a:t>
+            </a:r>
+            <a:endParaRPr lang="en-US" sz="1350" dirty="0"/>
           </a:p>
         </p:txBody>
       </p:sp>
@@ -20278,7 +20138,7 @@
                 <a:ea typeface="Arial" pitchFamily="34" charset="-122"/>
                 <a:cs typeface="Arial" pitchFamily="34" charset="-120"/>
               </a:rPr>
-              <a:t>2/26</a:t>
+              <a:t>2/27</a:t>
             </a:r>
             <a:endParaRPr lang="en-US" sz="1050" dirty="0"/>
           </a:p>
@@ -20369,7 +20229,7 @@
                 <a:ea typeface="Arial" pitchFamily="34" charset="-122"/>
                 <a:cs typeface="Arial" pitchFamily="34" charset="-120"/>
               </a:rPr>
-              <a:t>AUSWERTUNG</a:t>
+              <a:t>AUSWERTUNG · 30 MINUTEN</a:t>
             </a:r>
             <a:endParaRPr lang="en-US" sz="1150" dirty="0"/>
           </a:p>
@@ -20408,7 +20268,7 @@
                 <a:ea typeface="Arial" pitchFamily="34" charset="-122"/>
                 <a:cs typeface="Arial" pitchFamily="34" charset="-120"/>
               </a:rPr>
-              <a:t>Die Auflösung der fünf Störungen</a:t>
+              <a:t>Das gehen wir gemeinsam durch</a:t>
             </a:r>
             <a:endParaRPr lang="en-US" sz="2600" dirty="0"/>
           </a:p>
@@ -20416,154 +20276,14 @@
       </p:sp>
       <p:sp>
         <p:nvSpPr>
-          <p:cNvPr id="5" name="Text 3"/>
-          <p:cNvSpPr/>
-          <p:nvPr/>
-        </p:nvSpPr>
-        <p:spPr>
-          <a:xfrm>
-            <a:off x="658368" y="1627632"/>
-            <a:ext cx="1920240" cy="274320"/>
-          </a:xfrm>
-          <a:prstGeom prst="rect">
-            <a:avLst/>
-          </a:prstGeom>
-          <a:noFill/>
-          <a:ln/>
-        </p:spPr>
-        <p:txBody>
-          <a:bodyPr wrap="square" lIns="0" tIns="0" rIns="0" bIns="0" rtlCol="0" anchor="ctr"/>
-          <a:lstStyle/>
-          <a:p>
-            <a:pPr indent="0" marL="0">
-              <a:buNone/>
-            </a:pPr>
-            <a:r>
-              <a:rPr lang="en-US" sz="1050" b="1" spc="80" kern="0" dirty="0">
-                <a:solidFill>
-                  <a:srgbClr val="3843AF"/>
-                </a:solidFill>
-                <a:latin typeface="Arial" pitchFamily="34" charset="0"/>
-                <a:ea typeface="Arial" pitchFamily="34" charset="-122"/>
-                <a:cs typeface="Arial" pitchFamily="34" charset="-120"/>
-              </a:rPr>
-              <a:t>Fall</a:t>
-            </a:r>
-            <a:endParaRPr lang="en-US" sz="1050" dirty="0"/>
-          </a:p>
-        </p:txBody>
-      </p:sp>
-      <p:sp>
-        <p:nvSpPr>
-          <p:cNvPr id="6" name="Text 4"/>
-          <p:cNvSpPr/>
-          <p:nvPr/>
-        </p:nvSpPr>
-        <p:spPr>
-          <a:xfrm>
-            <a:off x="2761488" y="1627632"/>
-            <a:ext cx="1645920" cy="274320"/>
-          </a:xfrm>
-          <a:prstGeom prst="rect">
-            <a:avLst/>
-          </a:prstGeom>
-          <a:noFill/>
-          <a:ln/>
-        </p:spPr>
-        <p:txBody>
-          <a:bodyPr wrap="square" lIns="0" tIns="0" rIns="0" bIns="0" rtlCol="0" anchor="ctr"/>
-          <a:lstStyle/>
-          <a:p>
-            <a:pPr indent="0" marL="0">
-              <a:buNone/>
-            </a:pPr>
-            <a:r>
-              <a:rPr lang="en-US" sz="1050" b="1" spc="80" kern="0" dirty="0">
-                <a:solidFill>
-                  <a:srgbClr val="3843AF"/>
-                </a:solidFill>
-                <a:latin typeface="Arial" pitchFamily="34" charset="0"/>
-                <a:ea typeface="Arial" pitchFamily="34" charset="-122"/>
-                <a:cs typeface="Arial" pitchFamily="34" charset="-120"/>
-              </a:rPr>
-              <a:t>Schicht</a:t>
-            </a:r>
-            <a:endParaRPr lang="en-US" sz="1050" dirty="0"/>
-          </a:p>
-        </p:txBody>
-      </p:sp>
-      <p:sp>
-        <p:nvSpPr>
-          <p:cNvPr id="7" name="Text 5"/>
-          <p:cNvSpPr/>
-          <p:nvPr/>
-        </p:nvSpPr>
-        <p:spPr>
-          <a:xfrm>
-            <a:off x="4590288" y="1627632"/>
-            <a:ext cx="3895344" cy="274320"/>
-          </a:xfrm>
-          <a:prstGeom prst="rect">
-            <a:avLst/>
-          </a:prstGeom>
-          <a:noFill/>
-          <a:ln/>
-        </p:spPr>
-        <p:txBody>
-          <a:bodyPr wrap="square" lIns="0" tIns="0" rIns="0" bIns="0" rtlCol="0" anchor="ctr"/>
-          <a:lstStyle/>
-          <a:p>
-            <a:pPr indent="0" marL="0">
-              <a:buNone/>
-            </a:pPr>
-            <a:r>
-              <a:rPr lang="en-US" sz="1050" b="1" spc="80" kern="0" dirty="0">
-                <a:solidFill>
-                  <a:srgbClr val="3843AF"/>
-                </a:solidFill>
-                <a:latin typeface="Arial" pitchFamily="34" charset="0"/>
-                <a:ea typeface="Arial" pitchFamily="34" charset="-122"/>
-                <a:cs typeface="Arial" pitchFamily="34" charset="-120"/>
-              </a:rPr>
-              <a:t>Nachweis</a:t>
-            </a:r>
-            <a:endParaRPr lang="en-US" sz="1050" dirty="0"/>
-          </a:p>
-        </p:txBody>
-      </p:sp>
-      <p:sp>
-        <p:nvSpPr>
-          <p:cNvPr id="8" name="Shape 6"/>
-          <p:cNvSpPr/>
-          <p:nvPr/>
-        </p:nvSpPr>
-        <p:spPr>
-          <a:xfrm>
-            <a:off x="566928" y="1920240"/>
-            <a:ext cx="8010144" cy="0"/>
-          </a:xfrm>
-          <a:prstGeom prst="line">
-            <a:avLst/>
-          </a:prstGeom>
-          <a:noFill/>
-          <a:ln w="12700">
-            <a:solidFill>
-              <a:srgbClr val="DFE3F0"/>
-            </a:solidFill>
-            <a:prstDash val="solid"/>
-          </a:ln>
-        </p:spPr>
-      </p:sp>
-      <p:sp>
-        <p:nvSpPr>
-          <p:cNvPr id="9" name="Shape 7"/>
-          <p:cNvSpPr/>
-          <p:nvPr/>
-        </p:nvSpPr>
-        <p:spPr>
-          <a:xfrm>
-            <a:off x="475488" y="1993392"/>
-            <a:ext cx="8193024" cy="384048"/>
+          <p:cNvPr id="5" name="Shape 3"/>
+          <p:cNvSpPr/>
+          <p:nvPr/>
+        </p:nvSpPr>
+        <p:spPr>
+          <a:xfrm>
+            <a:off x="438912" y="1737360"/>
+            <a:ext cx="8266176" cy="384048"/>
           </a:xfrm>
           <a:prstGeom prst="rect">
             <a:avLst/>
@@ -20576,14 +20296,14 @@
       </p:sp>
       <p:sp>
         <p:nvSpPr>
-          <p:cNvPr id="10" name="Text 8"/>
-          <p:cNvSpPr/>
-          <p:nvPr/>
-        </p:nvSpPr>
-        <p:spPr>
-          <a:xfrm>
-            <a:off x="658368" y="1993392"/>
-            <a:ext cx="1920240" cy="384048"/>
+          <p:cNvPr id="6" name="Text 4"/>
+          <p:cNvSpPr/>
+          <p:nvPr/>
+        </p:nvSpPr>
+        <p:spPr>
+          <a:xfrm>
+            <a:off x="566928" y="1737360"/>
+            <a:ext cx="411480" cy="384048"/>
           </a:xfrm>
           <a:prstGeom prst="rect">
             <a:avLst/>
@@ -20599,30 +20319,30 @@
               <a:buNone/>
             </a:pPr>
             <a:r>
-              <a:rPr lang="en-US" sz="1150" b="1" dirty="0">
-                <a:solidFill>
-                  <a:srgbClr val="272E52"/>
-                </a:solidFill>
-                <a:latin typeface="Arial" pitchFamily="34" charset="0"/>
-                <a:ea typeface="Arial" pitchFamily="34" charset="-122"/>
-                <a:cs typeface="Arial" pitchFamily="34" charset="-120"/>
-              </a:rPr>
-              <a:t>Kein Kabel</a:t>
-            </a:r>
-            <a:endParaRPr lang="en-US" sz="1150" dirty="0"/>
-          </a:p>
-        </p:txBody>
-      </p:sp>
-      <p:sp>
-        <p:nvSpPr>
-          <p:cNvPr id="11" name="Text 9"/>
-          <p:cNvSpPr/>
-          <p:nvPr/>
-        </p:nvSpPr>
-        <p:spPr>
-          <a:xfrm>
-            <a:off x="2761488" y="1993392"/>
-            <a:ext cx="1645920" cy="384048"/>
+              <a:rPr lang="en-US" sz="1200" b="1" dirty="0">
+                <a:solidFill>
+                  <a:srgbClr val="3843AF"/>
+                </a:solidFill>
+                <a:latin typeface="Courier New" pitchFamily="34" charset="0"/>
+                <a:ea typeface="Courier New" pitchFamily="34" charset="-122"/>
+                <a:cs typeface="Courier New" pitchFamily="34" charset="-120"/>
+              </a:rPr>
+              <a:t>1</a:t>
+            </a:r>
+            <a:endParaRPr lang="en-US" sz="1200" dirty="0"/>
+          </a:p>
+        </p:txBody>
+      </p:sp>
+      <p:sp>
+        <p:nvSpPr>
+          <p:cNvPr id="7" name="Text 5"/>
+          <p:cNvSpPr/>
+          <p:nvPr/>
+        </p:nvSpPr>
+        <p:spPr>
+          <a:xfrm>
+            <a:off x="978408" y="1737360"/>
+            <a:ext cx="7598664" cy="384048"/>
           </a:xfrm>
           <a:prstGeom prst="rect">
             <a:avLst/>
@@ -20638,7 +20358,7 @@
               <a:buNone/>
             </a:pPr>
             <a:r>
-              <a:rPr lang="en-US" sz="1150" dirty="0">
+              <a:rPr lang="en-US" sz="1200" dirty="0">
                 <a:solidFill>
                   <a:srgbClr val="434A63"/>
                 </a:solidFill>
@@ -20646,22 +20366,22 @@
                 <a:ea typeface="Arial" pitchFamily="34" charset="-122"/>
                 <a:cs typeface="Arial" pitchFamily="34" charset="-120"/>
               </a:rPr>
-              <a:t>1 – physisch</a:t>
-            </a:r>
-            <a:endParaRPr lang="en-US" sz="1150" dirty="0"/>
-          </a:p>
-        </p:txBody>
-      </p:sp>
-      <p:sp>
-        <p:nvSpPr>
-          <p:cNvPr id="12" name="Text 10"/>
-          <p:cNvSpPr/>
-          <p:nvPr/>
-        </p:nvSpPr>
-        <p:spPr>
-          <a:xfrm>
-            <a:off x="4590288" y="1993392"/>
-            <a:ext cx="3895344" cy="384048"/>
+              <a:t>Reihum: eine Gruppe zeigt ihren Steckbrief, die anderen ergänzen</a:t>
+            </a:r>
+            <a:endParaRPr lang="en-US" sz="1200" dirty="0"/>
+          </a:p>
+        </p:txBody>
+      </p:sp>
+      <p:sp>
+        <p:nvSpPr>
+          <p:cNvPr id="8" name="Text 6"/>
+          <p:cNvSpPr/>
+          <p:nvPr/>
+        </p:nvSpPr>
+        <p:spPr>
+          <a:xfrm>
+            <a:off x="566928" y="2121408"/>
+            <a:ext cx="411480" cy="384048"/>
           </a:xfrm>
           <a:prstGeom prst="rect">
             <a:avLst/>
@@ -20677,7 +20397,46 @@
               <a:buNone/>
             </a:pPr>
             <a:r>
-              <a:rPr lang="en-US" sz="1150" dirty="0">
+              <a:rPr lang="en-US" sz="1200" b="1" dirty="0">
+                <a:solidFill>
+                  <a:srgbClr val="3843AF"/>
+                </a:solidFill>
+                <a:latin typeface="Courier New" pitchFamily="34" charset="0"/>
+                <a:ea typeface="Courier New" pitchFamily="34" charset="-122"/>
+                <a:cs typeface="Courier New" pitchFamily="34" charset="-120"/>
+              </a:rPr>
+              <a:t>2</a:t>
+            </a:r>
+            <a:endParaRPr lang="en-US" sz="1200" dirty="0"/>
+          </a:p>
+        </p:txBody>
+      </p:sp>
+      <p:sp>
+        <p:nvSpPr>
+          <p:cNvPr id="9" name="Text 7"/>
+          <p:cNvSpPr/>
+          <p:nvPr/>
+        </p:nvSpPr>
+        <p:spPr>
+          <a:xfrm>
+            <a:off x="978408" y="2121408"/>
+            <a:ext cx="7598664" cy="384048"/>
+          </a:xfrm>
+          <a:prstGeom prst="rect">
+            <a:avLst/>
+          </a:prstGeom>
+          <a:noFill/>
+          <a:ln/>
+        </p:spPr>
+        <p:txBody>
+          <a:bodyPr wrap="square" lIns="0" tIns="0" rIns="0" bIns="0" rtlCol="0" anchor="ctr"/>
+          <a:lstStyle/>
+          <a:p>
+            <a:pPr indent="0" marL="0">
+              <a:buNone/>
+            </a:pPr>
+            <a:r>
+              <a:rPr lang="en-US" sz="1200" dirty="0">
                 <a:solidFill>
                   <a:srgbClr val="434A63"/>
                 </a:solidFill>
@@ -20685,139 +20444,22 @@
                 <a:ea typeface="Arial" pitchFamily="34" charset="-122"/>
                 <a:cs typeface="Arial" pitchFamily="34" charset="-120"/>
               </a:rPr>
-              <a:t>ipconfig: Medium getrennt</a:t>
-            </a:r>
-            <a:endParaRPr lang="en-US" sz="1150" dirty="0"/>
-          </a:p>
-        </p:txBody>
-      </p:sp>
-      <p:sp>
-        <p:nvSpPr>
-          <p:cNvPr id="13" name="Text 11"/>
-          <p:cNvSpPr/>
-          <p:nvPr/>
-        </p:nvSpPr>
-        <p:spPr>
-          <a:xfrm>
-            <a:off x="658368" y="2377440"/>
-            <a:ext cx="1920240" cy="384048"/>
-          </a:xfrm>
-          <a:prstGeom prst="rect">
-            <a:avLst/>
-          </a:prstGeom>
-          <a:noFill/>
-          <a:ln/>
-        </p:spPr>
-        <p:txBody>
-          <a:bodyPr wrap="square" lIns="0" tIns="0" rIns="0" bIns="0" rtlCol="0" anchor="ctr"/>
-          <a:lstStyle/>
-          <a:p>
-            <a:pPr indent="0" marL="0">
-              <a:buNone/>
-            </a:pPr>
-            <a:r>
-              <a:rPr lang="en-US" sz="1150" b="1" dirty="0">
-                <a:solidFill>
-                  <a:srgbClr val="272E52"/>
-                </a:solidFill>
-                <a:latin typeface="Arial" pitchFamily="34" charset="0"/>
-                <a:ea typeface="Arial" pitchFamily="34" charset="-122"/>
-                <a:cs typeface="Arial" pitchFamily="34" charset="-120"/>
-              </a:rPr>
-              <a:t>169.254.x.x</a:t>
-            </a:r>
-            <a:endParaRPr lang="en-US" sz="1150" dirty="0"/>
-          </a:p>
-        </p:txBody>
-      </p:sp>
-      <p:sp>
-        <p:nvSpPr>
-          <p:cNvPr id="14" name="Text 12"/>
-          <p:cNvSpPr/>
-          <p:nvPr/>
-        </p:nvSpPr>
-        <p:spPr>
-          <a:xfrm>
-            <a:off x="2761488" y="2377440"/>
-            <a:ext cx="1645920" cy="384048"/>
-          </a:xfrm>
-          <a:prstGeom prst="rect">
-            <a:avLst/>
-          </a:prstGeom>
-          <a:noFill/>
-          <a:ln/>
-        </p:spPr>
-        <p:txBody>
-          <a:bodyPr wrap="square" lIns="0" tIns="0" rIns="0" bIns="0" rtlCol="0" anchor="ctr"/>
-          <a:lstStyle/>
-          <a:p>
-            <a:pPr indent="0" marL="0">
-              <a:buNone/>
-            </a:pPr>
-            <a:r>
-              <a:rPr lang="en-US" sz="1150" dirty="0">
-                <a:solidFill>
-                  <a:srgbClr val="434A63"/>
-                </a:solidFill>
-                <a:latin typeface="Arial" pitchFamily="34" charset="0"/>
-                <a:ea typeface="Arial" pitchFamily="34" charset="-122"/>
-                <a:cs typeface="Arial" pitchFamily="34" charset="-120"/>
-              </a:rPr>
-              <a:t>3 – Adresse</a:t>
-            </a:r>
-            <a:endParaRPr lang="en-US" sz="1150" dirty="0"/>
-          </a:p>
-        </p:txBody>
-      </p:sp>
-      <p:sp>
-        <p:nvSpPr>
-          <p:cNvPr id="15" name="Text 13"/>
-          <p:cNvSpPr/>
-          <p:nvPr/>
-        </p:nvSpPr>
-        <p:spPr>
-          <a:xfrm>
-            <a:off x="4590288" y="2377440"/>
-            <a:ext cx="3895344" cy="384048"/>
-          </a:xfrm>
-          <a:prstGeom prst="rect">
-            <a:avLst/>
-          </a:prstGeom>
-          <a:noFill/>
-          <a:ln/>
-        </p:spPr>
-        <p:txBody>
-          <a:bodyPr wrap="square" lIns="0" tIns="0" rIns="0" bIns="0" rtlCol="0" anchor="ctr"/>
-          <a:lstStyle/>
-          <a:p>
-            <a:pPr indent="0" marL="0">
-              <a:buNone/>
-            </a:pPr>
-            <a:r>
-              <a:rPr lang="en-US" sz="1150" dirty="0">
-                <a:solidFill>
-                  <a:srgbClr val="434A63"/>
-                </a:solidFill>
-                <a:latin typeface="Arial" pitchFamily="34" charset="0"/>
-                <a:ea typeface="Arial" pitchFamily="34" charset="-122"/>
-                <a:cs typeface="Arial" pitchFamily="34" charset="-120"/>
-              </a:rPr>
-              <a:t>kein DHCP erreichbar, Selbstvergabe</a:t>
-            </a:r>
-            <a:endParaRPr lang="en-US" sz="1150" dirty="0"/>
-          </a:p>
-        </p:txBody>
-      </p:sp>
-      <p:sp>
-        <p:nvSpPr>
-          <p:cNvPr id="16" name="Shape 14"/>
-          <p:cNvSpPr/>
-          <p:nvPr/>
-        </p:nvSpPr>
-        <p:spPr>
-          <a:xfrm>
-            <a:off x="475488" y="2761488"/>
-            <a:ext cx="8193024" cy="384048"/>
+              <a:t>Warum hat fast jeder eine 192.168er-Adresse? – private Adressbereiche</a:t>
+            </a:r>
+            <a:endParaRPr lang="en-US" sz="1200" dirty="0"/>
+          </a:p>
+        </p:txBody>
+      </p:sp>
+      <p:sp>
+        <p:nvSpPr>
+          <p:cNvPr id="10" name="Shape 8"/>
+          <p:cNvSpPr/>
+          <p:nvPr/>
+        </p:nvSpPr>
+        <p:spPr>
+          <a:xfrm>
+            <a:off x="438912" y="2505456"/>
+            <a:ext cx="8266176" cy="384048"/>
           </a:xfrm>
           <a:prstGeom prst="rect">
             <a:avLst/>
@@ -20830,14 +20472,14 @@
       </p:sp>
       <p:sp>
         <p:nvSpPr>
-          <p:cNvPr id="17" name="Text 15"/>
-          <p:cNvSpPr/>
-          <p:nvPr/>
-        </p:nvSpPr>
-        <p:spPr>
-          <a:xfrm>
-            <a:off x="658368" y="2761488"/>
-            <a:ext cx="1920240" cy="384048"/>
+          <p:cNvPr id="11" name="Text 9"/>
+          <p:cNvSpPr/>
+          <p:nvPr/>
+        </p:nvSpPr>
+        <p:spPr>
+          <a:xfrm>
+            <a:off x="566928" y="2505456"/>
+            <a:ext cx="411480" cy="384048"/>
           </a:xfrm>
           <a:prstGeom prst="rect">
             <a:avLst/>
@@ -20853,30 +20495,30 @@
               <a:buNone/>
             </a:pPr>
             <a:r>
-              <a:rPr lang="en-US" sz="1150" b="1" dirty="0">
-                <a:solidFill>
-                  <a:srgbClr val="272E52"/>
-                </a:solidFill>
-                <a:latin typeface="Arial" pitchFamily="34" charset="0"/>
-                <a:ea typeface="Arial" pitchFamily="34" charset="-122"/>
-                <a:cs typeface="Arial" pitchFamily="34" charset="-120"/>
-              </a:rPr>
-              <a:t>Nur Name geht nicht</a:t>
-            </a:r>
-            <a:endParaRPr lang="en-US" sz="1150" dirty="0"/>
-          </a:p>
-        </p:txBody>
-      </p:sp>
-      <p:sp>
-        <p:nvSpPr>
-          <p:cNvPr id="18" name="Text 16"/>
-          <p:cNvSpPr/>
-          <p:nvPr/>
-        </p:nvSpPr>
-        <p:spPr>
-          <a:xfrm>
-            <a:off x="2761488" y="2761488"/>
-            <a:ext cx="1645920" cy="384048"/>
+              <a:rPr lang="en-US" sz="1200" b="1" dirty="0">
+                <a:solidFill>
+                  <a:srgbClr val="3843AF"/>
+                </a:solidFill>
+                <a:latin typeface="Courier New" pitchFamily="34" charset="0"/>
+                <a:ea typeface="Courier New" pitchFamily="34" charset="-122"/>
+                <a:cs typeface="Courier New" pitchFamily="34" charset="-120"/>
+              </a:rPr>
+              <a:t>3</a:t>
+            </a:r>
+            <a:endParaRPr lang="en-US" sz="1200" dirty="0"/>
+          </a:p>
+        </p:txBody>
+      </p:sp>
+      <p:sp>
+        <p:nvSpPr>
+          <p:cNvPr id="12" name="Text 10"/>
+          <p:cNvSpPr/>
+          <p:nvPr/>
+        </p:nvSpPr>
+        <p:spPr>
+          <a:xfrm>
+            <a:off x="978408" y="2505456"/>
+            <a:ext cx="7598664" cy="384048"/>
           </a:xfrm>
           <a:prstGeom prst="rect">
             <a:avLst/>
@@ -20892,7 +20534,7 @@
               <a:buNone/>
             </a:pPr>
             <a:r>
-              <a:rPr lang="en-US" sz="1150" dirty="0">
+              <a:rPr lang="en-US" sz="1200" dirty="0">
                 <a:solidFill>
                   <a:srgbClr val="434A63"/>
                 </a:solidFill>
@@ -20900,22 +20542,22 @@
                 <a:ea typeface="Arial" pitchFamily="34" charset="-122"/>
                 <a:cs typeface="Arial" pitchFamily="34" charset="-120"/>
               </a:rPr>
-              <a:t>7 – DNS</a:t>
-            </a:r>
-            <a:endParaRPr lang="en-US" sz="1150" dirty="0"/>
-          </a:p>
-        </p:txBody>
-      </p:sp>
-      <p:sp>
-        <p:nvSpPr>
-          <p:cNvPr id="19" name="Text 17"/>
-          <p:cNvSpPr/>
-          <p:nvPr/>
-        </p:nvSpPr>
-        <p:spPr>
-          <a:xfrm>
-            <a:off x="4590288" y="2761488"/>
-            <a:ext cx="3895344" cy="384048"/>
+              <a:t>Die fünf Befehle, jeder einer Schicht zugeordnet</a:t>
+            </a:r>
+            <a:endParaRPr lang="en-US" sz="1200" dirty="0"/>
+          </a:p>
+        </p:txBody>
+      </p:sp>
+      <p:sp>
+        <p:nvSpPr>
+          <p:cNvPr id="13" name="Text 11"/>
+          <p:cNvSpPr/>
+          <p:nvPr/>
+        </p:nvSpPr>
+        <p:spPr>
+          <a:xfrm>
+            <a:off x="566928" y="2889504"/>
+            <a:ext cx="411480" cy="384048"/>
           </a:xfrm>
           <a:prstGeom prst="rect">
             <a:avLst/>
@@ -20931,7 +20573,46 @@
               <a:buNone/>
             </a:pPr>
             <a:r>
-              <a:rPr lang="en-US" sz="1150" dirty="0">
+              <a:rPr lang="en-US" sz="1200" b="1" dirty="0">
+                <a:solidFill>
+                  <a:srgbClr val="3843AF"/>
+                </a:solidFill>
+                <a:latin typeface="Courier New" pitchFamily="34" charset="0"/>
+                <a:ea typeface="Courier New" pitchFamily="34" charset="-122"/>
+                <a:cs typeface="Courier New" pitchFamily="34" charset="-120"/>
+              </a:rPr>
+              <a:t>4</a:t>
+            </a:r>
+            <a:endParaRPr lang="en-US" sz="1200" dirty="0"/>
+          </a:p>
+        </p:txBody>
+      </p:sp>
+      <p:sp>
+        <p:nvSpPr>
+          <p:cNvPr id="14" name="Text 12"/>
+          <p:cNvSpPr/>
+          <p:nvPr/>
+        </p:nvSpPr>
+        <p:spPr>
+          <a:xfrm>
+            <a:off x="978408" y="2889504"/>
+            <a:ext cx="7598664" cy="384048"/>
+          </a:xfrm>
+          <a:prstGeom prst="rect">
+            <a:avLst/>
+          </a:prstGeom>
+          <a:noFill/>
+          <a:ln/>
+        </p:spPr>
+        <p:txBody>
+          <a:bodyPr wrap="square" lIns="0" tIns="0" rIns="0" bIns="0" rtlCol="0" anchor="ctr"/>
+          <a:lstStyle/>
+          <a:p>
+            <a:pPr indent="0" marL="0">
+              <a:buNone/>
+            </a:pPr>
+            <a:r>
+              <a:rPr lang="en-US" sz="1200" dirty="0">
                 <a:solidFill>
                   <a:srgbClr val="434A63"/>
                 </a:solidFill>
@@ -20939,139 +20620,22 @@
                 <a:ea typeface="Arial" pitchFamily="34" charset="-122"/>
                 <a:cs typeface="Arial" pitchFamily="34" charset="-120"/>
               </a:rPr>
-              <a:t>nslookup schlägt fehl, ping auf IP klappt</a:t>
-            </a:r>
-            <a:endParaRPr lang="en-US" sz="1150" dirty="0"/>
-          </a:p>
-        </p:txBody>
-      </p:sp>
-      <p:sp>
-        <p:nvSpPr>
-          <p:cNvPr id="20" name="Text 18"/>
-          <p:cNvSpPr/>
-          <p:nvPr/>
-        </p:nvSpPr>
-        <p:spPr>
-          <a:xfrm>
-            <a:off x="658368" y="3145536"/>
-            <a:ext cx="1920240" cy="384048"/>
-          </a:xfrm>
-          <a:prstGeom prst="rect">
-            <a:avLst/>
-          </a:prstGeom>
-          <a:noFill/>
-          <a:ln/>
-        </p:spPr>
-        <p:txBody>
-          <a:bodyPr wrap="square" lIns="0" tIns="0" rIns="0" bIns="0" rtlCol="0" anchor="ctr"/>
-          <a:lstStyle/>
-          <a:p>
-            <a:pPr indent="0" marL="0">
-              <a:buNone/>
-            </a:pPr>
-            <a:r>
-              <a:rPr lang="en-US" sz="1150" b="1" dirty="0">
-                <a:solidFill>
-                  <a:srgbClr val="272E52"/>
-                </a:solidFill>
-                <a:latin typeface="Arial" pitchFamily="34" charset="0"/>
-                <a:ea typeface="Arial" pitchFamily="34" charset="-122"/>
-                <a:cs typeface="Arial" pitchFamily="34" charset="-120"/>
-              </a:rPr>
-              <a:t>ping ja, Web nein</a:t>
-            </a:r>
-            <a:endParaRPr lang="en-US" sz="1150" dirty="0"/>
-          </a:p>
-        </p:txBody>
-      </p:sp>
-      <p:sp>
-        <p:nvSpPr>
-          <p:cNvPr id="21" name="Text 19"/>
-          <p:cNvSpPr/>
-          <p:nvPr/>
-        </p:nvSpPr>
-        <p:spPr>
-          <a:xfrm>
-            <a:off x="2761488" y="3145536"/>
-            <a:ext cx="1645920" cy="384048"/>
-          </a:xfrm>
-          <a:prstGeom prst="rect">
-            <a:avLst/>
-          </a:prstGeom>
-          <a:noFill/>
-          <a:ln/>
-        </p:spPr>
-        <p:txBody>
-          <a:bodyPr wrap="square" lIns="0" tIns="0" rIns="0" bIns="0" rtlCol="0" anchor="ctr"/>
-          <a:lstStyle/>
-          <a:p>
-            <a:pPr indent="0" marL="0">
-              <a:buNone/>
-            </a:pPr>
-            <a:r>
-              <a:rPr lang="en-US" sz="1150" dirty="0">
-                <a:solidFill>
-                  <a:srgbClr val="434A63"/>
-                </a:solidFill>
-                <a:latin typeface="Arial" pitchFamily="34" charset="0"/>
-                <a:ea typeface="Arial" pitchFamily="34" charset="-122"/>
-                <a:cs typeface="Arial" pitchFamily="34" charset="-120"/>
-              </a:rPr>
-              <a:t>4 oder 7</a:t>
-            </a:r>
-            <a:endParaRPr lang="en-US" sz="1150" dirty="0"/>
-          </a:p>
-        </p:txBody>
-      </p:sp>
-      <p:sp>
-        <p:nvSpPr>
-          <p:cNvPr id="22" name="Text 20"/>
-          <p:cNvSpPr/>
-          <p:nvPr/>
-        </p:nvSpPr>
-        <p:spPr>
-          <a:xfrm>
-            <a:off x="4590288" y="3145536"/>
-            <a:ext cx="3895344" cy="384048"/>
-          </a:xfrm>
-          <a:prstGeom prst="rect">
-            <a:avLst/>
-          </a:prstGeom>
-          <a:noFill/>
-          <a:ln/>
-        </p:spPr>
-        <p:txBody>
-          <a:bodyPr wrap="square" lIns="0" tIns="0" rIns="0" bIns="0" rtlCol="0" anchor="ctr"/>
-          <a:lstStyle/>
-          <a:p>
-            <a:pPr indent="0" marL="0">
-              <a:buNone/>
-            </a:pPr>
-            <a:r>
-              <a:rPr lang="en-US" sz="1150" dirty="0">
-                <a:solidFill>
-                  <a:srgbClr val="434A63"/>
-                </a:solidFill>
-                <a:latin typeface="Arial" pitchFamily="34" charset="0"/>
-                <a:ea typeface="Arial" pitchFamily="34" charset="-122"/>
-                <a:cs typeface="Arial" pitchFamily="34" charset="-120"/>
-              </a:rPr>
-              <a:t>Test-NetConnection auf Port 443</a:t>
-            </a:r>
-            <a:endParaRPr lang="en-US" sz="1150" dirty="0"/>
-          </a:p>
-        </p:txBody>
-      </p:sp>
-      <p:sp>
-        <p:nvSpPr>
-          <p:cNvPr id="23" name="Shape 21"/>
-          <p:cNvSpPr/>
-          <p:nvPr/>
-        </p:nvSpPr>
-        <p:spPr>
-          <a:xfrm>
-            <a:off x="475488" y="3529584"/>
-            <a:ext cx="8193024" cy="384048"/>
+              <a:t>Die fünf Störungen – auflösen und begründen</a:t>
+            </a:r>
+            <a:endParaRPr lang="en-US" sz="1200" dirty="0"/>
+          </a:p>
+        </p:txBody>
+      </p:sp>
+      <p:sp>
+        <p:nvSpPr>
+          <p:cNvPr id="15" name="Shape 13"/>
+          <p:cNvSpPr/>
+          <p:nvPr/>
+        </p:nvSpPr>
+        <p:spPr>
+          <a:xfrm>
+            <a:off x="438912" y="3273552"/>
+            <a:ext cx="8266176" cy="384048"/>
           </a:xfrm>
           <a:prstGeom prst="rect">
             <a:avLst/>
@@ -21084,14 +20648,14 @@
       </p:sp>
       <p:sp>
         <p:nvSpPr>
-          <p:cNvPr id="24" name="Text 22"/>
-          <p:cNvSpPr/>
-          <p:nvPr/>
-        </p:nvSpPr>
-        <p:spPr>
-          <a:xfrm>
-            <a:off x="658368" y="3529584"/>
-            <a:ext cx="1920240" cy="384048"/>
+          <p:cNvPr id="16" name="Text 14"/>
+          <p:cNvSpPr/>
+          <p:nvPr/>
+        </p:nvSpPr>
+        <p:spPr>
+          <a:xfrm>
+            <a:off x="566928" y="3273552"/>
+            <a:ext cx="411480" cy="384048"/>
           </a:xfrm>
           <a:prstGeom prst="rect">
             <a:avLst/>
@@ -21107,30 +20671,30 @@
               <a:buNone/>
             </a:pPr>
             <a:r>
-              <a:rPr lang="en-US" sz="1150" b="1" dirty="0">
-                <a:solidFill>
-                  <a:srgbClr val="272E52"/>
-                </a:solidFill>
-                <a:latin typeface="Arial" pitchFamily="34" charset="0"/>
-                <a:ea typeface="Arial" pitchFamily="34" charset="-122"/>
-                <a:cs typeface="Arial" pitchFamily="34" charset="-120"/>
-              </a:rPr>
-              <a:t>Alles langsam</a:t>
-            </a:r>
-            <a:endParaRPr lang="en-US" sz="1150" dirty="0"/>
-          </a:p>
-        </p:txBody>
-      </p:sp>
-      <p:sp>
-        <p:nvSpPr>
-          <p:cNvPr id="25" name="Text 23"/>
-          <p:cNvSpPr/>
-          <p:nvPr/>
-        </p:nvSpPr>
-        <p:spPr>
-          <a:xfrm>
-            <a:off x="2761488" y="3529584"/>
-            <a:ext cx="1645920" cy="384048"/>
+              <a:rPr lang="en-US" sz="1200" b="1" dirty="0">
+                <a:solidFill>
+                  <a:srgbClr val="3843AF"/>
+                </a:solidFill>
+                <a:latin typeface="Courier New" pitchFamily="34" charset="0"/>
+                <a:ea typeface="Courier New" pitchFamily="34" charset="-122"/>
+                <a:cs typeface="Courier New" pitchFamily="34" charset="-120"/>
+              </a:rPr>
+              <a:t>5</a:t>
+            </a:r>
+            <a:endParaRPr lang="en-US" sz="1200" dirty="0"/>
+          </a:p>
+        </p:txBody>
+      </p:sp>
+      <p:sp>
+        <p:nvSpPr>
+          <p:cNvPr id="17" name="Text 15"/>
+          <p:cNvSpPr/>
+          <p:nvPr/>
+        </p:nvSpPr>
+        <p:spPr>
+          <a:xfrm>
+            <a:off x="978408" y="3273552"/>
+            <a:ext cx="7598664" cy="384048"/>
           </a:xfrm>
           <a:prstGeom prst="rect">
             <a:avLst/>
@@ -21146,7 +20710,7 @@
               <a:buNone/>
             </a:pPr>
             <a:r>
-              <a:rPr lang="en-US" sz="1150" dirty="0">
+              <a:rPr lang="en-US" sz="1200" dirty="0">
                 <a:solidFill>
                   <a:srgbClr val="434A63"/>
                 </a:solidFill>
@@ -21154,61 +20718,42 @@
                 <a:ea typeface="Arial" pitchFamily="34" charset="-122"/>
                 <a:cs typeface="Arial" pitchFamily="34" charset="-120"/>
               </a:rPr>
-              <a:t>kein Ausfall</a:t>
-            </a:r>
-            <a:endParaRPr lang="en-US" sz="1150" dirty="0"/>
-          </a:p>
-        </p:txBody>
-      </p:sp>
-      <p:sp>
-        <p:nvSpPr>
-          <p:cNvPr id="26" name="Text 24"/>
-          <p:cNvSpPr/>
-          <p:nvPr/>
-        </p:nvSpPr>
-        <p:spPr>
-          <a:xfrm>
-            <a:off x="4590288" y="3529584"/>
-            <a:ext cx="3895344" cy="384048"/>
-          </a:xfrm>
-          <a:prstGeom prst="rect">
-            <a:avLst/>
-          </a:prstGeom>
-          <a:noFill/>
-          <a:ln/>
-        </p:spPr>
-        <p:txBody>
-          <a:bodyPr wrap="square" lIns="0" tIns="0" rIns="0" bIns="0" rtlCol="0" anchor="ctr"/>
-          <a:lstStyle/>
-          <a:p>
-            <a:pPr indent="0" marL="0">
-              <a:buNone/>
-            </a:pPr>
-            <a:r>
-              <a:rPr lang="en-US" sz="1150" dirty="0">
-                <a:solidFill>
-                  <a:srgbClr val="434A63"/>
-                </a:solidFill>
-                <a:latin typeface="Arial" pitchFamily="34" charset="0"/>
-                <a:ea typeface="Arial" pitchFamily="34" charset="-122"/>
-                <a:cs typeface="Arial" pitchFamily="34" charset="-120"/>
-              </a:rPr>
-              <a:t>Latenz und Verlust in ping ansehen</a:t>
-            </a:r>
-            <a:endParaRPr lang="en-US" sz="1150" dirty="0"/>
-          </a:p>
-        </p:txBody>
-      </p:sp>
-      <p:sp>
-        <p:nvSpPr>
-          <p:cNvPr id="27" name="Shape 25"/>
-          <p:cNvSpPr/>
-          <p:nvPr/>
-        </p:nvSpPr>
-        <p:spPr>
-          <a:xfrm>
-            <a:off x="566928" y="4160520"/>
-            <a:ext cx="32004" cy="256032"/>
+              <a:t>Was war unerwartet? Woran seid ihr hängengeblieben?</a:t>
+            </a:r>
+            <a:endParaRPr lang="en-US" sz="1200" dirty="0"/>
+          </a:p>
+        </p:txBody>
+      </p:sp>
+      <p:sp>
+        <p:nvSpPr>
+          <p:cNvPr id="18" name="Shape 16"/>
+          <p:cNvSpPr/>
+          <p:nvPr/>
+        </p:nvSpPr>
+        <p:spPr>
+          <a:xfrm>
+            <a:off x="566928" y="3703320"/>
+            <a:ext cx="8010144" cy="713232"/>
+          </a:xfrm>
+          <a:prstGeom prst="rect">
+            <a:avLst/>
+          </a:prstGeom>
+          <a:solidFill>
+            <a:srgbClr val="EEF0FB"/>
+          </a:solidFill>
+          <a:ln/>
+        </p:spPr>
+      </p:sp>
+      <p:sp>
+        <p:nvSpPr>
+          <p:cNvPr id="19" name="Shape 17"/>
+          <p:cNvSpPr/>
+          <p:nvPr/>
+        </p:nvSpPr>
+        <p:spPr>
+          <a:xfrm>
+            <a:off x="566928" y="3703320"/>
+            <a:ext cx="41148" cy="713232"/>
           </a:xfrm>
           <a:prstGeom prst="rect">
             <a:avLst/>
@@ -21221,30 +20766,33 @@
       </p:sp>
       <p:sp>
         <p:nvSpPr>
-          <p:cNvPr id="28" name="Text 26"/>
-          <p:cNvSpPr/>
-          <p:nvPr/>
-        </p:nvSpPr>
-        <p:spPr>
-          <a:xfrm>
-            <a:off x="749808" y="4114800"/>
-            <a:ext cx="7827264" cy="402336"/>
-          </a:xfrm>
-          <a:prstGeom prst="rect">
-            <a:avLst/>
-          </a:prstGeom>
-          <a:noFill/>
-          <a:ln/>
-        </p:spPr>
-        <p:txBody>
-          <a:bodyPr wrap="square" lIns="0" tIns="0" rIns="0" bIns="0" rtlCol="0" anchor="ctr"/>
-          <a:lstStyle/>
-          <a:p>
-            <a:pPr indent="0" marL="0">
-              <a:buNone/>
-            </a:pPr>
-            <a:r>
-              <a:rPr lang="en-US" sz="1200" b="1" dirty="0">
+          <p:cNvPr id="20" name="Text 18"/>
+          <p:cNvSpPr/>
+          <p:nvPr/>
+        </p:nvSpPr>
+        <p:spPr>
+          <a:xfrm>
+            <a:off x="804672" y="3849624"/>
+            <a:ext cx="7607808" cy="448056"/>
+          </a:xfrm>
+          <a:prstGeom prst="rect">
+            <a:avLst/>
+          </a:prstGeom>
+          <a:noFill/>
+          <a:ln/>
+        </p:spPr>
+        <p:txBody>
+          <a:bodyPr wrap="square" lIns="0" tIns="0" rIns="0" bIns="0" rtlCol="0" anchor="t"/>
+          <a:lstStyle/>
+          <a:p>
+            <a:pPr indent="0" marL="0">
+              <a:lnSpc>
+                <a:spcPct val="92000"/>
+              </a:lnSpc>
+              <a:buNone/>
+            </a:pPr>
+            <a:r>
+              <a:rPr lang="en-US" sz="1150" dirty="0">
                 <a:solidFill>
                   <a:srgbClr val="434A63"/>
                 </a:solidFill>
@@ -21252,15 +20800,15 @@
                 <a:ea typeface="Arial" pitchFamily="34" charset="-122"/>
                 <a:cs typeface="Arial" pitchFamily="34" charset="-120"/>
               </a:rPr>
-              <a:t>Von unten nach oben prüfen. Die erste Schicht, die nicht antwortet, ist die Ursache.</a:t>
-            </a:r>
-            <a:endParaRPr lang="en-US" sz="1200" dirty="0"/>
-          </a:p>
-        </p:txBody>
-      </p:sp>
-      <p:sp>
-        <p:nvSpPr>
-          <p:cNvPr id="29" name="Shape 27"/>
+              <a:t>Wichtiger als die richtige Antwort ist die Begründung: Woran habt ihr die Schicht erkannt? Wer das sagen kann, findet auch den nächsten Fehler.</a:t>
+            </a:r>
+            <a:endParaRPr lang="en-US" sz="1150" dirty="0"/>
+          </a:p>
+        </p:txBody>
+      </p:sp>
+      <p:sp>
+        <p:nvSpPr>
+          <p:cNvPr id="21" name="Shape 19"/>
           <p:cNvSpPr/>
           <p:nvPr/>
         </p:nvSpPr>
@@ -21283,7 +20831,7 @@
       </p:sp>
       <p:sp>
         <p:nvSpPr>
-          <p:cNvPr id="30" name="Text 28"/>
+          <p:cNvPr id="22" name="Text 20"/>
           <p:cNvSpPr/>
           <p:nvPr/>
         </p:nvSpPr>
@@ -21322,7 +20870,7 @@
       </p:sp>
       <p:sp>
         <p:nvSpPr>
-          <p:cNvPr id="31" name="Text 29"/>
+          <p:cNvPr id="23" name="Text 21"/>
           <p:cNvSpPr/>
           <p:nvPr/>
         </p:nvSpPr>
@@ -21353,7 +20901,7 @@
                 <a:ea typeface="Arial" pitchFamily="34" charset="-122"/>
                 <a:cs typeface="Arial" pitchFamily="34" charset="-120"/>
               </a:rPr>
-              <a:t>24/26</a:t>
+              <a:t>24/27</a:t>
             </a:r>
             <a:endParaRPr lang="en-US" sz="1050" dirty="0"/>
           </a:p>
@@ -21444,7 +20992,7 @@
                 <a:ea typeface="Arial" pitchFamily="34" charset="-122"/>
                 <a:cs typeface="Arial" pitchFamily="34" charset="-120"/>
               </a:rPr>
-              <a:t>KERN DES ABENDS</a:t>
+              <a:t>AUSWERTUNG</a:t>
             </a:r>
             <a:endParaRPr lang="en-US" sz="1150" dirty="0"/>
           </a:p>
@@ -21483,7 +21031,7 @@
                 <a:ea typeface="Arial" pitchFamily="34" charset="-122"/>
                 <a:cs typeface="Arial" pitchFamily="34" charset="-120"/>
               </a:rPr>
-              <a:t>Das nehmt ihr heute mit</a:t>
+              <a:t>Die Auflösung der fünf Störungen</a:t>
             </a:r>
             <a:endParaRPr lang="en-US" sz="2600" dirty="0"/>
           </a:p>
@@ -21497,27 +21045,24 @@
         </p:nvSpPr>
         <p:spPr>
           <a:xfrm>
-            <a:off x="566928" y="1691640"/>
-            <a:ext cx="8010144" cy="1828800"/>
-          </a:xfrm>
-          <a:prstGeom prst="rect">
-            <a:avLst/>
-          </a:prstGeom>
-          <a:noFill/>
-          <a:ln/>
-        </p:spPr>
-        <p:txBody>
-          <a:bodyPr wrap="square" lIns="0" tIns="0" rIns="0" bIns="0" rtlCol="0" anchor="t"/>
-          <a:lstStyle/>
-          <a:p>
-            <a:pPr indent="0" marL="0">
-              <a:lnSpc>
-                <a:spcPct val="92000"/>
-              </a:lnSpc>
-              <a:buNone/>
-            </a:pPr>
-            <a:r>
-              <a:rPr lang="en-US" sz="1350" b="1" dirty="0">
+            <a:off x="658368" y="1627632"/>
+            <a:ext cx="1920240" cy="274320"/>
+          </a:xfrm>
+          <a:prstGeom prst="rect">
+            <a:avLst/>
+          </a:prstGeom>
+          <a:noFill/>
+          <a:ln/>
+        </p:spPr>
+        <p:txBody>
+          <a:bodyPr wrap="square" lIns="0" tIns="0" rIns="0" bIns="0" rtlCol="0" anchor="ctr"/>
+          <a:lstStyle/>
+          <a:p>
+            <a:pPr indent="0" marL="0">
+              <a:buNone/>
+            </a:pPr>
+            <a:r>
+              <a:rPr lang="en-US" sz="1050" b="1" spc="80" kern="0" dirty="0">
                 <a:solidFill>
                   <a:srgbClr val="3843AF"/>
                 </a:solidFill>
@@ -21525,19 +21070,198 @@
                 <a:ea typeface="Arial" pitchFamily="34" charset="-122"/>
                 <a:cs typeface="Arial" pitchFamily="34" charset="-120"/>
               </a:rPr>
-              <a:t>▸   </a:t>
-            </a:r>
-            <a:pPr indent="0" marL="0">
-              <a:lnSpc>
-                <a:spcPct val="92000"/>
-              </a:lnSpc>
-              <a:spcAft>
-                <a:spcPts val="900"/>
-              </a:spcAft>
-              <a:buNone/>
-            </a:pPr>
-            <a:r>
-              <a:rPr lang="en-US" sz="1350" b="1" dirty="0">
+              <a:t>Fall</a:t>
+            </a:r>
+            <a:endParaRPr lang="en-US" sz="1050" dirty="0"/>
+          </a:p>
+        </p:txBody>
+      </p:sp>
+      <p:sp>
+        <p:nvSpPr>
+          <p:cNvPr id="6" name="Text 4"/>
+          <p:cNvSpPr/>
+          <p:nvPr/>
+        </p:nvSpPr>
+        <p:spPr>
+          <a:xfrm>
+            <a:off x="2761488" y="1627632"/>
+            <a:ext cx="1645920" cy="274320"/>
+          </a:xfrm>
+          <a:prstGeom prst="rect">
+            <a:avLst/>
+          </a:prstGeom>
+          <a:noFill/>
+          <a:ln/>
+        </p:spPr>
+        <p:txBody>
+          <a:bodyPr wrap="square" lIns="0" tIns="0" rIns="0" bIns="0" rtlCol="0" anchor="ctr"/>
+          <a:lstStyle/>
+          <a:p>
+            <a:pPr indent="0" marL="0">
+              <a:buNone/>
+            </a:pPr>
+            <a:r>
+              <a:rPr lang="en-US" sz="1050" b="1" spc="80" kern="0" dirty="0">
+                <a:solidFill>
+                  <a:srgbClr val="3843AF"/>
+                </a:solidFill>
+                <a:latin typeface="Arial" pitchFamily="34" charset="0"/>
+                <a:ea typeface="Arial" pitchFamily="34" charset="-122"/>
+                <a:cs typeface="Arial" pitchFamily="34" charset="-120"/>
+              </a:rPr>
+              <a:t>Schicht</a:t>
+            </a:r>
+            <a:endParaRPr lang="en-US" sz="1050" dirty="0"/>
+          </a:p>
+        </p:txBody>
+      </p:sp>
+      <p:sp>
+        <p:nvSpPr>
+          <p:cNvPr id="7" name="Text 5"/>
+          <p:cNvSpPr/>
+          <p:nvPr/>
+        </p:nvSpPr>
+        <p:spPr>
+          <a:xfrm>
+            <a:off x="4590288" y="1627632"/>
+            <a:ext cx="3895344" cy="274320"/>
+          </a:xfrm>
+          <a:prstGeom prst="rect">
+            <a:avLst/>
+          </a:prstGeom>
+          <a:noFill/>
+          <a:ln/>
+        </p:spPr>
+        <p:txBody>
+          <a:bodyPr wrap="square" lIns="0" tIns="0" rIns="0" bIns="0" rtlCol="0" anchor="ctr"/>
+          <a:lstStyle/>
+          <a:p>
+            <a:pPr indent="0" marL="0">
+              <a:buNone/>
+            </a:pPr>
+            <a:r>
+              <a:rPr lang="en-US" sz="1050" b="1" spc="80" kern="0" dirty="0">
+                <a:solidFill>
+                  <a:srgbClr val="3843AF"/>
+                </a:solidFill>
+                <a:latin typeface="Arial" pitchFamily="34" charset="0"/>
+                <a:ea typeface="Arial" pitchFamily="34" charset="-122"/>
+                <a:cs typeface="Arial" pitchFamily="34" charset="-120"/>
+              </a:rPr>
+              <a:t>Nachweis</a:t>
+            </a:r>
+            <a:endParaRPr lang="en-US" sz="1050" dirty="0"/>
+          </a:p>
+        </p:txBody>
+      </p:sp>
+      <p:sp>
+        <p:nvSpPr>
+          <p:cNvPr id="8" name="Shape 6"/>
+          <p:cNvSpPr/>
+          <p:nvPr/>
+        </p:nvSpPr>
+        <p:spPr>
+          <a:xfrm>
+            <a:off x="566928" y="1920240"/>
+            <a:ext cx="8010144" cy="0"/>
+          </a:xfrm>
+          <a:prstGeom prst="line">
+            <a:avLst/>
+          </a:prstGeom>
+          <a:noFill/>
+          <a:ln w="12700">
+            <a:solidFill>
+              <a:srgbClr val="DFE3F0"/>
+            </a:solidFill>
+            <a:prstDash val="solid"/>
+          </a:ln>
+        </p:spPr>
+      </p:sp>
+      <p:sp>
+        <p:nvSpPr>
+          <p:cNvPr id="9" name="Shape 7"/>
+          <p:cNvSpPr/>
+          <p:nvPr/>
+        </p:nvSpPr>
+        <p:spPr>
+          <a:xfrm>
+            <a:off x="475488" y="1993392"/>
+            <a:ext cx="8193024" cy="384048"/>
+          </a:xfrm>
+          <a:prstGeom prst="rect">
+            <a:avLst/>
+          </a:prstGeom>
+          <a:solidFill>
+            <a:srgbClr val="F5F6FC"/>
+          </a:solidFill>
+          <a:ln/>
+        </p:spPr>
+      </p:sp>
+      <p:sp>
+        <p:nvSpPr>
+          <p:cNvPr id="10" name="Text 8"/>
+          <p:cNvSpPr/>
+          <p:nvPr/>
+        </p:nvSpPr>
+        <p:spPr>
+          <a:xfrm>
+            <a:off x="658368" y="1993392"/>
+            <a:ext cx="1920240" cy="384048"/>
+          </a:xfrm>
+          <a:prstGeom prst="rect">
+            <a:avLst/>
+          </a:prstGeom>
+          <a:noFill/>
+          <a:ln/>
+        </p:spPr>
+        <p:txBody>
+          <a:bodyPr wrap="square" lIns="0" tIns="0" rIns="0" bIns="0" rtlCol="0" anchor="ctr"/>
+          <a:lstStyle/>
+          <a:p>
+            <a:pPr indent="0" marL="0">
+              <a:buNone/>
+            </a:pPr>
+            <a:r>
+              <a:rPr lang="en-US" sz="1150" b="1" dirty="0">
+                <a:solidFill>
+                  <a:srgbClr val="272E52"/>
+                </a:solidFill>
+                <a:latin typeface="Arial" pitchFamily="34" charset="0"/>
+                <a:ea typeface="Arial" pitchFamily="34" charset="-122"/>
+                <a:cs typeface="Arial" pitchFamily="34" charset="-120"/>
+              </a:rPr>
+              <a:t>Kein Kabel</a:t>
+            </a:r>
+            <a:endParaRPr lang="en-US" sz="1150" dirty="0"/>
+          </a:p>
+        </p:txBody>
+      </p:sp>
+      <p:sp>
+        <p:nvSpPr>
+          <p:cNvPr id="11" name="Text 9"/>
+          <p:cNvSpPr/>
+          <p:nvPr/>
+        </p:nvSpPr>
+        <p:spPr>
+          <a:xfrm>
+            <a:off x="2761488" y="1993392"/>
+            <a:ext cx="1645920" cy="384048"/>
+          </a:xfrm>
+          <a:prstGeom prst="rect">
+            <a:avLst/>
+          </a:prstGeom>
+          <a:noFill/>
+          <a:ln/>
+        </p:spPr>
+        <p:txBody>
+          <a:bodyPr wrap="square" lIns="0" tIns="0" rIns="0" bIns="0" rtlCol="0" anchor="ctr"/>
+          <a:lstStyle/>
+          <a:p>
+            <a:pPr indent="0" marL="0">
+              <a:buNone/>
+            </a:pPr>
+            <a:r>
+              <a:rPr lang="en-US" sz="1150" dirty="0">
                 <a:solidFill>
                   <a:srgbClr val="434A63"/>
                 </a:solidFill>
@@ -21545,39 +21269,38 @@
                 <a:ea typeface="Arial" pitchFamily="34" charset="-122"/>
                 <a:cs typeface="Arial" pitchFamily="34" charset="-120"/>
               </a:rPr>
-              <a:t>Ein Netz braucht drei Dinge: Verbindung, Adressen, Regeln.</a:t>
-            </a:r>
-            <a:endParaRPr lang="en-US" sz="1350" dirty="0"/>
-          </a:p>
-          <a:p>
-            <a:pPr indent="0" marL="0">
-              <a:lnSpc>
-                <a:spcPct val="92000"/>
-              </a:lnSpc>
-              <a:buNone/>
-            </a:pPr>
-            <a:r>
-              <a:rPr lang="en-US" sz="1350" b="1" dirty="0">
-                <a:solidFill>
-                  <a:srgbClr val="3843AF"/>
-                </a:solidFill>
-                <a:latin typeface="Arial" pitchFamily="34" charset="0"/>
-                <a:ea typeface="Arial" pitchFamily="34" charset="-122"/>
-                <a:cs typeface="Arial" pitchFamily="34" charset="-120"/>
-              </a:rPr>
-              <a:t>▸   </a:t>
-            </a:r>
-            <a:pPr indent="0" marL="0">
-              <a:lnSpc>
-                <a:spcPct val="92000"/>
-              </a:lnSpc>
-              <a:spcAft>
-                <a:spcPts val="900"/>
-              </a:spcAft>
-              <a:buNone/>
-            </a:pPr>
-            <a:r>
-              <a:rPr lang="en-US" sz="1350" b="1" dirty="0">
+              <a:t>1 – physisch</a:t>
+            </a:r>
+            <a:endParaRPr lang="en-US" sz="1150" dirty="0"/>
+          </a:p>
+        </p:txBody>
+      </p:sp>
+      <p:sp>
+        <p:nvSpPr>
+          <p:cNvPr id="12" name="Text 10"/>
+          <p:cNvSpPr/>
+          <p:nvPr/>
+        </p:nvSpPr>
+        <p:spPr>
+          <a:xfrm>
+            <a:off x="4590288" y="1993392"/>
+            <a:ext cx="3895344" cy="384048"/>
+          </a:xfrm>
+          <a:prstGeom prst="rect">
+            <a:avLst/>
+          </a:prstGeom>
+          <a:noFill/>
+          <a:ln/>
+        </p:spPr>
+        <p:txBody>
+          <a:bodyPr wrap="square" lIns="0" tIns="0" rIns="0" bIns="0" rtlCol="0" anchor="ctr"/>
+          <a:lstStyle/>
+          <a:p>
+            <a:pPr indent="0" marL="0">
+              <a:buNone/>
+            </a:pPr>
+            <a:r>
+              <a:rPr lang="en-US" sz="1150" dirty="0">
                 <a:solidFill>
                   <a:srgbClr val="434A63"/>
                 </a:solidFill>
@@ -21585,39 +21308,77 @@
                 <a:ea typeface="Arial" pitchFamily="34" charset="-122"/>
                 <a:cs typeface="Arial" pitchFamily="34" charset="-120"/>
               </a:rPr>
-              <a:t>Dieselben Daten heißen je nach Schicht Frame, Paket oder Segment.</a:t>
-            </a:r>
-            <a:endParaRPr lang="en-US" sz="1350" dirty="0"/>
-          </a:p>
-          <a:p>
-            <a:pPr indent="0" marL="0">
-              <a:lnSpc>
-                <a:spcPct val="92000"/>
-              </a:lnSpc>
-              <a:buNone/>
-            </a:pPr>
-            <a:r>
-              <a:rPr lang="en-US" sz="1350" b="1" dirty="0">
-                <a:solidFill>
-                  <a:srgbClr val="3843AF"/>
-                </a:solidFill>
-                <a:latin typeface="Arial" pitchFamily="34" charset="0"/>
-                <a:ea typeface="Arial" pitchFamily="34" charset="-122"/>
-                <a:cs typeface="Arial" pitchFamily="34" charset="-120"/>
-              </a:rPr>
-              <a:t>▸   </a:t>
-            </a:r>
-            <a:pPr indent="0" marL="0">
-              <a:lnSpc>
-                <a:spcPct val="92000"/>
-              </a:lnSpc>
-              <a:spcAft>
-                <a:spcPts val="900"/>
-              </a:spcAft>
-              <a:buNone/>
-            </a:pPr>
-            <a:r>
-              <a:rPr lang="en-US" sz="1350" b="1" dirty="0">
+              <a:t>ipconfig: Medium getrennt</a:t>
+            </a:r>
+            <a:endParaRPr lang="en-US" sz="1150" dirty="0"/>
+          </a:p>
+        </p:txBody>
+      </p:sp>
+      <p:sp>
+        <p:nvSpPr>
+          <p:cNvPr id="13" name="Text 11"/>
+          <p:cNvSpPr/>
+          <p:nvPr/>
+        </p:nvSpPr>
+        <p:spPr>
+          <a:xfrm>
+            <a:off x="658368" y="2377440"/>
+            <a:ext cx="1920240" cy="384048"/>
+          </a:xfrm>
+          <a:prstGeom prst="rect">
+            <a:avLst/>
+          </a:prstGeom>
+          <a:noFill/>
+          <a:ln/>
+        </p:spPr>
+        <p:txBody>
+          <a:bodyPr wrap="square" lIns="0" tIns="0" rIns="0" bIns="0" rtlCol="0" anchor="ctr"/>
+          <a:lstStyle/>
+          <a:p>
+            <a:pPr indent="0" marL="0">
+              <a:buNone/>
+            </a:pPr>
+            <a:r>
+              <a:rPr lang="en-US" sz="1150" b="1" dirty="0">
+                <a:solidFill>
+                  <a:srgbClr val="272E52"/>
+                </a:solidFill>
+                <a:latin typeface="Arial" pitchFamily="34" charset="0"/>
+                <a:ea typeface="Arial" pitchFamily="34" charset="-122"/>
+                <a:cs typeface="Arial" pitchFamily="34" charset="-120"/>
+              </a:rPr>
+              <a:t>169.254.x.x</a:t>
+            </a:r>
+            <a:endParaRPr lang="en-US" sz="1150" dirty="0"/>
+          </a:p>
+        </p:txBody>
+      </p:sp>
+      <p:sp>
+        <p:nvSpPr>
+          <p:cNvPr id="14" name="Text 12"/>
+          <p:cNvSpPr/>
+          <p:nvPr/>
+        </p:nvSpPr>
+        <p:spPr>
+          <a:xfrm>
+            <a:off x="2761488" y="2377440"/>
+            <a:ext cx="1645920" cy="384048"/>
+          </a:xfrm>
+          <a:prstGeom prst="rect">
+            <a:avLst/>
+          </a:prstGeom>
+          <a:noFill/>
+          <a:ln/>
+        </p:spPr>
+        <p:txBody>
+          <a:bodyPr wrap="square" lIns="0" tIns="0" rIns="0" bIns="0" rtlCol="0" anchor="ctr"/>
+          <a:lstStyle/>
+          <a:p>
+            <a:pPr indent="0" marL="0">
+              <a:buNone/>
+            </a:pPr>
+            <a:r>
+              <a:rPr lang="en-US" sz="1150" dirty="0">
                 <a:solidFill>
                   <a:srgbClr val="434A63"/>
                 </a:solidFill>
@@ -21625,39 +21386,38 @@
                 <a:ea typeface="Arial" pitchFamily="34" charset="-122"/>
                 <a:cs typeface="Arial" pitchFamily="34" charset="-120"/>
               </a:rPr>
-              <a:t>OSI hat sieben Schichten, TCP/IP vier – ihr müsst sie zuordnen können.</a:t>
-            </a:r>
-            <a:endParaRPr lang="en-US" sz="1350" dirty="0"/>
-          </a:p>
-          <a:p>
-            <a:pPr indent="0" marL="0">
-              <a:lnSpc>
-                <a:spcPct val="92000"/>
-              </a:lnSpc>
-              <a:buNone/>
-            </a:pPr>
-            <a:r>
-              <a:rPr lang="en-US" sz="1350" b="1" dirty="0">
-                <a:solidFill>
-                  <a:srgbClr val="3843AF"/>
-                </a:solidFill>
-                <a:latin typeface="Arial" pitchFamily="34" charset="0"/>
-                <a:ea typeface="Arial" pitchFamily="34" charset="-122"/>
-                <a:cs typeface="Arial" pitchFamily="34" charset="-120"/>
-              </a:rPr>
-              <a:t>▸   </a:t>
-            </a:r>
-            <a:pPr indent="0" marL="0">
-              <a:lnSpc>
-                <a:spcPct val="92000"/>
-              </a:lnSpc>
-              <a:spcAft>
-                <a:spcPts val="900"/>
-              </a:spcAft>
-              <a:buNone/>
-            </a:pPr>
-            <a:r>
-              <a:rPr lang="en-US" sz="1350" b="1" dirty="0">
+              <a:t>3 – Adresse</a:t>
+            </a:r>
+            <a:endParaRPr lang="en-US" sz="1150" dirty="0"/>
+          </a:p>
+        </p:txBody>
+      </p:sp>
+      <p:sp>
+        <p:nvSpPr>
+          <p:cNvPr id="15" name="Text 13"/>
+          <p:cNvSpPr/>
+          <p:nvPr/>
+        </p:nvSpPr>
+        <p:spPr>
+          <a:xfrm>
+            <a:off x="4590288" y="2377440"/>
+            <a:ext cx="3895344" cy="384048"/>
+          </a:xfrm>
+          <a:prstGeom prst="rect">
+            <a:avLst/>
+          </a:prstGeom>
+          <a:noFill/>
+          <a:ln/>
+        </p:spPr>
+        <p:txBody>
+          <a:bodyPr wrap="square" lIns="0" tIns="0" rIns="0" bIns="0" rtlCol="0" anchor="ctr"/>
+          <a:lstStyle/>
+          <a:p>
+            <a:pPr indent="0" marL="0">
+              <a:buNone/>
+            </a:pPr>
+            <a:r>
+              <a:rPr lang="en-US" sz="1150" dirty="0">
                 <a:solidFill>
                   <a:srgbClr val="434A63"/>
                 </a:solidFill>
@@ -21665,39 +21425,97 @@
                 <a:ea typeface="Arial" pitchFamily="34" charset="-122"/>
                 <a:cs typeface="Arial" pitchFamily="34" charset="-120"/>
               </a:rPr>
-              <a:t>Bandbreite ist nicht Geschwindigkeit. Latenz ist die andere Hälfte.</a:t>
-            </a:r>
-            <a:endParaRPr lang="en-US" sz="1350" dirty="0"/>
-          </a:p>
-          <a:p>
-            <a:pPr indent="0" marL="0">
-              <a:lnSpc>
-                <a:spcPct val="92000"/>
-              </a:lnSpc>
-              <a:buNone/>
-            </a:pPr>
-            <a:r>
-              <a:rPr lang="en-US" sz="1350" b="1" dirty="0">
-                <a:solidFill>
-                  <a:srgbClr val="3843AF"/>
-                </a:solidFill>
-                <a:latin typeface="Arial" pitchFamily="34" charset="0"/>
-                <a:ea typeface="Arial" pitchFamily="34" charset="-122"/>
-                <a:cs typeface="Arial" pitchFamily="34" charset="-120"/>
-              </a:rPr>
-              <a:t>▸   </a:t>
-            </a:r>
-            <a:pPr indent="0" marL="0">
-              <a:lnSpc>
-                <a:spcPct val="92000"/>
-              </a:lnSpc>
-              <a:spcAft>
-                <a:spcPts val="900"/>
-              </a:spcAft>
-              <a:buNone/>
-            </a:pPr>
-            <a:r>
-              <a:rPr lang="en-US" sz="1350" b="1" dirty="0">
+              <a:t>kein DHCP erreichbar, Selbstvergabe</a:t>
+            </a:r>
+            <a:endParaRPr lang="en-US" sz="1150" dirty="0"/>
+          </a:p>
+        </p:txBody>
+      </p:sp>
+      <p:sp>
+        <p:nvSpPr>
+          <p:cNvPr id="16" name="Shape 14"/>
+          <p:cNvSpPr/>
+          <p:nvPr/>
+        </p:nvSpPr>
+        <p:spPr>
+          <a:xfrm>
+            <a:off x="475488" y="2761488"/>
+            <a:ext cx="8193024" cy="384048"/>
+          </a:xfrm>
+          <a:prstGeom prst="rect">
+            <a:avLst/>
+          </a:prstGeom>
+          <a:solidFill>
+            <a:srgbClr val="F5F6FC"/>
+          </a:solidFill>
+          <a:ln/>
+        </p:spPr>
+      </p:sp>
+      <p:sp>
+        <p:nvSpPr>
+          <p:cNvPr id="17" name="Text 15"/>
+          <p:cNvSpPr/>
+          <p:nvPr/>
+        </p:nvSpPr>
+        <p:spPr>
+          <a:xfrm>
+            <a:off x="658368" y="2761488"/>
+            <a:ext cx="1920240" cy="384048"/>
+          </a:xfrm>
+          <a:prstGeom prst="rect">
+            <a:avLst/>
+          </a:prstGeom>
+          <a:noFill/>
+          <a:ln/>
+        </p:spPr>
+        <p:txBody>
+          <a:bodyPr wrap="square" lIns="0" tIns="0" rIns="0" bIns="0" rtlCol="0" anchor="ctr"/>
+          <a:lstStyle/>
+          <a:p>
+            <a:pPr indent="0" marL="0">
+              <a:buNone/>
+            </a:pPr>
+            <a:r>
+              <a:rPr lang="en-US" sz="1150" b="1" dirty="0">
+                <a:solidFill>
+                  <a:srgbClr val="272E52"/>
+                </a:solidFill>
+                <a:latin typeface="Arial" pitchFamily="34" charset="0"/>
+                <a:ea typeface="Arial" pitchFamily="34" charset="-122"/>
+                <a:cs typeface="Arial" pitchFamily="34" charset="-120"/>
+              </a:rPr>
+              <a:t>Nur Name geht nicht</a:t>
+            </a:r>
+            <a:endParaRPr lang="en-US" sz="1150" dirty="0"/>
+          </a:p>
+        </p:txBody>
+      </p:sp>
+      <p:sp>
+        <p:nvSpPr>
+          <p:cNvPr id="18" name="Text 16"/>
+          <p:cNvSpPr/>
+          <p:nvPr/>
+        </p:nvSpPr>
+        <p:spPr>
+          <a:xfrm>
+            <a:off x="2761488" y="2761488"/>
+            <a:ext cx="1645920" cy="384048"/>
+          </a:xfrm>
+          <a:prstGeom prst="rect">
+            <a:avLst/>
+          </a:prstGeom>
+          <a:noFill/>
+          <a:ln/>
+        </p:spPr>
+        <p:txBody>
+          <a:bodyPr wrap="square" lIns="0" tIns="0" rIns="0" bIns="0" rtlCol="0" anchor="ctr"/>
+          <a:lstStyle/>
+          <a:p>
+            <a:pPr indent="0" marL="0">
+              <a:buNone/>
+            </a:pPr>
+            <a:r>
+              <a:rPr lang="en-US" sz="1150" dirty="0">
                 <a:solidFill>
                   <a:srgbClr val="434A63"/>
                 </a:solidFill>
@@ -21705,42 +21523,315 @@
                 <a:ea typeface="Arial" pitchFamily="34" charset="-122"/>
                 <a:cs typeface="Arial" pitchFamily="34" charset="-120"/>
               </a:rPr>
-              <a:t>Fehlersuche heißt: von unten nach oben, Schicht für Schicht.</a:t>
-            </a:r>
-            <a:endParaRPr lang="en-US" sz="1350" dirty="0"/>
-          </a:p>
-        </p:txBody>
-      </p:sp>
-      <p:sp>
-        <p:nvSpPr>
-          <p:cNvPr id="6" name="Shape 4"/>
-          <p:cNvSpPr/>
-          <p:nvPr/>
-        </p:nvSpPr>
-        <p:spPr>
-          <a:xfrm>
-            <a:off x="566928" y="3566160"/>
-            <a:ext cx="8010144" cy="960120"/>
+              <a:t>7 – DNS</a:t>
+            </a:r>
+            <a:endParaRPr lang="en-US" sz="1150" dirty="0"/>
+          </a:p>
+        </p:txBody>
+      </p:sp>
+      <p:sp>
+        <p:nvSpPr>
+          <p:cNvPr id="19" name="Text 17"/>
+          <p:cNvSpPr/>
+          <p:nvPr/>
+        </p:nvSpPr>
+        <p:spPr>
+          <a:xfrm>
+            <a:off x="4590288" y="2761488"/>
+            <a:ext cx="3895344" cy="384048"/>
+          </a:xfrm>
+          <a:prstGeom prst="rect">
+            <a:avLst/>
+          </a:prstGeom>
+          <a:noFill/>
+          <a:ln/>
+        </p:spPr>
+        <p:txBody>
+          <a:bodyPr wrap="square" lIns="0" tIns="0" rIns="0" bIns="0" rtlCol="0" anchor="ctr"/>
+          <a:lstStyle/>
+          <a:p>
+            <a:pPr indent="0" marL="0">
+              <a:buNone/>
+            </a:pPr>
+            <a:r>
+              <a:rPr lang="en-US" sz="1150" dirty="0">
+                <a:solidFill>
+                  <a:srgbClr val="434A63"/>
+                </a:solidFill>
+                <a:latin typeface="Arial" pitchFamily="34" charset="0"/>
+                <a:ea typeface="Arial" pitchFamily="34" charset="-122"/>
+                <a:cs typeface="Arial" pitchFamily="34" charset="-120"/>
+              </a:rPr>
+              <a:t>nslookup schlägt fehl, ping auf IP klappt</a:t>
+            </a:r>
+            <a:endParaRPr lang="en-US" sz="1150" dirty="0"/>
+          </a:p>
+        </p:txBody>
+      </p:sp>
+      <p:sp>
+        <p:nvSpPr>
+          <p:cNvPr id="20" name="Text 18"/>
+          <p:cNvSpPr/>
+          <p:nvPr/>
+        </p:nvSpPr>
+        <p:spPr>
+          <a:xfrm>
+            <a:off x="658368" y="3145536"/>
+            <a:ext cx="1920240" cy="384048"/>
+          </a:xfrm>
+          <a:prstGeom prst="rect">
+            <a:avLst/>
+          </a:prstGeom>
+          <a:noFill/>
+          <a:ln/>
+        </p:spPr>
+        <p:txBody>
+          <a:bodyPr wrap="square" lIns="0" tIns="0" rIns="0" bIns="0" rtlCol="0" anchor="ctr"/>
+          <a:lstStyle/>
+          <a:p>
+            <a:pPr indent="0" marL="0">
+              <a:buNone/>
+            </a:pPr>
+            <a:r>
+              <a:rPr lang="en-US" sz="1150" b="1" dirty="0">
+                <a:solidFill>
+                  <a:srgbClr val="272E52"/>
+                </a:solidFill>
+                <a:latin typeface="Arial" pitchFamily="34" charset="0"/>
+                <a:ea typeface="Arial" pitchFamily="34" charset="-122"/>
+                <a:cs typeface="Arial" pitchFamily="34" charset="-120"/>
+              </a:rPr>
+              <a:t>ping ja, Web nein</a:t>
+            </a:r>
+            <a:endParaRPr lang="en-US" sz="1150" dirty="0"/>
+          </a:p>
+        </p:txBody>
+      </p:sp>
+      <p:sp>
+        <p:nvSpPr>
+          <p:cNvPr id="21" name="Text 19"/>
+          <p:cNvSpPr/>
+          <p:nvPr/>
+        </p:nvSpPr>
+        <p:spPr>
+          <a:xfrm>
+            <a:off x="2761488" y="3145536"/>
+            <a:ext cx="1645920" cy="384048"/>
+          </a:xfrm>
+          <a:prstGeom prst="rect">
+            <a:avLst/>
+          </a:prstGeom>
+          <a:noFill/>
+          <a:ln/>
+        </p:spPr>
+        <p:txBody>
+          <a:bodyPr wrap="square" lIns="0" tIns="0" rIns="0" bIns="0" rtlCol="0" anchor="ctr"/>
+          <a:lstStyle/>
+          <a:p>
+            <a:pPr indent="0" marL="0">
+              <a:buNone/>
+            </a:pPr>
+            <a:r>
+              <a:rPr lang="en-US" sz="1150" dirty="0">
+                <a:solidFill>
+                  <a:srgbClr val="434A63"/>
+                </a:solidFill>
+                <a:latin typeface="Arial" pitchFamily="34" charset="0"/>
+                <a:ea typeface="Arial" pitchFamily="34" charset="-122"/>
+                <a:cs typeface="Arial" pitchFamily="34" charset="-120"/>
+              </a:rPr>
+              <a:t>4 oder 7</a:t>
+            </a:r>
+            <a:endParaRPr lang="en-US" sz="1150" dirty="0"/>
+          </a:p>
+        </p:txBody>
+      </p:sp>
+      <p:sp>
+        <p:nvSpPr>
+          <p:cNvPr id="22" name="Text 20"/>
+          <p:cNvSpPr/>
+          <p:nvPr/>
+        </p:nvSpPr>
+        <p:spPr>
+          <a:xfrm>
+            <a:off x="4590288" y="3145536"/>
+            <a:ext cx="3895344" cy="384048"/>
+          </a:xfrm>
+          <a:prstGeom prst="rect">
+            <a:avLst/>
+          </a:prstGeom>
+          <a:noFill/>
+          <a:ln/>
+        </p:spPr>
+        <p:txBody>
+          <a:bodyPr wrap="square" lIns="0" tIns="0" rIns="0" bIns="0" rtlCol="0" anchor="ctr"/>
+          <a:lstStyle/>
+          <a:p>
+            <a:pPr indent="0" marL="0">
+              <a:buNone/>
+            </a:pPr>
+            <a:r>
+              <a:rPr lang="en-US" sz="1150" dirty="0">
+                <a:solidFill>
+                  <a:srgbClr val="434A63"/>
+                </a:solidFill>
+                <a:latin typeface="Arial" pitchFamily="34" charset="0"/>
+                <a:ea typeface="Arial" pitchFamily="34" charset="-122"/>
+                <a:cs typeface="Arial" pitchFamily="34" charset="-120"/>
+              </a:rPr>
+              <a:t>Test-NetConnection auf Port 443</a:t>
+            </a:r>
+            <a:endParaRPr lang="en-US" sz="1150" dirty="0"/>
+          </a:p>
+        </p:txBody>
+      </p:sp>
+      <p:sp>
+        <p:nvSpPr>
+          <p:cNvPr id="23" name="Shape 21"/>
+          <p:cNvSpPr/>
+          <p:nvPr/>
+        </p:nvSpPr>
+        <p:spPr>
+          <a:xfrm>
+            <a:off x="475488" y="3529584"/>
+            <a:ext cx="8193024" cy="384048"/>
           </a:xfrm>
           <a:prstGeom prst="rect">
             <a:avLst/>
           </a:prstGeom>
           <a:solidFill>
-            <a:srgbClr val="EEF0FB"/>
+            <a:srgbClr val="F5F6FC"/>
           </a:solidFill>
           <a:ln/>
         </p:spPr>
       </p:sp>
       <p:sp>
         <p:nvSpPr>
-          <p:cNvPr id="7" name="Shape 5"/>
-          <p:cNvSpPr/>
-          <p:nvPr/>
-        </p:nvSpPr>
-        <p:spPr>
-          <a:xfrm>
-            <a:off x="566928" y="3566160"/>
-            <a:ext cx="41148" cy="960120"/>
+          <p:cNvPr id="24" name="Text 22"/>
+          <p:cNvSpPr/>
+          <p:nvPr/>
+        </p:nvSpPr>
+        <p:spPr>
+          <a:xfrm>
+            <a:off x="658368" y="3529584"/>
+            <a:ext cx="1920240" cy="384048"/>
+          </a:xfrm>
+          <a:prstGeom prst="rect">
+            <a:avLst/>
+          </a:prstGeom>
+          <a:noFill/>
+          <a:ln/>
+        </p:spPr>
+        <p:txBody>
+          <a:bodyPr wrap="square" lIns="0" tIns="0" rIns="0" bIns="0" rtlCol="0" anchor="ctr"/>
+          <a:lstStyle/>
+          <a:p>
+            <a:pPr indent="0" marL="0">
+              <a:buNone/>
+            </a:pPr>
+            <a:r>
+              <a:rPr lang="en-US" sz="1150" b="1" dirty="0">
+                <a:solidFill>
+                  <a:srgbClr val="272E52"/>
+                </a:solidFill>
+                <a:latin typeface="Arial" pitchFamily="34" charset="0"/>
+                <a:ea typeface="Arial" pitchFamily="34" charset="-122"/>
+                <a:cs typeface="Arial" pitchFamily="34" charset="-120"/>
+              </a:rPr>
+              <a:t>Alles langsam</a:t>
+            </a:r>
+            <a:endParaRPr lang="en-US" sz="1150" dirty="0"/>
+          </a:p>
+        </p:txBody>
+      </p:sp>
+      <p:sp>
+        <p:nvSpPr>
+          <p:cNvPr id="25" name="Text 23"/>
+          <p:cNvSpPr/>
+          <p:nvPr/>
+        </p:nvSpPr>
+        <p:spPr>
+          <a:xfrm>
+            <a:off x="2761488" y="3529584"/>
+            <a:ext cx="1645920" cy="384048"/>
+          </a:xfrm>
+          <a:prstGeom prst="rect">
+            <a:avLst/>
+          </a:prstGeom>
+          <a:noFill/>
+          <a:ln/>
+        </p:spPr>
+        <p:txBody>
+          <a:bodyPr wrap="square" lIns="0" tIns="0" rIns="0" bIns="0" rtlCol="0" anchor="ctr"/>
+          <a:lstStyle/>
+          <a:p>
+            <a:pPr indent="0" marL="0">
+              <a:buNone/>
+            </a:pPr>
+            <a:r>
+              <a:rPr lang="en-US" sz="1150" dirty="0">
+                <a:solidFill>
+                  <a:srgbClr val="434A63"/>
+                </a:solidFill>
+                <a:latin typeface="Arial" pitchFamily="34" charset="0"/>
+                <a:ea typeface="Arial" pitchFamily="34" charset="-122"/>
+                <a:cs typeface="Arial" pitchFamily="34" charset="-120"/>
+              </a:rPr>
+              <a:t>kein Ausfall</a:t>
+            </a:r>
+            <a:endParaRPr lang="en-US" sz="1150" dirty="0"/>
+          </a:p>
+        </p:txBody>
+      </p:sp>
+      <p:sp>
+        <p:nvSpPr>
+          <p:cNvPr id="26" name="Text 24"/>
+          <p:cNvSpPr/>
+          <p:nvPr/>
+        </p:nvSpPr>
+        <p:spPr>
+          <a:xfrm>
+            <a:off x="4590288" y="3529584"/>
+            <a:ext cx="3895344" cy="384048"/>
+          </a:xfrm>
+          <a:prstGeom prst="rect">
+            <a:avLst/>
+          </a:prstGeom>
+          <a:noFill/>
+          <a:ln/>
+        </p:spPr>
+        <p:txBody>
+          <a:bodyPr wrap="square" lIns="0" tIns="0" rIns="0" bIns="0" rtlCol="0" anchor="ctr"/>
+          <a:lstStyle/>
+          <a:p>
+            <a:pPr indent="0" marL="0">
+              <a:buNone/>
+            </a:pPr>
+            <a:r>
+              <a:rPr lang="en-US" sz="1150" dirty="0">
+                <a:solidFill>
+                  <a:srgbClr val="434A63"/>
+                </a:solidFill>
+                <a:latin typeface="Arial" pitchFamily="34" charset="0"/>
+                <a:ea typeface="Arial" pitchFamily="34" charset="-122"/>
+                <a:cs typeface="Arial" pitchFamily="34" charset="-120"/>
+              </a:rPr>
+              <a:t>Latenz und Verlust in ping ansehen</a:t>
+            </a:r>
+            <a:endParaRPr lang="en-US" sz="1150" dirty="0"/>
+          </a:p>
+        </p:txBody>
+      </p:sp>
+      <p:sp>
+        <p:nvSpPr>
+          <p:cNvPr id="27" name="Shape 25"/>
+          <p:cNvSpPr/>
+          <p:nvPr/>
+        </p:nvSpPr>
+        <p:spPr>
+          <a:xfrm>
+            <a:off x="566928" y="4160520"/>
+            <a:ext cx="32004" cy="256032"/>
           </a:xfrm>
           <a:prstGeom prst="rect">
             <a:avLst/>
@@ -21753,72 +21844,30 @@
       </p:sp>
       <p:sp>
         <p:nvSpPr>
-          <p:cNvPr id="8" name="Text 6"/>
-          <p:cNvSpPr/>
-          <p:nvPr/>
-        </p:nvSpPr>
-        <p:spPr>
-          <a:xfrm>
-            <a:off x="804672" y="3712464"/>
-            <a:ext cx="7607808" cy="237744"/>
-          </a:xfrm>
-          <a:prstGeom prst="rect">
-            <a:avLst/>
-          </a:prstGeom>
-          <a:noFill/>
-          <a:ln/>
-        </p:spPr>
-        <p:txBody>
-          <a:bodyPr wrap="square" lIns="0" tIns="0" rIns="0" bIns="0" rtlCol="0" anchor="t"/>
-          <a:lstStyle/>
-          <a:p>
-            <a:pPr indent="0" marL="0">
-              <a:buNone/>
-            </a:pPr>
-            <a:r>
-              <a:rPr lang="en-US" sz="1300" b="1" dirty="0">
-                <a:solidFill>
-                  <a:srgbClr val="272E52"/>
-                </a:solidFill>
-                <a:latin typeface="Arial" pitchFamily="34" charset="0"/>
-                <a:ea typeface="Arial" pitchFamily="34" charset="-122"/>
-                <a:cs typeface="Arial" pitchFamily="34" charset="-120"/>
-              </a:rPr>
-              <a:t>Prüfungsbegriffe von heute</a:t>
-            </a:r>
-            <a:endParaRPr lang="en-US" sz="1300" dirty="0"/>
-          </a:p>
-        </p:txBody>
-      </p:sp>
-      <p:sp>
-        <p:nvSpPr>
-          <p:cNvPr id="9" name="Text 7"/>
-          <p:cNvSpPr/>
-          <p:nvPr/>
-        </p:nvSpPr>
-        <p:spPr>
-          <a:xfrm>
-            <a:off x="804672" y="3995928"/>
-            <a:ext cx="7607808" cy="411480"/>
-          </a:xfrm>
-          <a:prstGeom prst="rect">
-            <a:avLst/>
-          </a:prstGeom>
-          <a:noFill/>
-          <a:ln/>
-        </p:spPr>
-        <p:txBody>
-          <a:bodyPr wrap="square" lIns="0" tIns="0" rIns="0" bIns="0" rtlCol="0" anchor="t"/>
-          <a:lstStyle/>
-          <a:p>
-            <a:pPr indent="0" marL="0">
-              <a:lnSpc>
-                <a:spcPct val="92000"/>
-              </a:lnSpc>
-              <a:buNone/>
-            </a:pPr>
-            <a:r>
-              <a:rPr lang="en-US" sz="1100" dirty="0">
+          <p:cNvPr id="28" name="Text 26"/>
+          <p:cNvSpPr/>
+          <p:nvPr/>
+        </p:nvSpPr>
+        <p:spPr>
+          <a:xfrm>
+            <a:off x="749808" y="4114800"/>
+            <a:ext cx="7827264" cy="402336"/>
+          </a:xfrm>
+          <a:prstGeom prst="rect">
+            <a:avLst/>
+          </a:prstGeom>
+          <a:noFill/>
+          <a:ln/>
+        </p:spPr>
+        <p:txBody>
+          <a:bodyPr wrap="square" lIns="0" tIns="0" rIns="0" bIns="0" rtlCol="0" anchor="ctr"/>
+          <a:lstStyle/>
+          <a:p>
+            <a:pPr indent="0" marL="0">
+              <a:buNone/>
+            </a:pPr>
+            <a:r>
+              <a:rPr lang="en-US" sz="1200" b="1" dirty="0">
                 <a:solidFill>
                   <a:srgbClr val="434A63"/>
                 </a:solidFill>
@@ -21826,15 +21875,15 @@
                 <a:ea typeface="Arial" pitchFamily="34" charset="-122"/>
                 <a:cs typeface="Arial" pitchFamily="34" charset="-120"/>
               </a:rPr>
-              <a:t>Schichtenmodell · OSI · TCP/IP · Topologie · Client-Server · Latenz · Bandbreite · Frame, Paket, Segment.</a:t>
-            </a:r>
-            <a:endParaRPr lang="en-US" sz="1100" dirty="0"/>
-          </a:p>
-        </p:txBody>
-      </p:sp>
-      <p:sp>
-        <p:nvSpPr>
-          <p:cNvPr id="10" name="Shape 8"/>
+              <a:t>Von unten nach oben prüfen. Die erste Schicht, die nicht antwortet, ist die Ursache.</a:t>
+            </a:r>
+            <a:endParaRPr lang="en-US" sz="1200" dirty="0"/>
+          </a:p>
+        </p:txBody>
+      </p:sp>
+      <p:sp>
+        <p:nvSpPr>
+          <p:cNvPr id="29" name="Shape 27"/>
           <p:cNvSpPr/>
           <p:nvPr/>
         </p:nvSpPr>
@@ -21857,7 +21906,7 @@
       </p:sp>
       <p:sp>
         <p:nvSpPr>
-          <p:cNvPr id="11" name="Text 9"/>
+          <p:cNvPr id="30" name="Text 28"/>
           <p:cNvSpPr/>
           <p:nvPr/>
         </p:nvSpPr>
@@ -21888,7 +21937,7 @@
                 <a:ea typeface="Arial" pitchFamily="34" charset="-122"/>
                 <a:cs typeface="Arial" pitchFamily="34" charset="-120"/>
               </a:rPr>
-              <a:t>Abschluss</a:t>
+              <a:t>Auswertung</a:t>
             </a:r>
             <a:endParaRPr lang="en-US" sz="1050" dirty="0"/>
           </a:p>
@@ -21896,7 +21945,7 @@
       </p:sp>
       <p:sp>
         <p:nvSpPr>
-          <p:cNvPr id="12" name="Text 10"/>
+          <p:cNvPr id="31" name="Text 29"/>
           <p:cNvSpPr/>
           <p:nvPr/>
         </p:nvSpPr>
@@ -21927,7 +21976,7 @@
                 <a:ea typeface="Arial" pitchFamily="34" charset="-122"/>
                 <a:cs typeface="Arial" pitchFamily="34" charset="-120"/>
               </a:rPr>
-              <a:t>25/26</a:t>
+              <a:t>25/27</a:t>
             </a:r>
             <a:endParaRPr lang="en-US" sz="1050" dirty="0"/>
           </a:p>
@@ -22018,7 +22067,7 @@
                 <a:ea typeface="Arial" pitchFamily="34" charset="-122"/>
                 <a:cs typeface="Arial" pitchFamily="34" charset="-120"/>
               </a:rPr>
-              <a:t>NACHARBEIT</a:t>
+              <a:t>KERN DES ABENDS</a:t>
             </a:r>
             <a:endParaRPr lang="en-US" sz="1150" dirty="0"/>
           </a:p>
@@ -22057,7 +22106,7 @@
                 <a:ea typeface="Arial" pitchFamily="34" charset="-122"/>
                 <a:cs typeface="Arial" pitchFamily="34" charset="-120"/>
               </a:rPr>
-              <a:t>Bis Montag</a:t>
+              <a:t>Das nehmt ihr heute mit</a:t>
             </a:r>
             <a:endParaRPr lang="en-US" sz="2600" dirty="0"/>
           </a:p>
@@ -22071,8 +22120,8 @@
         </p:nvSpPr>
         <p:spPr>
           <a:xfrm>
-            <a:off x="566928" y="1444752"/>
-            <a:ext cx="8010144" cy="438912"/>
+            <a:off x="566928" y="1691640"/>
+            <a:ext cx="8010144" cy="1828800"/>
           </a:xfrm>
           <a:prstGeom prst="rect">
             <a:avLst/>
@@ -22085,20 +22134,203 @@
           <a:lstStyle/>
           <a:p>
             <a:pPr indent="0" marL="0">
-              <a:buNone/>
-            </a:pPr>
-            <a:r>
-              <a:rPr lang="en-US" sz="1300" dirty="0">
-                <a:solidFill>
-                  <a:srgbClr val="5C6377"/>
-                </a:solidFill>
-                <a:latin typeface="Arial" pitchFamily="34" charset="0"/>
-                <a:ea typeface="Arial" pitchFamily="34" charset="-122"/>
-                <a:cs typeface="Arial" pitchFamily="34" charset="-120"/>
-              </a:rPr>
-              <a:t>Alles freiwillig – aber der Montag wird deutlich leichter, wenn ihr das gemacht habt.</a:t>
-            </a:r>
-            <a:endParaRPr lang="en-US" sz="1300" dirty="0"/>
+              <a:lnSpc>
+                <a:spcPct val="92000"/>
+              </a:lnSpc>
+              <a:buNone/>
+            </a:pPr>
+            <a:r>
+              <a:rPr lang="en-US" sz="1350" b="1" dirty="0">
+                <a:solidFill>
+                  <a:srgbClr val="3843AF"/>
+                </a:solidFill>
+                <a:latin typeface="Arial" pitchFamily="34" charset="0"/>
+                <a:ea typeface="Arial" pitchFamily="34" charset="-122"/>
+                <a:cs typeface="Arial" pitchFamily="34" charset="-120"/>
+              </a:rPr>
+              <a:t>▸   </a:t>
+            </a:r>
+            <a:pPr indent="0" marL="0">
+              <a:lnSpc>
+                <a:spcPct val="92000"/>
+              </a:lnSpc>
+              <a:spcAft>
+                <a:spcPts val="900"/>
+              </a:spcAft>
+              <a:buNone/>
+            </a:pPr>
+            <a:r>
+              <a:rPr lang="en-US" sz="1350" b="1" dirty="0">
+                <a:solidFill>
+                  <a:srgbClr val="434A63"/>
+                </a:solidFill>
+                <a:latin typeface="Arial" pitchFamily="34" charset="0"/>
+                <a:ea typeface="Arial" pitchFamily="34" charset="-122"/>
+                <a:cs typeface="Arial" pitchFamily="34" charset="-120"/>
+              </a:rPr>
+              <a:t>Ein Netz braucht drei Dinge: Verbindung, Adressen, Regeln.</a:t>
+            </a:r>
+            <a:endParaRPr lang="en-US" sz="1350" dirty="0"/>
+          </a:p>
+          <a:p>
+            <a:pPr indent="0" marL="0">
+              <a:lnSpc>
+                <a:spcPct val="92000"/>
+              </a:lnSpc>
+              <a:buNone/>
+            </a:pPr>
+            <a:r>
+              <a:rPr lang="en-US" sz="1350" b="1" dirty="0">
+                <a:solidFill>
+                  <a:srgbClr val="3843AF"/>
+                </a:solidFill>
+                <a:latin typeface="Arial" pitchFamily="34" charset="0"/>
+                <a:ea typeface="Arial" pitchFamily="34" charset="-122"/>
+                <a:cs typeface="Arial" pitchFamily="34" charset="-120"/>
+              </a:rPr>
+              <a:t>▸   </a:t>
+            </a:r>
+            <a:pPr indent="0" marL="0">
+              <a:lnSpc>
+                <a:spcPct val="92000"/>
+              </a:lnSpc>
+              <a:spcAft>
+                <a:spcPts val="900"/>
+              </a:spcAft>
+              <a:buNone/>
+            </a:pPr>
+            <a:r>
+              <a:rPr lang="en-US" sz="1350" b="1" dirty="0">
+                <a:solidFill>
+                  <a:srgbClr val="434A63"/>
+                </a:solidFill>
+                <a:latin typeface="Arial" pitchFamily="34" charset="0"/>
+                <a:ea typeface="Arial" pitchFamily="34" charset="-122"/>
+                <a:cs typeface="Arial" pitchFamily="34" charset="-120"/>
+              </a:rPr>
+              <a:t>Dieselben Daten heißen je nach Schicht Frame, Paket oder Segment.</a:t>
+            </a:r>
+            <a:endParaRPr lang="en-US" sz="1350" dirty="0"/>
+          </a:p>
+          <a:p>
+            <a:pPr indent="0" marL="0">
+              <a:lnSpc>
+                <a:spcPct val="92000"/>
+              </a:lnSpc>
+              <a:buNone/>
+            </a:pPr>
+            <a:r>
+              <a:rPr lang="en-US" sz="1350" b="1" dirty="0">
+                <a:solidFill>
+                  <a:srgbClr val="3843AF"/>
+                </a:solidFill>
+                <a:latin typeface="Arial" pitchFamily="34" charset="0"/>
+                <a:ea typeface="Arial" pitchFamily="34" charset="-122"/>
+                <a:cs typeface="Arial" pitchFamily="34" charset="-120"/>
+              </a:rPr>
+              <a:t>▸   </a:t>
+            </a:r>
+            <a:pPr indent="0" marL="0">
+              <a:lnSpc>
+                <a:spcPct val="92000"/>
+              </a:lnSpc>
+              <a:spcAft>
+                <a:spcPts val="900"/>
+              </a:spcAft>
+              <a:buNone/>
+            </a:pPr>
+            <a:r>
+              <a:rPr lang="en-US" sz="1350" b="1" dirty="0">
+                <a:solidFill>
+                  <a:srgbClr val="434A63"/>
+                </a:solidFill>
+                <a:latin typeface="Arial" pitchFamily="34" charset="0"/>
+                <a:ea typeface="Arial" pitchFamily="34" charset="-122"/>
+                <a:cs typeface="Arial" pitchFamily="34" charset="-120"/>
+              </a:rPr>
+              <a:t>OSI hat sieben Schichten, TCP/IP vier – ihr müsst sie zuordnen können.</a:t>
+            </a:r>
+            <a:endParaRPr lang="en-US" sz="1350" dirty="0"/>
+          </a:p>
+          <a:p>
+            <a:pPr indent="0" marL="0">
+              <a:lnSpc>
+                <a:spcPct val="92000"/>
+              </a:lnSpc>
+              <a:buNone/>
+            </a:pPr>
+            <a:r>
+              <a:rPr lang="en-US" sz="1350" b="1" dirty="0">
+                <a:solidFill>
+                  <a:srgbClr val="3843AF"/>
+                </a:solidFill>
+                <a:latin typeface="Arial" pitchFamily="34" charset="0"/>
+                <a:ea typeface="Arial" pitchFamily="34" charset="-122"/>
+                <a:cs typeface="Arial" pitchFamily="34" charset="-120"/>
+              </a:rPr>
+              <a:t>▸   </a:t>
+            </a:r>
+            <a:pPr indent="0" marL="0">
+              <a:lnSpc>
+                <a:spcPct val="92000"/>
+              </a:lnSpc>
+              <a:spcAft>
+                <a:spcPts val="900"/>
+              </a:spcAft>
+              <a:buNone/>
+            </a:pPr>
+            <a:r>
+              <a:rPr lang="en-US" sz="1350" b="1" dirty="0">
+                <a:solidFill>
+                  <a:srgbClr val="434A63"/>
+                </a:solidFill>
+                <a:latin typeface="Arial" pitchFamily="34" charset="0"/>
+                <a:ea typeface="Arial" pitchFamily="34" charset="-122"/>
+                <a:cs typeface="Arial" pitchFamily="34" charset="-120"/>
+              </a:rPr>
+              <a:t>Bandbreite ist nicht Geschwindigkeit. Latenz ist die andere Hälfte.</a:t>
+            </a:r>
+            <a:endParaRPr lang="en-US" sz="1350" dirty="0"/>
+          </a:p>
+          <a:p>
+            <a:pPr indent="0" marL="0">
+              <a:lnSpc>
+                <a:spcPct val="92000"/>
+              </a:lnSpc>
+              <a:buNone/>
+            </a:pPr>
+            <a:r>
+              <a:rPr lang="en-US" sz="1350" b="1" dirty="0">
+                <a:solidFill>
+                  <a:srgbClr val="3843AF"/>
+                </a:solidFill>
+                <a:latin typeface="Arial" pitchFamily="34" charset="0"/>
+                <a:ea typeface="Arial" pitchFamily="34" charset="-122"/>
+                <a:cs typeface="Arial" pitchFamily="34" charset="-120"/>
+              </a:rPr>
+              <a:t>▸   </a:t>
+            </a:r>
+            <a:pPr indent="0" marL="0">
+              <a:lnSpc>
+                <a:spcPct val="92000"/>
+              </a:lnSpc>
+              <a:spcAft>
+                <a:spcPts val="900"/>
+              </a:spcAft>
+              <a:buNone/>
+            </a:pPr>
+            <a:r>
+              <a:rPr lang="en-US" sz="1350" b="1" dirty="0">
+                <a:solidFill>
+                  <a:srgbClr val="434A63"/>
+                </a:solidFill>
+                <a:latin typeface="Arial" pitchFamily="34" charset="0"/>
+                <a:ea typeface="Arial" pitchFamily="34" charset="-122"/>
+                <a:cs typeface="Arial" pitchFamily="34" charset="-120"/>
+              </a:rPr>
+              <a:t>Fehlersuche heißt: von unten nach oben, Schicht für Schicht.</a:t>
+            </a:r>
+            <a:endParaRPr lang="en-US" sz="1350" dirty="0"/>
           </a:p>
         </p:txBody>
       </p:sp>
@@ -22110,14 +22342,14 @@
         </p:nvSpPr>
         <p:spPr>
           <a:xfrm>
-            <a:off x="566928" y="1975104"/>
-            <a:ext cx="2523744" cy="1920240"/>
+            <a:off x="566928" y="3566160"/>
+            <a:ext cx="8010144" cy="960120"/>
           </a:xfrm>
           <a:prstGeom prst="rect">
             <a:avLst/>
           </a:prstGeom>
           <a:solidFill>
-            <a:srgbClr val="F5F6FC"/>
+            <a:srgbClr val="EEF0FB"/>
           </a:solidFill>
           <a:ln/>
         </p:spPr>
@@ -22130,8 +22362,8 @@
         </p:nvSpPr>
         <p:spPr>
           <a:xfrm>
-            <a:off x="566928" y="1975104"/>
-            <a:ext cx="41148" cy="1920240"/>
+            <a:off x="566928" y="3566160"/>
+            <a:ext cx="41148" cy="960120"/>
           </a:xfrm>
           <a:prstGeom prst="rect">
             <a:avLst/>
@@ -22150,8 +22382,8 @@
         </p:nvSpPr>
         <p:spPr>
           <a:xfrm>
-            <a:off x="804672" y="2121408"/>
-            <a:ext cx="2121408" cy="256032"/>
+            <a:off x="804672" y="3712464"/>
+            <a:ext cx="7607808" cy="237744"/>
           </a:xfrm>
           <a:prstGeom prst="rect">
             <a:avLst/>
@@ -22175,7 +22407,7 @@
                 <a:ea typeface="Arial" pitchFamily="34" charset="-122"/>
                 <a:cs typeface="Arial" pitchFamily="34" charset="-120"/>
               </a:rPr>
-              <a:t>Lesen</a:t>
+              <a:t>Die Begriffe von heute</a:t>
             </a:r>
             <a:endParaRPr lang="en-US" sz="1300" dirty="0"/>
           </a:p>
@@ -22189,8 +22421,8 @@
         </p:nvSpPr>
         <p:spPr>
           <a:xfrm>
-            <a:off x="804672" y="2423160"/>
-            <a:ext cx="2121408" cy="1353312"/>
+            <a:off x="804672" y="3995928"/>
+            <a:ext cx="7607808" cy="411480"/>
           </a:xfrm>
           <a:prstGeom prst="rect">
             <a:avLst/>
@@ -22209,7 +22441,7 @@
               <a:buNone/>
             </a:pPr>
             <a:r>
-              <a:rPr lang="en-US" sz="1150" dirty="0">
+              <a:rPr lang="en-US" sz="1100" dirty="0">
                 <a:solidFill>
                   <a:srgbClr val="434A63"/>
                 </a:solidFill>
@@ -22217,316 +22449,15 @@
                 <a:ea typeface="Arial" pitchFamily="34" charset="-122"/>
                 <a:cs typeface="Arial" pitchFamily="34" charset="-120"/>
               </a:rPr>
-              <a:t>Die Seiten „Grundbegriffe“ und „OSI- und TCP/IP-Modell“ in Ruhe durchgehen, inklusive der Selbstkontrollfragen am Ende.</a:t>
-            </a:r>
-            <a:endParaRPr lang="en-US" sz="1150" dirty="0"/>
+              <a:t>Schichtenmodell · OSI · TCP/IP · Topologie · Client-Server · Latenz · Bandbreite · Frame, Paket, Segment. Diese Begriffe begleiten euch bis zum Schluss – im Kurs wie in der Prüfung.</a:t>
+            </a:r>
+            <a:endParaRPr lang="en-US" sz="1100" dirty="0"/>
           </a:p>
         </p:txBody>
       </p:sp>
       <p:sp>
         <p:nvSpPr>
           <p:cNvPr id="10" name="Shape 8"/>
-          <p:cNvSpPr/>
-          <p:nvPr/>
-        </p:nvSpPr>
-        <p:spPr>
-          <a:xfrm>
-            <a:off x="3310128" y="1975104"/>
-            <a:ext cx="2523744" cy="1920240"/>
-          </a:xfrm>
-          <a:prstGeom prst="rect">
-            <a:avLst/>
-          </a:prstGeom>
-          <a:solidFill>
-            <a:srgbClr val="F5F6FC"/>
-          </a:solidFill>
-          <a:ln/>
-        </p:spPr>
-      </p:sp>
-      <p:sp>
-        <p:nvSpPr>
-          <p:cNvPr id="11" name="Shape 9"/>
-          <p:cNvSpPr/>
-          <p:nvPr/>
-        </p:nvSpPr>
-        <p:spPr>
-          <a:xfrm>
-            <a:off x="3310128" y="1975104"/>
-            <a:ext cx="41148" cy="1920240"/>
-          </a:xfrm>
-          <a:prstGeom prst="rect">
-            <a:avLst/>
-          </a:prstGeom>
-          <a:solidFill>
-            <a:srgbClr val="3843AF"/>
-          </a:solidFill>
-          <a:ln/>
-        </p:spPr>
-      </p:sp>
-      <p:sp>
-        <p:nvSpPr>
-          <p:cNvPr id="12" name="Text 10"/>
-          <p:cNvSpPr/>
-          <p:nvPr/>
-        </p:nvSpPr>
-        <p:spPr>
-          <a:xfrm>
-            <a:off x="3547872" y="2121408"/>
-            <a:ext cx="2121408" cy="256032"/>
-          </a:xfrm>
-          <a:prstGeom prst="rect">
-            <a:avLst/>
-          </a:prstGeom>
-          <a:noFill/>
-          <a:ln/>
-        </p:spPr>
-        <p:txBody>
-          <a:bodyPr wrap="square" lIns="0" tIns="0" rIns="0" bIns="0" rtlCol="0" anchor="t"/>
-          <a:lstStyle/>
-          <a:p>
-            <a:pPr indent="0" marL="0">
-              <a:buNone/>
-            </a:pPr>
-            <a:r>
-              <a:rPr lang="en-US" sz="1300" b="1" dirty="0">
-                <a:solidFill>
-                  <a:srgbClr val="272E52"/>
-                </a:solidFill>
-                <a:latin typeface="Arial" pitchFamily="34" charset="0"/>
-                <a:ea typeface="Arial" pitchFamily="34" charset="-122"/>
-                <a:cs typeface="Arial" pitchFamily="34" charset="-120"/>
-              </a:rPr>
-              <a:t>Nachholen</a:t>
-            </a:r>
-            <a:endParaRPr lang="en-US" sz="1300" dirty="0"/>
-          </a:p>
-        </p:txBody>
-      </p:sp>
-      <p:sp>
-        <p:nvSpPr>
-          <p:cNvPr id="13" name="Text 11"/>
-          <p:cNvSpPr/>
-          <p:nvPr/>
-        </p:nvSpPr>
-        <p:spPr>
-          <a:xfrm>
-            <a:off x="3547872" y="2423160"/>
-            <a:ext cx="2121408" cy="1353312"/>
-          </a:xfrm>
-          <a:prstGeom prst="rect">
-            <a:avLst/>
-          </a:prstGeom>
-          <a:noFill/>
-          <a:ln/>
-        </p:spPr>
-        <p:txBody>
-          <a:bodyPr wrap="square" lIns="0" tIns="0" rIns="0" bIns="0" rtlCol="0" anchor="t"/>
-          <a:lstStyle/>
-          <a:p>
-            <a:pPr indent="0" marL="0">
-              <a:lnSpc>
-                <a:spcPct val="92000"/>
-              </a:lnSpc>
-              <a:buNone/>
-            </a:pPr>
-            <a:r>
-              <a:rPr lang="en-US" sz="1150" dirty="0">
-                <a:solidFill>
-                  <a:srgbClr val="434A63"/>
-                </a:solidFill>
-                <a:latin typeface="Arial" pitchFamily="34" charset="0"/>
-                <a:ea typeface="Arial" pitchFamily="34" charset="-122"/>
-                <a:cs typeface="Arial" pitchFamily="34" charset="-120"/>
-              </a:rPr>
-              <a:t>Wer im Breakout nicht bis Station 3 gekommen ist: Der Schichten-Check steht vollständig auf der Kursseite.</a:t>
-            </a:r>
-            <a:endParaRPr lang="en-US" sz="1150" dirty="0"/>
-          </a:p>
-        </p:txBody>
-      </p:sp>
-      <p:sp>
-        <p:nvSpPr>
-          <p:cNvPr id="14" name="Shape 12"/>
-          <p:cNvSpPr/>
-          <p:nvPr/>
-        </p:nvSpPr>
-        <p:spPr>
-          <a:xfrm>
-            <a:off x="6053328" y="1975104"/>
-            <a:ext cx="2523744" cy="1920240"/>
-          </a:xfrm>
-          <a:prstGeom prst="rect">
-            <a:avLst/>
-          </a:prstGeom>
-          <a:solidFill>
-            <a:srgbClr val="F5F6FC"/>
-          </a:solidFill>
-          <a:ln/>
-        </p:spPr>
-      </p:sp>
-      <p:sp>
-        <p:nvSpPr>
-          <p:cNvPr id="15" name="Shape 13"/>
-          <p:cNvSpPr/>
-          <p:nvPr/>
-        </p:nvSpPr>
-        <p:spPr>
-          <a:xfrm>
-            <a:off x="6053328" y="1975104"/>
-            <a:ext cx="41148" cy="1920240"/>
-          </a:xfrm>
-          <a:prstGeom prst="rect">
-            <a:avLst/>
-          </a:prstGeom>
-          <a:solidFill>
-            <a:srgbClr val="3843AF"/>
-          </a:solidFill>
-          <a:ln/>
-        </p:spPr>
-      </p:sp>
-      <p:sp>
-        <p:nvSpPr>
-          <p:cNvPr id="16" name="Text 14"/>
-          <p:cNvSpPr/>
-          <p:nvPr/>
-        </p:nvSpPr>
-        <p:spPr>
-          <a:xfrm>
-            <a:off x="6291072" y="2121408"/>
-            <a:ext cx="2121408" cy="256032"/>
-          </a:xfrm>
-          <a:prstGeom prst="rect">
-            <a:avLst/>
-          </a:prstGeom>
-          <a:noFill/>
-          <a:ln/>
-        </p:spPr>
-        <p:txBody>
-          <a:bodyPr wrap="square" lIns="0" tIns="0" rIns="0" bIns="0" rtlCol="0" anchor="t"/>
-          <a:lstStyle/>
-          <a:p>
-            <a:pPr indent="0" marL="0">
-              <a:buNone/>
-            </a:pPr>
-            <a:r>
-              <a:rPr lang="en-US" sz="1300" b="1" dirty="0">
-                <a:solidFill>
-                  <a:srgbClr val="272E52"/>
-                </a:solidFill>
-                <a:latin typeface="Arial" pitchFamily="34" charset="0"/>
-                <a:ea typeface="Arial" pitchFamily="34" charset="-122"/>
-                <a:cs typeface="Arial" pitchFamily="34" charset="-120"/>
-              </a:rPr>
-              <a:t>Vorbereiten</a:t>
-            </a:r>
-            <a:endParaRPr lang="en-US" sz="1300" dirty="0"/>
-          </a:p>
-        </p:txBody>
-      </p:sp>
-      <p:sp>
-        <p:nvSpPr>
-          <p:cNvPr id="17" name="Text 15"/>
-          <p:cNvSpPr/>
-          <p:nvPr/>
-        </p:nvSpPr>
-        <p:spPr>
-          <a:xfrm>
-            <a:off x="6291072" y="2423160"/>
-            <a:ext cx="2121408" cy="1353312"/>
-          </a:xfrm>
-          <a:prstGeom prst="rect">
-            <a:avLst/>
-          </a:prstGeom>
-          <a:noFill/>
-          <a:ln/>
-        </p:spPr>
-        <p:txBody>
-          <a:bodyPr wrap="square" lIns="0" tIns="0" rIns="0" bIns="0" rtlCol="0" anchor="t"/>
-          <a:lstStyle/>
-          <a:p>
-            <a:pPr indent="0" marL="0">
-              <a:lnSpc>
-                <a:spcPct val="92000"/>
-              </a:lnSpc>
-              <a:buNone/>
-            </a:pPr>
-            <a:r>
-              <a:rPr lang="en-US" sz="1150" dirty="0">
-                <a:solidFill>
-                  <a:srgbClr val="434A63"/>
-                </a:solidFill>
-                <a:latin typeface="Arial" pitchFamily="34" charset="0"/>
-                <a:ea typeface="Arial" pitchFamily="34" charset="-122"/>
-                <a:cs typeface="Arial" pitchFamily="34" charset="-120"/>
-              </a:rPr>
-              <a:t>Am Montag rechnen wir Subnetze. Bringt Papier, Stift und einen wachen Kopf mit – Taschenrechner braucht ihr nicht.</a:t>
-            </a:r>
-            <a:endParaRPr lang="en-US" sz="1150" dirty="0"/>
-          </a:p>
-        </p:txBody>
-      </p:sp>
-      <p:sp>
-        <p:nvSpPr>
-          <p:cNvPr id="18" name="Shape 16"/>
-          <p:cNvSpPr/>
-          <p:nvPr/>
-        </p:nvSpPr>
-        <p:spPr>
-          <a:xfrm>
-            <a:off x="566928" y="4160520"/>
-            <a:ext cx="32004" cy="256032"/>
-          </a:xfrm>
-          <a:prstGeom prst="rect">
-            <a:avLst/>
-          </a:prstGeom>
-          <a:solidFill>
-            <a:srgbClr val="3843AF"/>
-          </a:solidFill>
-          <a:ln/>
-        </p:spPr>
-      </p:sp>
-      <p:sp>
-        <p:nvSpPr>
-          <p:cNvPr id="19" name="Text 17"/>
-          <p:cNvSpPr/>
-          <p:nvPr/>
-        </p:nvSpPr>
-        <p:spPr>
-          <a:xfrm>
-            <a:off x="749808" y="4114800"/>
-            <a:ext cx="7827264" cy="402336"/>
-          </a:xfrm>
-          <a:prstGeom prst="rect">
-            <a:avLst/>
-          </a:prstGeom>
-          <a:noFill/>
-          <a:ln/>
-        </p:spPr>
-        <p:txBody>
-          <a:bodyPr wrap="square" lIns="0" tIns="0" rIns="0" bIns="0" rtlCol="0" anchor="ctr"/>
-          <a:lstStyle/>
-          <a:p>
-            <a:pPr indent="0" marL="0">
-              <a:buNone/>
-            </a:pPr>
-            <a:r>
-              <a:rPr lang="en-US" sz="1200" b="1" dirty="0">
-                <a:solidFill>
-                  <a:srgbClr val="434A63"/>
-                </a:solidFill>
-                <a:latin typeface="Arial" pitchFamily="34" charset="0"/>
-                <a:ea typeface="Arial" pitchFamily="34" charset="-122"/>
-                <a:cs typeface="Arial" pitchFamily="34" charset="-120"/>
-              </a:rPr>
-              <a:t>Nächster Termin: Montag, 31. August, 18:00 Uhr – Adressierung und Subnetting.</a:t>
-            </a:r>
-            <a:endParaRPr lang="en-US" sz="1200" dirty="0"/>
-          </a:p>
-        </p:txBody>
-      </p:sp>
-      <p:sp>
-        <p:nvSpPr>
-          <p:cNvPr id="20" name="Shape 18"/>
           <p:cNvSpPr/>
           <p:nvPr/>
         </p:nvSpPr>
@@ -22549,7 +22480,7 @@
       </p:sp>
       <p:sp>
         <p:nvSpPr>
-          <p:cNvPr id="21" name="Text 19"/>
+          <p:cNvPr id="11" name="Text 9"/>
           <p:cNvSpPr/>
           <p:nvPr/>
         </p:nvSpPr>
@@ -22588,7 +22519,7 @@
       </p:sp>
       <p:sp>
         <p:nvSpPr>
-          <p:cNvPr id="22" name="Text 20"/>
+          <p:cNvPr id="12" name="Text 10"/>
           <p:cNvSpPr/>
           <p:nvPr/>
         </p:nvSpPr>
@@ -22619,7 +22550,7 @@
                 <a:ea typeface="Arial" pitchFamily="34" charset="-122"/>
                 <a:cs typeface="Arial" pitchFamily="34" charset="-120"/>
               </a:rPr>
-              <a:t>26/26</a:t>
+              <a:t>26/27</a:t>
             </a:r>
             <a:endParaRPr lang="en-US" sz="1050" dirty="0"/>
           </a:p>
@@ -22636,6 +22567,698 @@
 <file path=ppt/slides/slide33.xml><?xml version="1.0" encoding="utf-8"?>
 <p:sld xmlns:a="http://schemas.openxmlformats.org/drawingml/2006/main" xmlns:r="http://schemas.openxmlformats.org/officeDocument/2006/relationships" xmlns:p="http://schemas.openxmlformats.org/presentationml/2006/main">
   <p:cSld name="Slide 33">
+    <p:bg>
+      <p:bgPr>
+        <a:solidFill>
+          <a:srgbClr val="FFFFFF"/>
+        </a:solidFill>
+      </p:bgPr>
+    </p:bg>
+    <p:spTree>
+      <p:nvGrpSpPr>
+        <p:cNvPr id="1" name=""/>
+        <p:cNvGrpSpPr/>
+        <p:nvPr/>
+      </p:nvGrpSpPr>
+      <p:grpSpPr>
+        <a:xfrm>
+          <a:off x="0" y="0"/>
+          <a:ext cx="0" cy="0"/>
+          <a:chOff x="0" y="0"/>
+          <a:chExt cx="0" cy="0"/>
+        </a:xfrm>
+      </p:grpSpPr>
+      <p:sp>
+        <p:nvSpPr>
+          <p:cNvPr id="2" name="Shape 0"/>
+          <p:cNvSpPr/>
+          <p:nvPr/>
+        </p:nvSpPr>
+        <p:spPr>
+          <a:xfrm>
+            <a:off x="566928" y="201168"/>
+            <a:ext cx="475488" cy="50292"/>
+          </a:xfrm>
+          <a:prstGeom prst="rect">
+            <a:avLst/>
+          </a:prstGeom>
+          <a:solidFill>
+            <a:srgbClr val="3843AF"/>
+          </a:solidFill>
+          <a:ln/>
+        </p:spPr>
+      </p:sp>
+      <p:sp>
+        <p:nvSpPr>
+          <p:cNvPr id="3" name="Text 1"/>
+          <p:cNvSpPr/>
+          <p:nvPr/>
+        </p:nvSpPr>
+        <p:spPr>
+          <a:xfrm>
+            <a:off x="566928" y="384048"/>
+            <a:ext cx="8010144" cy="237744"/>
+          </a:xfrm>
+          <a:prstGeom prst="rect">
+            <a:avLst/>
+          </a:prstGeom>
+          <a:noFill/>
+          <a:ln/>
+        </p:spPr>
+        <p:txBody>
+          <a:bodyPr wrap="square" lIns="0" tIns="0" rIns="0" bIns="0" rtlCol="0" anchor="ctr"/>
+          <a:lstStyle/>
+          <a:p>
+            <a:pPr indent="0" marL="0">
+              <a:buNone/>
+            </a:pPr>
+            <a:r>
+              <a:rPr lang="en-US" sz="1150" b="1" spc="180" kern="0" dirty="0">
+                <a:solidFill>
+                  <a:srgbClr val="3843AF"/>
+                </a:solidFill>
+                <a:latin typeface="Arial" pitchFamily="34" charset="0"/>
+                <a:ea typeface="Arial" pitchFamily="34" charset="-122"/>
+                <a:cs typeface="Arial" pitchFamily="34" charset="-120"/>
+              </a:rPr>
+              <a:t>NACHARBEIT</a:t>
+            </a:r>
+            <a:endParaRPr lang="en-US" sz="1150" dirty="0"/>
+          </a:p>
+        </p:txBody>
+      </p:sp>
+      <p:sp>
+        <p:nvSpPr>
+          <p:cNvPr id="4" name="Text 2"/>
+          <p:cNvSpPr/>
+          <p:nvPr/>
+        </p:nvSpPr>
+        <p:spPr>
+          <a:xfrm>
+            <a:off x="566928" y="731520"/>
+            <a:ext cx="8010144" cy="603504"/>
+          </a:xfrm>
+          <a:prstGeom prst="rect">
+            <a:avLst/>
+          </a:prstGeom>
+          <a:noFill/>
+          <a:ln/>
+        </p:spPr>
+        <p:txBody>
+          <a:bodyPr wrap="square" lIns="0" tIns="0" rIns="0" bIns="0" rtlCol="0" anchor="t"/>
+          <a:lstStyle/>
+          <a:p>
+            <a:pPr indent="0" marL="0">
+              <a:buNone/>
+            </a:pPr>
+            <a:r>
+              <a:rPr lang="en-US" sz="2600" b="1" dirty="0">
+                <a:solidFill>
+                  <a:srgbClr val="272E52"/>
+                </a:solidFill>
+                <a:latin typeface="Arial" pitchFamily="34" charset="0"/>
+                <a:ea typeface="Arial" pitchFamily="34" charset="-122"/>
+                <a:cs typeface="Arial" pitchFamily="34" charset="-120"/>
+              </a:rPr>
+              <a:t>Bis Montag</a:t>
+            </a:r>
+            <a:endParaRPr lang="en-US" sz="2600" dirty="0"/>
+          </a:p>
+        </p:txBody>
+      </p:sp>
+      <p:sp>
+        <p:nvSpPr>
+          <p:cNvPr id="5" name="Text 3"/>
+          <p:cNvSpPr/>
+          <p:nvPr/>
+        </p:nvSpPr>
+        <p:spPr>
+          <a:xfrm>
+            <a:off x="566928" y="1444752"/>
+            <a:ext cx="8010144" cy="438912"/>
+          </a:xfrm>
+          <a:prstGeom prst="rect">
+            <a:avLst/>
+          </a:prstGeom>
+          <a:noFill/>
+          <a:ln/>
+        </p:spPr>
+        <p:txBody>
+          <a:bodyPr wrap="square" lIns="0" tIns="0" rIns="0" bIns="0" rtlCol="0" anchor="t"/>
+          <a:lstStyle/>
+          <a:p>
+            <a:pPr indent="0" marL="0">
+              <a:buNone/>
+            </a:pPr>
+            <a:r>
+              <a:rPr lang="en-US" sz="1300" dirty="0">
+                <a:solidFill>
+                  <a:srgbClr val="5C6377"/>
+                </a:solidFill>
+                <a:latin typeface="Arial" pitchFamily="34" charset="0"/>
+                <a:ea typeface="Arial" pitchFamily="34" charset="-122"/>
+                <a:cs typeface="Arial" pitchFamily="34" charset="-120"/>
+              </a:rPr>
+              <a:t>Alles freiwillig – aber der Montag wird deutlich leichter, wenn ihr das gemacht habt.</a:t>
+            </a:r>
+            <a:endParaRPr lang="en-US" sz="1300" dirty="0"/>
+          </a:p>
+        </p:txBody>
+      </p:sp>
+      <p:sp>
+        <p:nvSpPr>
+          <p:cNvPr id="6" name="Shape 4"/>
+          <p:cNvSpPr/>
+          <p:nvPr/>
+        </p:nvSpPr>
+        <p:spPr>
+          <a:xfrm>
+            <a:off x="566928" y="1975104"/>
+            <a:ext cx="2523744" cy="1920240"/>
+          </a:xfrm>
+          <a:prstGeom prst="rect">
+            <a:avLst/>
+          </a:prstGeom>
+          <a:solidFill>
+            <a:srgbClr val="F5F6FC"/>
+          </a:solidFill>
+          <a:ln/>
+        </p:spPr>
+      </p:sp>
+      <p:sp>
+        <p:nvSpPr>
+          <p:cNvPr id="7" name="Shape 5"/>
+          <p:cNvSpPr/>
+          <p:nvPr/>
+        </p:nvSpPr>
+        <p:spPr>
+          <a:xfrm>
+            <a:off x="566928" y="1975104"/>
+            <a:ext cx="41148" cy="1920240"/>
+          </a:xfrm>
+          <a:prstGeom prst="rect">
+            <a:avLst/>
+          </a:prstGeom>
+          <a:solidFill>
+            <a:srgbClr val="3843AF"/>
+          </a:solidFill>
+          <a:ln/>
+        </p:spPr>
+      </p:sp>
+      <p:sp>
+        <p:nvSpPr>
+          <p:cNvPr id="8" name="Text 6"/>
+          <p:cNvSpPr/>
+          <p:nvPr/>
+        </p:nvSpPr>
+        <p:spPr>
+          <a:xfrm>
+            <a:off x="804672" y="2121408"/>
+            <a:ext cx="2121408" cy="256032"/>
+          </a:xfrm>
+          <a:prstGeom prst="rect">
+            <a:avLst/>
+          </a:prstGeom>
+          <a:noFill/>
+          <a:ln/>
+        </p:spPr>
+        <p:txBody>
+          <a:bodyPr wrap="square" lIns="0" tIns="0" rIns="0" bIns="0" rtlCol="0" anchor="t"/>
+          <a:lstStyle/>
+          <a:p>
+            <a:pPr indent="0" marL="0">
+              <a:buNone/>
+            </a:pPr>
+            <a:r>
+              <a:rPr lang="en-US" sz="1300" b="1" dirty="0">
+                <a:solidFill>
+                  <a:srgbClr val="272E52"/>
+                </a:solidFill>
+                <a:latin typeface="Arial" pitchFamily="34" charset="0"/>
+                <a:ea typeface="Arial" pitchFamily="34" charset="-122"/>
+                <a:cs typeface="Arial" pitchFamily="34" charset="-120"/>
+              </a:rPr>
+              <a:t>Lesen</a:t>
+            </a:r>
+            <a:endParaRPr lang="en-US" sz="1300" dirty="0"/>
+          </a:p>
+        </p:txBody>
+      </p:sp>
+      <p:sp>
+        <p:nvSpPr>
+          <p:cNvPr id="9" name="Text 7"/>
+          <p:cNvSpPr/>
+          <p:nvPr/>
+        </p:nvSpPr>
+        <p:spPr>
+          <a:xfrm>
+            <a:off x="804672" y="2423160"/>
+            <a:ext cx="2121408" cy="1353312"/>
+          </a:xfrm>
+          <a:prstGeom prst="rect">
+            <a:avLst/>
+          </a:prstGeom>
+          <a:noFill/>
+          <a:ln/>
+        </p:spPr>
+        <p:txBody>
+          <a:bodyPr wrap="square" lIns="0" tIns="0" rIns="0" bIns="0" rtlCol="0" anchor="t"/>
+          <a:lstStyle/>
+          <a:p>
+            <a:pPr indent="0" marL="0">
+              <a:lnSpc>
+                <a:spcPct val="92000"/>
+              </a:lnSpc>
+              <a:buNone/>
+            </a:pPr>
+            <a:r>
+              <a:rPr lang="en-US" sz="1150" dirty="0">
+                <a:solidFill>
+                  <a:srgbClr val="434A63"/>
+                </a:solidFill>
+                <a:latin typeface="Arial" pitchFamily="34" charset="0"/>
+                <a:ea typeface="Arial" pitchFamily="34" charset="-122"/>
+                <a:cs typeface="Arial" pitchFamily="34" charset="-120"/>
+              </a:rPr>
+              <a:t>Die Seiten „Grundbegriffe“ und „OSI- und TCP/IP-Modell“ in Ruhe durchgehen, inklusive der Selbstkontrollfragen am Ende.</a:t>
+            </a:r>
+            <a:endParaRPr lang="en-US" sz="1150" dirty="0"/>
+          </a:p>
+        </p:txBody>
+      </p:sp>
+      <p:sp>
+        <p:nvSpPr>
+          <p:cNvPr id="10" name="Shape 8"/>
+          <p:cNvSpPr/>
+          <p:nvPr/>
+        </p:nvSpPr>
+        <p:spPr>
+          <a:xfrm>
+            <a:off x="3310128" y="1975104"/>
+            <a:ext cx="2523744" cy="1920240"/>
+          </a:xfrm>
+          <a:prstGeom prst="rect">
+            <a:avLst/>
+          </a:prstGeom>
+          <a:solidFill>
+            <a:srgbClr val="F5F6FC"/>
+          </a:solidFill>
+          <a:ln/>
+        </p:spPr>
+      </p:sp>
+      <p:sp>
+        <p:nvSpPr>
+          <p:cNvPr id="11" name="Shape 9"/>
+          <p:cNvSpPr/>
+          <p:nvPr/>
+        </p:nvSpPr>
+        <p:spPr>
+          <a:xfrm>
+            <a:off x="3310128" y="1975104"/>
+            <a:ext cx="41148" cy="1920240"/>
+          </a:xfrm>
+          <a:prstGeom prst="rect">
+            <a:avLst/>
+          </a:prstGeom>
+          <a:solidFill>
+            <a:srgbClr val="3843AF"/>
+          </a:solidFill>
+          <a:ln/>
+        </p:spPr>
+      </p:sp>
+      <p:sp>
+        <p:nvSpPr>
+          <p:cNvPr id="12" name="Text 10"/>
+          <p:cNvSpPr/>
+          <p:nvPr/>
+        </p:nvSpPr>
+        <p:spPr>
+          <a:xfrm>
+            <a:off x="3547872" y="2121408"/>
+            <a:ext cx="2121408" cy="256032"/>
+          </a:xfrm>
+          <a:prstGeom prst="rect">
+            <a:avLst/>
+          </a:prstGeom>
+          <a:noFill/>
+          <a:ln/>
+        </p:spPr>
+        <p:txBody>
+          <a:bodyPr wrap="square" lIns="0" tIns="0" rIns="0" bIns="0" rtlCol="0" anchor="t"/>
+          <a:lstStyle/>
+          <a:p>
+            <a:pPr indent="0" marL="0">
+              <a:buNone/>
+            </a:pPr>
+            <a:r>
+              <a:rPr lang="en-US" sz="1300" b="1" dirty="0">
+                <a:solidFill>
+                  <a:srgbClr val="272E52"/>
+                </a:solidFill>
+                <a:latin typeface="Arial" pitchFamily="34" charset="0"/>
+                <a:ea typeface="Arial" pitchFamily="34" charset="-122"/>
+                <a:cs typeface="Arial" pitchFamily="34" charset="-120"/>
+              </a:rPr>
+              <a:t>Nachholen</a:t>
+            </a:r>
+            <a:endParaRPr lang="en-US" sz="1300" dirty="0"/>
+          </a:p>
+        </p:txBody>
+      </p:sp>
+      <p:sp>
+        <p:nvSpPr>
+          <p:cNvPr id="13" name="Text 11"/>
+          <p:cNvSpPr/>
+          <p:nvPr/>
+        </p:nvSpPr>
+        <p:spPr>
+          <a:xfrm>
+            <a:off x="3547872" y="2423160"/>
+            <a:ext cx="2121408" cy="1353312"/>
+          </a:xfrm>
+          <a:prstGeom prst="rect">
+            <a:avLst/>
+          </a:prstGeom>
+          <a:noFill/>
+          <a:ln/>
+        </p:spPr>
+        <p:txBody>
+          <a:bodyPr wrap="square" lIns="0" tIns="0" rIns="0" bIns="0" rtlCol="0" anchor="t"/>
+          <a:lstStyle/>
+          <a:p>
+            <a:pPr indent="0" marL="0">
+              <a:lnSpc>
+                <a:spcPct val="92000"/>
+              </a:lnSpc>
+              <a:buNone/>
+            </a:pPr>
+            <a:r>
+              <a:rPr lang="en-US" sz="1150" dirty="0">
+                <a:solidFill>
+                  <a:srgbClr val="434A63"/>
+                </a:solidFill>
+                <a:latin typeface="Arial" pitchFamily="34" charset="0"/>
+                <a:ea typeface="Arial" pitchFamily="34" charset="-122"/>
+                <a:cs typeface="Arial" pitchFamily="34" charset="-120"/>
+              </a:rPr>
+              <a:t>Wer im Breakout nicht bis Station 3 gekommen ist: Der Schichten-Check steht vollständig auf der Kursseite.</a:t>
+            </a:r>
+            <a:endParaRPr lang="en-US" sz="1150" dirty="0"/>
+          </a:p>
+        </p:txBody>
+      </p:sp>
+      <p:sp>
+        <p:nvSpPr>
+          <p:cNvPr id="14" name="Shape 12"/>
+          <p:cNvSpPr/>
+          <p:nvPr/>
+        </p:nvSpPr>
+        <p:spPr>
+          <a:xfrm>
+            <a:off x="6053328" y="1975104"/>
+            <a:ext cx="2523744" cy="1920240"/>
+          </a:xfrm>
+          <a:prstGeom prst="rect">
+            <a:avLst/>
+          </a:prstGeom>
+          <a:solidFill>
+            <a:srgbClr val="F5F6FC"/>
+          </a:solidFill>
+          <a:ln/>
+        </p:spPr>
+      </p:sp>
+      <p:sp>
+        <p:nvSpPr>
+          <p:cNvPr id="15" name="Shape 13"/>
+          <p:cNvSpPr/>
+          <p:nvPr/>
+        </p:nvSpPr>
+        <p:spPr>
+          <a:xfrm>
+            <a:off x="6053328" y="1975104"/>
+            <a:ext cx="41148" cy="1920240"/>
+          </a:xfrm>
+          <a:prstGeom prst="rect">
+            <a:avLst/>
+          </a:prstGeom>
+          <a:solidFill>
+            <a:srgbClr val="3843AF"/>
+          </a:solidFill>
+          <a:ln/>
+        </p:spPr>
+      </p:sp>
+      <p:sp>
+        <p:nvSpPr>
+          <p:cNvPr id="16" name="Text 14"/>
+          <p:cNvSpPr/>
+          <p:nvPr/>
+        </p:nvSpPr>
+        <p:spPr>
+          <a:xfrm>
+            <a:off x="6291072" y="2121408"/>
+            <a:ext cx="2121408" cy="256032"/>
+          </a:xfrm>
+          <a:prstGeom prst="rect">
+            <a:avLst/>
+          </a:prstGeom>
+          <a:noFill/>
+          <a:ln/>
+        </p:spPr>
+        <p:txBody>
+          <a:bodyPr wrap="square" lIns="0" tIns="0" rIns="0" bIns="0" rtlCol="0" anchor="t"/>
+          <a:lstStyle/>
+          <a:p>
+            <a:pPr indent="0" marL="0">
+              <a:buNone/>
+            </a:pPr>
+            <a:r>
+              <a:rPr lang="en-US" sz="1300" b="1" dirty="0">
+                <a:solidFill>
+                  <a:srgbClr val="272E52"/>
+                </a:solidFill>
+                <a:latin typeface="Arial" pitchFamily="34" charset="0"/>
+                <a:ea typeface="Arial" pitchFamily="34" charset="-122"/>
+                <a:cs typeface="Arial" pitchFamily="34" charset="-120"/>
+              </a:rPr>
+              <a:t>Vorbereiten</a:t>
+            </a:r>
+            <a:endParaRPr lang="en-US" sz="1300" dirty="0"/>
+          </a:p>
+        </p:txBody>
+      </p:sp>
+      <p:sp>
+        <p:nvSpPr>
+          <p:cNvPr id="17" name="Text 15"/>
+          <p:cNvSpPr/>
+          <p:nvPr/>
+        </p:nvSpPr>
+        <p:spPr>
+          <a:xfrm>
+            <a:off x="6291072" y="2423160"/>
+            <a:ext cx="2121408" cy="1353312"/>
+          </a:xfrm>
+          <a:prstGeom prst="rect">
+            <a:avLst/>
+          </a:prstGeom>
+          <a:noFill/>
+          <a:ln/>
+        </p:spPr>
+        <p:txBody>
+          <a:bodyPr wrap="square" lIns="0" tIns="0" rIns="0" bIns="0" rtlCol="0" anchor="t"/>
+          <a:lstStyle/>
+          <a:p>
+            <a:pPr indent="0" marL="0">
+              <a:lnSpc>
+                <a:spcPct val="92000"/>
+              </a:lnSpc>
+              <a:buNone/>
+            </a:pPr>
+            <a:r>
+              <a:rPr lang="en-US" sz="1150" dirty="0">
+                <a:solidFill>
+                  <a:srgbClr val="434A63"/>
+                </a:solidFill>
+                <a:latin typeface="Arial" pitchFamily="34" charset="0"/>
+                <a:ea typeface="Arial" pitchFamily="34" charset="-122"/>
+                <a:cs typeface="Arial" pitchFamily="34" charset="-120"/>
+              </a:rPr>
+              <a:t>Am Montag rechnen wir Subnetze. Bringt Papier, Stift und einen wachen Kopf mit – Taschenrechner braucht ihr nicht.</a:t>
+            </a:r>
+            <a:endParaRPr lang="en-US" sz="1150" dirty="0"/>
+          </a:p>
+        </p:txBody>
+      </p:sp>
+      <p:sp>
+        <p:nvSpPr>
+          <p:cNvPr id="18" name="Shape 16"/>
+          <p:cNvSpPr/>
+          <p:nvPr/>
+        </p:nvSpPr>
+        <p:spPr>
+          <a:xfrm>
+            <a:off x="566928" y="4160520"/>
+            <a:ext cx="32004" cy="256032"/>
+          </a:xfrm>
+          <a:prstGeom prst="rect">
+            <a:avLst/>
+          </a:prstGeom>
+          <a:solidFill>
+            <a:srgbClr val="3843AF"/>
+          </a:solidFill>
+          <a:ln/>
+        </p:spPr>
+      </p:sp>
+      <p:sp>
+        <p:nvSpPr>
+          <p:cNvPr id="19" name="Text 17"/>
+          <p:cNvSpPr/>
+          <p:nvPr/>
+        </p:nvSpPr>
+        <p:spPr>
+          <a:xfrm>
+            <a:off x="749808" y="4114800"/>
+            <a:ext cx="7827264" cy="402336"/>
+          </a:xfrm>
+          <a:prstGeom prst="rect">
+            <a:avLst/>
+          </a:prstGeom>
+          <a:noFill/>
+          <a:ln/>
+        </p:spPr>
+        <p:txBody>
+          <a:bodyPr wrap="square" lIns="0" tIns="0" rIns="0" bIns="0" rtlCol="0" anchor="ctr"/>
+          <a:lstStyle/>
+          <a:p>
+            <a:pPr indent="0" marL="0">
+              <a:buNone/>
+            </a:pPr>
+            <a:r>
+              <a:rPr lang="en-US" sz="1200" b="1" dirty="0">
+                <a:solidFill>
+                  <a:srgbClr val="434A63"/>
+                </a:solidFill>
+                <a:latin typeface="Arial" pitchFamily="34" charset="0"/>
+                <a:ea typeface="Arial" pitchFamily="34" charset="-122"/>
+                <a:cs typeface="Arial" pitchFamily="34" charset="-120"/>
+              </a:rPr>
+              <a:t>Nächster Termin: Montag, 31. August, 18:00 Uhr – Adressierung und Subnetting.</a:t>
+            </a:r>
+            <a:endParaRPr lang="en-US" sz="1200" dirty="0"/>
+          </a:p>
+        </p:txBody>
+      </p:sp>
+      <p:sp>
+        <p:nvSpPr>
+          <p:cNvPr id="20" name="Shape 18"/>
+          <p:cNvSpPr/>
+          <p:nvPr/>
+        </p:nvSpPr>
+        <p:spPr>
+          <a:xfrm>
+            <a:off x="566928" y="4631436"/>
+            <a:ext cx="8010144" cy="0"/>
+          </a:xfrm>
+          <a:prstGeom prst="line">
+            <a:avLst/>
+          </a:prstGeom>
+          <a:noFill/>
+          <a:ln w="9525">
+            <a:solidFill>
+              <a:srgbClr val="DFE3F0"/>
+            </a:solidFill>
+            <a:prstDash val="solid"/>
+          </a:ln>
+        </p:spPr>
+      </p:sp>
+      <p:sp>
+        <p:nvSpPr>
+          <p:cNvPr id="21" name="Text 19"/>
+          <p:cNvSpPr/>
+          <p:nvPr/>
+        </p:nvSpPr>
+        <p:spPr>
+          <a:xfrm>
+            <a:off x="566928" y="4722876"/>
+            <a:ext cx="5029200" cy="237744"/>
+          </a:xfrm>
+          <a:prstGeom prst="rect">
+            <a:avLst/>
+          </a:prstGeom>
+          <a:noFill/>
+          <a:ln/>
+        </p:spPr>
+        <p:txBody>
+          <a:bodyPr wrap="square" lIns="0" tIns="0" rIns="0" bIns="0" rtlCol="0" anchor="ctr"/>
+          <a:lstStyle/>
+          <a:p>
+            <a:pPr indent="0" marL="0">
+              <a:buNone/>
+            </a:pPr>
+            <a:r>
+              <a:rPr lang="en-US" sz="1050" spc="30" kern="0" dirty="0">
+                <a:solidFill>
+                  <a:srgbClr val="5C6377"/>
+                </a:solidFill>
+                <a:latin typeface="Arial" pitchFamily="34" charset="0"/>
+                <a:ea typeface="Arial" pitchFamily="34" charset="-122"/>
+                <a:cs typeface="Arial" pitchFamily="34" charset="-120"/>
+              </a:rPr>
+              <a:t>Abschluss</a:t>
+            </a:r>
+            <a:endParaRPr lang="en-US" sz="1050" dirty="0"/>
+          </a:p>
+        </p:txBody>
+      </p:sp>
+      <p:sp>
+        <p:nvSpPr>
+          <p:cNvPr id="22" name="Text 20"/>
+          <p:cNvSpPr/>
+          <p:nvPr/>
+        </p:nvSpPr>
+        <p:spPr>
+          <a:xfrm>
+            <a:off x="8028432" y="4722876"/>
+            <a:ext cx="548640" cy="237744"/>
+          </a:xfrm>
+          <a:prstGeom prst="rect">
+            <a:avLst/>
+          </a:prstGeom>
+          <a:noFill/>
+          <a:ln/>
+        </p:spPr>
+        <p:txBody>
+          <a:bodyPr wrap="square" lIns="0" tIns="0" rIns="0" bIns="0" rtlCol="0" anchor="ctr"/>
+          <a:lstStyle/>
+          <a:p>
+            <a:pPr algn="r" indent="0" marL="0">
+              <a:buNone/>
+            </a:pPr>
+            <a:r>
+              <a:rPr lang="en-US" sz="1050" dirty="0">
+                <a:solidFill>
+                  <a:srgbClr val="5C6377"/>
+                </a:solidFill>
+                <a:latin typeface="Arial" pitchFamily="34" charset="0"/>
+                <a:ea typeface="Arial" pitchFamily="34" charset="-122"/>
+                <a:cs typeface="Arial" pitchFamily="34" charset="-120"/>
+              </a:rPr>
+              <a:t>27/27</a:t>
+            </a:r>
+            <a:endParaRPr lang="en-US" sz="1050" dirty="0"/>
+          </a:p>
+        </p:txBody>
+      </p:sp>
+    </p:spTree>
+  </p:cSld>
+  <p:clrMapOvr>
+    <a:masterClrMapping/>
+  </p:clrMapOvr>
+</p:sld>
+</file>
+
+<file path=ppt/slides/slide34.xml><?xml version="1.0" encoding="utf-8"?>
+<p:sld xmlns:a="http://schemas.openxmlformats.org/drawingml/2006/main" xmlns:r="http://schemas.openxmlformats.org/officeDocument/2006/relationships" xmlns:p="http://schemas.openxmlformats.org/presentationml/2006/main">
+  <p:cSld name="Slide 34">
     <p:bg>
       <p:bgPr>
         <a:solidFill>
@@ -23532,7 +24155,7 @@
                 <a:ea typeface="Arial" pitchFamily="34" charset="-122"/>
                 <a:cs typeface="Arial" pitchFamily="34" charset="-120"/>
               </a:rPr>
-              <a:t>3/26</a:t>
+              <a:t>3/27</a:t>
             </a:r>
             <a:endParaRPr lang="en-US" sz="1050" dirty="0"/>
           </a:p>
@@ -24433,7 +25056,7 @@
                 <a:ea typeface="Arial" pitchFamily="34" charset="-122"/>
                 <a:cs typeface="Arial" pitchFamily="34" charset="-120"/>
               </a:rPr>
-              <a:t>4/26</a:t>
+              <a:t>4/27</a:t>
             </a:r>
             <a:endParaRPr lang="en-US" sz="1050" dirty="0"/>
           </a:p>
@@ -25242,7 +25865,7 @@
                 <a:ea typeface="Arial" pitchFamily="34" charset="-122"/>
                 <a:cs typeface="Arial" pitchFamily="34" charset="-120"/>
               </a:rPr>
-              <a:t>5/26</a:t>
+              <a:t>5/27</a:t>
             </a:r>
             <a:endParaRPr lang="en-US" sz="1050" dirty="0"/>
           </a:p>
@@ -26244,7 +26867,7 @@
                 <a:ea typeface="Arial" pitchFamily="34" charset="-122"/>
                 <a:cs typeface="Arial" pitchFamily="34" charset="-120"/>
               </a:rPr>
-              <a:t>Wer beide Welten verbindet, muss die Regeln beider Seiten kennen – genau das prüft die IHK.</a:t>
+              <a:t>Wer beide Welten verbindet, muss die Regeln von beiden Seiten kennen.</a:t>
             </a:r>
             <a:endParaRPr lang="en-US" sz="1200" dirty="0"/>
           </a:p>
@@ -26345,7 +26968,7 @@
                 <a:ea typeface="Arial" pitchFamily="34" charset="-122"/>
                 <a:cs typeface="Arial" pitchFamily="34" charset="-120"/>
               </a:rPr>
-              <a:t>6/26</a:t>
+              <a:t>6/27</a:t>
             </a:r>
             <a:endParaRPr lang="en-US" sz="1050" dirty="0"/>
           </a:p>

--- a/folien/dist/01-netzwerke-grundlagen.pptx
+++ b/folien/dist/01-netzwerke-grundlagen.pptx
@@ -33,10 +33,9 @@
     <p:sldId id="281" r:id="rId27"/>
     <p:sldId id="282" r:id="rId28"/>
     <p:sldId id="283" r:id="rId29"/>
-    <p:sldId id="284" r:id="rId30"/>
   </p:sldIdLst>
   <p:notesMasterIdLst>
-    <p:notesMasterId r:id="rId31"/>
+    <p:notesMasterId r:id="rId30"/>
   </p:notesMasterIdLst>
   <p:sldSz cx="9144000" cy="5143500"/>
   <p:notesSz cx="5143500" cy="9144000"/>
@@ -2314,94 +2313,6 @@
             <a:fld id="{F7021451-1387-4CA6-816F-3879F97B5CBC}" type="slidenum">
               <a:rPr lang="en-US"/>
               <a:t>28</a:t>
-            </a:fld>
-            <a:endParaRPr lang="en-US"/>
-          </a:p>
-        </p:txBody>
-      </p:sp>
-    </p:spTree>
-    <p:extLst>
-      <p:ext uri="{BB962C8B-B14F-4D97-AF65-F5344CB8AC3E}">
-        <p14:creationId xmlns:p14="http://schemas.microsoft.com/office/powerpoint/2010/main" val="1024086991"/>
-      </p:ext>
-    </p:extLst>
-  </p:cSld>
-  <p:clrMapOvr>
-    <a:masterClrMapping/>
-  </p:clrMapOvr>
-</p:notes>
-</file>
-
-<file path=ppt/notesSlides/notesSlide29.xml><?xml version="1.0" encoding="utf-8"?>
-<p:notes xmlns:a="http://schemas.openxmlformats.org/drawingml/2006/main" xmlns:r="http://schemas.openxmlformats.org/officeDocument/2006/relationships" xmlns:p="http://schemas.openxmlformats.org/presentationml/2006/main">
-  <p:cSld>
-    <p:spTree>
-      <p:nvGrpSpPr>
-        <p:cNvPr id="1" name=""/>
-        <p:cNvGrpSpPr/>
-        <p:nvPr/>
-      </p:nvGrpSpPr>
-      <p:grpSpPr>
-        <a:xfrm>
-          <a:off x="0" y="0"/>
-          <a:ext cx="0" cy="0"/>
-          <a:chOff x="0" y="0"/>
-          <a:chExt cx="0" cy="0"/>
-        </a:xfrm>
-      </p:grpSpPr>
-      <p:sp>
-        <p:nvSpPr>
-          <p:cNvPr id="2" name="Slide Image Placeholder 1"/>
-          <p:cNvSpPr>
-            <a:spLocks noGrp="1" noRot="1" noChangeAspect="1"/>
-          </p:cNvSpPr>
-          <p:nvPr>
-            <p:ph type="sldImg"/>
-          </p:nvPr>
-        </p:nvSpPr>
-        <p:spPr/>
-      </p:sp>
-      <p:sp>
-        <p:nvSpPr>
-          <p:cNvPr id="3" name="Notes Placeholder 2"/>
-          <p:cNvSpPr>
-            <a:spLocks noGrp="1"/>
-          </p:cNvSpPr>
-          <p:nvPr>
-            <p:ph type="body" idx="1"/>
-          </p:nvPr>
-        </p:nvSpPr>
-        <p:spPr/>
-        <p:txBody>
-          <a:bodyPr/>
-          <a:lstStyle/>
-          <a:p>
-            <a:r>
-              <a:rPr lang="en-US" dirty="0"/>
-              <a:t/>
-            </a:r>
-            <a:endParaRPr lang="en-US" dirty="0"/>
-          </a:p>
-        </p:txBody>
-      </p:sp>
-      <p:sp>
-        <p:nvSpPr>
-          <p:cNvPr id="4" name="Slide Number Placeholder 3"/>
-          <p:cNvSpPr>
-            <a:spLocks noGrp="1"/>
-          </p:cNvSpPr>
-          <p:nvPr>
-            <p:ph type="sldNum" sz="quarter" idx="10"/>
-          </p:nvPr>
-        </p:nvSpPr>
-        <p:spPr/>
-        <p:txBody>
-          <a:bodyPr/>
-          <a:lstStyle/>
-          <a:p>
-            <a:fld id="{F7021451-1387-4CA6-816F-3879F97B5CBC}" type="slidenum">
-              <a:rPr lang="en-US"/>
-              <a:t>29</a:t>
             </a:fld>
             <a:endParaRPr lang="en-US"/>
           </a:p>
@@ -4169,7 +4080,7 @@
                 <a:ea typeface="Arial" pitchFamily="34" charset="-122"/>
                 <a:cs typeface="Arial" pitchFamily="34" charset="-120"/>
               </a:rPr>
-              <a:t>8/22</a:t>
+              <a:t>8/21</a:t>
             </a:r>
             <a:endParaRPr lang="en-US" sz="1050" dirty="0"/>
           </a:p>
@@ -4338,7 +4249,7 @@
                 <a:ea typeface="Arial" pitchFamily="34" charset="-122"/>
                 <a:cs typeface="Arial" pitchFamily="34" charset="-120"/>
               </a:rPr>
-              <a:t>Dieselben Daten heißen auf jeder Schicht anders – und das ist kein Zufall.</a:t>
+              <a:t>Fünf Namen für dieselben Daten. Der Unterschied ist nur, was drumherum steht.</a:t>
             </a:r>
             <a:endParaRPr lang="en-US" sz="1300" dirty="0"/>
           </a:p>
@@ -5283,7 +5194,7 @@
                 <a:ea typeface="Arial" pitchFamily="34" charset="-122"/>
                 <a:cs typeface="Arial" pitchFamily="34" charset="-120"/>
               </a:rPr>
-              <a:t>9/22</a:t>
+              <a:t>9/21</a:t>
             </a:r>
             <a:endParaRPr lang="en-US" sz="1050" dirty="0"/>
           </a:p>
@@ -5901,7 +5812,7 @@
                 <a:ea typeface="Arial" pitchFamily="34" charset="-122"/>
                 <a:cs typeface="Arial" pitchFamily="34" charset="-120"/>
               </a:rPr>
-              <a:t>10/22</a:t>
+              <a:t>10/21</a:t>
             </a:r>
             <a:endParaRPr lang="en-US" sz="1050" dirty="0"/>
           </a:p>
@@ -6341,7 +6252,7 @@
                 <a:ea typeface="Arial" pitchFamily="34" charset="-122"/>
                 <a:cs typeface="Arial" pitchFamily="34" charset="-120"/>
               </a:rPr>
-              <a:t>Jede Schicht löst genau ein Problem und nutzt die Schicht darunter.</a:t>
+              <a:t>Jede Schicht löst ein Problem und nutzt die Schicht darunter.</a:t>
             </a:r>
             <a:endParaRPr lang="en-US" sz="1350" dirty="0"/>
           </a:p>
@@ -6421,7 +6332,7 @@
                 <a:ea typeface="Arial" pitchFamily="34" charset="-122"/>
                 <a:cs typeface="Arial" pitchFamily="34" charset="-120"/>
               </a:rPr>
-              <a:t>Fehler lassen sich eingrenzen, statt zu raten – das ist der Alltagsnutzen.</a:t>
+              <a:t>Fehler lassen sich eingrenzen, statt zu raten. Das ist der Alltagsnutzen.</a:t>
             </a:r>
             <a:endParaRPr lang="en-US" sz="1350" dirty="0"/>
           </a:p>
@@ -6461,7 +6372,7 @@
                 <a:ea typeface="Arial" pitchFamily="34" charset="-122"/>
                 <a:cs typeface="Arial" pitchFamily="34" charset="-120"/>
               </a:rPr>
-              <a:t>Hersteller können unabhängig voneinander entwickeln und bleiben kompatibel.</a:t>
+              <a:t>Auch die Abwehr sitzt schichtweise: Portsicherheit auf 2, Firewall auf 3 und 4, Web-Filter auf 7.</a:t>
             </a:r>
             <a:endParaRPr lang="en-US" sz="1350" dirty="0"/>
           </a:p>
@@ -6683,7 +6594,7 @@
                 <a:ea typeface="Arial" pitchFamily="34" charset="-122"/>
                 <a:cs typeface="Arial" pitchFamily="34" charset="-120"/>
               </a:rPr>
-              <a:t>11/22</a:t>
+              <a:t>11/21</a:t>
             </a:r>
             <a:endParaRPr lang="en-US" sz="1050" dirty="0"/>
           </a:p>
@@ -6997,7 +6908,7 @@
                 <a:ea typeface="Arial" pitchFamily="34" charset="-122"/>
                 <a:cs typeface="Arial" pitchFamily="34" charset="-120"/>
               </a:rPr>
-              <a:t>12/22</a:t>
+              <a:t>12/21</a:t>
             </a:r>
             <a:endParaRPr lang="en-US" sz="1050" dirty="0"/>
           </a:p>
@@ -7334,7 +7245,7 @@
                 <a:ea typeface="Arial" pitchFamily="34" charset="-122"/>
                 <a:cs typeface="Arial" pitchFamily="34" charset="-120"/>
               </a:rPr>
-              <a:t>13/22</a:t>
+              <a:t>13/21</a:t>
             </a:r>
             <a:endParaRPr lang="en-US" sz="1050" dirty="0"/>
           </a:p>
@@ -7425,7 +7336,7 @@
                 <a:ea typeface="Arial" pitchFamily="34" charset="-122"/>
                 <a:cs typeface="Arial" pitchFamily="34" charset="-120"/>
               </a:rPr>
-              <a:t>SCHICHT-DENKEN IM ALLTAG</a:t>
+              <a:t>DER WERKZEUGKASTEN</a:t>
             </a:r>
             <a:endParaRPr lang="en-US" sz="1150" dirty="0"/>
           </a:p>
@@ -7464,81 +7375,66 @@
                 <a:ea typeface="Arial" pitchFamily="34" charset="-122"/>
                 <a:cs typeface="Arial" pitchFamily="34" charset="-120"/>
               </a:rPr>
-              <a:t>Wofür ihr das wirklich braucht</a:t>
+              <a:t>Ein Befehl je Schicht</a:t>
             </a:r>
             <a:endParaRPr lang="en-US" sz="2600" dirty="0"/>
           </a:p>
         </p:txBody>
       </p:sp>
-      <p:sp>
-        <p:nvSpPr>
-          <p:cNvPr id="5" name="Text 3"/>
-          <p:cNvSpPr/>
-          <p:nvPr/>
-        </p:nvSpPr>
-        <p:spPr>
-          <a:xfrm>
-            <a:off x="566928" y="1444752"/>
-            <a:ext cx="8010144" cy="438912"/>
-          </a:xfrm>
-          <a:prstGeom prst="rect">
-            <a:avLst/>
-          </a:prstGeom>
-          <a:noFill/>
-          <a:ln/>
-        </p:spPr>
-        <p:txBody>
-          <a:bodyPr wrap="square" lIns="0" tIns="0" rIns="0" bIns="0" rtlCol="0" anchor="t"/>
-          <a:lstStyle/>
-          <a:p>
-            <a:pPr indent="0" marL="0">
-              <a:buNone/>
-            </a:pPr>
-            <a:r>
-              <a:rPr lang="en-US" sz="1300" dirty="0">
-                <a:solidFill>
-                  <a:srgbClr val="5C6377"/>
-                </a:solidFill>
-                <a:latin typeface="Arial" pitchFamily="34" charset="0"/>
-                <a:ea typeface="Arial" pitchFamily="34" charset="-122"/>
-                <a:cs typeface="Arial" pitchFamily="34" charset="-120"/>
-              </a:rPr>
-              <a:t>Schichten sind nichts zum Auswendiglernen, sondern ein Suchraster für den Alltag.</a:t>
-            </a:r>
-            <a:endParaRPr lang="en-US" sz="1300" dirty="0"/>
-          </a:p>
-        </p:txBody>
-      </p:sp>
-      <p:sp>
-        <p:nvSpPr>
-          <p:cNvPr id="6" name="Shape 4"/>
-          <p:cNvSpPr/>
-          <p:nvPr/>
-        </p:nvSpPr>
-        <p:spPr>
-          <a:xfrm>
-            <a:off x="566928" y="1975104"/>
-            <a:ext cx="2523744" cy="1920240"/>
+      <p:pic>
+        <p:nvPicPr>
+          <p:cNvPr id="5" name="Image 0" descr="/Users/jacobmenge/Desktop/kurs-unterlagen/folien/assets/diagramme/diagnose-leiter.png">    </p:cNvPr>
+          <p:cNvPicPr>
+            <a:picLocks noChangeAspect="1"/>
+          </p:cNvPicPr>
+          <p:nvPr/>
+        </p:nvPicPr>
+        <p:blipFill>
+          <a:blip r:embed="rId1"/>
+          <a:stretch>
+            <a:fillRect/>
+          </a:stretch>
+        </p:blipFill>
+        <p:spPr>
+          <a:xfrm>
+            <a:off x="566928" y="1517904"/>
+            <a:ext cx="8010144" cy="2331720"/>
+          </a:xfrm>
+          <a:prstGeom prst="rect">
+            <a:avLst/>
+          </a:prstGeom>
+        </p:spPr>
+      </p:pic>
+      <p:sp>
+        <p:nvSpPr>
+          <p:cNvPr id="6" name="Shape 3"/>
+          <p:cNvSpPr/>
+          <p:nvPr/>
+        </p:nvSpPr>
+        <p:spPr>
+          <a:xfrm>
+            <a:off x="566928" y="3858768"/>
+            <a:ext cx="8010144" cy="548640"/>
           </a:xfrm>
           <a:prstGeom prst="rect">
             <a:avLst/>
           </a:prstGeom>
           <a:solidFill>
-            <a:srgbClr val="F5F6FC"/>
+            <a:srgbClr val="EEF0FB"/>
           </a:solidFill>
           <a:ln/>
         </p:spPr>
       </p:sp>
       <p:sp>
         <p:nvSpPr>
-          <p:cNvPr id="7" name="Shape 5"/>
-          <p:cNvSpPr/>
-          <p:nvPr/>
-        </p:nvSpPr>
-        <p:spPr>
-          <a:xfrm>
-            <a:off x="566928" y="1975104"/>
-            <a:ext cx="41148" cy="1920240"/>
+          <p:cNvPr id="7" name="Shape 4"/>
+          <p:cNvSpPr/>
+          <p:nvPr/>
+        </p:nvSpPr>
+        <p:spPr>
+          <a:xfrm>
+            <a:off x="566928" y="3858768"/>
+            <a:ext cx="41148" cy="548640"/>
           </a:xfrm>
           <a:prstGeom prst="rect">
             <a:avLst/>
@@ -7551,53 +7447,14 @@
       </p:sp>
       <p:sp>
         <p:nvSpPr>
-          <p:cNvPr id="8" name="Text 6"/>
-          <p:cNvSpPr/>
-          <p:nvPr/>
-        </p:nvSpPr>
-        <p:spPr>
-          <a:xfrm>
-            <a:off x="804672" y="2121408"/>
-            <a:ext cx="2121408" cy="274320"/>
-          </a:xfrm>
-          <a:prstGeom prst="rect">
-            <a:avLst/>
-          </a:prstGeom>
-          <a:noFill/>
-          <a:ln/>
-        </p:spPr>
-        <p:txBody>
-          <a:bodyPr wrap="square" lIns="0" tIns="0" rIns="0" bIns="0" rtlCol="0" anchor="t"/>
-          <a:lstStyle/>
-          <a:p>
-            <a:pPr indent="0" marL="0">
-              <a:buNone/>
-            </a:pPr>
-            <a:r>
-              <a:rPr lang="en-US" sz="1300" b="1" dirty="0">
-                <a:solidFill>
-                  <a:srgbClr val="272E52"/>
-                </a:solidFill>
-                <a:latin typeface="Arial" pitchFamily="34" charset="0"/>
-                <a:ea typeface="Arial" pitchFamily="34" charset="-122"/>
-                <a:cs typeface="Arial" pitchFamily="34" charset="-120"/>
-              </a:rPr>
-              <a:t>Fehlersuche</a:t>
-            </a:r>
-            <a:endParaRPr lang="en-US" sz="1300" dirty="0"/>
-          </a:p>
-        </p:txBody>
-      </p:sp>
-      <p:sp>
-        <p:nvSpPr>
-          <p:cNvPr id="9" name="Text 7"/>
-          <p:cNvSpPr/>
-          <p:nvPr/>
-        </p:nvSpPr>
-        <p:spPr>
-          <a:xfrm>
-            <a:off x="804672" y="2441448"/>
-            <a:ext cx="2121408" cy="1335024"/>
+          <p:cNvPr id="8" name="Text 5"/>
+          <p:cNvSpPr/>
+          <p:nvPr/>
+        </p:nvSpPr>
+        <p:spPr>
+          <a:xfrm>
+            <a:off x="804672" y="4005072"/>
+            <a:ext cx="7607808" cy="283464"/>
           </a:xfrm>
           <a:prstGeom prst="rect">
             <a:avLst/>
@@ -7613,10 +7470,13 @@
               <a:lnSpc>
                 <a:spcPct val="92000"/>
               </a:lnSpc>
-              <a:buNone/>
-            </a:pPr>
-            <a:r>
-              <a:rPr lang="en-US" sz="1150" dirty="0">
+              <a:spcAft>
+                <a:spcPts val="500"/>
+              </a:spcAft>
+              <a:buNone/>
+            </a:pPr>
+            <a:r>
+              <a:rPr lang="en-US" sz="1050" dirty="0">
                 <a:solidFill>
                   <a:srgbClr val="434A63"/>
                 </a:solidFill>
@@ -7624,120 +7484,22 @@
                 <a:ea typeface="Arial" pitchFamily="34" charset="-122"/>
                 <a:cs typeface="Arial" pitchFamily="34" charset="-120"/>
               </a:rPr>
-              <a:t>Von unten nach oben prüfen: Kabel, Adresse, Weg, Port, Dienst. Die erste Schicht, die scheitert, ist die Ursache.</a:t>
-            </a:r>
-            <a:endParaRPr lang="en-US" sz="1150" dirty="0"/>
-          </a:p>
-        </p:txBody>
-      </p:sp>
-      <p:sp>
-        <p:nvSpPr>
-          <p:cNvPr id="10" name="Shape 8"/>
-          <p:cNvSpPr/>
-          <p:nvPr/>
-        </p:nvSpPr>
-        <p:spPr>
-          <a:xfrm>
-            <a:off x="3310128" y="1975104"/>
-            <a:ext cx="2523744" cy="1920240"/>
-          </a:xfrm>
-          <a:prstGeom prst="rect">
-            <a:avLst/>
-          </a:prstGeom>
-          <a:solidFill>
-            <a:srgbClr val="F5F6FC"/>
-          </a:solidFill>
-          <a:ln/>
-        </p:spPr>
-      </p:sp>
-      <p:sp>
-        <p:nvSpPr>
-          <p:cNvPr id="11" name="Shape 9"/>
-          <p:cNvSpPr/>
-          <p:nvPr/>
-        </p:nvSpPr>
-        <p:spPr>
-          <a:xfrm>
-            <a:off x="3310128" y="1975104"/>
-            <a:ext cx="41148" cy="1920240"/>
-          </a:xfrm>
-          <a:prstGeom prst="rect">
-            <a:avLst/>
-          </a:prstGeom>
-          <a:solidFill>
-            <a:srgbClr val="9A6310"/>
-          </a:solidFill>
-          <a:ln/>
-        </p:spPr>
-      </p:sp>
-      <p:sp>
-        <p:nvSpPr>
-          <p:cNvPr id="12" name="Text 10"/>
-          <p:cNvSpPr/>
-          <p:nvPr/>
-        </p:nvSpPr>
-        <p:spPr>
-          <a:xfrm>
-            <a:off x="3547872" y="2121408"/>
-            <a:ext cx="2121408" cy="274320"/>
-          </a:xfrm>
-          <a:prstGeom prst="rect">
-            <a:avLst/>
-          </a:prstGeom>
-          <a:noFill/>
-          <a:ln/>
-        </p:spPr>
-        <p:txBody>
-          <a:bodyPr wrap="square" lIns="0" tIns="0" rIns="0" bIns="0" rtlCol="0" anchor="t"/>
-          <a:lstStyle/>
-          <a:p>
-            <a:pPr indent="0" marL="0">
-              <a:buNone/>
-            </a:pPr>
-            <a:r>
-              <a:rPr lang="en-US" sz="1300" b="1" dirty="0">
-                <a:solidFill>
-                  <a:srgbClr val="272E52"/>
-                </a:solidFill>
-                <a:latin typeface="Arial" pitchFamily="34" charset="0"/>
-                <a:ea typeface="Arial" pitchFamily="34" charset="-122"/>
-                <a:cs typeface="Arial" pitchFamily="34" charset="-120"/>
-              </a:rPr>
-              <a:t>Sicherheit</a:t>
-            </a:r>
-            <a:endParaRPr lang="en-US" sz="1300" dirty="0"/>
-          </a:p>
-        </p:txBody>
-      </p:sp>
-      <p:sp>
-        <p:nvSpPr>
-          <p:cNvPr id="13" name="Text 11"/>
-          <p:cNvSpPr/>
-          <p:nvPr/>
-        </p:nvSpPr>
-        <p:spPr>
-          <a:xfrm>
-            <a:off x="3547872" y="2441448"/>
-            <a:ext cx="2121408" cy="1335024"/>
-          </a:xfrm>
-          <a:prstGeom prst="rect">
-            <a:avLst/>
-          </a:prstGeom>
-          <a:noFill/>
-          <a:ln/>
-        </p:spPr>
-        <p:txBody>
-          <a:bodyPr wrap="square" lIns="0" tIns="0" rIns="0" bIns="0" rtlCol="0" anchor="t"/>
-          <a:lstStyle/>
+              <a:t>macOS: ifconfig · arp -a · traceroute · dig</a:t>
+            </a:r>
+            <a:endParaRPr lang="en-US" sz="1050" dirty="0"/>
+          </a:p>
           <a:p>
             <a:pPr indent="0" marL="0">
               <a:lnSpc>
                 <a:spcPct val="92000"/>
               </a:lnSpc>
-              <a:buNone/>
-            </a:pPr>
-            <a:r>
-              <a:rPr lang="en-US" sz="1150" dirty="0">
+              <a:spcAft>
+                <a:spcPts val="500"/>
+              </a:spcAft>
+              <a:buNone/>
+            </a:pPr>
+            <a:r>
+              <a:rPr lang="en-US" sz="1050" dirty="0">
                 <a:solidFill>
                   <a:srgbClr val="434A63"/>
                 </a:solidFill>
@@ -7745,195 +7507,15 @@
                 <a:ea typeface="Arial" pitchFamily="34" charset="-122"/>
                 <a:cs typeface="Arial" pitchFamily="34" charset="-120"/>
               </a:rPr>
-              <a:t>Jede Schicht hat ihre eigene Abwehr: Portsicherheit auf 2, Firewall auf 3 und 4, Web-Filter auf 7.</a:t>
-            </a:r>
-            <a:endParaRPr lang="en-US" sz="1150" dirty="0"/>
-          </a:p>
-        </p:txBody>
-      </p:sp>
-      <p:sp>
-        <p:nvSpPr>
-          <p:cNvPr id="14" name="Shape 12"/>
-          <p:cNvSpPr/>
-          <p:nvPr/>
-        </p:nvSpPr>
-        <p:spPr>
-          <a:xfrm>
-            <a:off x="6053328" y="1975104"/>
-            <a:ext cx="2523744" cy="1920240"/>
-          </a:xfrm>
-          <a:prstGeom prst="rect">
-            <a:avLst/>
-          </a:prstGeom>
-          <a:solidFill>
-            <a:srgbClr val="F5F6FC"/>
-          </a:solidFill>
-          <a:ln/>
-        </p:spPr>
-      </p:sp>
-      <p:sp>
-        <p:nvSpPr>
-          <p:cNvPr id="15" name="Shape 13"/>
-          <p:cNvSpPr/>
-          <p:nvPr/>
-        </p:nvSpPr>
-        <p:spPr>
-          <a:xfrm>
-            <a:off x="6053328" y="1975104"/>
-            <a:ext cx="41148" cy="1920240"/>
-          </a:xfrm>
-          <a:prstGeom prst="rect">
-            <a:avLst/>
-          </a:prstGeom>
-          <a:solidFill>
-            <a:srgbClr val="3843AF"/>
-          </a:solidFill>
-          <a:ln/>
-        </p:spPr>
-      </p:sp>
-      <p:sp>
-        <p:nvSpPr>
-          <p:cNvPr id="16" name="Text 14"/>
-          <p:cNvSpPr/>
-          <p:nvPr/>
-        </p:nvSpPr>
-        <p:spPr>
-          <a:xfrm>
-            <a:off x="6291072" y="2121408"/>
-            <a:ext cx="2121408" cy="274320"/>
-          </a:xfrm>
-          <a:prstGeom prst="rect">
-            <a:avLst/>
-          </a:prstGeom>
-          <a:noFill/>
-          <a:ln/>
-        </p:spPr>
-        <p:txBody>
-          <a:bodyPr wrap="square" lIns="0" tIns="0" rIns="0" bIns="0" rtlCol="0" anchor="t"/>
-          <a:lstStyle/>
-          <a:p>
-            <a:pPr indent="0" marL="0">
-              <a:buNone/>
-            </a:pPr>
-            <a:r>
-              <a:rPr lang="en-US" sz="1300" b="1" dirty="0">
-                <a:solidFill>
-                  <a:srgbClr val="272E52"/>
-                </a:solidFill>
-                <a:latin typeface="Arial" pitchFamily="34" charset="0"/>
-                <a:ea typeface="Arial" pitchFamily="34" charset="-122"/>
-                <a:cs typeface="Arial" pitchFamily="34" charset="-120"/>
-              </a:rPr>
-              <a:t>Leistung</a:t>
-            </a:r>
-            <a:endParaRPr lang="en-US" sz="1300" dirty="0"/>
-          </a:p>
-        </p:txBody>
-      </p:sp>
-      <p:sp>
-        <p:nvSpPr>
-          <p:cNvPr id="17" name="Text 15"/>
-          <p:cNvSpPr/>
-          <p:nvPr/>
-        </p:nvSpPr>
-        <p:spPr>
-          <a:xfrm>
-            <a:off x="6291072" y="2441448"/>
-            <a:ext cx="2121408" cy="1335024"/>
-          </a:xfrm>
-          <a:prstGeom prst="rect">
-            <a:avLst/>
-          </a:prstGeom>
-          <a:noFill/>
-          <a:ln/>
-        </p:spPr>
-        <p:txBody>
-          <a:bodyPr wrap="square" lIns="0" tIns="0" rIns="0" bIns="0" rtlCol="0" anchor="t"/>
-          <a:lstStyle/>
-          <a:p>
-            <a:pPr indent="0" marL="0">
-              <a:lnSpc>
-                <a:spcPct val="92000"/>
-              </a:lnSpc>
-              <a:buNone/>
-            </a:pPr>
-            <a:r>
-              <a:rPr lang="en-US" sz="1150" dirty="0">
-                <a:solidFill>
-                  <a:srgbClr val="434A63"/>
-                </a:solidFill>
-                <a:latin typeface="Arial" pitchFamily="34" charset="0"/>
-                <a:ea typeface="Arial" pitchFamily="34" charset="-122"/>
-                <a:cs typeface="Arial" pitchFamily="34" charset="-120"/>
-              </a:rPr>
-              <a:t>Langsam heißt selten „das Netz“. Es ist Latenz, Paketverlust oder eine wartende Anwendung.</a:t>
-            </a:r>
-            <a:endParaRPr lang="en-US" sz="1150" dirty="0"/>
-          </a:p>
-        </p:txBody>
-      </p:sp>
-      <p:sp>
-        <p:nvSpPr>
-          <p:cNvPr id="18" name="Shape 16"/>
-          <p:cNvSpPr/>
-          <p:nvPr/>
-        </p:nvSpPr>
-        <p:spPr>
-          <a:xfrm>
-            <a:off x="566928" y="4160520"/>
-            <a:ext cx="32004" cy="256032"/>
-          </a:xfrm>
-          <a:prstGeom prst="rect">
-            <a:avLst/>
-          </a:prstGeom>
-          <a:solidFill>
-            <a:srgbClr val="0F7C86"/>
-          </a:solidFill>
-          <a:ln/>
-        </p:spPr>
-      </p:sp>
-      <p:sp>
-        <p:nvSpPr>
-          <p:cNvPr id="19" name="Text 17"/>
-          <p:cNvSpPr/>
-          <p:nvPr/>
-        </p:nvSpPr>
-        <p:spPr>
-          <a:xfrm>
-            <a:off x="749808" y="4114800"/>
-            <a:ext cx="7827264" cy="402336"/>
-          </a:xfrm>
-          <a:prstGeom prst="rect">
-            <a:avLst/>
-          </a:prstGeom>
-          <a:noFill/>
-          <a:ln/>
-        </p:spPr>
-        <p:txBody>
-          <a:bodyPr wrap="square" lIns="0" tIns="0" rIns="0" bIns="0" rtlCol="0" anchor="ctr"/>
-          <a:lstStyle/>
-          <a:p>
-            <a:pPr indent="0" marL="0">
-              <a:buNone/>
-            </a:pPr>
-            <a:r>
-              <a:rPr lang="en-US" sz="1200" b="1" dirty="0">
-                <a:solidFill>
-                  <a:srgbClr val="434A63"/>
-                </a:solidFill>
-                <a:latin typeface="Arial" pitchFamily="34" charset="0"/>
-                <a:ea typeface="Arial" pitchFamily="34" charset="-122"/>
-                <a:cs typeface="Arial" pitchFamily="34" charset="-120"/>
-              </a:rPr>
-              <a:t>Genau dieses Vorgehen probt ihr gleich im Breakout.</a:t>
-            </a:r>
-            <a:endParaRPr lang="en-US" sz="1200" dirty="0"/>
-          </a:p>
-        </p:txBody>
-      </p:sp>
-      <p:sp>
-        <p:nvSpPr>
-          <p:cNvPr id="20" name="Shape 18"/>
+              <a:t>Linux: ip -brief addr · ip neigh · tracepath · resolvectl query</a:t>
+            </a:r>
+            <a:endParaRPr lang="en-US" sz="1050" dirty="0"/>
+          </a:p>
+        </p:txBody>
+      </p:sp>
+      <p:sp>
+        <p:nvSpPr>
+          <p:cNvPr id="9" name="Shape 6"/>
           <p:cNvSpPr/>
           <p:nvPr/>
         </p:nvSpPr>
@@ -7956,7 +7538,7 @@
       </p:sp>
       <p:sp>
         <p:nvSpPr>
-          <p:cNvPr id="21" name="Text 19"/>
+          <p:cNvPr id="10" name="Text 7"/>
           <p:cNvSpPr/>
           <p:nvPr/>
         </p:nvSpPr>
@@ -7995,7 +7577,7 @@
       </p:sp>
       <p:sp>
         <p:nvSpPr>
-          <p:cNvPr id="22" name="Text 20"/>
+          <p:cNvPr id="11" name="Text 8"/>
           <p:cNvSpPr/>
           <p:nvPr/>
         </p:nvSpPr>
@@ -8026,7 +7608,7 @@
                 <a:ea typeface="Arial" pitchFamily="34" charset="-122"/>
                 <a:cs typeface="Arial" pitchFamily="34" charset="-120"/>
               </a:rPr>
-              <a:t>14/22</a:t>
+              <a:t>14/21</a:t>
             </a:r>
             <a:endParaRPr lang="en-US" sz="1050" dirty="0"/>
           </a:p>
@@ -8072,67 +7654,107 @@
         </p:nvSpPr>
         <p:spPr>
           <a:xfrm>
-            <a:off x="566928" y="201168"/>
+            <a:off x="6355080" y="0"/>
+            <a:ext cx="2788920" cy="5143500"/>
+          </a:xfrm>
+          <a:prstGeom prst="rect">
+            <a:avLst/>
+          </a:prstGeom>
+          <a:solidFill>
+            <a:srgbClr val="FBF2E3"/>
+          </a:solidFill>
+          <a:ln/>
+        </p:spPr>
+      </p:sp>
+      <p:sp>
+        <p:nvSpPr>
+          <p:cNvPr id="3" name="Shape 1"/>
+          <p:cNvSpPr/>
+          <p:nvPr/>
+        </p:nvSpPr>
+        <p:spPr>
+          <a:xfrm>
+            <a:off x="6355080" y="0"/>
+            <a:ext cx="45720" cy="5143500"/>
+          </a:xfrm>
+          <a:prstGeom prst="rect">
+            <a:avLst/>
+          </a:prstGeom>
+          <a:solidFill>
+            <a:srgbClr val="9A6310"/>
+          </a:solidFill>
+          <a:ln/>
+        </p:spPr>
+      </p:sp>
+      <p:sp>
+        <p:nvSpPr>
+          <p:cNvPr id="4" name="Text 2"/>
+          <p:cNvSpPr/>
+          <p:nvPr/>
+        </p:nvSpPr>
+        <p:spPr>
+          <a:xfrm>
+            <a:off x="6629400" y="1463040"/>
+            <a:ext cx="2194560" cy="1737360"/>
+          </a:xfrm>
+          <a:prstGeom prst="rect">
+            <a:avLst/>
+          </a:prstGeom>
+          <a:noFill/>
+          <a:ln/>
+        </p:spPr>
+        <p:txBody>
+          <a:bodyPr wrap="square" lIns="0" tIns="0" rIns="0" bIns="0" rtlCol="0" anchor="ctr"/>
+          <a:lstStyle/>
+          <a:p>
+            <a:pPr algn="ctr" indent="0" marL="0">
+              <a:buNone/>
+            </a:pPr>
+            <a:r>
+              <a:rPr lang="en-US" sz="8400" b="1" dirty="0">
+                <a:solidFill>
+                  <a:srgbClr val="9A6310"/>
+                </a:solidFill>
+                <a:latin typeface="Arial" pitchFamily="34" charset="0"/>
+                <a:ea typeface="Arial" pitchFamily="34" charset="-122"/>
+                <a:cs typeface="Arial" pitchFamily="34" charset="-120"/>
+              </a:rPr>
+              <a:t>04</a:t>
+            </a:r>
+            <a:endParaRPr lang="en-US" sz="8400" dirty="0"/>
+          </a:p>
+        </p:txBody>
+      </p:sp>
+      <p:sp>
+        <p:nvSpPr>
+          <p:cNvPr id="5" name="Shape 3"/>
+          <p:cNvSpPr/>
+          <p:nvPr/>
+        </p:nvSpPr>
+        <p:spPr>
+          <a:xfrm>
+            <a:off x="566928" y="1883664"/>
             <a:ext cx="475488" cy="50292"/>
           </a:xfrm>
           <a:prstGeom prst="rect">
             <a:avLst/>
           </a:prstGeom>
           <a:solidFill>
-            <a:srgbClr val="0F7C86"/>
+            <a:srgbClr val="9A6310"/>
           </a:solidFill>
           <a:ln/>
         </p:spPr>
       </p:sp>
       <p:sp>
         <p:nvSpPr>
-          <p:cNvPr id="3" name="Text 1"/>
-          <p:cNvSpPr/>
-          <p:nvPr/>
-        </p:nvSpPr>
-        <p:spPr>
-          <a:xfrm>
-            <a:off x="566928" y="384048"/>
-            <a:ext cx="8010144" cy="237744"/>
-          </a:xfrm>
-          <a:prstGeom prst="rect">
-            <a:avLst/>
-          </a:prstGeom>
-          <a:noFill/>
-          <a:ln/>
-        </p:spPr>
-        <p:txBody>
-          <a:bodyPr wrap="square" lIns="0" tIns="0" rIns="0" bIns="0" rtlCol="0" anchor="ctr"/>
-          <a:lstStyle/>
-          <a:p>
-            <a:pPr indent="0" marL="0">
-              <a:buNone/>
-            </a:pPr>
-            <a:r>
-              <a:rPr lang="en-US" sz="1150" b="1" spc="180" kern="0" dirty="0">
-                <a:solidFill>
-                  <a:srgbClr val="0F7C86"/>
-                </a:solidFill>
-                <a:latin typeface="Arial" pitchFamily="34" charset="0"/>
-                <a:ea typeface="Arial" pitchFamily="34" charset="-122"/>
-                <a:cs typeface="Arial" pitchFamily="34" charset="-120"/>
-              </a:rPr>
-              <a:t>DER WERKZEUGKASTEN</a:t>
-            </a:r>
-            <a:endParaRPr lang="en-US" sz="1150" dirty="0"/>
-          </a:p>
-        </p:txBody>
-      </p:sp>
-      <p:sp>
-        <p:nvSpPr>
-          <p:cNvPr id="4" name="Text 2"/>
-          <p:cNvSpPr/>
-          <p:nvPr/>
-        </p:nvSpPr>
-        <p:spPr>
-          <a:xfrm>
-            <a:off x="566928" y="731520"/>
-            <a:ext cx="8010144" cy="603504"/>
+          <p:cNvPr id="6" name="Text 4"/>
+          <p:cNvSpPr/>
+          <p:nvPr/>
+        </p:nvSpPr>
+        <p:spPr>
+          <a:xfrm>
+            <a:off x="566928" y="2084832"/>
+            <a:ext cx="5394960" cy="868680"/>
           </a:xfrm>
           <a:prstGeom prst="rect">
             <a:avLst/>
@@ -8148,7 +7770,7 @@
               <a:buNone/>
             </a:pPr>
             <a:r>
-              <a:rPr lang="en-US" sz="2600" b="1" dirty="0">
+              <a:rPr lang="en-US" sz="3000" b="1" dirty="0">
                 <a:solidFill>
                   <a:srgbClr val="272E52"/>
                 </a:solidFill>
@@ -8156,86 +7778,22 @@
                 <a:ea typeface="Arial" pitchFamily="34" charset="-122"/>
                 <a:cs typeface="Arial" pitchFamily="34" charset="-120"/>
               </a:rPr>
-              <a:t>Ein Befehl je Schicht</a:t>
-            </a:r>
-            <a:endParaRPr lang="en-US" sz="2600" dirty="0"/>
-          </a:p>
-        </p:txBody>
-      </p:sp>
-      <p:pic>
-        <p:nvPicPr>
-          <p:cNvPr id="5" name="Image 0" descr="/Users/jacobmenge/Desktop/kurs-unterlagen/folien/assets/diagramme/diagnose-leiter.png">    </p:cNvPr>
-          <p:cNvPicPr>
-            <a:picLocks noChangeAspect="1"/>
-          </p:cNvPicPr>
-          <p:nvPr/>
-        </p:nvPicPr>
-        <p:blipFill>
-          <a:blip r:embed="rId1"/>
-          <a:stretch>
-            <a:fillRect/>
-          </a:stretch>
-        </p:blipFill>
-        <p:spPr>
-          <a:xfrm>
-            <a:off x="566928" y="1517904"/>
-            <a:ext cx="8010144" cy="2331720"/>
-          </a:xfrm>
-          <a:prstGeom prst="rect">
-            <a:avLst/>
-          </a:prstGeom>
-        </p:spPr>
-      </p:pic>
-      <p:sp>
-        <p:nvSpPr>
-          <p:cNvPr id="6" name="Shape 3"/>
-          <p:cNvSpPr/>
-          <p:nvPr/>
-        </p:nvSpPr>
-        <p:spPr>
-          <a:xfrm>
-            <a:off x="566928" y="3931920"/>
-            <a:ext cx="8010144" cy="475488"/>
-          </a:xfrm>
-          <a:prstGeom prst="rect">
-            <a:avLst/>
-          </a:prstGeom>
-          <a:solidFill>
-            <a:srgbClr val="EEF0FB"/>
-          </a:solidFill>
-          <a:ln/>
-        </p:spPr>
-      </p:sp>
-      <p:sp>
-        <p:nvSpPr>
-          <p:cNvPr id="7" name="Shape 4"/>
-          <p:cNvSpPr/>
-          <p:nvPr/>
-        </p:nvSpPr>
-        <p:spPr>
-          <a:xfrm>
-            <a:off x="566928" y="3931920"/>
-            <a:ext cx="41148" cy="475488"/>
-          </a:xfrm>
-          <a:prstGeom prst="rect">
-            <a:avLst/>
-          </a:prstGeom>
-          <a:solidFill>
-            <a:srgbClr val="0F7C86"/>
-          </a:solidFill>
-          <a:ln/>
-        </p:spPr>
-      </p:sp>
-      <p:sp>
-        <p:nvSpPr>
-          <p:cNvPr id="8" name="Text 5"/>
-          <p:cNvSpPr/>
-          <p:nvPr/>
-        </p:nvSpPr>
-        <p:spPr>
-          <a:xfrm>
-            <a:off x="804672" y="4078224"/>
-            <a:ext cx="7607808" cy="210312"/>
+              <a:t>Der Schichten-Check</a:t>
+            </a:r>
+            <a:endParaRPr lang="en-US" sz="3000" dirty="0"/>
+          </a:p>
+        </p:txBody>
+      </p:sp>
+      <p:sp>
+        <p:nvSpPr>
+          <p:cNvPr id="7" name="Text 5"/>
+          <p:cNvSpPr/>
+          <p:nvPr/>
+        </p:nvSpPr>
+        <p:spPr>
+          <a:xfrm>
+            <a:off x="566928" y="3017520"/>
+            <a:ext cx="5394960" cy="548640"/>
           </a:xfrm>
           <a:prstGeom prst="rect">
             <a:avLst/>
@@ -8248,75 +7806,10 @@
           <a:lstStyle/>
           <a:p>
             <a:pPr indent="0" marL="0">
-              <a:lnSpc>
-                <a:spcPct val="92000"/>
-              </a:lnSpc>
-              <a:buNone/>
-            </a:pPr>
-            <a:r>
-              <a:rPr lang="en-US" sz="1100" dirty="0">
-                <a:solidFill>
-                  <a:srgbClr val="434A63"/>
-                </a:solidFill>
-                <a:latin typeface="Arial" pitchFamily="34" charset="0"/>
-                <a:ea typeface="Arial" pitchFamily="34" charset="-122"/>
-                <a:cs typeface="Arial" pitchFamily="34" charset="-120"/>
-              </a:rPr>
-              <a:t>macOS und Linux: ip addr oder ifconfig · traceroute · nc -vz host port · dig statt nslookup.</a:t>
-            </a:r>
-            <a:endParaRPr lang="en-US" sz="1100" dirty="0"/>
-          </a:p>
-        </p:txBody>
-      </p:sp>
-      <p:sp>
-        <p:nvSpPr>
-          <p:cNvPr id="9" name="Shape 6"/>
-          <p:cNvSpPr/>
-          <p:nvPr/>
-        </p:nvSpPr>
-        <p:spPr>
-          <a:xfrm>
-            <a:off x="566928" y="4631436"/>
-            <a:ext cx="8010144" cy="0"/>
-          </a:xfrm>
-          <a:prstGeom prst="line">
-            <a:avLst/>
-          </a:prstGeom>
-          <a:noFill/>
-          <a:ln w="9525">
-            <a:solidFill>
-              <a:srgbClr val="DFE3F0"/>
-            </a:solidFill>
-            <a:prstDash val="solid"/>
-          </a:ln>
-        </p:spPr>
-      </p:sp>
-      <p:sp>
-        <p:nvSpPr>
-          <p:cNvPr id="10" name="Text 7"/>
-          <p:cNvSpPr/>
-          <p:nvPr/>
-        </p:nvSpPr>
-        <p:spPr>
-          <a:xfrm>
-            <a:off x="566928" y="4722876"/>
-            <a:ext cx="5029200" cy="237744"/>
-          </a:xfrm>
-          <a:prstGeom prst="rect">
-            <a:avLst/>
-          </a:prstGeom>
-          <a:noFill/>
-          <a:ln/>
-        </p:spPr>
-        <p:txBody>
-          <a:bodyPr wrap="square" lIns="0" tIns="0" rIns="0" bIns="0" rtlCol="0" anchor="ctr"/>
-          <a:lstStyle/>
-          <a:p>
-            <a:pPr indent="0" marL="0">
-              <a:buNone/>
-            </a:pPr>
-            <a:r>
-              <a:rPr lang="en-US" sz="1050" spc="30" kern="0" dirty="0">
+              <a:buNone/>
+            </a:pPr>
+            <a:r>
+              <a:rPr lang="en-US" sz="1350" dirty="0">
                 <a:solidFill>
                   <a:srgbClr val="5C6377"/>
                 </a:solidFill>
@@ -8324,48 +7817,9 @@
                 <a:ea typeface="Arial" pitchFamily="34" charset="-122"/>
                 <a:cs typeface="Arial" pitchFamily="34" charset="-120"/>
               </a:rPr>
-              <a:t>OSI und TCP/IP</a:t>
-            </a:r>
-            <a:endParaRPr lang="en-US" sz="1050" dirty="0"/>
-          </a:p>
-        </p:txBody>
-      </p:sp>
-      <p:sp>
-        <p:nvSpPr>
-          <p:cNvPr id="11" name="Text 8"/>
-          <p:cNvSpPr/>
-          <p:nvPr/>
-        </p:nvSpPr>
-        <p:spPr>
-          <a:xfrm>
-            <a:off x="8028432" y="4722876"/>
-            <a:ext cx="548640" cy="237744"/>
-          </a:xfrm>
-          <a:prstGeom prst="rect">
-            <a:avLst/>
-          </a:prstGeom>
-          <a:noFill/>
-          <a:ln/>
-        </p:spPr>
-        <p:txBody>
-          <a:bodyPr wrap="square" lIns="0" tIns="0" rIns="0" bIns="0" rtlCol="0" anchor="ctr"/>
-          <a:lstStyle/>
-          <a:p>
-            <a:pPr algn="r" indent="0" marL="0">
-              <a:buNone/>
-            </a:pPr>
-            <a:r>
-              <a:rPr lang="en-US" sz="1050" dirty="0">
-                <a:solidFill>
-                  <a:srgbClr val="5C6377"/>
-                </a:solidFill>
-                <a:latin typeface="Arial" pitchFamily="34" charset="0"/>
-                <a:ea typeface="Arial" pitchFamily="34" charset="-122"/>
-                <a:cs typeface="Arial" pitchFamily="34" charset="-120"/>
-              </a:rPr>
-              <a:t>15/22</a:t>
-            </a:r>
-            <a:endParaRPr lang="en-US" sz="1050" dirty="0"/>
+              <a:t>55 Minuten in Gruppen – euer eigener Rechner ist das Labor</a:t>
+            </a:r>
+            <a:endParaRPr lang="en-US" sz="1350" dirty="0"/>
           </a:p>
         </p:txBody>
       </p:sp>
@@ -9494,7 +8948,7 @@
                 <a:ea typeface="Arial" pitchFamily="34" charset="-122"/>
                 <a:cs typeface="Arial" pitchFamily="34" charset="-120"/>
               </a:rPr>
-              <a:t>1/22</a:t>
+              <a:t>1/21</a:t>
             </a:r>
             <a:endParaRPr lang="en-US" sz="1050" dirty="0"/>
           </a:p>
@@ -9540,28 +8994,8 @@
         </p:nvSpPr>
         <p:spPr>
           <a:xfrm>
-            <a:off x="6355080" y="0"/>
-            <a:ext cx="2788920" cy="5143500"/>
-          </a:xfrm>
-          <a:prstGeom prst="rect">
-            <a:avLst/>
-          </a:prstGeom>
-          <a:solidFill>
-            <a:srgbClr val="FBF2E3"/>
-          </a:solidFill>
-          <a:ln/>
-        </p:spPr>
-      </p:sp>
-      <p:sp>
-        <p:nvSpPr>
-          <p:cNvPr id="3" name="Shape 1"/>
-          <p:cNvSpPr/>
-          <p:nvPr/>
-        </p:nvSpPr>
-        <p:spPr>
-          <a:xfrm>
-            <a:off x="6355080" y="0"/>
-            <a:ext cx="45720" cy="5143500"/>
+            <a:off x="566928" y="201168"/>
+            <a:ext cx="475488" cy="50292"/>
           </a:xfrm>
           <a:prstGeom prst="rect">
             <a:avLst/>
@@ -9574,14 +9008,151 @@
       </p:sp>
       <p:sp>
         <p:nvSpPr>
+          <p:cNvPr id="3" name="Text 1"/>
+          <p:cNvSpPr/>
+          <p:nvPr/>
+        </p:nvSpPr>
+        <p:spPr>
+          <a:xfrm>
+            <a:off x="566928" y="384048"/>
+            <a:ext cx="8010144" cy="237744"/>
+          </a:xfrm>
+          <a:prstGeom prst="rect">
+            <a:avLst/>
+          </a:prstGeom>
+          <a:noFill/>
+          <a:ln/>
+        </p:spPr>
+        <p:txBody>
+          <a:bodyPr wrap="square" lIns="0" tIns="0" rIns="0" bIns="0" rtlCol="0" anchor="ctr"/>
+          <a:lstStyle/>
+          <a:p>
+            <a:pPr indent="0" marL="0">
+              <a:buNone/>
+            </a:pPr>
+            <a:r>
+              <a:rPr lang="en-US" sz="1150" b="1" spc="180" kern="0" dirty="0">
+                <a:solidFill>
+                  <a:srgbClr val="9A6310"/>
+                </a:solidFill>
+                <a:latin typeface="Arial" pitchFamily="34" charset="0"/>
+                <a:ea typeface="Arial" pitchFamily="34" charset="-122"/>
+                <a:cs typeface="Arial" pitchFamily="34" charset="-120"/>
+              </a:rPr>
+              <a:t>BREAKOUT · 55 MINUTEN</a:t>
+            </a:r>
+            <a:endParaRPr lang="en-US" sz="1150" dirty="0"/>
+          </a:p>
+        </p:txBody>
+      </p:sp>
+      <p:sp>
+        <p:nvSpPr>
           <p:cNvPr id="4" name="Text 2"/>
           <p:cNvSpPr/>
           <p:nvPr/>
         </p:nvSpPr>
         <p:spPr>
           <a:xfrm>
-            <a:off x="6629400" y="1463040"/>
-            <a:ext cx="2194560" cy="1737360"/>
+            <a:off x="566928" y="731520"/>
+            <a:ext cx="8010144" cy="603504"/>
+          </a:xfrm>
+          <a:prstGeom prst="rect">
+            <a:avLst/>
+          </a:prstGeom>
+          <a:noFill/>
+          <a:ln/>
+        </p:spPr>
+        <p:txBody>
+          <a:bodyPr wrap="square" lIns="0" tIns="0" rIns="0" bIns="0" rtlCol="0" anchor="t"/>
+          <a:lstStyle/>
+          <a:p>
+            <a:pPr indent="0" marL="0">
+              <a:buNone/>
+            </a:pPr>
+            <a:r>
+              <a:rPr lang="en-US" sz="2600" b="1" dirty="0">
+                <a:solidFill>
+                  <a:srgbClr val="272E52"/>
+                </a:solidFill>
+                <a:latin typeface="Arial" pitchFamily="34" charset="0"/>
+                <a:ea typeface="Arial" pitchFamily="34" charset="-122"/>
+                <a:cs typeface="Arial" pitchFamily="34" charset="-120"/>
+              </a:rPr>
+              <a:t>Der Auftrag</a:t>
+            </a:r>
+            <a:endParaRPr lang="en-US" sz="2600" dirty="0"/>
+          </a:p>
+        </p:txBody>
+      </p:sp>
+      <p:sp>
+        <p:nvSpPr>
+          <p:cNvPr id="5" name="Text 3"/>
+          <p:cNvSpPr/>
+          <p:nvPr/>
+        </p:nvSpPr>
+        <p:spPr>
+          <a:xfrm>
+            <a:off x="566928" y="1444752"/>
+            <a:ext cx="8010144" cy="438912"/>
+          </a:xfrm>
+          <a:prstGeom prst="rect">
+            <a:avLst/>
+          </a:prstGeom>
+          <a:noFill/>
+          <a:ln/>
+        </p:spPr>
+        <p:txBody>
+          <a:bodyPr wrap="square" lIns="0" tIns="0" rIns="0" bIns="0" rtlCol="0" anchor="t"/>
+          <a:lstStyle/>
+          <a:p>
+            <a:pPr indent="0" marL="0">
+              <a:buNone/>
+            </a:pPr>
+            <a:r>
+              <a:rPr lang="en-US" sz="1300" dirty="0">
+                <a:solidFill>
+                  <a:srgbClr val="5C6377"/>
+                </a:solidFill>
+                <a:latin typeface="Arial" pitchFamily="34" charset="0"/>
+                <a:ea typeface="Arial" pitchFamily="34" charset="-122"/>
+                <a:cs typeface="Arial" pitchFamily="34" charset="-120"/>
+              </a:rPr>
+              <a:t>Jetzt messt ihr an eurem eigenen Rechner nach, was wir eben zusammen aufgebaut haben. Nichts zu installieren.</a:t>
+            </a:r>
+            <a:endParaRPr lang="en-US" sz="1300" dirty="0"/>
+          </a:p>
+        </p:txBody>
+      </p:sp>
+      <p:sp>
+        <p:nvSpPr>
+          <p:cNvPr id="6" name="Shape 4"/>
+          <p:cNvSpPr/>
+          <p:nvPr/>
+        </p:nvSpPr>
+        <p:spPr>
+          <a:xfrm>
+            <a:off x="438912" y="1956816"/>
+            <a:ext cx="8266176" cy="365760"/>
+          </a:xfrm>
+          <a:prstGeom prst="rect">
+            <a:avLst/>
+          </a:prstGeom>
+          <a:solidFill>
+            <a:srgbClr val="F5F6FC"/>
+          </a:solidFill>
+          <a:ln/>
+        </p:spPr>
+      </p:sp>
+      <p:sp>
+        <p:nvSpPr>
+          <p:cNvPr id="7" name="Text 5"/>
+          <p:cNvSpPr/>
+          <p:nvPr/>
+        </p:nvSpPr>
+        <p:spPr>
+          <a:xfrm>
+            <a:off x="566928" y="1956816"/>
+            <a:ext cx="868680" cy="365760"/>
           </a:xfrm>
           <a:prstGeom prst="rect">
             <a:avLst/>
@@ -9593,34 +9164,347 @@
           <a:bodyPr wrap="square" lIns="0" tIns="0" rIns="0" bIns="0" rtlCol="0" anchor="ctr"/>
           <a:lstStyle/>
           <a:p>
-            <a:pPr algn="ctr" indent="0" marL="0">
-              <a:buNone/>
-            </a:pPr>
-            <a:r>
-              <a:rPr lang="en-US" sz="8400" b="1" dirty="0">
+            <a:pPr indent="0" marL="0">
+              <a:buNone/>
+            </a:pPr>
+            <a:r>
+              <a:rPr lang="en-US" sz="1200" b="1" dirty="0">
                 <a:solidFill>
                   <a:srgbClr val="9A6310"/>
                 </a:solidFill>
-                <a:latin typeface="Arial" pitchFamily="34" charset="0"/>
-                <a:ea typeface="Arial" pitchFamily="34" charset="-122"/>
-                <a:cs typeface="Arial" pitchFamily="34" charset="-120"/>
-              </a:rPr>
-              <a:t>04</a:t>
-            </a:r>
-            <a:endParaRPr lang="en-US" sz="8400" dirty="0"/>
-          </a:p>
-        </p:txBody>
-      </p:sp>
-      <p:sp>
-        <p:nvSpPr>
-          <p:cNvPr id="5" name="Shape 3"/>
-          <p:cNvSpPr/>
-          <p:nvPr/>
-        </p:nvSpPr>
-        <p:spPr>
-          <a:xfrm>
-            <a:off x="566928" y="1883664"/>
-            <a:ext cx="475488" cy="50292"/>
+                <a:latin typeface="Courier New" pitchFamily="34" charset="0"/>
+                <a:ea typeface="Courier New" pitchFamily="34" charset="-122"/>
+                <a:cs typeface="Courier New" pitchFamily="34" charset="-120"/>
+              </a:rPr>
+              <a:t>8 min</a:t>
+            </a:r>
+            <a:endParaRPr lang="en-US" sz="1200" dirty="0"/>
+          </a:p>
+        </p:txBody>
+      </p:sp>
+      <p:sp>
+        <p:nvSpPr>
+          <p:cNvPr id="8" name="Text 6"/>
+          <p:cNvSpPr/>
+          <p:nvPr/>
+        </p:nvSpPr>
+        <p:spPr>
+          <a:xfrm>
+            <a:off x="1435608" y="1956816"/>
+            <a:ext cx="7141464" cy="365760"/>
+          </a:xfrm>
+          <a:prstGeom prst="rect">
+            <a:avLst/>
+          </a:prstGeom>
+          <a:noFill/>
+          <a:ln/>
+        </p:spPr>
+        <p:txBody>
+          <a:bodyPr wrap="square" lIns="0" tIns="0" rIns="0" bIns="0" rtlCol="0" anchor="ctr"/>
+          <a:lstStyle/>
+          <a:p>
+            <a:pPr indent="0" marL="0">
+              <a:buNone/>
+            </a:pPr>
+            <a:r>
+              <a:rPr lang="en-US" sz="1200" dirty="0">
+                <a:solidFill>
+                  <a:srgbClr val="434A63"/>
+                </a:solidFill>
+                <a:latin typeface="Arial" pitchFamily="34" charset="0"/>
+                <a:ea typeface="Arial" pitchFamily="34" charset="-122"/>
+                <a:cs typeface="Arial" pitchFamily="34" charset="-120"/>
+              </a:rPr>
+              <a:t>Netz-Steckbrief: sechs Werte, jeder auf seine Schicht einsortiert</a:t>
+            </a:r>
+            <a:endParaRPr lang="en-US" sz="1200" dirty="0"/>
+          </a:p>
+        </p:txBody>
+      </p:sp>
+      <p:sp>
+        <p:nvSpPr>
+          <p:cNvPr id="9" name="Text 7"/>
+          <p:cNvSpPr/>
+          <p:nvPr/>
+        </p:nvSpPr>
+        <p:spPr>
+          <a:xfrm>
+            <a:off x="566928" y="2322576"/>
+            <a:ext cx="868680" cy="365760"/>
+          </a:xfrm>
+          <a:prstGeom prst="rect">
+            <a:avLst/>
+          </a:prstGeom>
+          <a:noFill/>
+          <a:ln/>
+        </p:spPr>
+        <p:txBody>
+          <a:bodyPr wrap="square" lIns="0" tIns="0" rIns="0" bIns="0" rtlCol="0" anchor="ctr"/>
+          <a:lstStyle/>
+          <a:p>
+            <a:pPr indent="0" marL="0">
+              <a:buNone/>
+            </a:pPr>
+            <a:r>
+              <a:rPr lang="en-US" sz="1200" b="1" dirty="0">
+                <a:solidFill>
+                  <a:srgbClr val="9A6310"/>
+                </a:solidFill>
+                <a:latin typeface="Courier New" pitchFamily="34" charset="0"/>
+                <a:ea typeface="Courier New" pitchFamily="34" charset="-122"/>
+                <a:cs typeface="Courier New" pitchFamily="34" charset="-120"/>
+              </a:rPr>
+              <a:t>12 min</a:t>
+            </a:r>
+            <a:endParaRPr lang="en-US" sz="1200" dirty="0"/>
+          </a:p>
+        </p:txBody>
+      </p:sp>
+      <p:sp>
+        <p:nvSpPr>
+          <p:cNvPr id="10" name="Text 8"/>
+          <p:cNvSpPr/>
+          <p:nvPr/>
+        </p:nvSpPr>
+        <p:spPr>
+          <a:xfrm>
+            <a:off x="1435608" y="2322576"/>
+            <a:ext cx="7141464" cy="365760"/>
+          </a:xfrm>
+          <a:prstGeom prst="rect">
+            <a:avLst/>
+          </a:prstGeom>
+          <a:noFill/>
+          <a:ln/>
+        </p:spPr>
+        <p:txBody>
+          <a:bodyPr wrap="square" lIns="0" tIns="0" rIns="0" bIns="0" rtlCol="0" anchor="ctr"/>
+          <a:lstStyle/>
+          <a:p>
+            <a:pPr indent="0" marL="0">
+              <a:buNone/>
+            </a:pPr>
+            <a:r>
+              <a:rPr lang="en-US" sz="1200" dirty="0">
+                <a:solidFill>
+                  <a:srgbClr val="434A63"/>
+                </a:solidFill>
+                <a:latin typeface="Arial" pitchFamily="34" charset="0"/>
+                <a:ea typeface="Arial" pitchFamily="34" charset="-122"/>
+                <a:cs typeface="Arial" pitchFamily="34" charset="-120"/>
+              </a:rPr>
+              <a:t>Fünf Befehle – und die Frage, was ein Erfolg jeweils beweist</a:t>
+            </a:r>
+            <a:endParaRPr lang="en-US" sz="1200" dirty="0"/>
+          </a:p>
+        </p:txBody>
+      </p:sp>
+      <p:sp>
+        <p:nvSpPr>
+          <p:cNvPr id="11" name="Shape 9"/>
+          <p:cNvSpPr/>
+          <p:nvPr/>
+        </p:nvSpPr>
+        <p:spPr>
+          <a:xfrm>
+            <a:off x="438912" y="2688336"/>
+            <a:ext cx="8266176" cy="365760"/>
+          </a:xfrm>
+          <a:prstGeom prst="rect">
+            <a:avLst/>
+          </a:prstGeom>
+          <a:solidFill>
+            <a:srgbClr val="F5F6FC"/>
+          </a:solidFill>
+          <a:ln/>
+        </p:spPr>
+      </p:sp>
+      <p:sp>
+        <p:nvSpPr>
+          <p:cNvPr id="12" name="Text 10"/>
+          <p:cNvSpPr/>
+          <p:nvPr/>
+        </p:nvSpPr>
+        <p:spPr>
+          <a:xfrm>
+            <a:off x="566928" y="2688336"/>
+            <a:ext cx="868680" cy="365760"/>
+          </a:xfrm>
+          <a:prstGeom prst="rect">
+            <a:avLst/>
+          </a:prstGeom>
+          <a:noFill/>
+          <a:ln/>
+        </p:spPr>
+        <p:txBody>
+          <a:bodyPr wrap="square" lIns="0" tIns="0" rIns="0" bIns="0" rtlCol="0" anchor="ctr"/>
+          <a:lstStyle/>
+          <a:p>
+            <a:pPr indent="0" marL="0">
+              <a:buNone/>
+            </a:pPr>
+            <a:r>
+              <a:rPr lang="en-US" sz="1200" b="1" dirty="0">
+                <a:solidFill>
+                  <a:srgbClr val="9A6310"/>
+                </a:solidFill>
+                <a:latin typeface="Courier New" pitchFamily="34" charset="0"/>
+                <a:ea typeface="Courier New" pitchFamily="34" charset="-122"/>
+                <a:cs typeface="Courier New" pitchFamily="34" charset="-120"/>
+              </a:rPr>
+              <a:t>20 min</a:t>
+            </a:r>
+            <a:endParaRPr lang="en-US" sz="1200" dirty="0"/>
+          </a:p>
+        </p:txBody>
+      </p:sp>
+      <p:sp>
+        <p:nvSpPr>
+          <p:cNvPr id="13" name="Text 11"/>
+          <p:cNvSpPr/>
+          <p:nvPr/>
+        </p:nvSpPr>
+        <p:spPr>
+          <a:xfrm>
+            <a:off x="1435608" y="2688336"/>
+            <a:ext cx="7141464" cy="365760"/>
+          </a:xfrm>
+          <a:prstGeom prst="rect">
+            <a:avLst/>
+          </a:prstGeom>
+          <a:noFill/>
+          <a:ln/>
+        </p:spPr>
+        <p:txBody>
+          <a:bodyPr wrap="square" lIns="0" tIns="0" rIns="0" bIns="0" rtlCol="0" anchor="ctr"/>
+          <a:lstStyle/>
+          <a:p>
+            <a:pPr indent="0" marL="0">
+              <a:buNone/>
+            </a:pPr>
+            <a:r>
+              <a:rPr lang="en-US" sz="1200" dirty="0">
+                <a:solidFill>
+                  <a:srgbClr val="434A63"/>
+                </a:solidFill>
+                <a:latin typeface="Arial" pitchFamily="34" charset="0"/>
+                <a:ea typeface="Arial" pitchFamily="34" charset="-122"/>
+                <a:cs typeface="Arial" pitchFamily="34" charset="-120"/>
+              </a:rPr>
+              <a:t>Fünf Störungen einsortieren. Das ist der Kern, dafür ist Zeit</a:t>
+            </a:r>
+            <a:endParaRPr lang="en-US" sz="1200" dirty="0"/>
+          </a:p>
+        </p:txBody>
+      </p:sp>
+      <p:sp>
+        <p:nvSpPr>
+          <p:cNvPr id="14" name="Text 12"/>
+          <p:cNvSpPr/>
+          <p:nvPr/>
+        </p:nvSpPr>
+        <p:spPr>
+          <a:xfrm>
+            <a:off x="566928" y="3054096"/>
+            <a:ext cx="868680" cy="365760"/>
+          </a:xfrm>
+          <a:prstGeom prst="rect">
+            <a:avLst/>
+          </a:prstGeom>
+          <a:noFill/>
+          <a:ln/>
+        </p:spPr>
+        <p:txBody>
+          <a:bodyPr wrap="square" lIns="0" tIns="0" rIns="0" bIns="0" rtlCol="0" anchor="ctr"/>
+          <a:lstStyle/>
+          <a:p>
+            <a:pPr indent="0" marL="0">
+              <a:buNone/>
+            </a:pPr>
+            <a:r>
+              <a:rPr lang="en-US" sz="1200" b="1" dirty="0">
+                <a:solidFill>
+                  <a:srgbClr val="9A6310"/>
+                </a:solidFill>
+                <a:latin typeface="Courier New" pitchFamily="34" charset="0"/>
+                <a:ea typeface="Courier New" pitchFamily="34" charset="-122"/>
+                <a:cs typeface="Courier New" pitchFamily="34" charset="-120"/>
+              </a:rPr>
+              <a:t>15 min</a:t>
+            </a:r>
+            <a:endParaRPr lang="en-US" sz="1200" dirty="0"/>
+          </a:p>
+        </p:txBody>
+      </p:sp>
+      <p:sp>
+        <p:nvSpPr>
+          <p:cNvPr id="15" name="Text 13"/>
+          <p:cNvSpPr/>
+          <p:nvPr/>
+        </p:nvSpPr>
+        <p:spPr>
+          <a:xfrm>
+            <a:off x="1435608" y="3054096"/>
+            <a:ext cx="7141464" cy="365760"/>
+          </a:xfrm>
+          <a:prstGeom prst="rect">
+            <a:avLst/>
+          </a:prstGeom>
+          <a:noFill/>
+          <a:ln/>
+        </p:spPr>
+        <p:txBody>
+          <a:bodyPr wrap="square" lIns="0" tIns="0" rIns="0" bIns="0" rtlCol="0" anchor="ctr"/>
+          <a:lstStyle/>
+          <a:p>
+            <a:pPr indent="0" marL="0">
+              <a:buNone/>
+            </a:pPr>
+            <a:r>
+              <a:rPr lang="en-US" sz="1200" dirty="0">
+                <a:solidFill>
+                  <a:srgbClr val="434A63"/>
+                </a:solidFill>
+                <a:latin typeface="Arial" pitchFamily="34" charset="0"/>
+                <a:ea typeface="Arial" pitchFamily="34" charset="-122"/>
+                <a:cs typeface="Arial" pitchFamily="34" charset="-120"/>
+              </a:rPr>
+              <a:t>Eure Wegverfolgungen nebeneinanderlegen und vergleichen</a:t>
+            </a:r>
+            <a:endParaRPr lang="en-US" sz="1200" dirty="0"/>
+          </a:p>
+        </p:txBody>
+      </p:sp>
+      <p:sp>
+        <p:nvSpPr>
+          <p:cNvPr id="16" name="Shape 14"/>
+          <p:cNvSpPr/>
+          <p:nvPr/>
+        </p:nvSpPr>
+        <p:spPr>
+          <a:xfrm>
+            <a:off x="566928" y="3529584"/>
+            <a:ext cx="8010144" cy="877824"/>
+          </a:xfrm>
+          <a:prstGeom prst="rect">
+            <a:avLst/>
+          </a:prstGeom>
+          <a:solidFill>
+            <a:srgbClr val="EEF0FB"/>
+          </a:solidFill>
+          <a:ln/>
+        </p:spPr>
+      </p:sp>
+      <p:sp>
+        <p:nvSpPr>
+          <p:cNvPr id="17" name="Shape 15"/>
+          <p:cNvSpPr/>
+          <p:nvPr/>
+        </p:nvSpPr>
+        <p:spPr>
+          <a:xfrm>
+            <a:off x="566928" y="3529584"/>
+            <a:ext cx="41148" cy="877824"/>
           </a:xfrm>
           <a:prstGeom prst="rect">
             <a:avLst/>
@@ -9633,14 +9517,14 @@
       </p:sp>
       <p:sp>
         <p:nvSpPr>
-          <p:cNvPr id="6" name="Text 4"/>
-          <p:cNvSpPr/>
-          <p:nvPr/>
-        </p:nvSpPr>
-        <p:spPr>
-          <a:xfrm>
-            <a:off x="566928" y="2084832"/>
-            <a:ext cx="5394960" cy="868680"/>
+          <p:cNvPr id="18" name="Text 16"/>
+          <p:cNvSpPr/>
+          <p:nvPr/>
+        </p:nvSpPr>
+        <p:spPr>
+          <a:xfrm>
+            <a:off x="804672" y="3675888"/>
+            <a:ext cx="7607808" cy="219456"/>
           </a:xfrm>
           <a:prstGeom prst="rect">
             <a:avLst/>
@@ -9656,7 +9540,7 @@
               <a:buNone/>
             </a:pPr>
             <a:r>
-              <a:rPr lang="en-US" sz="3000" b="1" dirty="0">
+              <a:rPr lang="en-US" sz="1300" b="1" dirty="0">
                 <a:solidFill>
                   <a:srgbClr val="272E52"/>
                 </a:solidFill>
@@ -9664,22 +9548,22 @@
                 <a:ea typeface="Arial" pitchFamily="34" charset="-122"/>
                 <a:cs typeface="Arial" pitchFamily="34" charset="-120"/>
               </a:rPr>
-              <a:t>Der Schichten-Check</a:t>
-            </a:r>
-            <a:endParaRPr lang="en-US" sz="3000" dirty="0"/>
-          </a:p>
-        </p:txBody>
-      </p:sp>
-      <p:sp>
-        <p:nvSpPr>
-          <p:cNvPr id="7" name="Text 5"/>
-          <p:cNvSpPr/>
-          <p:nvPr/>
-        </p:nvSpPr>
-        <p:spPr>
-          <a:xfrm>
-            <a:off x="566928" y="3017520"/>
-            <a:ext cx="5394960" cy="548640"/>
+              <a:t>Jetzt öffnen – beides braucht ihr gleich im Raum</a:t>
+            </a:r>
+            <a:endParaRPr lang="en-US" sz="1300" dirty="0"/>
+          </a:p>
+        </p:txBody>
+      </p:sp>
+      <p:sp>
+        <p:nvSpPr>
+          <p:cNvPr id="19" name="Text 17"/>
+          <p:cNvSpPr/>
+          <p:nvPr/>
+        </p:nvSpPr>
+        <p:spPr>
+          <a:xfrm>
+            <a:off x="804672" y="3941064"/>
+            <a:ext cx="7607808" cy="347472"/>
           </a:xfrm>
           <a:prstGeom prst="rect">
             <a:avLst/>
@@ -9692,10 +9576,101 @@
           <a:lstStyle/>
           <a:p>
             <a:pPr indent="0" marL="0">
-              <a:buNone/>
-            </a:pPr>
-            <a:r>
-              <a:rPr lang="en-US" sz="1350" dirty="0">
+              <a:lnSpc>
+                <a:spcPct val="92000"/>
+              </a:lnSpc>
+              <a:spcAft>
+                <a:spcPts val="500"/>
+              </a:spcAft>
+              <a:buNone/>
+            </a:pPr>
+            <a:r>
+              <a:rPr lang="en-US" sz="1000" dirty="0">
+                <a:solidFill>
+                  <a:srgbClr val="434A63"/>
+                </a:solidFill>
+                <a:latin typeface="Arial" pitchFamily="34" charset="0"/>
+                <a:ea typeface="Arial" pitchFamily="34" charset="-122"/>
+                <a:cs typeface="Arial" pitchFamily="34" charset="-120"/>
+              </a:rPr>
+              <a:t>Befehle für alle drei Systeme:   jacobmenge.github.io/kurs-unterlagen/netzwerke/praxis-schichten-check/</a:t>
+            </a:r>
+            <a:endParaRPr lang="en-US" sz="1000" dirty="0"/>
+          </a:p>
+          <a:p>
+            <a:pPr indent="0" marL="0">
+              <a:lnSpc>
+                <a:spcPct val="92000"/>
+              </a:lnSpc>
+              <a:spcAft>
+                <a:spcPts val="500"/>
+              </a:spcAft>
+              <a:buNone/>
+            </a:pPr>
+            <a:r>
+              <a:rPr lang="en-US" sz="1000" dirty="0">
+                <a:solidFill>
+                  <a:srgbClr val="434A63"/>
+                </a:solidFill>
+                <a:latin typeface="Arial" pitchFamily="34" charset="0"/>
+                <a:ea typeface="Arial" pitchFamily="34" charset="-122"/>
+                <a:cs typeface="Arial" pitchFamily="34" charset="-120"/>
+              </a:rPr>
+              <a:t>Ergebnisse eintragen:   &lt;Link zum Ergebnis-Dokument hier eintragen&gt;</a:t>
+            </a:r>
+            <a:endParaRPr lang="en-US" sz="1000" dirty="0"/>
+          </a:p>
+        </p:txBody>
+      </p:sp>
+      <p:sp>
+        <p:nvSpPr>
+          <p:cNvPr id="20" name="Shape 18"/>
+          <p:cNvSpPr/>
+          <p:nvPr/>
+        </p:nvSpPr>
+        <p:spPr>
+          <a:xfrm>
+            <a:off x="566928" y="4631436"/>
+            <a:ext cx="8010144" cy="0"/>
+          </a:xfrm>
+          <a:prstGeom prst="line">
+            <a:avLst/>
+          </a:prstGeom>
+          <a:noFill/>
+          <a:ln w="9525">
+            <a:solidFill>
+              <a:srgbClr val="DFE3F0"/>
+            </a:solidFill>
+            <a:prstDash val="solid"/>
+          </a:ln>
+        </p:spPr>
+      </p:sp>
+      <p:sp>
+        <p:nvSpPr>
+          <p:cNvPr id="21" name="Text 19"/>
+          <p:cNvSpPr/>
+          <p:nvPr/>
+        </p:nvSpPr>
+        <p:spPr>
+          <a:xfrm>
+            <a:off x="566928" y="4722876"/>
+            <a:ext cx="5029200" cy="237744"/>
+          </a:xfrm>
+          <a:prstGeom prst="rect">
+            <a:avLst/>
+          </a:prstGeom>
+          <a:noFill/>
+          <a:ln/>
+        </p:spPr>
+        <p:txBody>
+          <a:bodyPr wrap="square" lIns="0" tIns="0" rIns="0" bIns="0" rtlCol="0" anchor="ctr"/>
+          <a:lstStyle/>
+          <a:p>
+            <a:pPr indent="0" marL="0">
+              <a:buNone/>
+            </a:pPr>
+            <a:r>
+              <a:rPr lang="en-US" sz="1050" spc="30" kern="0" dirty="0">
                 <a:solidFill>
                   <a:srgbClr val="5C6377"/>
                 </a:solidFill>
@@ -9703,9 +9678,48 @@
                 <a:ea typeface="Arial" pitchFamily="34" charset="-122"/>
                 <a:cs typeface="Arial" pitchFamily="34" charset="-120"/>
               </a:rPr>
-              <a:t>55 Minuten in Gruppen – euer eigener Rechner ist das Labor</a:t>
-            </a:r>
-            <a:endParaRPr lang="en-US" sz="1350" dirty="0"/>
+              <a:t>Breakout</a:t>
+            </a:r>
+            <a:endParaRPr lang="en-US" sz="1050" dirty="0"/>
+          </a:p>
+        </p:txBody>
+      </p:sp>
+      <p:sp>
+        <p:nvSpPr>
+          <p:cNvPr id="22" name="Text 20"/>
+          <p:cNvSpPr/>
+          <p:nvPr/>
+        </p:nvSpPr>
+        <p:spPr>
+          <a:xfrm>
+            <a:off x="8028432" y="4722876"/>
+            <a:ext cx="548640" cy="237744"/>
+          </a:xfrm>
+          <a:prstGeom prst="rect">
+            <a:avLst/>
+          </a:prstGeom>
+          <a:noFill/>
+          <a:ln/>
+        </p:spPr>
+        <p:txBody>
+          <a:bodyPr wrap="square" lIns="0" tIns="0" rIns="0" bIns="0" rtlCol="0" anchor="ctr"/>
+          <a:lstStyle/>
+          <a:p>
+            <a:pPr algn="r" indent="0" marL="0">
+              <a:buNone/>
+            </a:pPr>
+            <a:r>
+              <a:rPr lang="en-US" sz="1050" dirty="0">
+                <a:solidFill>
+                  <a:srgbClr val="5C6377"/>
+                </a:solidFill>
+                <a:latin typeface="Arial" pitchFamily="34" charset="0"/>
+                <a:ea typeface="Arial" pitchFamily="34" charset="-122"/>
+                <a:cs typeface="Arial" pitchFamily="34" charset="-120"/>
+              </a:rPr>
+              <a:t>15/21</a:t>
+            </a:r>
+            <a:endParaRPr lang="en-US" sz="1050" dirty="0"/>
           </a:p>
         </p:txBody>
       </p:sp>
@@ -9794,7 +9808,7 @@
                 <a:ea typeface="Arial" pitchFamily="34" charset="-122"/>
                 <a:cs typeface="Arial" pitchFamily="34" charset="-120"/>
               </a:rPr>
-              <a:t>BREAKOUT · 55 MINUTEN</a:t>
+              <a:t>SPIELREGELN</a:t>
             </a:r>
             <a:endParaRPr lang="en-US" sz="1150" dirty="0"/>
           </a:p>
@@ -9833,7 +9847,7 @@
                 <a:ea typeface="Arial" pitchFamily="34" charset="-122"/>
                 <a:cs typeface="Arial" pitchFamily="34" charset="-120"/>
               </a:rPr>
-              <a:t>Der Auftrag</a:t>
+              <a:t>So arbeitet ihr</a:t>
             </a:r>
             <a:endParaRPr lang="en-US" sz="2600" dirty="0"/>
           </a:p>
@@ -9847,8 +9861,8 @@
         </p:nvSpPr>
         <p:spPr>
           <a:xfrm>
-            <a:off x="566928" y="1444752"/>
-            <a:ext cx="8010144" cy="438912"/>
+            <a:off x="566928" y="1700784"/>
+            <a:ext cx="8010144" cy="2011680"/>
           </a:xfrm>
           <a:prstGeom prst="rect">
             <a:avLst/>
@@ -9861,20 +9875,203 @@
           <a:lstStyle/>
           <a:p>
             <a:pPr indent="0" marL="0">
-              <a:buNone/>
-            </a:pPr>
-            <a:r>
-              <a:rPr lang="en-US" sz="1300" dirty="0">
-                <a:solidFill>
-                  <a:srgbClr val="5C6377"/>
-                </a:solidFill>
-                <a:latin typeface="Arial" pitchFamily="34" charset="0"/>
-                <a:ea typeface="Arial" pitchFamily="34" charset="-122"/>
-                <a:cs typeface="Arial" pitchFamily="34" charset="-120"/>
-              </a:rPr>
-              <a:t>Jetzt messt ihr an eurem eigenen Rechner nach, was wir eben zusammen aufgebaut haben. Nichts zu installieren.</a:t>
-            </a:r>
-            <a:endParaRPr lang="en-US" sz="1300" dirty="0"/>
+              <a:lnSpc>
+                <a:spcPct val="92000"/>
+              </a:lnSpc>
+              <a:buNone/>
+            </a:pPr>
+            <a:r>
+              <a:rPr lang="en-US" sz="1250" b="1" dirty="0">
+                <a:solidFill>
+                  <a:srgbClr val="9A6310"/>
+                </a:solidFill>
+                <a:latin typeface="Arial" pitchFamily="34" charset="0"/>
+                <a:ea typeface="Arial" pitchFamily="34" charset="-122"/>
+                <a:cs typeface="Arial" pitchFamily="34" charset="-120"/>
+              </a:rPr>
+              <a:t>▸   </a:t>
+            </a:r>
+            <a:pPr indent="0" marL="0">
+              <a:lnSpc>
+                <a:spcPct val="92000"/>
+              </a:lnSpc>
+              <a:spcAft>
+                <a:spcPts val="900"/>
+              </a:spcAft>
+              <a:buNone/>
+            </a:pPr>
+            <a:r>
+              <a:rPr lang="en-US" sz="1250" dirty="0">
+                <a:solidFill>
+                  <a:srgbClr val="434A63"/>
+                </a:solidFill>
+                <a:latin typeface="Arial" pitchFamily="34" charset="0"/>
+                <a:ea typeface="Arial" pitchFamily="34" charset="-122"/>
+                <a:cs typeface="Arial" pitchFamily="34" charset="-120"/>
+              </a:rPr>
+              <a:t>Gruppen zu dritt oder viert. Eine Person teilt den Bildschirm, alle tippen bei sich mit.</a:t>
+            </a:r>
+            <a:endParaRPr lang="en-US" sz="1250" dirty="0"/>
+          </a:p>
+          <a:p>
+            <a:pPr indent="0" marL="0">
+              <a:lnSpc>
+                <a:spcPct val="92000"/>
+              </a:lnSpc>
+              <a:buNone/>
+            </a:pPr>
+            <a:r>
+              <a:rPr lang="en-US" sz="1250" b="1" dirty="0">
+                <a:solidFill>
+                  <a:srgbClr val="9A6310"/>
+                </a:solidFill>
+                <a:latin typeface="Arial" pitchFamily="34" charset="0"/>
+                <a:ea typeface="Arial" pitchFamily="34" charset="-122"/>
+                <a:cs typeface="Arial" pitchFamily="34" charset="-120"/>
+              </a:rPr>
+              <a:t>▸   </a:t>
+            </a:r>
+            <a:pPr indent="0" marL="0">
+              <a:lnSpc>
+                <a:spcPct val="92000"/>
+              </a:lnSpc>
+              <a:spcAft>
+                <a:spcPts val="900"/>
+              </a:spcAft>
+              <a:buNone/>
+            </a:pPr>
+            <a:r>
+              <a:rPr lang="en-US" sz="1250" dirty="0">
+                <a:solidFill>
+                  <a:srgbClr val="434A63"/>
+                </a:solidFill>
+                <a:latin typeface="Arial" pitchFamily="34" charset="0"/>
+                <a:ea typeface="Arial" pitchFamily="34" charset="-122"/>
+                <a:cs typeface="Arial" pitchFamily="34" charset="-120"/>
+              </a:rPr>
+              <a:t>Öffnet den Link zur Kursseite jetzt, bevor die Räume aufgehen – im Breakout-Raum seht ihr diese Folie nicht mehr.</a:t>
+            </a:r>
+            <a:endParaRPr lang="en-US" sz="1250" dirty="0"/>
+          </a:p>
+          <a:p>
+            <a:pPr indent="0" marL="0">
+              <a:lnSpc>
+                <a:spcPct val="92000"/>
+              </a:lnSpc>
+              <a:buNone/>
+            </a:pPr>
+            <a:r>
+              <a:rPr lang="en-US" sz="1250" b="1" dirty="0">
+                <a:solidFill>
+                  <a:srgbClr val="9A6310"/>
+                </a:solidFill>
+                <a:latin typeface="Arial" pitchFamily="34" charset="0"/>
+                <a:ea typeface="Arial" pitchFamily="34" charset="-122"/>
+                <a:cs typeface="Arial" pitchFamily="34" charset="-120"/>
+              </a:rPr>
+              <a:t>▸   </a:t>
+            </a:r>
+            <a:pPr indent="0" marL="0">
+              <a:lnSpc>
+                <a:spcPct val="92000"/>
+              </a:lnSpc>
+              <a:spcAft>
+                <a:spcPts val="900"/>
+              </a:spcAft>
+              <a:buNone/>
+            </a:pPr>
+            <a:r>
+              <a:rPr lang="en-US" sz="1250" dirty="0">
+                <a:solidFill>
+                  <a:srgbClr val="434A63"/>
+                </a:solidFill>
+                <a:latin typeface="Arial" pitchFamily="34" charset="0"/>
+                <a:ea typeface="Arial" pitchFamily="34" charset="-122"/>
+                <a:cs typeface="Arial" pitchFamily="34" charset="-120"/>
+              </a:rPr>
+              <a:t>Sprecher und euer Auswertungsfall stehen fest – bearbeitet trotzdem alle fünf Störungen.</a:t>
+            </a:r>
+            <a:endParaRPr lang="en-US" sz="1250" dirty="0"/>
+          </a:p>
+          <a:p>
+            <a:pPr indent="0" marL="0">
+              <a:lnSpc>
+                <a:spcPct val="92000"/>
+              </a:lnSpc>
+              <a:buNone/>
+            </a:pPr>
+            <a:r>
+              <a:rPr lang="en-US" sz="1250" b="1" dirty="0">
+                <a:solidFill>
+                  <a:srgbClr val="9A6310"/>
+                </a:solidFill>
+                <a:latin typeface="Arial" pitchFamily="34" charset="0"/>
+                <a:ea typeface="Arial" pitchFamily="34" charset="-122"/>
+                <a:cs typeface="Arial" pitchFamily="34" charset="-120"/>
+              </a:rPr>
+              <a:t>▸   </a:t>
+            </a:r>
+            <a:pPr indent="0" marL="0">
+              <a:lnSpc>
+                <a:spcPct val="92000"/>
+              </a:lnSpc>
+              <a:spcAft>
+                <a:spcPts val="900"/>
+              </a:spcAft>
+              <a:buNone/>
+            </a:pPr>
+            <a:r>
+              <a:rPr lang="en-US" sz="1250" dirty="0">
+                <a:solidFill>
+                  <a:srgbClr val="434A63"/>
+                </a:solidFill>
+                <a:latin typeface="Arial" pitchFamily="34" charset="0"/>
+                <a:ea typeface="Arial" pitchFamily="34" charset="-122"/>
+                <a:cs typeface="Arial" pitchFamily="34" charset="-120"/>
+              </a:rPr>
+              <a:t>Windows: PowerShell, nicht die Eingabeaufforderung. Test-NetConnection gibt es nur dort.</a:t>
+            </a:r>
+            <a:endParaRPr lang="en-US" sz="1250" dirty="0"/>
+          </a:p>
+          <a:p>
+            <a:pPr indent="0" marL="0">
+              <a:lnSpc>
+                <a:spcPct val="92000"/>
+              </a:lnSpc>
+              <a:buNone/>
+            </a:pPr>
+            <a:r>
+              <a:rPr lang="en-US" sz="1250" b="1" dirty="0">
+                <a:solidFill>
+                  <a:srgbClr val="9A6310"/>
+                </a:solidFill>
+                <a:latin typeface="Arial" pitchFamily="34" charset="0"/>
+                <a:ea typeface="Arial" pitchFamily="34" charset="-122"/>
+                <a:cs typeface="Arial" pitchFamily="34" charset="-120"/>
+              </a:rPr>
+              <a:t>▸   </a:t>
+            </a:r>
+            <a:pPr indent="0" marL="0">
+              <a:lnSpc>
+                <a:spcPct val="92000"/>
+              </a:lnSpc>
+              <a:spcAft>
+                <a:spcPts val="900"/>
+              </a:spcAft>
+              <a:buNone/>
+            </a:pPr>
+            <a:r>
+              <a:rPr lang="en-US" sz="1250" dirty="0">
+                <a:solidFill>
+                  <a:srgbClr val="434A63"/>
+                </a:solidFill>
+                <a:latin typeface="Arial" pitchFamily="34" charset="0"/>
+                <a:ea typeface="Arial" pitchFamily="34" charset="-122"/>
+                <a:cs typeface="Arial" pitchFamily="34" charset="-120"/>
+              </a:rPr>
+              <a:t>Wenn es klemmt: in eurem Raum auf „Um Hilfe bitten“ klicken. Dann komme ich rein.</a:t>
+            </a:r>
+            <a:endParaRPr lang="en-US" sz="1250" dirty="0"/>
           </a:p>
         </p:txBody>
       </p:sp>
@@ -9886,8 +10083,8 @@
         </p:nvSpPr>
         <p:spPr>
           <a:xfrm>
-            <a:off x="438912" y="2011680"/>
-            <a:ext cx="8266176" cy="402336"/>
+            <a:off x="566928" y="3602736"/>
+            <a:ext cx="8010144" cy="822960"/>
           </a:xfrm>
           <a:prstGeom prst="rect">
             <a:avLst/>
@@ -9900,366 +10097,14 @@
       </p:sp>
       <p:sp>
         <p:nvSpPr>
-          <p:cNvPr id="7" name="Text 5"/>
-          <p:cNvSpPr/>
-          <p:nvPr/>
-        </p:nvSpPr>
-        <p:spPr>
-          <a:xfrm>
-            <a:off x="566928" y="2011680"/>
-            <a:ext cx="868680" cy="402336"/>
-          </a:xfrm>
-          <a:prstGeom prst="rect">
-            <a:avLst/>
-          </a:prstGeom>
-          <a:noFill/>
-          <a:ln/>
-        </p:spPr>
-        <p:txBody>
-          <a:bodyPr wrap="square" lIns="0" tIns="0" rIns="0" bIns="0" rtlCol="0" anchor="ctr"/>
-          <a:lstStyle/>
-          <a:p>
-            <a:pPr indent="0" marL="0">
-              <a:buNone/>
-            </a:pPr>
-            <a:r>
-              <a:rPr lang="en-US" sz="1200" b="1" dirty="0">
-                <a:solidFill>
-                  <a:srgbClr val="9A6310"/>
-                </a:solidFill>
-                <a:latin typeface="Courier New" pitchFamily="34" charset="0"/>
-                <a:ea typeface="Courier New" pitchFamily="34" charset="-122"/>
-                <a:cs typeface="Courier New" pitchFamily="34" charset="-120"/>
-              </a:rPr>
-              <a:t>8 min</a:t>
-            </a:r>
-            <a:endParaRPr lang="en-US" sz="1200" dirty="0"/>
-          </a:p>
-        </p:txBody>
-      </p:sp>
-      <p:sp>
-        <p:nvSpPr>
-          <p:cNvPr id="8" name="Text 6"/>
-          <p:cNvSpPr/>
-          <p:nvPr/>
-        </p:nvSpPr>
-        <p:spPr>
-          <a:xfrm>
-            <a:off x="1435608" y="2011680"/>
-            <a:ext cx="7141464" cy="402336"/>
-          </a:xfrm>
-          <a:prstGeom prst="rect">
-            <a:avLst/>
-          </a:prstGeom>
-          <a:noFill/>
-          <a:ln/>
-        </p:spPr>
-        <p:txBody>
-          <a:bodyPr wrap="square" lIns="0" tIns="0" rIns="0" bIns="0" rtlCol="0" anchor="ctr"/>
-          <a:lstStyle/>
-          <a:p>
-            <a:pPr indent="0" marL="0">
-              <a:buNone/>
-            </a:pPr>
-            <a:r>
-              <a:rPr lang="en-US" sz="1200" dirty="0">
-                <a:solidFill>
-                  <a:srgbClr val="434A63"/>
-                </a:solidFill>
-                <a:latin typeface="Arial" pitchFamily="34" charset="0"/>
-                <a:ea typeface="Arial" pitchFamily="34" charset="-122"/>
-                <a:cs typeface="Arial" pitchFamily="34" charset="-120"/>
-              </a:rPr>
-              <a:t>Netz-Steckbrief: sechs Werte, jeder auf seine Schicht einsortiert</a:t>
-            </a:r>
-            <a:endParaRPr lang="en-US" sz="1200" dirty="0"/>
-          </a:p>
-        </p:txBody>
-      </p:sp>
-      <p:sp>
-        <p:nvSpPr>
-          <p:cNvPr id="9" name="Text 7"/>
-          <p:cNvSpPr/>
-          <p:nvPr/>
-        </p:nvSpPr>
-        <p:spPr>
-          <a:xfrm>
-            <a:off x="566928" y="2414016"/>
-            <a:ext cx="868680" cy="402336"/>
-          </a:xfrm>
-          <a:prstGeom prst="rect">
-            <a:avLst/>
-          </a:prstGeom>
-          <a:noFill/>
-          <a:ln/>
-        </p:spPr>
-        <p:txBody>
-          <a:bodyPr wrap="square" lIns="0" tIns="0" rIns="0" bIns="0" rtlCol="0" anchor="ctr"/>
-          <a:lstStyle/>
-          <a:p>
-            <a:pPr indent="0" marL="0">
-              <a:buNone/>
-            </a:pPr>
-            <a:r>
-              <a:rPr lang="en-US" sz="1200" b="1" dirty="0">
-                <a:solidFill>
-                  <a:srgbClr val="9A6310"/>
-                </a:solidFill>
-                <a:latin typeface="Courier New" pitchFamily="34" charset="0"/>
-                <a:ea typeface="Courier New" pitchFamily="34" charset="-122"/>
-                <a:cs typeface="Courier New" pitchFamily="34" charset="-120"/>
-              </a:rPr>
-              <a:t>12 min</a:t>
-            </a:r>
-            <a:endParaRPr lang="en-US" sz="1200" dirty="0"/>
-          </a:p>
-        </p:txBody>
-      </p:sp>
-      <p:sp>
-        <p:nvSpPr>
-          <p:cNvPr id="10" name="Text 8"/>
-          <p:cNvSpPr/>
-          <p:nvPr/>
-        </p:nvSpPr>
-        <p:spPr>
-          <a:xfrm>
-            <a:off x="1435608" y="2414016"/>
-            <a:ext cx="7141464" cy="402336"/>
-          </a:xfrm>
-          <a:prstGeom prst="rect">
-            <a:avLst/>
-          </a:prstGeom>
-          <a:noFill/>
-          <a:ln/>
-        </p:spPr>
-        <p:txBody>
-          <a:bodyPr wrap="square" lIns="0" tIns="0" rIns="0" bIns="0" rtlCol="0" anchor="ctr"/>
-          <a:lstStyle/>
-          <a:p>
-            <a:pPr indent="0" marL="0">
-              <a:buNone/>
-            </a:pPr>
-            <a:r>
-              <a:rPr lang="en-US" sz="1200" dirty="0">
-                <a:solidFill>
-                  <a:srgbClr val="434A63"/>
-                </a:solidFill>
-                <a:latin typeface="Arial" pitchFamily="34" charset="0"/>
-                <a:ea typeface="Arial" pitchFamily="34" charset="-122"/>
-                <a:cs typeface="Arial" pitchFamily="34" charset="-120"/>
-              </a:rPr>
-              <a:t>Fünf Befehle – und die Frage, was ein Erfolg jeweils beweist</a:t>
-            </a:r>
-            <a:endParaRPr lang="en-US" sz="1200" dirty="0"/>
-          </a:p>
-        </p:txBody>
-      </p:sp>
-      <p:sp>
-        <p:nvSpPr>
-          <p:cNvPr id="11" name="Shape 9"/>
-          <p:cNvSpPr/>
-          <p:nvPr/>
-        </p:nvSpPr>
-        <p:spPr>
-          <a:xfrm>
-            <a:off x="438912" y="2816352"/>
-            <a:ext cx="8266176" cy="402336"/>
-          </a:xfrm>
-          <a:prstGeom prst="rect">
-            <a:avLst/>
-          </a:prstGeom>
-          <a:solidFill>
-            <a:srgbClr val="F5F6FC"/>
-          </a:solidFill>
-          <a:ln/>
-        </p:spPr>
-      </p:sp>
-      <p:sp>
-        <p:nvSpPr>
-          <p:cNvPr id="12" name="Text 10"/>
-          <p:cNvSpPr/>
-          <p:nvPr/>
-        </p:nvSpPr>
-        <p:spPr>
-          <a:xfrm>
-            <a:off x="566928" y="2816352"/>
-            <a:ext cx="868680" cy="402336"/>
-          </a:xfrm>
-          <a:prstGeom prst="rect">
-            <a:avLst/>
-          </a:prstGeom>
-          <a:noFill/>
-          <a:ln/>
-        </p:spPr>
-        <p:txBody>
-          <a:bodyPr wrap="square" lIns="0" tIns="0" rIns="0" bIns="0" rtlCol="0" anchor="ctr"/>
-          <a:lstStyle/>
-          <a:p>
-            <a:pPr indent="0" marL="0">
-              <a:buNone/>
-            </a:pPr>
-            <a:r>
-              <a:rPr lang="en-US" sz="1200" b="1" dirty="0">
-                <a:solidFill>
-                  <a:srgbClr val="9A6310"/>
-                </a:solidFill>
-                <a:latin typeface="Courier New" pitchFamily="34" charset="0"/>
-                <a:ea typeface="Courier New" pitchFamily="34" charset="-122"/>
-                <a:cs typeface="Courier New" pitchFamily="34" charset="-120"/>
-              </a:rPr>
-              <a:t>20 min</a:t>
-            </a:r>
-            <a:endParaRPr lang="en-US" sz="1200" dirty="0"/>
-          </a:p>
-        </p:txBody>
-      </p:sp>
-      <p:sp>
-        <p:nvSpPr>
-          <p:cNvPr id="13" name="Text 11"/>
-          <p:cNvSpPr/>
-          <p:nvPr/>
-        </p:nvSpPr>
-        <p:spPr>
-          <a:xfrm>
-            <a:off x="1435608" y="2816352"/>
-            <a:ext cx="7141464" cy="402336"/>
-          </a:xfrm>
-          <a:prstGeom prst="rect">
-            <a:avLst/>
-          </a:prstGeom>
-          <a:noFill/>
-          <a:ln/>
-        </p:spPr>
-        <p:txBody>
-          <a:bodyPr wrap="square" lIns="0" tIns="0" rIns="0" bIns="0" rtlCol="0" anchor="ctr"/>
-          <a:lstStyle/>
-          <a:p>
-            <a:pPr indent="0" marL="0">
-              <a:buNone/>
-            </a:pPr>
-            <a:r>
-              <a:rPr lang="en-US" sz="1200" dirty="0">
-                <a:solidFill>
-                  <a:srgbClr val="434A63"/>
-                </a:solidFill>
-                <a:latin typeface="Arial" pitchFamily="34" charset="0"/>
-                <a:ea typeface="Arial" pitchFamily="34" charset="-122"/>
-                <a:cs typeface="Arial" pitchFamily="34" charset="-120"/>
-              </a:rPr>
-              <a:t>Fünf Störungen einsortieren. Das ist der Kern, dafür ist Zeit</a:t>
-            </a:r>
-            <a:endParaRPr lang="en-US" sz="1200" dirty="0"/>
-          </a:p>
-        </p:txBody>
-      </p:sp>
-      <p:sp>
-        <p:nvSpPr>
-          <p:cNvPr id="14" name="Text 12"/>
-          <p:cNvSpPr/>
-          <p:nvPr/>
-        </p:nvSpPr>
-        <p:spPr>
-          <a:xfrm>
-            <a:off x="566928" y="3218688"/>
-            <a:ext cx="868680" cy="402336"/>
-          </a:xfrm>
-          <a:prstGeom prst="rect">
-            <a:avLst/>
-          </a:prstGeom>
-          <a:noFill/>
-          <a:ln/>
-        </p:spPr>
-        <p:txBody>
-          <a:bodyPr wrap="square" lIns="0" tIns="0" rIns="0" bIns="0" rtlCol="0" anchor="ctr"/>
-          <a:lstStyle/>
-          <a:p>
-            <a:pPr indent="0" marL="0">
-              <a:buNone/>
-            </a:pPr>
-            <a:r>
-              <a:rPr lang="en-US" sz="1200" b="1" dirty="0">
-                <a:solidFill>
-                  <a:srgbClr val="9A6310"/>
-                </a:solidFill>
-                <a:latin typeface="Courier New" pitchFamily="34" charset="0"/>
-                <a:ea typeface="Courier New" pitchFamily="34" charset="-122"/>
-                <a:cs typeface="Courier New" pitchFamily="34" charset="-120"/>
-              </a:rPr>
-              <a:t>Kür</a:t>
-            </a:r>
-            <a:endParaRPr lang="en-US" sz="1200" dirty="0"/>
-          </a:p>
-        </p:txBody>
-      </p:sp>
-      <p:sp>
-        <p:nvSpPr>
-          <p:cNvPr id="15" name="Text 13"/>
-          <p:cNvSpPr/>
-          <p:nvPr/>
-        </p:nvSpPr>
-        <p:spPr>
-          <a:xfrm>
-            <a:off x="1435608" y="3218688"/>
-            <a:ext cx="7141464" cy="402336"/>
-          </a:xfrm>
-          <a:prstGeom prst="rect">
-            <a:avLst/>
-          </a:prstGeom>
-          <a:noFill/>
-          <a:ln/>
-        </p:spPr>
-        <p:txBody>
-          <a:bodyPr wrap="square" lIns="0" tIns="0" rIns="0" bIns="0" rtlCol="0" anchor="ctr"/>
-          <a:lstStyle/>
-          <a:p>
-            <a:pPr indent="0" marL="0">
-              <a:buNone/>
-            </a:pPr>
-            <a:r>
-              <a:rPr lang="en-US" sz="1200" dirty="0">
-                <a:solidFill>
-                  <a:srgbClr val="434A63"/>
-                </a:solidFill>
-                <a:latin typeface="Arial" pitchFamily="34" charset="0"/>
-                <a:ea typeface="Arial" pitchFamily="34" charset="-122"/>
-                <a:cs typeface="Arial" pitchFamily="34" charset="-120"/>
-              </a:rPr>
-              <a:t>Eure tracert-Ausgaben nebeneinanderlegen und vergleichen</a:t>
-            </a:r>
-            <a:endParaRPr lang="en-US" sz="1200" dirty="0"/>
-          </a:p>
-        </p:txBody>
-      </p:sp>
-      <p:sp>
-        <p:nvSpPr>
-          <p:cNvPr id="16" name="Shape 14"/>
-          <p:cNvSpPr/>
-          <p:nvPr/>
-        </p:nvSpPr>
-        <p:spPr>
-          <a:xfrm>
-            <a:off x="566928" y="3712464"/>
-            <a:ext cx="8010144" cy="694944"/>
-          </a:xfrm>
-          <a:prstGeom prst="rect">
-            <a:avLst/>
-          </a:prstGeom>
-          <a:solidFill>
-            <a:srgbClr val="EEF0FB"/>
-          </a:solidFill>
-          <a:ln/>
-        </p:spPr>
-      </p:sp>
-      <p:sp>
-        <p:nvSpPr>
-          <p:cNvPr id="17" name="Shape 15"/>
-          <p:cNvSpPr/>
-          <p:nvPr/>
-        </p:nvSpPr>
-        <p:spPr>
-          <a:xfrm>
-            <a:off x="566928" y="3712464"/>
-            <a:ext cx="41148" cy="694944"/>
+          <p:cNvPr id="7" name="Shape 5"/>
+          <p:cNvSpPr/>
+          <p:nvPr/>
+        </p:nvSpPr>
+        <p:spPr>
+          <a:xfrm>
+            <a:off x="566928" y="3602736"/>
+            <a:ext cx="41148" cy="822960"/>
           </a:xfrm>
           <a:prstGeom prst="rect">
             <a:avLst/>
@@ -10272,13 +10117,13 @@
       </p:sp>
       <p:sp>
         <p:nvSpPr>
-          <p:cNvPr id="18" name="Text 16"/>
-          <p:cNvSpPr/>
-          <p:nvPr/>
-        </p:nvSpPr>
-        <p:spPr>
-          <a:xfrm>
-            <a:off x="804672" y="3858768"/>
+          <p:cNvPr id="8" name="Text 6"/>
+          <p:cNvSpPr/>
+          <p:nvPr/>
+        </p:nvSpPr>
+        <p:spPr>
+          <a:xfrm>
+            <a:off x="804672" y="3749040"/>
             <a:ext cx="7607808" cy="237744"/>
           </a:xfrm>
           <a:prstGeom prst="rect">
@@ -10303,7 +10148,7 @@
                 <a:ea typeface="Arial" pitchFamily="34" charset="-122"/>
                 <a:cs typeface="Arial" pitchFamily="34" charset="-120"/>
               </a:rPr>
-              <a:t>Alle Befehle zum Kopieren – für Windows, macOS und Linux</a:t>
+              <a:t>Um 20:25 sind alle wieder hier</a:t>
             </a:r>
             <a:endParaRPr lang="en-US" sz="1300" dirty="0"/>
           </a:p>
@@ -10311,14 +10156,14 @@
       </p:sp>
       <p:sp>
         <p:nvSpPr>
-          <p:cNvPr id="19" name="Text 17"/>
-          <p:cNvSpPr/>
-          <p:nvPr/>
-        </p:nvSpPr>
-        <p:spPr>
-          <a:xfrm>
-            <a:off x="804672" y="4142232"/>
-            <a:ext cx="7607808" cy="146304"/>
+          <p:cNvPr id="9" name="Text 7"/>
+          <p:cNvSpPr/>
+          <p:nvPr/>
+        </p:nvSpPr>
+        <p:spPr>
+          <a:xfrm>
+            <a:off x="804672" y="4032504"/>
+            <a:ext cx="7607808" cy="274320"/>
           </a:xfrm>
           <a:prstGeom prst="rect">
             <a:avLst/>
@@ -10345,7 +10190,7 @@
                 <a:ea typeface="Arial" pitchFamily="34" charset="-122"/>
                 <a:cs typeface="Arial" pitchFamily="34" charset="-120"/>
               </a:rPr>
-              <a:t>jacobmenge.github.io/kurs-unterlagen  →  Netzwerke  →  Praxis: Der Schichten-Check</a:t>
+              <a:t>Schreibt mit. Was nicht im Dokument steht, haben wir nachher nicht.</a:t>
             </a:r>
             <a:endParaRPr lang="en-US" sz="1150" dirty="0"/>
           </a:p>
@@ -10353,7 +10198,7 @@
       </p:sp>
       <p:sp>
         <p:nvSpPr>
-          <p:cNvPr id="20" name="Shape 18"/>
+          <p:cNvPr id="10" name="Shape 8"/>
           <p:cNvSpPr/>
           <p:nvPr/>
         </p:nvSpPr>
@@ -10376,7 +10221,7 @@
       </p:sp>
       <p:sp>
         <p:nvSpPr>
-          <p:cNvPr id="21" name="Text 19"/>
+          <p:cNvPr id="11" name="Text 9"/>
           <p:cNvSpPr/>
           <p:nvPr/>
         </p:nvSpPr>
@@ -10415,7 +10260,7 @@
       </p:sp>
       <p:sp>
         <p:nvSpPr>
-          <p:cNvPr id="22" name="Text 20"/>
+          <p:cNvPr id="12" name="Text 10"/>
           <p:cNvSpPr/>
           <p:nvPr/>
         </p:nvSpPr>
@@ -10446,7 +10291,7 @@
                 <a:ea typeface="Arial" pitchFamily="34" charset="-122"/>
                 <a:cs typeface="Arial" pitchFamily="34" charset="-120"/>
               </a:rPr>
-              <a:t>16/22</a:t>
+              <a:t>16/21</a:t>
             </a:r>
             <a:endParaRPr lang="en-US" sz="1050" dirty="0"/>
           </a:p>
@@ -10537,7 +10382,7 @@
                 <a:ea typeface="Arial" pitchFamily="34" charset="-122"/>
                 <a:cs typeface="Arial" pitchFamily="34" charset="-120"/>
               </a:rPr>
-              <a:t>SPIELREGELN</a:t>
+              <a:t>BREAKOUT · STATION 3</a:t>
             </a:r>
             <a:endParaRPr lang="en-US" sz="1150" dirty="0"/>
           </a:p>
@@ -10576,7 +10421,7 @@
                 <a:ea typeface="Arial" pitchFamily="34" charset="-122"/>
                 <a:cs typeface="Arial" pitchFamily="34" charset="-120"/>
               </a:rPr>
-              <a:t>So arbeitet ihr</a:t>
+              <a:t>Die fünf Störungen</a:t>
             </a:r>
             <a:endParaRPr lang="en-US" sz="2600" dirty="0"/>
           </a:p>
@@ -10590,8 +10435,47 @@
         </p:nvSpPr>
         <p:spPr>
           <a:xfrm>
-            <a:off x="566928" y="1700784"/>
-            <a:ext cx="8010144" cy="2011680"/>
+            <a:off x="566928" y="1444752"/>
+            <a:ext cx="8010144" cy="438912"/>
+          </a:xfrm>
+          <a:prstGeom prst="rect">
+            <a:avLst/>
+          </a:prstGeom>
+          <a:noFill/>
+          <a:ln/>
+        </p:spPr>
+        <p:txBody>
+          <a:bodyPr wrap="square" lIns="0" tIns="0" rIns="0" bIns="0" rtlCol="0" anchor="t"/>
+          <a:lstStyle/>
+          <a:p>
+            <a:pPr indent="0" marL="0">
+              <a:buNone/>
+            </a:pPr>
+            <a:r>
+              <a:rPr lang="en-US" sz="1300" dirty="0">
+                <a:solidFill>
+                  <a:srgbClr val="5C6377"/>
+                </a:solidFill>
+                <a:latin typeface="Arial" pitchFamily="34" charset="0"/>
+                <a:ea typeface="Arial" pitchFamily="34" charset="-122"/>
+                <a:cs typeface="Arial" pitchFamily="34" charset="-120"/>
+              </a:rPr>
+              <a:t>Zu jedem Fall drei Antworten: Welche Schicht? Welcher Befehl weist es nach? Und was steckt wahrscheinlich dahinter?</a:t>
+            </a:r>
+            <a:endParaRPr lang="en-US" sz="1300" dirty="0"/>
+          </a:p>
+        </p:txBody>
+      </p:sp>
+      <p:sp>
+        <p:nvSpPr>
+          <p:cNvPr id="6" name="Text 4"/>
+          <p:cNvSpPr/>
+          <p:nvPr/>
+        </p:nvSpPr>
+        <p:spPr>
+          <a:xfrm>
+            <a:off x="566928" y="2103120"/>
+            <a:ext cx="8010144" cy="1737360"/>
           </a:xfrm>
           <a:prstGeom prst="rect">
             <a:avLst/>
@@ -10618,7 +10502,7 @@
                 <a:ea typeface="Arial" pitchFamily="34" charset="-122"/>
                 <a:cs typeface="Arial" pitchFamily="34" charset="-120"/>
               </a:rPr>
-              <a:t>▸   </a:t>
+              <a:t>1   </a:t>
             </a:r>
             <a:pPr indent="0" marL="0">
               <a:lnSpc>
@@ -10638,7 +10522,7 @@
                 <a:ea typeface="Arial" pitchFamily="34" charset="-122"/>
                 <a:cs typeface="Arial" pitchFamily="34" charset="-120"/>
               </a:rPr>
-              <a:t>Gruppen zu dritt oder viert. Eine Person teilt den Bildschirm, alle tippen bei sich mit.</a:t>
+              <a:t>Das Netzwerksymbol zeigt ein Kreuz, es steckt kein Kabel.</a:t>
             </a:r>
             <a:endParaRPr lang="en-US" sz="1250" dirty="0"/>
           </a:p>
@@ -10658,7 +10542,7 @@
                 <a:ea typeface="Arial" pitchFamily="34" charset="-122"/>
                 <a:cs typeface="Arial" pitchFamily="34" charset="-120"/>
               </a:rPr>
-              <a:t>▸   </a:t>
+              <a:t>2   </a:t>
             </a:r>
             <a:pPr indent="0" marL="0">
               <a:lnSpc>
@@ -10678,7 +10562,7 @@
                 <a:ea typeface="Arial" pitchFamily="34" charset="-122"/>
                 <a:cs typeface="Arial" pitchFamily="34" charset="-120"/>
               </a:rPr>
-              <a:t>Öffnet den Link zur Kursseite jetzt, bevor die Räume aufgehen – im Breakout-Raum seht ihr diese Folie nicht mehr.</a:t>
+              <a:t>Der Rechner hat die Adresse 169.254.12.7 und kommt nirgends hin.</a:t>
             </a:r>
             <a:endParaRPr lang="en-US" sz="1250" dirty="0"/>
           </a:p>
@@ -10698,7 +10582,7 @@
                 <a:ea typeface="Arial" pitchFamily="34" charset="-122"/>
                 <a:cs typeface="Arial" pitchFamily="34" charset="-120"/>
               </a:rPr>
-              <a:t>▸   </a:t>
+              <a:t>3   </a:t>
             </a:r>
             <a:pPr indent="0" marL="0">
               <a:lnSpc>
@@ -10718,7 +10602,7 @@
                 <a:ea typeface="Arial" pitchFamily="34" charset="-122"/>
                 <a:cs typeface="Arial" pitchFamily="34" charset="-120"/>
               </a:rPr>
-              <a:t>Bestimmt jemanden, der nachher für eure Gruppe spricht.</a:t>
+              <a:t>ping 8.8.8.8 läuft, ping google.de bringt einen Fehler.</a:t>
             </a:r>
             <a:endParaRPr lang="en-US" sz="1250" dirty="0"/>
           </a:p>
@@ -10738,7 +10622,7 @@
                 <a:ea typeface="Arial" pitchFamily="34" charset="-122"/>
                 <a:cs typeface="Arial" pitchFamily="34" charset="-120"/>
               </a:rPr>
-              <a:t>▸   </a:t>
+              <a:t>4   </a:t>
             </a:r>
             <a:pPr indent="0" marL="0">
               <a:lnSpc>
@@ -10758,7 +10642,7 @@
                 <a:ea typeface="Arial" pitchFamily="34" charset="-122"/>
                 <a:cs typeface="Arial" pitchFamily="34" charset="-120"/>
               </a:rPr>
-              <a:t>Windows: PowerShell, nicht die Eingabeaufforderung. Test-NetConnection gibt es nur dort.</a:t>
+              <a:t>Der Server antwortet auf ping, aber die Webseite lädt nicht.</a:t>
             </a:r>
             <a:endParaRPr lang="en-US" sz="1250" dirty="0"/>
           </a:p>
@@ -10778,7 +10662,7 @@
                 <a:ea typeface="Arial" pitchFamily="34" charset="-122"/>
                 <a:cs typeface="Arial" pitchFamily="34" charset="-120"/>
               </a:rPr>
-              <a:t>▸   </a:t>
+              <a:t>5   </a:t>
             </a:r>
             <a:pPr indent="0" marL="0">
               <a:lnSpc>
@@ -10798,7 +10682,7 @@
                 <a:ea typeface="Arial" pitchFamily="34" charset="-122"/>
                 <a:cs typeface="Arial" pitchFamily="34" charset="-120"/>
               </a:rPr>
-              <a:t>Wenn es klemmt: in eurem Raum auf „Um Hilfe bitten“ klicken. Dann komme ich rein.</a:t>
+              <a:t>Alles ist erreichbar, aber quälend langsam.</a:t>
             </a:r>
             <a:endParaRPr lang="en-US" sz="1250" dirty="0"/>
           </a:p>
@@ -10806,34 +10690,14 @@
       </p:sp>
       <p:sp>
         <p:nvSpPr>
-          <p:cNvPr id="6" name="Shape 4"/>
-          <p:cNvSpPr/>
-          <p:nvPr/>
-        </p:nvSpPr>
-        <p:spPr>
-          <a:xfrm>
-            <a:off x="566928" y="3602736"/>
-            <a:ext cx="8010144" cy="822960"/>
-          </a:xfrm>
-          <a:prstGeom prst="rect">
-            <a:avLst/>
-          </a:prstGeom>
-          <a:solidFill>
-            <a:srgbClr val="F5F6FC"/>
-          </a:solidFill>
-          <a:ln/>
-        </p:spPr>
-      </p:sp>
-      <p:sp>
-        <p:nvSpPr>
           <p:cNvPr id="7" name="Shape 5"/>
           <p:cNvSpPr/>
           <p:nvPr/>
         </p:nvSpPr>
         <p:spPr>
           <a:xfrm>
-            <a:off x="566928" y="3602736"/>
-            <a:ext cx="41148" cy="822960"/>
+            <a:off x="566928" y="4069080"/>
+            <a:ext cx="32004" cy="256032"/>
           </a:xfrm>
           <a:prstGeom prst="rect">
             <a:avLst/>
@@ -10852,66 +10716,24 @@
         </p:nvSpPr>
         <p:spPr>
           <a:xfrm>
-            <a:off x="804672" y="3749040"/>
-            <a:ext cx="7607808" cy="237744"/>
-          </a:xfrm>
-          <a:prstGeom prst="rect">
-            <a:avLst/>
-          </a:prstGeom>
-          <a:noFill/>
-          <a:ln/>
-        </p:spPr>
-        <p:txBody>
-          <a:bodyPr wrap="square" lIns="0" tIns="0" rIns="0" bIns="0" rtlCol="0" anchor="t"/>
-          <a:lstStyle/>
-          <a:p>
-            <a:pPr indent="0" marL="0">
-              <a:buNone/>
-            </a:pPr>
-            <a:r>
-              <a:rPr lang="en-US" sz="1300" b="1" dirty="0">
-                <a:solidFill>
-                  <a:srgbClr val="272E52"/>
-                </a:solidFill>
-                <a:latin typeface="Arial" pitchFamily="34" charset="0"/>
-                <a:ea typeface="Arial" pitchFamily="34" charset="-122"/>
-                <a:cs typeface="Arial" pitchFamily="34" charset="-120"/>
-              </a:rPr>
-              <a:t>Um 20:25 sind alle wieder hier</a:t>
-            </a:r>
-            <a:endParaRPr lang="en-US" sz="1300" dirty="0"/>
-          </a:p>
-        </p:txBody>
-      </p:sp>
-      <p:sp>
-        <p:nvSpPr>
-          <p:cNvPr id="9" name="Text 7"/>
-          <p:cNvSpPr/>
-          <p:nvPr/>
-        </p:nvSpPr>
-        <p:spPr>
-          <a:xfrm>
-            <a:off x="804672" y="4032504"/>
-            <a:ext cx="7607808" cy="274320"/>
-          </a:xfrm>
-          <a:prstGeom prst="rect">
-            <a:avLst/>
-          </a:prstGeom>
-          <a:noFill/>
-          <a:ln/>
-        </p:spPr>
-        <p:txBody>
-          <a:bodyPr wrap="square" lIns="0" tIns="0" rIns="0" bIns="0" rtlCol="0" anchor="t"/>
-          <a:lstStyle/>
-          <a:p>
-            <a:pPr indent="0" marL="0">
-              <a:lnSpc>
-                <a:spcPct val="92000"/>
-              </a:lnSpc>
-              <a:buNone/>
-            </a:pPr>
-            <a:r>
-              <a:rPr lang="en-US" sz="1150" dirty="0">
+            <a:off x="749808" y="4023360"/>
+            <a:ext cx="7827264" cy="402336"/>
+          </a:xfrm>
+          <a:prstGeom prst="rect">
+            <a:avLst/>
+          </a:prstGeom>
+          <a:noFill/>
+          <a:ln/>
+        </p:spPr>
+        <p:txBody>
+          <a:bodyPr wrap="square" lIns="0" tIns="0" rIns="0" bIns="0" rtlCol="0" anchor="ctr"/>
+          <a:lstStyle/>
+          <a:p>
+            <a:pPr indent="0" marL="0">
+              <a:buNone/>
+            </a:pPr>
+            <a:r>
+              <a:rPr lang="en-US" sz="1200" b="1" dirty="0">
                 <a:solidFill>
                   <a:srgbClr val="434A63"/>
                 </a:solidFill>
@@ -10919,15 +10741,15 @@
                 <a:ea typeface="Arial" pitchFamily="34" charset="-122"/>
                 <a:cs typeface="Arial" pitchFamily="34" charset="-120"/>
               </a:rPr>
-              <a:t>Schreibt mit. Was nicht im Dokument steht, haben wir nachher nicht.</a:t>
-            </a:r>
-            <a:endParaRPr lang="en-US" sz="1150" dirty="0"/>
-          </a:p>
-        </p:txBody>
-      </p:sp>
-      <p:sp>
-        <p:nvSpPr>
-          <p:cNvPr id="10" name="Shape 8"/>
+              <a:t>Bei mindestens zweien ist die naheliegende Antwort nicht die vollständige.</a:t>
+            </a:r>
+            <a:endParaRPr lang="en-US" sz="1200" dirty="0"/>
+          </a:p>
+        </p:txBody>
+      </p:sp>
+      <p:sp>
+        <p:nvSpPr>
+          <p:cNvPr id="9" name="Shape 7"/>
           <p:cNvSpPr/>
           <p:nvPr/>
         </p:nvSpPr>
@@ -10950,7 +10772,7 @@
       </p:sp>
       <p:sp>
         <p:nvSpPr>
-          <p:cNvPr id="11" name="Text 9"/>
+          <p:cNvPr id="10" name="Text 8"/>
           <p:cNvSpPr/>
           <p:nvPr/>
         </p:nvSpPr>
@@ -10989,7 +10811,7 @@
       </p:sp>
       <p:sp>
         <p:nvSpPr>
-          <p:cNvPr id="12" name="Text 10"/>
+          <p:cNvPr id="11" name="Text 9"/>
           <p:cNvSpPr/>
           <p:nvPr/>
         </p:nvSpPr>
@@ -11020,7 +10842,7 @@
                 <a:ea typeface="Arial" pitchFamily="34" charset="-122"/>
                 <a:cs typeface="Arial" pitchFamily="34" charset="-120"/>
               </a:rPr>
-              <a:t>17/22</a:t>
+              <a:t>17/21</a:t>
             </a:r>
             <a:endParaRPr lang="en-US" sz="1050" dirty="0"/>
           </a:p>
@@ -11066,67 +10888,107 @@
         </p:nvSpPr>
         <p:spPr>
           <a:xfrm>
-            <a:off x="566928" y="201168"/>
+            <a:off x="6355080" y="0"/>
+            <a:ext cx="2788920" cy="5143500"/>
+          </a:xfrm>
+          <a:prstGeom prst="rect">
+            <a:avLst/>
+          </a:prstGeom>
+          <a:solidFill>
+            <a:srgbClr val="EEF0FB"/>
+          </a:solidFill>
+          <a:ln/>
+        </p:spPr>
+      </p:sp>
+      <p:sp>
+        <p:nvSpPr>
+          <p:cNvPr id="3" name="Shape 1"/>
+          <p:cNvSpPr/>
+          <p:nvPr/>
+        </p:nvSpPr>
+        <p:spPr>
+          <a:xfrm>
+            <a:off x="6355080" y="0"/>
+            <a:ext cx="45720" cy="5143500"/>
+          </a:xfrm>
+          <a:prstGeom prst="rect">
+            <a:avLst/>
+          </a:prstGeom>
+          <a:solidFill>
+            <a:srgbClr val="3843AF"/>
+          </a:solidFill>
+          <a:ln/>
+        </p:spPr>
+      </p:sp>
+      <p:sp>
+        <p:nvSpPr>
+          <p:cNvPr id="4" name="Text 2"/>
+          <p:cNvSpPr/>
+          <p:nvPr/>
+        </p:nvSpPr>
+        <p:spPr>
+          <a:xfrm>
+            <a:off x="6629400" y="1463040"/>
+            <a:ext cx="2194560" cy="1737360"/>
+          </a:xfrm>
+          <a:prstGeom prst="rect">
+            <a:avLst/>
+          </a:prstGeom>
+          <a:noFill/>
+          <a:ln/>
+        </p:spPr>
+        <p:txBody>
+          <a:bodyPr wrap="square" lIns="0" tIns="0" rIns="0" bIns="0" rtlCol="0" anchor="ctr"/>
+          <a:lstStyle/>
+          <a:p>
+            <a:pPr algn="ctr" indent="0" marL="0">
+              <a:buNone/>
+            </a:pPr>
+            <a:r>
+              <a:rPr lang="en-US" sz="8400" b="1" dirty="0">
+                <a:solidFill>
+                  <a:srgbClr val="3843AF"/>
+                </a:solidFill>
+                <a:latin typeface="Arial" pitchFamily="34" charset="0"/>
+                <a:ea typeface="Arial" pitchFamily="34" charset="-122"/>
+                <a:cs typeface="Arial" pitchFamily="34" charset="-120"/>
+              </a:rPr>
+              <a:t>05</a:t>
+            </a:r>
+            <a:endParaRPr lang="en-US" sz="8400" dirty="0"/>
+          </a:p>
+        </p:txBody>
+      </p:sp>
+      <p:sp>
+        <p:nvSpPr>
+          <p:cNvPr id="5" name="Shape 3"/>
+          <p:cNvSpPr/>
+          <p:nvPr/>
+        </p:nvSpPr>
+        <p:spPr>
+          <a:xfrm>
+            <a:off x="566928" y="1883664"/>
             <a:ext cx="475488" cy="50292"/>
           </a:xfrm>
           <a:prstGeom prst="rect">
             <a:avLst/>
           </a:prstGeom>
           <a:solidFill>
-            <a:srgbClr val="9A6310"/>
+            <a:srgbClr val="3843AF"/>
           </a:solidFill>
           <a:ln/>
         </p:spPr>
       </p:sp>
       <p:sp>
         <p:nvSpPr>
-          <p:cNvPr id="3" name="Text 1"/>
-          <p:cNvSpPr/>
-          <p:nvPr/>
-        </p:nvSpPr>
-        <p:spPr>
-          <a:xfrm>
-            <a:off x="566928" y="384048"/>
-            <a:ext cx="8010144" cy="237744"/>
-          </a:xfrm>
-          <a:prstGeom prst="rect">
-            <a:avLst/>
-          </a:prstGeom>
-          <a:noFill/>
-          <a:ln/>
-        </p:spPr>
-        <p:txBody>
-          <a:bodyPr wrap="square" lIns="0" tIns="0" rIns="0" bIns="0" rtlCol="0" anchor="ctr"/>
-          <a:lstStyle/>
-          <a:p>
-            <a:pPr indent="0" marL="0">
-              <a:buNone/>
-            </a:pPr>
-            <a:r>
-              <a:rPr lang="en-US" sz="1150" b="1" spc="180" kern="0" dirty="0">
-                <a:solidFill>
-                  <a:srgbClr val="9A6310"/>
-                </a:solidFill>
-                <a:latin typeface="Arial" pitchFamily="34" charset="0"/>
-                <a:ea typeface="Arial" pitchFamily="34" charset="-122"/>
-                <a:cs typeface="Arial" pitchFamily="34" charset="-120"/>
-              </a:rPr>
-              <a:t>BREAKOUT · STATION 3</a:t>
-            </a:r>
-            <a:endParaRPr lang="en-US" sz="1150" dirty="0"/>
-          </a:p>
-        </p:txBody>
-      </p:sp>
-      <p:sp>
-        <p:nvSpPr>
-          <p:cNvPr id="4" name="Text 2"/>
-          <p:cNvSpPr/>
-          <p:nvPr/>
-        </p:nvSpPr>
-        <p:spPr>
-          <a:xfrm>
-            <a:off x="566928" y="731520"/>
-            <a:ext cx="8010144" cy="603504"/>
+          <p:cNvPr id="6" name="Text 4"/>
+          <p:cNvSpPr/>
+          <p:nvPr/>
+        </p:nvSpPr>
+        <p:spPr>
+          <a:xfrm>
+            <a:off x="566928" y="2084832"/>
+            <a:ext cx="5394960" cy="868680"/>
           </a:xfrm>
           <a:prstGeom prst="rect">
             <a:avLst/>
@@ -11142,7 +11004,7 @@
               <a:buNone/>
             </a:pPr>
             <a:r>
-              <a:rPr lang="en-US" sz="2600" b="1" dirty="0">
+              <a:rPr lang="en-US" sz="3000" b="1" dirty="0">
                 <a:solidFill>
                   <a:srgbClr val="272E52"/>
                 </a:solidFill>
@@ -11150,22 +11012,22 @@
                 <a:ea typeface="Arial" pitchFamily="34" charset="-122"/>
                 <a:cs typeface="Arial" pitchFamily="34" charset="-120"/>
               </a:rPr>
-              <a:t>Die fünf Störungen</a:t>
-            </a:r>
-            <a:endParaRPr lang="en-US" sz="2600" dirty="0"/>
-          </a:p>
-        </p:txBody>
-      </p:sp>
-      <p:sp>
-        <p:nvSpPr>
-          <p:cNvPr id="5" name="Text 3"/>
-          <p:cNvSpPr/>
-          <p:nvPr/>
-        </p:nvSpPr>
-        <p:spPr>
-          <a:xfrm>
-            <a:off x="566928" y="1444752"/>
-            <a:ext cx="8010144" cy="438912"/>
+              <a:t>Zusammentragen</a:t>
+            </a:r>
+            <a:endParaRPr lang="en-US" sz="3000" dirty="0"/>
+          </a:p>
+        </p:txBody>
+      </p:sp>
+      <p:sp>
+        <p:nvSpPr>
+          <p:cNvPr id="7" name="Text 5"/>
+          <p:cNvSpPr/>
+          <p:nvPr/>
+        </p:nvSpPr>
+        <p:spPr>
+          <a:xfrm>
+            <a:off x="566928" y="3017520"/>
+            <a:ext cx="5394960" cy="548640"/>
           </a:xfrm>
           <a:prstGeom prst="rect">
             <a:avLst/>
@@ -11181,7 +11043,7 @@
               <a:buNone/>
             </a:pPr>
             <a:r>
-              <a:rPr lang="en-US" sz="1300" dirty="0">
+              <a:rPr lang="en-US" sz="1350" dirty="0">
                 <a:solidFill>
                   <a:srgbClr val="5C6377"/>
                 </a:solidFill>
@@ -11189,391 +11051,9 @@
                 <a:ea typeface="Arial" pitchFamily="34" charset="-122"/>
                 <a:cs typeface="Arial" pitchFamily="34" charset="-120"/>
               </a:rPr>
-              <a:t>Zu jedem Fall drei Antworten: Welche Schicht? Welcher Befehl weist es nach? Und was steckt wahrscheinlich dahinter?</a:t>
-            </a:r>
-            <a:endParaRPr lang="en-US" sz="1300" dirty="0"/>
-          </a:p>
-        </p:txBody>
-      </p:sp>
-      <p:sp>
-        <p:nvSpPr>
-          <p:cNvPr id="6" name="Text 4"/>
-          <p:cNvSpPr/>
-          <p:nvPr/>
-        </p:nvSpPr>
-        <p:spPr>
-          <a:xfrm>
-            <a:off x="566928" y="2103120"/>
-            <a:ext cx="8010144" cy="1737360"/>
-          </a:xfrm>
-          <a:prstGeom prst="rect">
-            <a:avLst/>
-          </a:prstGeom>
-          <a:noFill/>
-          <a:ln/>
-        </p:spPr>
-        <p:txBody>
-          <a:bodyPr wrap="square" lIns="0" tIns="0" rIns="0" bIns="0" rtlCol="0" anchor="t"/>
-          <a:lstStyle/>
-          <a:p>
-            <a:pPr indent="0" marL="0">
-              <a:lnSpc>
-                <a:spcPct val="92000"/>
-              </a:lnSpc>
-              <a:buNone/>
-            </a:pPr>
-            <a:r>
-              <a:rPr lang="en-US" sz="1250" b="1" dirty="0">
-                <a:solidFill>
-                  <a:srgbClr val="9A6310"/>
-                </a:solidFill>
-                <a:latin typeface="Arial" pitchFamily="34" charset="0"/>
-                <a:ea typeface="Arial" pitchFamily="34" charset="-122"/>
-                <a:cs typeface="Arial" pitchFamily="34" charset="-120"/>
-              </a:rPr>
-              <a:t>1   </a:t>
-            </a:r>
-            <a:pPr indent="0" marL="0">
-              <a:lnSpc>
-                <a:spcPct val="92000"/>
-              </a:lnSpc>
-              <a:spcAft>
-                <a:spcPts val="900"/>
-              </a:spcAft>
-              <a:buNone/>
-            </a:pPr>
-            <a:r>
-              <a:rPr lang="en-US" sz="1250" dirty="0">
-                <a:solidFill>
-                  <a:srgbClr val="434A63"/>
-                </a:solidFill>
-                <a:latin typeface="Arial" pitchFamily="34" charset="0"/>
-                <a:ea typeface="Arial" pitchFamily="34" charset="-122"/>
-                <a:cs typeface="Arial" pitchFamily="34" charset="-120"/>
-              </a:rPr>
-              <a:t>Das Netzwerksymbol zeigt ein Kreuz, es steckt kein Kabel.</a:t>
-            </a:r>
-            <a:endParaRPr lang="en-US" sz="1250" dirty="0"/>
-          </a:p>
-          <a:p>
-            <a:pPr indent="0" marL="0">
-              <a:lnSpc>
-                <a:spcPct val="92000"/>
-              </a:lnSpc>
-              <a:buNone/>
-            </a:pPr>
-            <a:r>
-              <a:rPr lang="en-US" sz="1250" b="1" dirty="0">
-                <a:solidFill>
-                  <a:srgbClr val="9A6310"/>
-                </a:solidFill>
-                <a:latin typeface="Arial" pitchFamily="34" charset="0"/>
-                <a:ea typeface="Arial" pitchFamily="34" charset="-122"/>
-                <a:cs typeface="Arial" pitchFamily="34" charset="-120"/>
-              </a:rPr>
-              <a:t>2   </a:t>
-            </a:r>
-            <a:pPr indent="0" marL="0">
-              <a:lnSpc>
-                <a:spcPct val="92000"/>
-              </a:lnSpc>
-              <a:spcAft>
-                <a:spcPts val="900"/>
-              </a:spcAft>
-              <a:buNone/>
-            </a:pPr>
-            <a:r>
-              <a:rPr lang="en-US" sz="1250" dirty="0">
-                <a:solidFill>
-                  <a:srgbClr val="434A63"/>
-                </a:solidFill>
-                <a:latin typeface="Arial" pitchFamily="34" charset="0"/>
-                <a:ea typeface="Arial" pitchFamily="34" charset="-122"/>
-                <a:cs typeface="Arial" pitchFamily="34" charset="-120"/>
-              </a:rPr>
-              <a:t>Der Rechner hat die Adresse 169.254.12.7 und kommt nirgends hin.</a:t>
-            </a:r>
-            <a:endParaRPr lang="en-US" sz="1250" dirty="0"/>
-          </a:p>
-          <a:p>
-            <a:pPr indent="0" marL="0">
-              <a:lnSpc>
-                <a:spcPct val="92000"/>
-              </a:lnSpc>
-              <a:buNone/>
-            </a:pPr>
-            <a:r>
-              <a:rPr lang="en-US" sz="1250" b="1" dirty="0">
-                <a:solidFill>
-                  <a:srgbClr val="9A6310"/>
-                </a:solidFill>
-                <a:latin typeface="Arial" pitchFamily="34" charset="0"/>
-                <a:ea typeface="Arial" pitchFamily="34" charset="-122"/>
-                <a:cs typeface="Arial" pitchFamily="34" charset="-120"/>
-              </a:rPr>
-              <a:t>3   </a:t>
-            </a:r>
-            <a:pPr indent="0" marL="0">
-              <a:lnSpc>
-                <a:spcPct val="92000"/>
-              </a:lnSpc>
-              <a:spcAft>
-                <a:spcPts val="900"/>
-              </a:spcAft>
-              <a:buNone/>
-            </a:pPr>
-            <a:r>
-              <a:rPr lang="en-US" sz="1250" dirty="0">
-                <a:solidFill>
-                  <a:srgbClr val="434A63"/>
-                </a:solidFill>
-                <a:latin typeface="Arial" pitchFamily="34" charset="0"/>
-                <a:ea typeface="Arial" pitchFamily="34" charset="-122"/>
-                <a:cs typeface="Arial" pitchFamily="34" charset="-120"/>
-              </a:rPr>
-              <a:t>ping 8.8.8.8 läuft, ping google.de bringt einen Fehler.</a:t>
-            </a:r>
-            <a:endParaRPr lang="en-US" sz="1250" dirty="0"/>
-          </a:p>
-          <a:p>
-            <a:pPr indent="0" marL="0">
-              <a:lnSpc>
-                <a:spcPct val="92000"/>
-              </a:lnSpc>
-              <a:buNone/>
-            </a:pPr>
-            <a:r>
-              <a:rPr lang="en-US" sz="1250" b="1" dirty="0">
-                <a:solidFill>
-                  <a:srgbClr val="9A6310"/>
-                </a:solidFill>
-                <a:latin typeface="Arial" pitchFamily="34" charset="0"/>
-                <a:ea typeface="Arial" pitchFamily="34" charset="-122"/>
-                <a:cs typeface="Arial" pitchFamily="34" charset="-120"/>
-              </a:rPr>
-              <a:t>4   </a:t>
-            </a:r>
-            <a:pPr indent="0" marL="0">
-              <a:lnSpc>
-                <a:spcPct val="92000"/>
-              </a:lnSpc>
-              <a:spcAft>
-                <a:spcPts val="900"/>
-              </a:spcAft>
-              <a:buNone/>
-            </a:pPr>
-            <a:r>
-              <a:rPr lang="en-US" sz="1250" dirty="0">
-                <a:solidFill>
-                  <a:srgbClr val="434A63"/>
-                </a:solidFill>
-                <a:latin typeface="Arial" pitchFamily="34" charset="0"/>
-                <a:ea typeface="Arial" pitchFamily="34" charset="-122"/>
-                <a:cs typeface="Arial" pitchFamily="34" charset="-120"/>
-              </a:rPr>
-              <a:t>Der Server antwortet auf ping, aber die Webseite lädt nicht.</a:t>
-            </a:r>
-            <a:endParaRPr lang="en-US" sz="1250" dirty="0"/>
-          </a:p>
-          <a:p>
-            <a:pPr indent="0" marL="0">
-              <a:lnSpc>
-                <a:spcPct val="92000"/>
-              </a:lnSpc>
-              <a:buNone/>
-            </a:pPr>
-            <a:r>
-              <a:rPr lang="en-US" sz="1250" b="1" dirty="0">
-                <a:solidFill>
-                  <a:srgbClr val="9A6310"/>
-                </a:solidFill>
-                <a:latin typeface="Arial" pitchFamily="34" charset="0"/>
-                <a:ea typeface="Arial" pitchFamily="34" charset="-122"/>
-                <a:cs typeface="Arial" pitchFamily="34" charset="-120"/>
-              </a:rPr>
-              <a:t>5   </a:t>
-            </a:r>
-            <a:pPr indent="0" marL="0">
-              <a:lnSpc>
-                <a:spcPct val="92000"/>
-              </a:lnSpc>
-              <a:spcAft>
-                <a:spcPts val="900"/>
-              </a:spcAft>
-              <a:buNone/>
-            </a:pPr>
-            <a:r>
-              <a:rPr lang="en-US" sz="1250" dirty="0">
-                <a:solidFill>
-                  <a:srgbClr val="434A63"/>
-                </a:solidFill>
-                <a:latin typeface="Arial" pitchFamily="34" charset="0"/>
-                <a:ea typeface="Arial" pitchFamily="34" charset="-122"/>
-                <a:cs typeface="Arial" pitchFamily="34" charset="-120"/>
-              </a:rPr>
-              <a:t>Alles ist erreichbar, aber quälend langsam.</a:t>
-            </a:r>
-            <a:endParaRPr lang="en-US" sz="1250" dirty="0"/>
-          </a:p>
-        </p:txBody>
-      </p:sp>
-      <p:sp>
-        <p:nvSpPr>
-          <p:cNvPr id="7" name="Shape 5"/>
-          <p:cNvSpPr/>
-          <p:nvPr/>
-        </p:nvSpPr>
-        <p:spPr>
-          <a:xfrm>
-            <a:off x="566928" y="4069080"/>
-            <a:ext cx="32004" cy="256032"/>
-          </a:xfrm>
-          <a:prstGeom prst="rect">
-            <a:avLst/>
-          </a:prstGeom>
-          <a:solidFill>
-            <a:srgbClr val="9A6310"/>
-          </a:solidFill>
-          <a:ln/>
-        </p:spPr>
-      </p:sp>
-      <p:sp>
-        <p:nvSpPr>
-          <p:cNvPr id="8" name="Text 6"/>
-          <p:cNvSpPr/>
-          <p:nvPr/>
-        </p:nvSpPr>
-        <p:spPr>
-          <a:xfrm>
-            <a:off x="749808" y="4023360"/>
-            <a:ext cx="7827264" cy="402336"/>
-          </a:xfrm>
-          <a:prstGeom prst="rect">
-            <a:avLst/>
-          </a:prstGeom>
-          <a:noFill/>
-          <a:ln/>
-        </p:spPr>
-        <p:txBody>
-          <a:bodyPr wrap="square" lIns="0" tIns="0" rIns="0" bIns="0" rtlCol="0" anchor="ctr"/>
-          <a:lstStyle/>
-          <a:p>
-            <a:pPr indent="0" marL="0">
-              <a:buNone/>
-            </a:pPr>
-            <a:r>
-              <a:rPr lang="en-US" sz="1200" b="1" dirty="0">
-                <a:solidFill>
-                  <a:srgbClr val="434A63"/>
-                </a:solidFill>
-                <a:latin typeface="Arial" pitchFamily="34" charset="0"/>
-                <a:ea typeface="Arial" pitchFamily="34" charset="-122"/>
-                <a:cs typeface="Arial" pitchFamily="34" charset="-120"/>
-              </a:rPr>
-              <a:t>Bei mindestens zweien ist die naheliegende Antwort nicht die vollständige.</a:t>
-            </a:r>
-            <a:endParaRPr lang="en-US" sz="1200" dirty="0"/>
-          </a:p>
-        </p:txBody>
-      </p:sp>
-      <p:sp>
-        <p:nvSpPr>
-          <p:cNvPr id="9" name="Shape 7"/>
-          <p:cNvSpPr/>
-          <p:nvPr/>
-        </p:nvSpPr>
-        <p:spPr>
-          <a:xfrm>
-            <a:off x="566928" y="4631436"/>
-            <a:ext cx="8010144" cy="0"/>
-          </a:xfrm>
-          <a:prstGeom prst="line">
-            <a:avLst/>
-          </a:prstGeom>
-          <a:noFill/>
-          <a:ln w="9525">
-            <a:solidFill>
-              <a:srgbClr val="DFE3F0"/>
-            </a:solidFill>
-            <a:prstDash val="solid"/>
-          </a:ln>
-        </p:spPr>
-      </p:sp>
-      <p:sp>
-        <p:nvSpPr>
-          <p:cNvPr id="10" name="Text 8"/>
-          <p:cNvSpPr/>
-          <p:nvPr/>
-        </p:nvSpPr>
-        <p:spPr>
-          <a:xfrm>
-            <a:off x="566928" y="4722876"/>
-            <a:ext cx="5029200" cy="237744"/>
-          </a:xfrm>
-          <a:prstGeom prst="rect">
-            <a:avLst/>
-          </a:prstGeom>
-          <a:noFill/>
-          <a:ln/>
-        </p:spPr>
-        <p:txBody>
-          <a:bodyPr wrap="square" lIns="0" tIns="0" rIns="0" bIns="0" rtlCol="0" anchor="ctr"/>
-          <a:lstStyle/>
-          <a:p>
-            <a:pPr indent="0" marL="0">
-              <a:buNone/>
-            </a:pPr>
-            <a:r>
-              <a:rPr lang="en-US" sz="1050" spc="30" kern="0" dirty="0">
-                <a:solidFill>
-                  <a:srgbClr val="5C6377"/>
-                </a:solidFill>
-                <a:latin typeface="Arial" pitchFamily="34" charset="0"/>
-                <a:ea typeface="Arial" pitchFamily="34" charset="-122"/>
-                <a:cs typeface="Arial" pitchFamily="34" charset="-120"/>
-              </a:rPr>
-              <a:t>Breakout</a:t>
-            </a:r>
-            <a:endParaRPr lang="en-US" sz="1050" dirty="0"/>
-          </a:p>
-        </p:txBody>
-      </p:sp>
-      <p:sp>
-        <p:nvSpPr>
-          <p:cNvPr id="11" name="Text 9"/>
-          <p:cNvSpPr/>
-          <p:nvPr/>
-        </p:nvSpPr>
-        <p:spPr>
-          <a:xfrm>
-            <a:off x="8028432" y="4722876"/>
-            <a:ext cx="548640" cy="237744"/>
-          </a:xfrm>
-          <a:prstGeom prst="rect">
-            <a:avLst/>
-          </a:prstGeom>
-          <a:noFill/>
-          <a:ln/>
-        </p:spPr>
-        <p:txBody>
-          <a:bodyPr wrap="square" lIns="0" tIns="0" rIns="0" bIns="0" rtlCol="0" anchor="ctr"/>
-          <a:lstStyle/>
-          <a:p>
-            <a:pPr algn="r" indent="0" marL="0">
-              <a:buNone/>
-            </a:pPr>
-            <a:r>
-              <a:rPr lang="en-US" sz="1050" dirty="0">
-                <a:solidFill>
-                  <a:srgbClr val="5C6377"/>
-                </a:solidFill>
-                <a:latin typeface="Arial" pitchFamily="34" charset="0"/>
-                <a:ea typeface="Arial" pitchFamily="34" charset="-122"/>
-                <a:cs typeface="Arial" pitchFamily="34" charset="-120"/>
-              </a:rPr>
-              <a:t>18/22</a:t>
-            </a:r>
-            <a:endParaRPr lang="en-US" sz="1050" dirty="0"/>
+              <a:t>Was habt ihr gefunden – und was hat euch überrascht?</a:t>
+            </a:r>
+            <a:endParaRPr lang="en-US" sz="1350" dirty="0"/>
           </a:p>
         </p:txBody>
       </p:sp>
@@ -11617,28 +11097,8 @@
         </p:nvSpPr>
         <p:spPr>
           <a:xfrm>
-            <a:off x="6355080" y="0"/>
-            <a:ext cx="2788920" cy="5143500"/>
-          </a:xfrm>
-          <a:prstGeom prst="rect">
-            <a:avLst/>
-          </a:prstGeom>
-          <a:solidFill>
-            <a:srgbClr val="EEF0FB"/>
-          </a:solidFill>
-          <a:ln/>
-        </p:spPr>
-      </p:sp>
-      <p:sp>
-        <p:nvSpPr>
-          <p:cNvPr id="3" name="Shape 1"/>
-          <p:cNvSpPr/>
-          <p:nvPr/>
-        </p:nvSpPr>
-        <p:spPr>
-          <a:xfrm>
-            <a:off x="6355080" y="0"/>
-            <a:ext cx="45720" cy="5143500"/>
+            <a:off x="566928" y="201168"/>
+            <a:ext cx="475488" cy="50292"/>
           </a:xfrm>
           <a:prstGeom prst="rect">
             <a:avLst/>
@@ -11651,14 +11111,112 @@
       </p:sp>
       <p:sp>
         <p:nvSpPr>
+          <p:cNvPr id="3" name="Text 1"/>
+          <p:cNvSpPr/>
+          <p:nvPr/>
+        </p:nvSpPr>
+        <p:spPr>
+          <a:xfrm>
+            <a:off x="566928" y="384048"/>
+            <a:ext cx="8010144" cy="237744"/>
+          </a:xfrm>
+          <a:prstGeom prst="rect">
+            <a:avLst/>
+          </a:prstGeom>
+          <a:noFill/>
+          <a:ln/>
+        </p:spPr>
+        <p:txBody>
+          <a:bodyPr wrap="square" lIns="0" tIns="0" rIns="0" bIns="0" rtlCol="0" anchor="ctr"/>
+          <a:lstStyle/>
+          <a:p>
+            <a:pPr indent="0" marL="0">
+              <a:buNone/>
+            </a:pPr>
+            <a:r>
+              <a:rPr lang="en-US" sz="1150" b="1" spc="180" kern="0" dirty="0">
+                <a:solidFill>
+                  <a:srgbClr val="3843AF"/>
+                </a:solidFill>
+                <a:latin typeface="Arial" pitchFamily="34" charset="0"/>
+                <a:ea typeface="Arial" pitchFamily="34" charset="-122"/>
+                <a:cs typeface="Arial" pitchFamily="34" charset="-120"/>
+              </a:rPr>
+              <a:t>AUSWERTUNG · 30 MINUTEN</a:t>
+            </a:r>
+            <a:endParaRPr lang="en-US" sz="1150" dirty="0"/>
+          </a:p>
+        </p:txBody>
+      </p:sp>
+      <p:sp>
+        <p:nvSpPr>
           <p:cNvPr id="4" name="Text 2"/>
           <p:cNvSpPr/>
           <p:nvPr/>
         </p:nvSpPr>
         <p:spPr>
           <a:xfrm>
-            <a:off x="6629400" y="1463040"/>
-            <a:ext cx="2194560" cy="1737360"/>
+            <a:off x="566928" y="731520"/>
+            <a:ext cx="8010144" cy="603504"/>
+          </a:xfrm>
+          <a:prstGeom prst="rect">
+            <a:avLst/>
+          </a:prstGeom>
+          <a:noFill/>
+          <a:ln/>
+        </p:spPr>
+        <p:txBody>
+          <a:bodyPr wrap="square" lIns="0" tIns="0" rIns="0" bIns="0" rtlCol="0" anchor="t"/>
+          <a:lstStyle/>
+          <a:p>
+            <a:pPr indent="0" marL="0">
+              <a:buNone/>
+            </a:pPr>
+            <a:r>
+              <a:rPr lang="en-US" sz="2600" b="1" dirty="0">
+                <a:solidFill>
+                  <a:srgbClr val="272E52"/>
+                </a:solidFill>
+                <a:latin typeface="Arial" pitchFamily="34" charset="0"/>
+                <a:ea typeface="Arial" pitchFamily="34" charset="-122"/>
+                <a:cs typeface="Arial" pitchFamily="34" charset="-120"/>
+              </a:rPr>
+              <a:t>Das gehen wir gemeinsam durch</a:t>
+            </a:r>
+            <a:endParaRPr lang="en-US" sz="2600" dirty="0"/>
+          </a:p>
+        </p:txBody>
+      </p:sp>
+      <p:sp>
+        <p:nvSpPr>
+          <p:cNvPr id="5" name="Shape 3"/>
+          <p:cNvSpPr/>
+          <p:nvPr/>
+        </p:nvSpPr>
+        <p:spPr>
+          <a:xfrm>
+            <a:off x="438912" y="1645920"/>
+            <a:ext cx="8266176" cy="347472"/>
+          </a:xfrm>
+          <a:prstGeom prst="rect">
+            <a:avLst/>
+          </a:prstGeom>
+          <a:solidFill>
+            <a:srgbClr val="F5F6FC"/>
+          </a:solidFill>
+          <a:ln/>
+        </p:spPr>
+      </p:sp>
+      <p:sp>
+        <p:nvSpPr>
+          <p:cNvPr id="6" name="Text 4"/>
+          <p:cNvSpPr/>
+          <p:nvPr/>
+        </p:nvSpPr>
+        <p:spPr>
+          <a:xfrm>
+            <a:off x="566928" y="1645920"/>
+            <a:ext cx="411480" cy="347472"/>
           </a:xfrm>
           <a:prstGeom prst="rect">
             <a:avLst/>
@@ -11670,34 +11228,601 @@
           <a:bodyPr wrap="square" lIns="0" tIns="0" rIns="0" bIns="0" rtlCol="0" anchor="ctr"/>
           <a:lstStyle/>
           <a:p>
-            <a:pPr algn="ctr" indent="0" marL="0">
-              <a:buNone/>
-            </a:pPr>
-            <a:r>
-              <a:rPr lang="en-US" sz="8400" b="1" dirty="0">
+            <a:pPr indent="0" marL="0">
+              <a:buNone/>
+            </a:pPr>
+            <a:r>
+              <a:rPr lang="en-US" sz="1150" b="1" dirty="0">
                 <a:solidFill>
                   <a:srgbClr val="3843AF"/>
                 </a:solidFill>
-                <a:latin typeface="Arial" pitchFamily="34" charset="0"/>
-                <a:ea typeface="Arial" pitchFamily="34" charset="-122"/>
-                <a:cs typeface="Arial" pitchFamily="34" charset="-120"/>
-              </a:rPr>
-              <a:t>05</a:t>
-            </a:r>
-            <a:endParaRPr lang="en-US" sz="8400" dirty="0"/>
-          </a:p>
-        </p:txBody>
-      </p:sp>
-      <p:sp>
-        <p:nvSpPr>
-          <p:cNvPr id="5" name="Shape 3"/>
-          <p:cNvSpPr/>
-          <p:nvPr/>
-        </p:nvSpPr>
-        <p:spPr>
-          <a:xfrm>
-            <a:off x="566928" y="1883664"/>
-            <a:ext cx="475488" cy="50292"/>
+                <a:latin typeface="Courier New" pitchFamily="34" charset="0"/>
+                <a:ea typeface="Courier New" pitchFamily="34" charset="-122"/>
+                <a:cs typeface="Courier New" pitchFamily="34" charset="-120"/>
+              </a:rPr>
+              <a:t>1</a:t>
+            </a:r>
+            <a:endParaRPr lang="en-US" sz="1150" dirty="0"/>
+          </a:p>
+        </p:txBody>
+      </p:sp>
+      <p:sp>
+        <p:nvSpPr>
+          <p:cNvPr id="7" name="Text 5"/>
+          <p:cNvSpPr/>
+          <p:nvPr/>
+        </p:nvSpPr>
+        <p:spPr>
+          <a:xfrm>
+            <a:off x="978408" y="1645920"/>
+            <a:ext cx="7598664" cy="347472"/>
+          </a:xfrm>
+          <a:prstGeom prst="rect">
+            <a:avLst/>
+          </a:prstGeom>
+          <a:noFill/>
+          <a:ln/>
+        </p:spPr>
+        <p:txBody>
+          <a:bodyPr wrap="square" lIns="0" tIns="0" rIns="0" bIns="0" rtlCol="0" anchor="ctr"/>
+          <a:lstStyle/>
+          <a:p>
+            <a:pPr indent="0" marL="0">
+              <a:buNone/>
+            </a:pPr>
+            <a:r>
+              <a:rPr lang="en-US" sz="1150" dirty="0">
+                <a:solidFill>
+                  <a:srgbClr val="434A63"/>
+                </a:solidFill>
+                <a:latin typeface="Arial" pitchFamily="34" charset="0"/>
+                <a:ea typeface="Arial" pitchFamily="34" charset="-122"/>
+                <a:cs typeface="Arial" pitchFamily="34" charset="-120"/>
+              </a:rPr>
+              <a:t>Ein Steckbrief – und warum fast alle eine 192.168er-Adresse haben</a:t>
+            </a:r>
+            <a:endParaRPr lang="en-US" sz="1150" dirty="0"/>
+          </a:p>
+        </p:txBody>
+      </p:sp>
+      <p:sp>
+        <p:nvSpPr>
+          <p:cNvPr id="8" name="Text 6"/>
+          <p:cNvSpPr/>
+          <p:nvPr/>
+        </p:nvSpPr>
+        <p:spPr>
+          <a:xfrm>
+            <a:off x="566928" y="1993392"/>
+            <a:ext cx="411480" cy="347472"/>
+          </a:xfrm>
+          <a:prstGeom prst="rect">
+            <a:avLst/>
+          </a:prstGeom>
+          <a:noFill/>
+          <a:ln/>
+        </p:spPr>
+        <p:txBody>
+          <a:bodyPr wrap="square" lIns="0" tIns="0" rIns="0" bIns="0" rtlCol="0" anchor="ctr"/>
+          <a:lstStyle/>
+          <a:p>
+            <a:pPr indent="0" marL="0">
+              <a:buNone/>
+            </a:pPr>
+            <a:r>
+              <a:rPr lang="en-US" sz="1150" b="1" dirty="0">
+                <a:solidFill>
+                  <a:srgbClr val="3843AF"/>
+                </a:solidFill>
+                <a:latin typeface="Courier New" pitchFamily="34" charset="0"/>
+                <a:ea typeface="Courier New" pitchFamily="34" charset="-122"/>
+                <a:cs typeface="Courier New" pitchFamily="34" charset="-120"/>
+              </a:rPr>
+              <a:t>2</a:t>
+            </a:r>
+            <a:endParaRPr lang="en-US" sz="1150" dirty="0"/>
+          </a:p>
+        </p:txBody>
+      </p:sp>
+      <p:sp>
+        <p:nvSpPr>
+          <p:cNvPr id="9" name="Text 7"/>
+          <p:cNvSpPr/>
+          <p:nvPr/>
+        </p:nvSpPr>
+        <p:spPr>
+          <a:xfrm>
+            <a:off x="978408" y="1993392"/>
+            <a:ext cx="7598664" cy="347472"/>
+          </a:xfrm>
+          <a:prstGeom prst="rect">
+            <a:avLst/>
+          </a:prstGeom>
+          <a:noFill/>
+          <a:ln/>
+        </p:spPr>
+        <p:txBody>
+          <a:bodyPr wrap="square" lIns="0" tIns="0" rIns="0" bIns="0" rtlCol="0" anchor="ctr"/>
+          <a:lstStyle/>
+          <a:p>
+            <a:pPr indent="0" marL="0">
+              <a:buNone/>
+            </a:pPr>
+            <a:r>
+              <a:rPr lang="en-US" sz="1150" dirty="0">
+                <a:solidFill>
+                  <a:srgbClr val="434A63"/>
+                </a:solidFill>
+                <a:latin typeface="Arial" pitchFamily="34" charset="0"/>
+                <a:ea typeface="Arial" pitchFamily="34" charset="-122"/>
+                <a:cs typeface="Arial" pitchFamily="34" charset="-120"/>
+              </a:rPr>
+              <a:t>Die fe80::-Adresse, die dabei mit aufgetaucht ist</a:t>
+            </a:r>
+            <a:endParaRPr lang="en-US" sz="1150" dirty="0"/>
+          </a:p>
+        </p:txBody>
+      </p:sp>
+      <p:sp>
+        <p:nvSpPr>
+          <p:cNvPr id="10" name="Shape 8"/>
+          <p:cNvSpPr/>
+          <p:nvPr/>
+        </p:nvSpPr>
+        <p:spPr>
+          <a:xfrm>
+            <a:off x="438912" y="2340864"/>
+            <a:ext cx="8266176" cy="347472"/>
+          </a:xfrm>
+          <a:prstGeom prst="rect">
+            <a:avLst/>
+          </a:prstGeom>
+          <a:solidFill>
+            <a:srgbClr val="F5F6FC"/>
+          </a:solidFill>
+          <a:ln/>
+        </p:spPr>
+      </p:sp>
+      <p:sp>
+        <p:nvSpPr>
+          <p:cNvPr id="11" name="Text 9"/>
+          <p:cNvSpPr/>
+          <p:nvPr/>
+        </p:nvSpPr>
+        <p:spPr>
+          <a:xfrm>
+            <a:off x="566928" y="2340864"/>
+            <a:ext cx="411480" cy="347472"/>
+          </a:xfrm>
+          <a:prstGeom prst="rect">
+            <a:avLst/>
+          </a:prstGeom>
+          <a:noFill/>
+          <a:ln/>
+        </p:spPr>
+        <p:txBody>
+          <a:bodyPr wrap="square" lIns="0" tIns="0" rIns="0" bIns="0" rtlCol="0" anchor="ctr"/>
+          <a:lstStyle/>
+          <a:p>
+            <a:pPr indent="0" marL="0">
+              <a:buNone/>
+            </a:pPr>
+            <a:r>
+              <a:rPr lang="en-US" sz="1150" b="1" dirty="0">
+                <a:solidFill>
+                  <a:srgbClr val="3843AF"/>
+                </a:solidFill>
+                <a:latin typeface="Courier New" pitchFamily="34" charset="0"/>
+                <a:ea typeface="Courier New" pitchFamily="34" charset="-122"/>
+                <a:cs typeface="Courier New" pitchFamily="34" charset="-120"/>
+              </a:rPr>
+              <a:t>3</a:t>
+            </a:r>
+            <a:endParaRPr lang="en-US" sz="1150" dirty="0"/>
+          </a:p>
+        </p:txBody>
+      </p:sp>
+      <p:sp>
+        <p:nvSpPr>
+          <p:cNvPr id="12" name="Text 10"/>
+          <p:cNvSpPr/>
+          <p:nvPr/>
+        </p:nvSpPr>
+        <p:spPr>
+          <a:xfrm>
+            <a:off x="978408" y="2340864"/>
+            <a:ext cx="7598664" cy="347472"/>
+          </a:xfrm>
+          <a:prstGeom prst="rect">
+            <a:avLst/>
+          </a:prstGeom>
+          <a:noFill/>
+          <a:ln/>
+        </p:spPr>
+        <p:txBody>
+          <a:bodyPr wrap="square" lIns="0" tIns="0" rIns="0" bIns="0" rtlCol="0" anchor="ctr"/>
+          <a:lstStyle/>
+          <a:p>
+            <a:pPr indent="0" marL="0">
+              <a:buNone/>
+            </a:pPr>
+            <a:r>
+              <a:rPr lang="en-US" sz="1150" dirty="0">
+                <a:solidFill>
+                  <a:srgbClr val="434A63"/>
+                </a:solidFill>
+                <a:latin typeface="Arial" pitchFamily="34" charset="0"/>
+                <a:ea typeface="Arial" pitchFamily="34" charset="-122"/>
+                <a:cs typeface="Arial" pitchFamily="34" charset="-120"/>
+              </a:rPr>
+              <a:t>Die fünf Befehle: Was beweist ein Erfolg, was beweist er nicht?</a:t>
+            </a:r>
+            <a:endParaRPr lang="en-US" sz="1150" dirty="0"/>
+          </a:p>
+        </p:txBody>
+      </p:sp>
+      <p:sp>
+        <p:nvSpPr>
+          <p:cNvPr id="13" name="Text 11"/>
+          <p:cNvSpPr/>
+          <p:nvPr/>
+        </p:nvSpPr>
+        <p:spPr>
+          <a:xfrm>
+            <a:off x="566928" y="2688336"/>
+            <a:ext cx="411480" cy="347472"/>
+          </a:xfrm>
+          <a:prstGeom prst="rect">
+            <a:avLst/>
+          </a:prstGeom>
+          <a:noFill/>
+          <a:ln/>
+        </p:spPr>
+        <p:txBody>
+          <a:bodyPr wrap="square" lIns="0" tIns="0" rIns="0" bIns="0" rtlCol="0" anchor="ctr"/>
+          <a:lstStyle/>
+          <a:p>
+            <a:pPr indent="0" marL="0">
+              <a:buNone/>
+            </a:pPr>
+            <a:r>
+              <a:rPr lang="en-US" sz="1150" b="1" dirty="0">
+                <a:solidFill>
+                  <a:srgbClr val="3843AF"/>
+                </a:solidFill>
+                <a:latin typeface="Courier New" pitchFamily="34" charset="0"/>
+                <a:ea typeface="Courier New" pitchFamily="34" charset="-122"/>
+                <a:cs typeface="Courier New" pitchFamily="34" charset="-120"/>
+              </a:rPr>
+              <a:t>4</a:t>
+            </a:r>
+            <a:endParaRPr lang="en-US" sz="1150" dirty="0"/>
+          </a:p>
+        </p:txBody>
+      </p:sp>
+      <p:sp>
+        <p:nvSpPr>
+          <p:cNvPr id="14" name="Text 12"/>
+          <p:cNvSpPr/>
+          <p:nvPr/>
+        </p:nvSpPr>
+        <p:spPr>
+          <a:xfrm>
+            <a:off x="978408" y="2688336"/>
+            <a:ext cx="7598664" cy="347472"/>
+          </a:xfrm>
+          <a:prstGeom prst="rect">
+            <a:avLst/>
+          </a:prstGeom>
+          <a:noFill/>
+          <a:ln/>
+        </p:spPr>
+        <p:txBody>
+          <a:bodyPr wrap="square" lIns="0" tIns="0" rIns="0" bIns="0" rtlCol="0" anchor="ctr"/>
+          <a:lstStyle/>
+          <a:p>
+            <a:pPr indent="0" marL="0">
+              <a:buNone/>
+            </a:pPr>
+            <a:r>
+              <a:rPr lang="en-US" sz="1150" dirty="0">
+                <a:solidFill>
+                  <a:srgbClr val="434A63"/>
+                </a:solidFill>
+                <a:latin typeface="Arial" pitchFamily="34" charset="0"/>
+                <a:ea typeface="Arial" pitchFamily="34" charset="-122"/>
+                <a:cs typeface="Arial" pitchFamily="34" charset="-120"/>
+              </a:rPr>
+              <a:t>Die Störungen: jede Gruppe begründet ihren Fall</a:t>
+            </a:r>
+            <a:endParaRPr lang="en-US" sz="1150" dirty="0"/>
+          </a:p>
+        </p:txBody>
+      </p:sp>
+      <p:sp>
+        <p:nvSpPr>
+          <p:cNvPr id="15" name="Shape 13"/>
+          <p:cNvSpPr/>
+          <p:nvPr/>
+        </p:nvSpPr>
+        <p:spPr>
+          <a:xfrm>
+            <a:off x="438912" y="3035808"/>
+            <a:ext cx="8266176" cy="347472"/>
+          </a:xfrm>
+          <a:prstGeom prst="rect">
+            <a:avLst/>
+          </a:prstGeom>
+          <a:solidFill>
+            <a:srgbClr val="F5F6FC"/>
+          </a:solidFill>
+          <a:ln/>
+        </p:spPr>
+      </p:sp>
+      <p:sp>
+        <p:nvSpPr>
+          <p:cNvPr id="16" name="Text 14"/>
+          <p:cNvSpPr/>
+          <p:nvPr/>
+        </p:nvSpPr>
+        <p:spPr>
+          <a:xfrm>
+            <a:off x="566928" y="3035808"/>
+            <a:ext cx="411480" cy="347472"/>
+          </a:xfrm>
+          <a:prstGeom prst="rect">
+            <a:avLst/>
+          </a:prstGeom>
+          <a:noFill/>
+          <a:ln/>
+        </p:spPr>
+        <p:txBody>
+          <a:bodyPr wrap="square" lIns="0" tIns="0" rIns="0" bIns="0" rtlCol="0" anchor="ctr"/>
+          <a:lstStyle/>
+          <a:p>
+            <a:pPr indent="0" marL="0">
+              <a:buNone/>
+            </a:pPr>
+            <a:r>
+              <a:rPr lang="en-US" sz="1150" b="1" dirty="0">
+                <a:solidFill>
+                  <a:srgbClr val="3843AF"/>
+                </a:solidFill>
+                <a:latin typeface="Courier New" pitchFamily="34" charset="0"/>
+                <a:ea typeface="Courier New" pitchFamily="34" charset="-122"/>
+                <a:cs typeface="Courier New" pitchFamily="34" charset="-120"/>
+              </a:rPr>
+              <a:t>5</a:t>
+            </a:r>
+            <a:endParaRPr lang="en-US" sz="1150" dirty="0"/>
+          </a:p>
+        </p:txBody>
+      </p:sp>
+      <p:sp>
+        <p:nvSpPr>
+          <p:cNvPr id="17" name="Text 15"/>
+          <p:cNvSpPr/>
+          <p:nvPr/>
+        </p:nvSpPr>
+        <p:spPr>
+          <a:xfrm>
+            <a:off x="978408" y="3035808"/>
+            <a:ext cx="7598664" cy="347472"/>
+          </a:xfrm>
+          <a:prstGeom prst="rect">
+            <a:avLst/>
+          </a:prstGeom>
+          <a:noFill/>
+          <a:ln/>
+        </p:spPr>
+        <p:txBody>
+          <a:bodyPr wrap="square" lIns="0" tIns="0" rIns="0" bIns="0" rtlCol="0" anchor="ctr"/>
+          <a:lstStyle/>
+          <a:p>
+            <a:pPr indent="0" marL="0">
+              <a:buNone/>
+            </a:pPr>
+            <a:r>
+              <a:rPr lang="en-US" sz="1150" dirty="0">
+                <a:solidFill>
+                  <a:srgbClr val="434A63"/>
+                </a:solidFill>
+                <a:latin typeface="Arial" pitchFamily="34" charset="0"/>
+                <a:ea typeface="Arial" pitchFamily="34" charset="-122"/>
+                <a:cs typeface="Arial" pitchFamily="34" charset="-120"/>
+              </a:rPr>
+              <a:t>Erst danach die Auflösung – und die Fälle, bei denen es nicht reicht</a:t>
+            </a:r>
+            <a:endParaRPr lang="en-US" sz="1150" dirty="0"/>
+          </a:p>
+        </p:txBody>
+      </p:sp>
+      <p:sp>
+        <p:nvSpPr>
+          <p:cNvPr id="18" name="Text 16"/>
+          <p:cNvSpPr/>
+          <p:nvPr/>
+        </p:nvSpPr>
+        <p:spPr>
+          <a:xfrm>
+            <a:off x="566928" y="3383280"/>
+            <a:ext cx="411480" cy="347472"/>
+          </a:xfrm>
+          <a:prstGeom prst="rect">
+            <a:avLst/>
+          </a:prstGeom>
+          <a:noFill/>
+          <a:ln/>
+        </p:spPr>
+        <p:txBody>
+          <a:bodyPr wrap="square" lIns="0" tIns="0" rIns="0" bIns="0" rtlCol="0" anchor="ctr"/>
+          <a:lstStyle/>
+          <a:p>
+            <a:pPr indent="0" marL="0">
+              <a:buNone/>
+            </a:pPr>
+            <a:r>
+              <a:rPr lang="en-US" sz="1150" b="1" dirty="0">
+                <a:solidFill>
+                  <a:srgbClr val="3843AF"/>
+                </a:solidFill>
+                <a:latin typeface="Courier New" pitchFamily="34" charset="0"/>
+                <a:ea typeface="Courier New" pitchFamily="34" charset="-122"/>
+                <a:cs typeface="Courier New" pitchFamily="34" charset="-120"/>
+              </a:rPr>
+              <a:t>6</a:t>
+            </a:r>
+            <a:endParaRPr lang="en-US" sz="1150" dirty="0"/>
+          </a:p>
+        </p:txBody>
+      </p:sp>
+      <p:sp>
+        <p:nvSpPr>
+          <p:cNvPr id="19" name="Text 17"/>
+          <p:cNvSpPr/>
+          <p:nvPr/>
+        </p:nvSpPr>
+        <p:spPr>
+          <a:xfrm>
+            <a:off x="978408" y="3383280"/>
+            <a:ext cx="7598664" cy="347472"/>
+          </a:xfrm>
+          <a:prstGeom prst="rect">
+            <a:avLst/>
+          </a:prstGeom>
+          <a:noFill/>
+          <a:ln/>
+        </p:spPr>
+        <p:txBody>
+          <a:bodyPr wrap="square" lIns="0" tIns="0" rIns="0" bIns="0" rtlCol="0" anchor="ctr"/>
+          <a:lstStyle/>
+          <a:p>
+            <a:pPr indent="0" marL="0">
+              <a:buNone/>
+            </a:pPr>
+            <a:r>
+              <a:rPr lang="en-US" sz="1150" dirty="0">
+                <a:solidFill>
+                  <a:srgbClr val="434A63"/>
+                </a:solidFill>
+                <a:latin typeface="Arial" pitchFamily="34" charset="0"/>
+                <a:ea typeface="Arial" pitchFamily="34" charset="-122"/>
+                <a:cs typeface="Arial" pitchFamily="34" charset="-120"/>
+              </a:rPr>
+              <a:t>Wer bei der Kür war: zwei Wegverfolgungen nebeneinander</a:t>
+            </a:r>
+            <a:endParaRPr lang="en-US" sz="1150" dirty="0"/>
+          </a:p>
+        </p:txBody>
+      </p:sp>
+      <p:sp>
+        <p:nvSpPr>
+          <p:cNvPr id="20" name="Shape 18"/>
+          <p:cNvSpPr/>
+          <p:nvPr/>
+        </p:nvSpPr>
+        <p:spPr>
+          <a:xfrm>
+            <a:off x="438912" y="3730752"/>
+            <a:ext cx="8266176" cy="347472"/>
+          </a:xfrm>
+          <a:prstGeom prst="rect">
+            <a:avLst/>
+          </a:prstGeom>
+          <a:solidFill>
+            <a:srgbClr val="F5F6FC"/>
+          </a:solidFill>
+          <a:ln/>
+        </p:spPr>
+      </p:sp>
+      <p:sp>
+        <p:nvSpPr>
+          <p:cNvPr id="21" name="Text 19"/>
+          <p:cNvSpPr/>
+          <p:nvPr/>
+        </p:nvSpPr>
+        <p:spPr>
+          <a:xfrm>
+            <a:off x="566928" y="3730752"/>
+            <a:ext cx="411480" cy="347472"/>
+          </a:xfrm>
+          <a:prstGeom prst="rect">
+            <a:avLst/>
+          </a:prstGeom>
+          <a:noFill/>
+          <a:ln/>
+        </p:spPr>
+        <p:txBody>
+          <a:bodyPr wrap="square" lIns="0" tIns="0" rIns="0" bIns="0" rtlCol="0" anchor="ctr"/>
+          <a:lstStyle/>
+          <a:p>
+            <a:pPr indent="0" marL="0">
+              <a:buNone/>
+            </a:pPr>
+            <a:r>
+              <a:rPr lang="en-US" sz="1150" b="1" dirty="0">
+                <a:solidFill>
+                  <a:srgbClr val="3843AF"/>
+                </a:solidFill>
+                <a:latin typeface="Courier New" pitchFamily="34" charset="0"/>
+                <a:ea typeface="Courier New" pitchFamily="34" charset="-122"/>
+                <a:cs typeface="Courier New" pitchFamily="34" charset="-120"/>
+              </a:rPr>
+              <a:t>7</a:t>
+            </a:r>
+            <a:endParaRPr lang="en-US" sz="1150" dirty="0"/>
+          </a:p>
+        </p:txBody>
+      </p:sp>
+      <p:sp>
+        <p:nvSpPr>
+          <p:cNvPr id="22" name="Text 20"/>
+          <p:cNvSpPr/>
+          <p:nvPr/>
+        </p:nvSpPr>
+        <p:spPr>
+          <a:xfrm>
+            <a:off x="978408" y="3730752"/>
+            <a:ext cx="7598664" cy="347472"/>
+          </a:xfrm>
+          <a:prstGeom prst="rect">
+            <a:avLst/>
+          </a:prstGeom>
+          <a:noFill/>
+          <a:ln/>
+        </p:spPr>
+        <p:txBody>
+          <a:bodyPr wrap="square" lIns="0" tIns="0" rIns="0" bIns="0" rtlCol="0" anchor="ctr"/>
+          <a:lstStyle/>
+          <a:p>
+            <a:pPr indent="0" marL="0">
+              <a:buNone/>
+            </a:pPr>
+            <a:r>
+              <a:rPr lang="en-US" sz="1150" dirty="0">
+                <a:solidFill>
+                  <a:srgbClr val="434A63"/>
+                </a:solidFill>
+                <a:latin typeface="Arial" pitchFamily="34" charset="0"/>
+                <a:ea typeface="Arial" pitchFamily="34" charset="-122"/>
+                <a:cs typeface="Arial" pitchFamily="34" charset="-120"/>
+              </a:rPr>
+              <a:t>Euer Satz: Was hat euch überrascht?</a:t>
+            </a:r>
+            <a:endParaRPr lang="en-US" sz="1150" dirty="0"/>
+          </a:p>
+        </p:txBody>
+      </p:sp>
+      <p:sp>
+        <p:nvSpPr>
+          <p:cNvPr id="23" name="Shape 21"/>
+          <p:cNvSpPr/>
+          <p:nvPr/>
+        </p:nvSpPr>
+        <p:spPr>
+          <a:xfrm>
+            <a:off x="566928" y="4215384"/>
+            <a:ext cx="32004" cy="256032"/>
           </a:xfrm>
           <a:prstGeom prst="rect">
             <a:avLst/>
@@ -11710,69 +11835,92 @@
       </p:sp>
       <p:sp>
         <p:nvSpPr>
-          <p:cNvPr id="6" name="Text 4"/>
-          <p:cNvSpPr/>
-          <p:nvPr/>
-        </p:nvSpPr>
-        <p:spPr>
-          <a:xfrm>
-            <a:off x="566928" y="2084832"/>
-            <a:ext cx="5394960" cy="868680"/>
-          </a:xfrm>
-          <a:prstGeom prst="rect">
-            <a:avLst/>
-          </a:prstGeom>
-          <a:noFill/>
-          <a:ln/>
-        </p:spPr>
-        <p:txBody>
-          <a:bodyPr wrap="square" lIns="0" tIns="0" rIns="0" bIns="0" rtlCol="0" anchor="t"/>
-          <a:lstStyle/>
-          <a:p>
-            <a:pPr indent="0" marL="0">
-              <a:buNone/>
-            </a:pPr>
-            <a:r>
-              <a:rPr lang="en-US" sz="3000" b="1" dirty="0">
-                <a:solidFill>
-                  <a:srgbClr val="272E52"/>
-                </a:solidFill>
-                <a:latin typeface="Arial" pitchFamily="34" charset="0"/>
-                <a:ea typeface="Arial" pitchFamily="34" charset="-122"/>
-                <a:cs typeface="Arial" pitchFamily="34" charset="-120"/>
-              </a:rPr>
-              <a:t>Zusammentragen</a:t>
-            </a:r>
-            <a:endParaRPr lang="en-US" sz="3000" dirty="0"/>
-          </a:p>
-        </p:txBody>
-      </p:sp>
-      <p:sp>
-        <p:nvSpPr>
-          <p:cNvPr id="7" name="Text 5"/>
-          <p:cNvSpPr/>
-          <p:nvPr/>
-        </p:nvSpPr>
-        <p:spPr>
-          <a:xfrm>
-            <a:off x="566928" y="3017520"/>
-            <a:ext cx="5394960" cy="548640"/>
-          </a:xfrm>
-          <a:prstGeom prst="rect">
-            <a:avLst/>
-          </a:prstGeom>
-          <a:noFill/>
-          <a:ln/>
-        </p:spPr>
-        <p:txBody>
-          <a:bodyPr wrap="square" lIns="0" tIns="0" rIns="0" bIns="0" rtlCol="0" anchor="t"/>
-          <a:lstStyle/>
-          <a:p>
-            <a:pPr indent="0" marL="0">
-              <a:buNone/>
-            </a:pPr>
-            <a:r>
-              <a:rPr lang="en-US" sz="1350" dirty="0">
+          <p:cNvPr id="24" name="Text 22"/>
+          <p:cNvSpPr/>
+          <p:nvPr/>
+        </p:nvSpPr>
+        <p:spPr>
+          <a:xfrm>
+            <a:off x="749808" y="4169664"/>
+            <a:ext cx="7827264" cy="402336"/>
+          </a:xfrm>
+          <a:prstGeom prst="rect">
+            <a:avLst/>
+          </a:prstGeom>
+          <a:noFill/>
+          <a:ln/>
+        </p:spPr>
+        <p:txBody>
+          <a:bodyPr wrap="square" lIns="0" tIns="0" rIns="0" bIns="0" rtlCol="0" anchor="ctr"/>
+          <a:lstStyle/>
+          <a:p>
+            <a:pPr indent="0" marL="0">
+              <a:buNone/>
+            </a:pPr>
+            <a:r>
+              <a:rPr lang="en-US" sz="1200" b="1" dirty="0">
+                <a:solidFill>
+                  <a:srgbClr val="434A63"/>
+                </a:solidFill>
+                <a:latin typeface="Arial" pitchFamily="34" charset="0"/>
+                <a:ea typeface="Arial" pitchFamily="34" charset="-122"/>
+                <a:cs typeface="Arial" pitchFamily="34" charset="-120"/>
+              </a:rPr>
+              <a:t>Die Begründung zählt mehr als die Antwort. Woran habt ihr die Schicht erkannt?</a:t>
+            </a:r>
+            <a:endParaRPr lang="en-US" sz="1200" dirty="0"/>
+          </a:p>
+        </p:txBody>
+      </p:sp>
+      <p:sp>
+        <p:nvSpPr>
+          <p:cNvPr id="25" name="Shape 23"/>
+          <p:cNvSpPr/>
+          <p:nvPr/>
+        </p:nvSpPr>
+        <p:spPr>
+          <a:xfrm>
+            <a:off x="566928" y="4631436"/>
+            <a:ext cx="8010144" cy="0"/>
+          </a:xfrm>
+          <a:prstGeom prst="line">
+            <a:avLst/>
+          </a:prstGeom>
+          <a:noFill/>
+          <a:ln w="9525">
+            <a:solidFill>
+              <a:srgbClr val="DFE3F0"/>
+            </a:solidFill>
+            <a:prstDash val="solid"/>
+          </a:ln>
+        </p:spPr>
+      </p:sp>
+      <p:sp>
+        <p:nvSpPr>
+          <p:cNvPr id="26" name="Text 24"/>
+          <p:cNvSpPr/>
+          <p:nvPr/>
+        </p:nvSpPr>
+        <p:spPr>
+          <a:xfrm>
+            <a:off x="566928" y="4722876"/>
+            <a:ext cx="5029200" cy="237744"/>
+          </a:xfrm>
+          <a:prstGeom prst="rect">
+            <a:avLst/>
+          </a:prstGeom>
+          <a:noFill/>
+          <a:ln/>
+        </p:spPr>
+        <p:txBody>
+          <a:bodyPr wrap="square" lIns="0" tIns="0" rIns="0" bIns="0" rtlCol="0" anchor="ctr"/>
+          <a:lstStyle/>
+          <a:p>
+            <a:pPr indent="0" marL="0">
+              <a:buNone/>
+            </a:pPr>
+            <a:r>
+              <a:rPr lang="en-US" sz="1050" spc="30" kern="0" dirty="0">
                 <a:solidFill>
                   <a:srgbClr val="5C6377"/>
                 </a:solidFill>
@@ -11780,9 +11928,48 @@
                 <a:ea typeface="Arial" pitchFamily="34" charset="-122"/>
                 <a:cs typeface="Arial" pitchFamily="34" charset="-120"/>
               </a:rPr>
-              <a:t>Was habt ihr gefunden – und was hat euch überrascht?</a:t>
-            </a:r>
-            <a:endParaRPr lang="en-US" sz="1350" dirty="0"/>
+              <a:t>Auswertung</a:t>
+            </a:r>
+            <a:endParaRPr lang="en-US" sz="1050" dirty="0"/>
+          </a:p>
+        </p:txBody>
+      </p:sp>
+      <p:sp>
+        <p:nvSpPr>
+          <p:cNvPr id="27" name="Text 25"/>
+          <p:cNvSpPr/>
+          <p:nvPr/>
+        </p:nvSpPr>
+        <p:spPr>
+          <a:xfrm>
+            <a:off x="8028432" y="4722876"/>
+            <a:ext cx="548640" cy="237744"/>
+          </a:xfrm>
+          <a:prstGeom prst="rect">
+            <a:avLst/>
+          </a:prstGeom>
+          <a:noFill/>
+          <a:ln/>
+        </p:spPr>
+        <p:txBody>
+          <a:bodyPr wrap="square" lIns="0" tIns="0" rIns="0" bIns="0" rtlCol="0" anchor="ctr"/>
+          <a:lstStyle/>
+          <a:p>
+            <a:pPr algn="r" indent="0" marL="0">
+              <a:buNone/>
+            </a:pPr>
+            <a:r>
+              <a:rPr lang="en-US" sz="1050" dirty="0">
+                <a:solidFill>
+                  <a:srgbClr val="5C6377"/>
+                </a:solidFill>
+                <a:latin typeface="Arial" pitchFamily="34" charset="0"/>
+                <a:ea typeface="Arial" pitchFamily="34" charset="-122"/>
+                <a:cs typeface="Arial" pitchFamily="34" charset="-120"/>
+              </a:rPr>
+              <a:t>18/21</a:t>
+            </a:r>
+            <a:endParaRPr lang="en-US" sz="1050" dirty="0"/>
           </a:p>
         </p:txBody>
       </p:sp>
@@ -11871,7 +12058,7 @@
                 <a:ea typeface="Arial" pitchFamily="34" charset="-122"/>
                 <a:cs typeface="Arial" pitchFamily="34" charset="-120"/>
               </a:rPr>
-              <a:t>AUSWERTUNG · 30 MINUTEN</a:t>
+              <a:t>AUSWERTUNG</a:t>
             </a:r>
             <a:endParaRPr lang="en-US" sz="1150" dirty="0"/>
           </a:p>
@@ -11910,7 +12097,7 @@
                 <a:ea typeface="Arial" pitchFamily="34" charset="-122"/>
                 <a:cs typeface="Arial" pitchFamily="34" charset="-120"/>
               </a:rPr>
-              <a:t>Das gehen wir gemeinsam durch</a:t>
+              <a:t>Die Auflösung der fünf Störungen</a:t>
             </a:r>
             <a:endParaRPr lang="en-US" sz="2600" dirty="0"/>
           </a:p>
@@ -11918,14 +12105,154 @@
       </p:sp>
       <p:sp>
         <p:nvSpPr>
-          <p:cNvPr id="5" name="Shape 3"/>
-          <p:cNvSpPr/>
-          <p:nvPr/>
-        </p:nvSpPr>
-        <p:spPr>
-          <a:xfrm>
-            <a:off x="438912" y="1700784"/>
-            <a:ext cx="8266176" cy="365760"/>
+          <p:cNvPr id="5" name="Text 3"/>
+          <p:cNvSpPr/>
+          <p:nvPr/>
+        </p:nvSpPr>
+        <p:spPr>
+          <a:xfrm>
+            <a:off x="658368" y="1627632"/>
+            <a:ext cx="1920240" cy="274320"/>
+          </a:xfrm>
+          <a:prstGeom prst="rect">
+            <a:avLst/>
+          </a:prstGeom>
+          <a:noFill/>
+          <a:ln/>
+        </p:spPr>
+        <p:txBody>
+          <a:bodyPr wrap="square" lIns="0" tIns="0" rIns="0" bIns="0" rtlCol="0" anchor="ctr"/>
+          <a:lstStyle/>
+          <a:p>
+            <a:pPr indent="0" marL="0">
+              <a:buNone/>
+            </a:pPr>
+            <a:r>
+              <a:rPr lang="en-US" sz="1050" b="1" spc="80" kern="0" dirty="0">
+                <a:solidFill>
+                  <a:srgbClr val="3843AF"/>
+                </a:solidFill>
+                <a:latin typeface="Arial" pitchFamily="34" charset="0"/>
+                <a:ea typeface="Arial" pitchFamily="34" charset="-122"/>
+                <a:cs typeface="Arial" pitchFamily="34" charset="-120"/>
+              </a:rPr>
+              <a:t>Fall</a:t>
+            </a:r>
+            <a:endParaRPr lang="en-US" sz="1050" dirty="0"/>
+          </a:p>
+        </p:txBody>
+      </p:sp>
+      <p:sp>
+        <p:nvSpPr>
+          <p:cNvPr id="6" name="Text 4"/>
+          <p:cNvSpPr/>
+          <p:nvPr/>
+        </p:nvSpPr>
+        <p:spPr>
+          <a:xfrm>
+            <a:off x="2761488" y="1627632"/>
+            <a:ext cx="1645920" cy="274320"/>
+          </a:xfrm>
+          <a:prstGeom prst="rect">
+            <a:avLst/>
+          </a:prstGeom>
+          <a:noFill/>
+          <a:ln/>
+        </p:spPr>
+        <p:txBody>
+          <a:bodyPr wrap="square" lIns="0" tIns="0" rIns="0" bIns="0" rtlCol="0" anchor="ctr"/>
+          <a:lstStyle/>
+          <a:p>
+            <a:pPr indent="0" marL="0">
+              <a:buNone/>
+            </a:pPr>
+            <a:r>
+              <a:rPr lang="en-US" sz="1050" b="1" spc="80" kern="0" dirty="0">
+                <a:solidFill>
+                  <a:srgbClr val="3843AF"/>
+                </a:solidFill>
+                <a:latin typeface="Arial" pitchFamily="34" charset="0"/>
+                <a:ea typeface="Arial" pitchFamily="34" charset="-122"/>
+                <a:cs typeface="Arial" pitchFamily="34" charset="-120"/>
+              </a:rPr>
+              <a:t>Schicht</a:t>
+            </a:r>
+            <a:endParaRPr lang="en-US" sz="1050" dirty="0"/>
+          </a:p>
+        </p:txBody>
+      </p:sp>
+      <p:sp>
+        <p:nvSpPr>
+          <p:cNvPr id="7" name="Text 5"/>
+          <p:cNvSpPr/>
+          <p:nvPr/>
+        </p:nvSpPr>
+        <p:spPr>
+          <a:xfrm>
+            <a:off x="4590288" y="1627632"/>
+            <a:ext cx="3895344" cy="274320"/>
+          </a:xfrm>
+          <a:prstGeom prst="rect">
+            <a:avLst/>
+          </a:prstGeom>
+          <a:noFill/>
+          <a:ln/>
+        </p:spPr>
+        <p:txBody>
+          <a:bodyPr wrap="square" lIns="0" tIns="0" rIns="0" bIns="0" rtlCol="0" anchor="ctr"/>
+          <a:lstStyle/>
+          <a:p>
+            <a:pPr indent="0" marL="0">
+              <a:buNone/>
+            </a:pPr>
+            <a:r>
+              <a:rPr lang="en-US" sz="1050" b="1" spc="80" kern="0" dirty="0">
+                <a:solidFill>
+                  <a:srgbClr val="3843AF"/>
+                </a:solidFill>
+                <a:latin typeface="Arial" pitchFamily="34" charset="0"/>
+                <a:ea typeface="Arial" pitchFamily="34" charset="-122"/>
+                <a:cs typeface="Arial" pitchFamily="34" charset="-120"/>
+              </a:rPr>
+              <a:t>Nachweis</a:t>
+            </a:r>
+            <a:endParaRPr lang="en-US" sz="1050" dirty="0"/>
+          </a:p>
+        </p:txBody>
+      </p:sp>
+      <p:sp>
+        <p:nvSpPr>
+          <p:cNvPr id="8" name="Shape 6"/>
+          <p:cNvSpPr/>
+          <p:nvPr/>
+        </p:nvSpPr>
+        <p:spPr>
+          <a:xfrm>
+            <a:off x="566928" y="1920240"/>
+            <a:ext cx="8010144" cy="0"/>
+          </a:xfrm>
+          <a:prstGeom prst="line">
+            <a:avLst/>
+          </a:prstGeom>
+          <a:noFill/>
+          <a:ln w="12700">
+            <a:solidFill>
+              <a:srgbClr val="DFE3F0"/>
+            </a:solidFill>
+            <a:prstDash val="solid"/>
+          </a:ln>
+        </p:spPr>
+      </p:sp>
+      <p:sp>
+        <p:nvSpPr>
+          <p:cNvPr id="9" name="Shape 7"/>
+          <p:cNvSpPr/>
+          <p:nvPr/>
+        </p:nvSpPr>
+        <p:spPr>
+          <a:xfrm>
+            <a:off x="475488" y="1993392"/>
+            <a:ext cx="8193024" cy="384048"/>
           </a:xfrm>
           <a:prstGeom prst="rect">
             <a:avLst/>
@@ -11938,14 +12265,14 @@
       </p:sp>
       <p:sp>
         <p:nvSpPr>
-          <p:cNvPr id="6" name="Text 4"/>
-          <p:cNvSpPr/>
-          <p:nvPr/>
-        </p:nvSpPr>
-        <p:spPr>
-          <a:xfrm>
-            <a:off x="566928" y="1700784"/>
-            <a:ext cx="411480" cy="365760"/>
+          <p:cNvPr id="10" name="Text 8"/>
+          <p:cNvSpPr/>
+          <p:nvPr/>
+        </p:nvSpPr>
+        <p:spPr>
+          <a:xfrm>
+            <a:off x="658368" y="1993392"/>
+            <a:ext cx="1920240" cy="384048"/>
           </a:xfrm>
           <a:prstGeom prst="rect">
             <a:avLst/>
@@ -11961,30 +12288,69 @@
               <a:buNone/>
             </a:pPr>
             <a:r>
-              <a:rPr lang="en-US" sz="1200" b="1" dirty="0">
-                <a:solidFill>
-                  <a:srgbClr val="3843AF"/>
-                </a:solidFill>
-                <a:latin typeface="Courier New" pitchFamily="34" charset="0"/>
-                <a:ea typeface="Courier New" pitchFamily="34" charset="-122"/>
-                <a:cs typeface="Courier New" pitchFamily="34" charset="-120"/>
+              <a:rPr lang="en-US" sz="1150" b="1" dirty="0">
+                <a:solidFill>
+                  <a:srgbClr val="272E52"/>
+                </a:solidFill>
+                <a:latin typeface="Arial" pitchFamily="34" charset="0"/>
+                <a:ea typeface="Arial" pitchFamily="34" charset="-122"/>
+                <a:cs typeface="Arial" pitchFamily="34" charset="-120"/>
+              </a:rPr>
+              <a:t>Kein Kabel</a:t>
+            </a:r>
+            <a:endParaRPr lang="en-US" sz="1150" dirty="0"/>
+          </a:p>
+        </p:txBody>
+      </p:sp>
+      <p:sp>
+        <p:nvSpPr>
+          <p:cNvPr id="11" name="Text 9"/>
+          <p:cNvSpPr/>
+          <p:nvPr/>
+        </p:nvSpPr>
+        <p:spPr>
+          <a:xfrm>
+            <a:off x="2761488" y="1993392"/>
+            <a:ext cx="1645920" cy="384048"/>
+          </a:xfrm>
+          <a:prstGeom prst="rect">
+            <a:avLst/>
+          </a:prstGeom>
+          <a:noFill/>
+          <a:ln/>
+        </p:spPr>
+        <p:txBody>
+          <a:bodyPr wrap="square" lIns="0" tIns="0" rIns="0" bIns="0" rtlCol="0" anchor="ctr"/>
+          <a:lstStyle/>
+          <a:p>
+            <a:pPr indent="0" marL="0">
+              <a:buNone/>
+            </a:pPr>
+            <a:r>
+              <a:rPr lang="en-US" sz="1150" dirty="0">
+                <a:solidFill>
+                  <a:srgbClr val="434A63"/>
+                </a:solidFill>
+                <a:latin typeface="Arial" pitchFamily="34" charset="0"/>
+                <a:ea typeface="Arial" pitchFamily="34" charset="-122"/>
+                <a:cs typeface="Arial" pitchFamily="34" charset="-120"/>
               </a:rPr>
               <a:t>1</a:t>
             </a:r>
-            <a:endParaRPr lang="en-US" sz="1200" dirty="0"/>
-          </a:p>
-        </p:txBody>
-      </p:sp>
-      <p:sp>
-        <p:nvSpPr>
-          <p:cNvPr id="7" name="Text 5"/>
-          <p:cNvSpPr/>
-          <p:nvPr/>
-        </p:nvSpPr>
-        <p:spPr>
-          <a:xfrm>
-            <a:off x="978408" y="1700784"/>
-            <a:ext cx="7598664" cy="365760"/>
+            <a:endParaRPr lang="en-US" sz="1150" dirty="0"/>
+          </a:p>
+        </p:txBody>
+      </p:sp>
+      <p:sp>
+        <p:nvSpPr>
+          <p:cNvPr id="12" name="Text 10"/>
+          <p:cNvSpPr/>
+          <p:nvPr/>
+        </p:nvSpPr>
+        <p:spPr>
+          <a:xfrm>
+            <a:off x="4590288" y="1993392"/>
+            <a:ext cx="3895344" cy="384048"/>
           </a:xfrm>
           <a:prstGeom prst="rect">
             <a:avLst/>
@@ -12000,7 +12366,7 @@
               <a:buNone/>
             </a:pPr>
             <a:r>
-              <a:rPr lang="en-US" sz="1200" dirty="0">
+              <a:rPr lang="en-US" sz="1150" dirty="0">
                 <a:solidFill>
                   <a:srgbClr val="434A63"/>
                 </a:solidFill>
@@ -12008,22 +12374,22 @@
                 <a:ea typeface="Arial" pitchFamily="34" charset="-122"/>
                 <a:cs typeface="Arial" pitchFamily="34" charset="-120"/>
               </a:rPr>
-              <a:t>Eine Gruppe zeigt ihren Steckbrief, die anderen ergänzen nur Abweichungen</a:t>
-            </a:r>
-            <a:endParaRPr lang="en-US" sz="1200" dirty="0"/>
-          </a:p>
-        </p:txBody>
-      </p:sp>
-      <p:sp>
-        <p:nvSpPr>
-          <p:cNvPr id="8" name="Text 6"/>
-          <p:cNvSpPr/>
-          <p:nvPr/>
-        </p:nvSpPr>
-        <p:spPr>
-          <a:xfrm>
-            <a:off x="566928" y="2066544"/>
-            <a:ext cx="411480" cy="365760"/>
+              <a:t>ipconfig: Medium getrennt</a:t>
+            </a:r>
+            <a:endParaRPr lang="en-US" sz="1150" dirty="0"/>
+          </a:p>
+        </p:txBody>
+      </p:sp>
+      <p:sp>
+        <p:nvSpPr>
+          <p:cNvPr id="13" name="Text 11"/>
+          <p:cNvSpPr/>
+          <p:nvPr/>
+        </p:nvSpPr>
+        <p:spPr>
+          <a:xfrm>
+            <a:off x="658368" y="2377440"/>
+            <a:ext cx="1920240" cy="384048"/>
           </a:xfrm>
           <a:prstGeom prst="rect">
             <a:avLst/>
@@ -12039,30 +12405,30 @@
               <a:buNone/>
             </a:pPr>
             <a:r>
-              <a:rPr lang="en-US" sz="1200" b="1" dirty="0">
-                <a:solidFill>
-                  <a:srgbClr val="3843AF"/>
-                </a:solidFill>
-                <a:latin typeface="Courier New" pitchFamily="34" charset="0"/>
-                <a:ea typeface="Courier New" pitchFamily="34" charset="-122"/>
-                <a:cs typeface="Courier New" pitchFamily="34" charset="-120"/>
-              </a:rPr>
-              <a:t>2</a:t>
-            </a:r>
-            <a:endParaRPr lang="en-US" sz="1200" dirty="0"/>
-          </a:p>
-        </p:txBody>
-      </p:sp>
-      <p:sp>
-        <p:nvSpPr>
-          <p:cNvPr id="9" name="Text 7"/>
-          <p:cNvSpPr/>
-          <p:nvPr/>
-        </p:nvSpPr>
-        <p:spPr>
-          <a:xfrm>
-            <a:off x="978408" y="2066544"/>
-            <a:ext cx="7598664" cy="365760"/>
+              <a:rPr lang="en-US" sz="1150" b="1" dirty="0">
+                <a:solidFill>
+                  <a:srgbClr val="272E52"/>
+                </a:solidFill>
+                <a:latin typeface="Arial" pitchFamily="34" charset="0"/>
+                <a:ea typeface="Arial" pitchFamily="34" charset="-122"/>
+                <a:cs typeface="Arial" pitchFamily="34" charset="-120"/>
+              </a:rPr>
+              <a:t>169.254.x.x</a:t>
+            </a:r>
+            <a:endParaRPr lang="en-US" sz="1150" dirty="0"/>
+          </a:p>
+        </p:txBody>
+      </p:sp>
+      <p:sp>
+        <p:nvSpPr>
+          <p:cNvPr id="14" name="Text 12"/>
+          <p:cNvSpPr/>
+          <p:nvPr/>
+        </p:nvSpPr>
+        <p:spPr>
+          <a:xfrm>
+            <a:off x="2761488" y="2377440"/>
+            <a:ext cx="1645920" cy="384048"/>
           </a:xfrm>
           <a:prstGeom prst="rect">
             <a:avLst/>
@@ -12078,7 +12444,7 @@
               <a:buNone/>
             </a:pPr>
             <a:r>
-              <a:rPr lang="en-US" sz="1200" dirty="0">
+              <a:rPr lang="en-US" sz="1150" dirty="0">
                 <a:solidFill>
                   <a:srgbClr val="434A63"/>
                 </a:solidFill>
@@ -12086,22 +12452,61 @@
                 <a:ea typeface="Arial" pitchFamily="34" charset="-122"/>
                 <a:cs typeface="Arial" pitchFamily="34" charset="-120"/>
               </a:rPr>
-              <a:t>Warum hat fast jeder eine 192.168er-Adresse?</a:t>
-            </a:r>
-            <a:endParaRPr lang="en-US" sz="1200" dirty="0"/>
-          </a:p>
-        </p:txBody>
-      </p:sp>
-      <p:sp>
-        <p:nvSpPr>
-          <p:cNvPr id="10" name="Shape 8"/>
-          <p:cNvSpPr/>
-          <p:nvPr/>
-        </p:nvSpPr>
-        <p:spPr>
-          <a:xfrm>
-            <a:off x="438912" y="2432304"/>
-            <a:ext cx="8266176" cy="365760"/>
+              <a:t>Symptom auf 3</a:t>
+            </a:r>
+            <a:endParaRPr lang="en-US" sz="1150" dirty="0"/>
+          </a:p>
+        </p:txBody>
+      </p:sp>
+      <p:sp>
+        <p:nvSpPr>
+          <p:cNvPr id="15" name="Text 13"/>
+          <p:cNvSpPr/>
+          <p:nvPr/>
+        </p:nvSpPr>
+        <p:spPr>
+          <a:xfrm>
+            <a:off x="4590288" y="2377440"/>
+            <a:ext cx="3895344" cy="384048"/>
+          </a:xfrm>
+          <a:prstGeom prst="rect">
+            <a:avLst/>
+          </a:prstGeom>
+          <a:noFill/>
+          <a:ln/>
+        </p:spPr>
+        <p:txBody>
+          <a:bodyPr wrap="square" lIns="0" tIns="0" rIns="0" bIns="0" rtlCol="0" anchor="ctr"/>
+          <a:lstStyle/>
+          <a:p>
+            <a:pPr indent="0" marL="0">
+              <a:buNone/>
+            </a:pPr>
+            <a:r>
+              <a:rPr lang="en-US" sz="1150" dirty="0">
+                <a:solidFill>
+                  <a:srgbClr val="434A63"/>
+                </a:solidFill>
+                <a:latin typeface="Arial" pitchFamily="34" charset="0"/>
+                <a:ea typeface="Arial" pitchFamily="34" charset="-122"/>
+                <a:cs typeface="Arial" pitchFamily="34" charset="-120"/>
+              </a:rPr>
+              <a:t>Ursache: kein DHCP erreichbar – oder Schicht 1</a:t>
+            </a:r>
+            <a:endParaRPr lang="en-US" sz="1150" dirty="0"/>
+          </a:p>
+        </p:txBody>
+      </p:sp>
+      <p:sp>
+        <p:nvSpPr>
+          <p:cNvPr id="16" name="Shape 14"/>
+          <p:cNvSpPr/>
+          <p:nvPr/>
+        </p:nvSpPr>
+        <p:spPr>
+          <a:xfrm>
+            <a:off x="475488" y="2761488"/>
+            <a:ext cx="8193024" cy="384048"/>
           </a:xfrm>
           <a:prstGeom prst="rect">
             <a:avLst/>
@@ -12114,14 +12519,14 @@
       </p:sp>
       <p:sp>
         <p:nvSpPr>
-          <p:cNvPr id="11" name="Text 9"/>
-          <p:cNvSpPr/>
-          <p:nvPr/>
-        </p:nvSpPr>
-        <p:spPr>
-          <a:xfrm>
-            <a:off x="566928" y="2432304"/>
-            <a:ext cx="411480" cy="365760"/>
+          <p:cNvPr id="17" name="Text 15"/>
+          <p:cNvSpPr/>
+          <p:nvPr/>
+        </p:nvSpPr>
+        <p:spPr>
+          <a:xfrm>
+            <a:off x="658368" y="2761488"/>
+            <a:ext cx="1920240" cy="384048"/>
           </a:xfrm>
           <a:prstGeom prst="rect">
             <a:avLst/>
@@ -12137,30 +12542,30 @@
               <a:buNone/>
             </a:pPr>
             <a:r>
-              <a:rPr lang="en-US" sz="1200" b="1" dirty="0">
-                <a:solidFill>
-                  <a:srgbClr val="3843AF"/>
-                </a:solidFill>
-                <a:latin typeface="Courier New" pitchFamily="34" charset="0"/>
-                <a:ea typeface="Courier New" pitchFamily="34" charset="-122"/>
-                <a:cs typeface="Courier New" pitchFamily="34" charset="-120"/>
-              </a:rPr>
-              <a:t>3</a:t>
-            </a:r>
-            <a:endParaRPr lang="en-US" sz="1200" dirty="0"/>
-          </a:p>
-        </p:txBody>
-      </p:sp>
-      <p:sp>
-        <p:nvSpPr>
-          <p:cNvPr id="12" name="Text 10"/>
-          <p:cNvSpPr/>
-          <p:nvPr/>
-        </p:nvSpPr>
-        <p:spPr>
-          <a:xfrm>
-            <a:off x="978408" y="2432304"/>
-            <a:ext cx="7598664" cy="365760"/>
+              <a:rPr lang="en-US" sz="1150" b="1" dirty="0">
+                <a:solidFill>
+                  <a:srgbClr val="272E52"/>
+                </a:solidFill>
+                <a:latin typeface="Arial" pitchFamily="34" charset="0"/>
+                <a:ea typeface="Arial" pitchFamily="34" charset="-122"/>
+                <a:cs typeface="Arial" pitchFamily="34" charset="-120"/>
+              </a:rPr>
+              <a:t>Nur Name geht nicht</a:t>
+            </a:r>
+            <a:endParaRPr lang="en-US" sz="1150" dirty="0"/>
+          </a:p>
+        </p:txBody>
+      </p:sp>
+      <p:sp>
+        <p:nvSpPr>
+          <p:cNvPr id="18" name="Text 16"/>
+          <p:cNvSpPr/>
+          <p:nvPr/>
+        </p:nvSpPr>
+        <p:spPr>
+          <a:xfrm>
+            <a:off x="2761488" y="2761488"/>
+            <a:ext cx="1645920" cy="384048"/>
           </a:xfrm>
           <a:prstGeom prst="rect">
             <a:avLst/>
@@ -12176,7 +12581,7 @@
               <a:buNone/>
             </a:pPr>
             <a:r>
-              <a:rPr lang="en-US" sz="1200" dirty="0">
+              <a:rPr lang="en-US" sz="1150" dirty="0">
                 <a:solidFill>
                   <a:srgbClr val="434A63"/>
                 </a:solidFill>
@@ -12184,22 +12589,22 @@
                 <a:ea typeface="Arial" pitchFamily="34" charset="-122"/>
                 <a:cs typeface="Arial" pitchFamily="34" charset="-120"/>
               </a:rPr>
-              <a:t>Die fünf Befehle – was beweist ein Erfolg, was beweist er nicht?</a:t>
-            </a:r>
-            <a:endParaRPr lang="en-US" sz="1200" dirty="0"/>
-          </a:p>
-        </p:txBody>
-      </p:sp>
-      <p:sp>
-        <p:nvSpPr>
-          <p:cNvPr id="13" name="Text 11"/>
-          <p:cNvSpPr/>
-          <p:nvPr/>
-        </p:nvSpPr>
-        <p:spPr>
-          <a:xfrm>
-            <a:off x="566928" y="2798064"/>
-            <a:ext cx="411480" cy="365760"/>
+              <a:t>7 – DNS</a:t>
+            </a:r>
+            <a:endParaRPr lang="en-US" sz="1150" dirty="0"/>
+          </a:p>
+        </p:txBody>
+      </p:sp>
+      <p:sp>
+        <p:nvSpPr>
+          <p:cNvPr id="19" name="Text 17"/>
+          <p:cNvSpPr/>
+          <p:nvPr/>
+        </p:nvSpPr>
+        <p:spPr>
+          <a:xfrm>
+            <a:off x="4590288" y="2761488"/>
+            <a:ext cx="3895344" cy="384048"/>
           </a:xfrm>
           <a:prstGeom prst="rect">
             <a:avLst/>
@@ -12215,30 +12620,30 @@
               <a:buNone/>
             </a:pPr>
             <a:r>
-              <a:rPr lang="en-US" sz="1200" b="1" dirty="0">
-                <a:solidFill>
-                  <a:srgbClr val="3843AF"/>
-                </a:solidFill>
-                <a:latin typeface="Courier New" pitchFamily="34" charset="0"/>
-                <a:ea typeface="Courier New" pitchFamily="34" charset="-122"/>
-                <a:cs typeface="Courier New" pitchFamily="34" charset="-120"/>
-              </a:rPr>
-              <a:t>4</a:t>
-            </a:r>
-            <a:endParaRPr lang="en-US" sz="1200" dirty="0"/>
-          </a:p>
-        </p:txBody>
-      </p:sp>
-      <p:sp>
-        <p:nvSpPr>
-          <p:cNvPr id="14" name="Text 12"/>
-          <p:cNvSpPr/>
-          <p:nvPr/>
-        </p:nvSpPr>
-        <p:spPr>
-          <a:xfrm>
-            <a:off x="978408" y="2798064"/>
-            <a:ext cx="7598664" cy="365760"/>
+              <a:rPr lang="en-US" sz="1150" dirty="0">
+                <a:solidFill>
+                  <a:srgbClr val="434A63"/>
+                </a:solidFill>
+                <a:latin typeface="Arial" pitchFamily="34" charset="0"/>
+                <a:ea typeface="Arial" pitchFamily="34" charset="-122"/>
+                <a:cs typeface="Arial" pitchFamily="34" charset="-120"/>
+              </a:rPr>
+              <a:t>nslookup scheitert, ping auf die IP läuft</a:t>
+            </a:r>
+            <a:endParaRPr lang="en-US" sz="1150" dirty="0"/>
+          </a:p>
+        </p:txBody>
+      </p:sp>
+      <p:sp>
+        <p:nvSpPr>
+          <p:cNvPr id="20" name="Text 18"/>
+          <p:cNvSpPr/>
+          <p:nvPr/>
+        </p:nvSpPr>
+        <p:spPr>
+          <a:xfrm>
+            <a:off x="658368" y="3145536"/>
+            <a:ext cx="1920240" cy="384048"/>
           </a:xfrm>
           <a:prstGeom prst="rect">
             <a:avLst/>
@@ -12254,7 +12659,46 @@
               <a:buNone/>
             </a:pPr>
             <a:r>
-              <a:rPr lang="en-US" sz="1200" dirty="0">
+              <a:rPr lang="en-US" sz="1150" b="1" dirty="0">
+                <a:solidFill>
+                  <a:srgbClr val="272E52"/>
+                </a:solidFill>
+                <a:latin typeface="Arial" pitchFamily="34" charset="0"/>
+                <a:ea typeface="Arial" pitchFamily="34" charset="-122"/>
+                <a:cs typeface="Arial" pitchFamily="34" charset="-120"/>
+              </a:rPr>
+              <a:t>ping ja, Web nein</a:t>
+            </a:r>
+            <a:endParaRPr lang="en-US" sz="1150" dirty="0"/>
+          </a:p>
+        </p:txBody>
+      </p:sp>
+      <p:sp>
+        <p:nvSpPr>
+          <p:cNvPr id="21" name="Text 19"/>
+          <p:cNvSpPr/>
+          <p:nvPr/>
+        </p:nvSpPr>
+        <p:spPr>
+          <a:xfrm>
+            <a:off x="2761488" y="3145536"/>
+            <a:ext cx="1645920" cy="384048"/>
+          </a:xfrm>
+          <a:prstGeom prst="rect">
+            <a:avLst/>
+          </a:prstGeom>
+          <a:noFill/>
+          <a:ln/>
+        </p:spPr>
+        <p:txBody>
+          <a:bodyPr wrap="square" lIns="0" tIns="0" rIns="0" bIns="0" rtlCol="0" anchor="ctr"/>
+          <a:lstStyle/>
+          <a:p>
+            <a:pPr indent="0" marL="0">
+              <a:buNone/>
+            </a:pPr>
+            <a:r>
+              <a:rPr lang="en-US" sz="1150" dirty="0">
                 <a:solidFill>
                   <a:srgbClr val="434A63"/>
                 </a:solidFill>
@@ -12262,22 +12706,61 @@
                 <a:ea typeface="Arial" pitchFamily="34" charset="-122"/>
                 <a:cs typeface="Arial" pitchFamily="34" charset="-120"/>
               </a:rPr>
-              <a:t>Die Störungen: jede Gruppe nimmt einen Fall und begründet ihn</a:t>
-            </a:r>
-            <a:endParaRPr lang="en-US" sz="1200" dirty="0"/>
-          </a:p>
-        </p:txBody>
-      </p:sp>
-      <p:sp>
-        <p:nvSpPr>
-          <p:cNvPr id="15" name="Shape 13"/>
-          <p:cNvSpPr/>
-          <p:nvPr/>
-        </p:nvSpPr>
-        <p:spPr>
-          <a:xfrm>
-            <a:off x="438912" y="3163824"/>
-            <a:ext cx="8266176" cy="365760"/>
+              <a:t>4 oder 7</a:t>
+            </a:r>
+            <a:endParaRPr lang="en-US" sz="1150" dirty="0"/>
+          </a:p>
+        </p:txBody>
+      </p:sp>
+      <p:sp>
+        <p:nvSpPr>
+          <p:cNvPr id="22" name="Text 20"/>
+          <p:cNvSpPr/>
+          <p:nvPr/>
+        </p:nvSpPr>
+        <p:spPr>
+          <a:xfrm>
+            <a:off x="4590288" y="3145536"/>
+            <a:ext cx="3895344" cy="384048"/>
+          </a:xfrm>
+          <a:prstGeom prst="rect">
+            <a:avLst/>
+          </a:prstGeom>
+          <a:noFill/>
+          <a:ln/>
+        </p:spPr>
+        <p:txBody>
+          <a:bodyPr wrap="square" lIns="0" tIns="0" rIns="0" bIns="0" rtlCol="0" anchor="ctr"/>
+          <a:lstStyle/>
+          <a:p>
+            <a:pPr indent="0" marL="0">
+              <a:buNone/>
+            </a:pPr>
+            <a:r>
+              <a:rPr lang="en-US" sz="1150" dirty="0">
+                <a:solidFill>
+                  <a:srgbClr val="434A63"/>
+                </a:solidFill>
+                <a:latin typeface="Arial" pitchFamily="34" charset="0"/>
+                <a:ea typeface="Arial" pitchFamily="34" charset="-122"/>
+                <a:cs typeface="Arial" pitchFamily="34" charset="-120"/>
+              </a:rPr>
+              <a:t>Test-NetConnection oder nc -vz auf Port 443</a:t>
+            </a:r>
+            <a:endParaRPr lang="en-US" sz="1150" dirty="0"/>
+          </a:p>
+        </p:txBody>
+      </p:sp>
+      <p:sp>
+        <p:nvSpPr>
+          <p:cNvPr id="23" name="Shape 21"/>
+          <p:cNvSpPr/>
+          <p:nvPr/>
+        </p:nvSpPr>
+        <p:spPr>
+          <a:xfrm>
+            <a:off x="475488" y="3529584"/>
+            <a:ext cx="8193024" cy="384048"/>
           </a:xfrm>
           <a:prstGeom prst="rect">
             <a:avLst/>
@@ -12290,14 +12773,14 @@
       </p:sp>
       <p:sp>
         <p:nvSpPr>
-          <p:cNvPr id="16" name="Text 14"/>
-          <p:cNvSpPr/>
-          <p:nvPr/>
-        </p:nvSpPr>
-        <p:spPr>
-          <a:xfrm>
-            <a:off x="566928" y="3163824"/>
-            <a:ext cx="411480" cy="365760"/>
+          <p:cNvPr id="24" name="Text 22"/>
+          <p:cNvSpPr/>
+          <p:nvPr/>
+        </p:nvSpPr>
+        <p:spPr>
+          <a:xfrm>
+            <a:off x="658368" y="3529584"/>
+            <a:ext cx="1920240" cy="384048"/>
           </a:xfrm>
           <a:prstGeom prst="rect">
             <a:avLst/>
@@ -12313,30 +12796,30 @@
               <a:buNone/>
             </a:pPr>
             <a:r>
-              <a:rPr lang="en-US" sz="1200" b="1" dirty="0">
-                <a:solidFill>
-                  <a:srgbClr val="3843AF"/>
-                </a:solidFill>
-                <a:latin typeface="Courier New" pitchFamily="34" charset="0"/>
-                <a:ea typeface="Courier New" pitchFamily="34" charset="-122"/>
-                <a:cs typeface="Courier New" pitchFamily="34" charset="-120"/>
-              </a:rPr>
-              <a:t>5</a:t>
-            </a:r>
-            <a:endParaRPr lang="en-US" sz="1200" dirty="0"/>
-          </a:p>
-        </p:txBody>
-      </p:sp>
-      <p:sp>
-        <p:nvSpPr>
-          <p:cNvPr id="17" name="Text 15"/>
-          <p:cNvSpPr/>
-          <p:nvPr/>
-        </p:nvSpPr>
-        <p:spPr>
-          <a:xfrm>
-            <a:off x="978408" y="3163824"/>
-            <a:ext cx="7598664" cy="365760"/>
+              <a:rPr lang="en-US" sz="1150" b="1" dirty="0">
+                <a:solidFill>
+                  <a:srgbClr val="272E52"/>
+                </a:solidFill>
+                <a:latin typeface="Arial" pitchFamily="34" charset="0"/>
+                <a:ea typeface="Arial" pitchFamily="34" charset="-122"/>
+                <a:cs typeface="Arial" pitchFamily="34" charset="-120"/>
+              </a:rPr>
+              <a:t>Alles langsam</a:t>
+            </a:r>
+            <a:endParaRPr lang="en-US" sz="1150" dirty="0"/>
+          </a:p>
+        </p:txBody>
+      </p:sp>
+      <p:sp>
+        <p:nvSpPr>
+          <p:cNvPr id="25" name="Text 23"/>
+          <p:cNvSpPr/>
+          <p:nvPr/>
+        </p:nvSpPr>
+        <p:spPr>
+          <a:xfrm>
+            <a:off x="2761488" y="3529584"/>
+            <a:ext cx="1645920" cy="384048"/>
           </a:xfrm>
           <a:prstGeom prst="rect">
             <a:avLst/>
@@ -12352,7 +12835,7 @@
               <a:buNone/>
             </a:pPr>
             <a:r>
-              <a:rPr lang="en-US" sz="1200" dirty="0">
+              <a:rPr lang="en-US" sz="1150" dirty="0">
                 <a:solidFill>
                   <a:srgbClr val="434A63"/>
                 </a:solidFill>
@@ -12360,22 +12843,22 @@
                 <a:ea typeface="Arial" pitchFamily="34" charset="-122"/>
                 <a:cs typeface="Arial" pitchFamily="34" charset="-120"/>
               </a:rPr>
-              <a:t>Erst danach die Auflösung – und die Fälle, bei denen es nicht reicht</a:t>
-            </a:r>
-            <a:endParaRPr lang="en-US" sz="1200" dirty="0"/>
-          </a:p>
-        </p:txBody>
-      </p:sp>
-      <p:sp>
-        <p:nvSpPr>
-          <p:cNvPr id="18" name="Text 16"/>
-          <p:cNvSpPr/>
-          <p:nvPr/>
-        </p:nvSpPr>
-        <p:spPr>
-          <a:xfrm>
-            <a:off x="566928" y="3529584"/>
-            <a:ext cx="411480" cy="365760"/>
+              <a:t>kein Ausfall</a:t>
+            </a:r>
+            <a:endParaRPr lang="en-US" sz="1150" dirty="0"/>
+          </a:p>
+        </p:txBody>
+      </p:sp>
+      <p:sp>
+        <p:nvSpPr>
+          <p:cNvPr id="26" name="Text 24"/>
+          <p:cNvSpPr/>
+          <p:nvPr/>
+        </p:nvSpPr>
+        <p:spPr>
+          <a:xfrm>
+            <a:off x="4590288" y="3529584"/>
+            <a:ext cx="3895344" cy="384048"/>
           </a:xfrm>
           <a:prstGeom prst="rect">
             <a:avLst/>
@@ -12391,46 +12874,7 @@
               <a:buNone/>
             </a:pPr>
             <a:r>
-              <a:rPr lang="en-US" sz="1200" b="1" dirty="0">
-                <a:solidFill>
-                  <a:srgbClr val="3843AF"/>
-                </a:solidFill>
-                <a:latin typeface="Courier New" pitchFamily="34" charset="0"/>
-                <a:ea typeface="Courier New" pitchFamily="34" charset="-122"/>
-                <a:cs typeface="Courier New" pitchFamily="34" charset="-120"/>
-              </a:rPr>
-              <a:t>6</a:t>
-            </a:r>
-            <a:endParaRPr lang="en-US" sz="1200" dirty="0"/>
-          </a:p>
-        </p:txBody>
-      </p:sp>
-      <p:sp>
-        <p:nvSpPr>
-          <p:cNvPr id="19" name="Text 17"/>
-          <p:cNvSpPr/>
-          <p:nvPr/>
-        </p:nvSpPr>
-        <p:spPr>
-          <a:xfrm>
-            <a:off x="978408" y="3529584"/>
-            <a:ext cx="7598664" cy="365760"/>
-          </a:xfrm>
-          <a:prstGeom prst="rect">
-            <a:avLst/>
-          </a:prstGeom>
-          <a:noFill/>
-          <a:ln/>
-        </p:spPr>
-        <p:txBody>
-          <a:bodyPr wrap="square" lIns="0" tIns="0" rIns="0" bIns="0" rtlCol="0" anchor="ctr"/>
-          <a:lstStyle/>
-          <a:p>
-            <a:pPr indent="0" marL="0">
-              <a:buNone/>
-            </a:pPr>
-            <a:r>
-              <a:rPr lang="en-US" sz="1200" dirty="0">
+              <a:rPr lang="en-US" sz="1150" dirty="0">
                 <a:solidFill>
                   <a:srgbClr val="434A63"/>
                 </a:solidFill>
@@ -12438,42 +12882,22 @@
                 <a:ea typeface="Arial" pitchFamily="34" charset="-122"/>
                 <a:cs typeface="Arial" pitchFamily="34" charset="-120"/>
               </a:rPr>
-              <a:t>Euer Satz: Was hat euch überrascht?</a:t>
-            </a:r>
-            <a:endParaRPr lang="en-US" sz="1200" dirty="0"/>
-          </a:p>
-        </p:txBody>
-      </p:sp>
-      <p:sp>
-        <p:nvSpPr>
-          <p:cNvPr id="20" name="Shape 18"/>
-          <p:cNvSpPr/>
-          <p:nvPr/>
-        </p:nvSpPr>
-        <p:spPr>
-          <a:xfrm>
-            <a:off x="566928" y="3986784"/>
-            <a:ext cx="8010144" cy="420624"/>
-          </a:xfrm>
-          <a:prstGeom prst="rect">
-            <a:avLst/>
-          </a:prstGeom>
-          <a:solidFill>
-            <a:srgbClr val="EEF0FB"/>
-          </a:solidFill>
-          <a:ln/>
-        </p:spPr>
-      </p:sp>
-      <p:sp>
-        <p:nvSpPr>
-          <p:cNvPr id="21" name="Shape 19"/>
-          <p:cNvSpPr/>
-          <p:nvPr/>
-        </p:nvSpPr>
-        <p:spPr>
-          <a:xfrm>
-            <a:off x="566928" y="3986784"/>
-            <a:ext cx="41148" cy="420624"/>
+              <a:t>Zeit und Verlust in der ping-Ausgabe</a:t>
+            </a:r>
+            <a:endParaRPr lang="en-US" sz="1150" dirty="0"/>
+          </a:p>
+        </p:txBody>
+      </p:sp>
+      <p:sp>
+        <p:nvSpPr>
+          <p:cNvPr id="27" name="Shape 25"/>
+          <p:cNvSpPr/>
+          <p:nvPr/>
+        </p:nvSpPr>
+        <p:spPr>
+          <a:xfrm>
+            <a:off x="566928" y="4160520"/>
+            <a:ext cx="32004" cy="256032"/>
           </a:xfrm>
           <a:prstGeom prst="rect">
             <a:avLst/>
@@ -12486,33 +12910,30 @@
       </p:sp>
       <p:sp>
         <p:nvSpPr>
-          <p:cNvPr id="22" name="Text 20"/>
-          <p:cNvSpPr/>
-          <p:nvPr/>
-        </p:nvSpPr>
-        <p:spPr>
-          <a:xfrm>
-            <a:off x="804672" y="4133088"/>
-            <a:ext cx="7607808" cy="155448"/>
-          </a:xfrm>
-          <a:prstGeom prst="rect">
-            <a:avLst/>
-          </a:prstGeom>
-          <a:noFill/>
-          <a:ln/>
-        </p:spPr>
-        <p:txBody>
-          <a:bodyPr wrap="square" lIns="0" tIns="0" rIns="0" bIns="0" rtlCol="0" anchor="t"/>
-          <a:lstStyle/>
-          <a:p>
-            <a:pPr indent="0" marL="0">
-              <a:lnSpc>
-                <a:spcPct val="92000"/>
-              </a:lnSpc>
-              <a:buNone/>
-            </a:pPr>
-            <a:r>
-              <a:rPr lang="en-US" sz="1150" dirty="0">
+          <p:cNvPr id="28" name="Text 26"/>
+          <p:cNvSpPr/>
+          <p:nvPr/>
+        </p:nvSpPr>
+        <p:spPr>
+          <a:xfrm>
+            <a:off x="749808" y="4114800"/>
+            <a:ext cx="7827264" cy="402336"/>
+          </a:xfrm>
+          <a:prstGeom prst="rect">
+            <a:avLst/>
+          </a:prstGeom>
+          <a:noFill/>
+          <a:ln/>
+        </p:spPr>
+        <p:txBody>
+          <a:bodyPr wrap="square" lIns="0" tIns="0" rIns="0" bIns="0" rtlCol="0" anchor="ctr"/>
+          <a:lstStyle/>
+          <a:p>
+            <a:pPr indent="0" marL="0">
+              <a:buNone/>
+            </a:pPr>
+            <a:r>
+              <a:rPr lang="en-US" sz="1200" b="1" dirty="0">
                 <a:solidFill>
                   <a:srgbClr val="434A63"/>
                 </a:solidFill>
@@ -12520,15 +12941,15 @@
                 <a:ea typeface="Arial" pitchFamily="34" charset="-122"/>
                 <a:cs typeface="Arial" pitchFamily="34" charset="-120"/>
               </a:rPr>
-              <a:t>Die Begründung zählt mehr als die Antwort. Woran habt ihr die Schicht erkannt?</a:t>
-            </a:r>
-            <a:endParaRPr lang="en-US" sz="1150" dirty="0"/>
-          </a:p>
-        </p:txBody>
-      </p:sp>
-      <p:sp>
-        <p:nvSpPr>
-          <p:cNvPr id="23" name="Shape 21"/>
+              <a:t>Von unten nach oben. Die unterste stumme Schicht sagt euch, wo ihr weitersucht – nicht immer, woran es liegt.</a:t>
+            </a:r>
+            <a:endParaRPr lang="en-US" sz="1200" dirty="0"/>
+          </a:p>
+        </p:txBody>
+      </p:sp>
+      <p:sp>
+        <p:nvSpPr>
+          <p:cNvPr id="29" name="Shape 27"/>
           <p:cNvSpPr/>
           <p:nvPr/>
         </p:nvSpPr>
@@ -12551,7 +12972,7 @@
       </p:sp>
       <p:sp>
         <p:nvSpPr>
-          <p:cNvPr id="24" name="Text 22"/>
+          <p:cNvPr id="30" name="Text 28"/>
           <p:cNvSpPr/>
           <p:nvPr/>
         </p:nvSpPr>
@@ -12590,7 +13011,7 @@
       </p:sp>
       <p:sp>
         <p:nvSpPr>
-          <p:cNvPr id="25" name="Text 23"/>
+          <p:cNvPr id="31" name="Text 29"/>
           <p:cNvSpPr/>
           <p:nvPr/>
         </p:nvSpPr>
@@ -12621,7 +13042,7 @@
                 <a:ea typeface="Arial" pitchFamily="34" charset="-122"/>
                 <a:cs typeface="Arial" pitchFamily="34" charset="-120"/>
               </a:rPr>
-              <a:t>19/22</a:t>
+              <a:t>19/21</a:t>
             </a:r>
             <a:endParaRPr lang="en-US" sz="1050" dirty="0"/>
           </a:p>
@@ -12712,7 +13133,7 @@
                 <a:ea typeface="Arial" pitchFamily="34" charset="-122"/>
                 <a:cs typeface="Arial" pitchFamily="34" charset="-120"/>
               </a:rPr>
-              <a:t>AUSWERTUNG</a:t>
+              <a:t>KERN DES ABENDS</a:t>
             </a:r>
             <a:endParaRPr lang="en-US" sz="1150" dirty="0"/>
           </a:p>
@@ -12751,7 +13172,7 @@
                 <a:ea typeface="Arial" pitchFamily="34" charset="-122"/>
                 <a:cs typeface="Arial" pitchFamily="34" charset="-120"/>
               </a:rPr>
-              <a:t>Die Auflösung der fünf Störungen</a:t>
+              <a:t>Das nehmt ihr heute mit</a:t>
             </a:r>
             <a:endParaRPr lang="en-US" sz="2600" dirty="0"/>
           </a:p>
@@ -12765,24 +13186,27 @@
         </p:nvSpPr>
         <p:spPr>
           <a:xfrm>
-            <a:off x="658368" y="1627632"/>
-            <a:ext cx="1920240" cy="274320"/>
-          </a:xfrm>
-          <a:prstGeom prst="rect">
-            <a:avLst/>
-          </a:prstGeom>
-          <a:noFill/>
-          <a:ln/>
-        </p:spPr>
-        <p:txBody>
-          <a:bodyPr wrap="square" lIns="0" tIns="0" rIns="0" bIns="0" rtlCol="0" anchor="ctr"/>
-          <a:lstStyle/>
-          <a:p>
-            <a:pPr indent="0" marL="0">
-              <a:buNone/>
-            </a:pPr>
-            <a:r>
-              <a:rPr lang="en-US" sz="1050" b="1" spc="80" kern="0" dirty="0">
+            <a:off x="566928" y="1691640"/>
+            <a:ext cx="8010144" cy="1828800"/>
+          </a:xfrm>
+          <a:prstGeom prst="rect">
+            <a:avLst/>
+          </a:prstGeom>
+          <a:noFill/>
+          <a:ln/>
+        </p:spPr>
+        <p:txBody>
+          <a:bodyPr wrap="square" lIns="0" tIns="0" rIns="0" bIns="0" rtlCol="0" anchor="t"/>
+          <a:lstStyle/>
+          <a:p>
+            <a:pPr indent="0" marL="0">
+              <a:lnSpc>
+                <a:spcPct val="92000"/>
+              </a:lnSpc>
+              <a:buNone/>
+            </a:pPr>
+            <a:r>
+              <a:rPr lang="en-US" sz="1350" b="1" dirty="0">
                 <a:solidFill>
                   <a:srgbClr val="3843AF"/>
                 </a:solidFill>
@@ -12790,38 +13214,39 @@
                 <a:ea typeface="Arial" pitchFamily="34" charset="-122"/>
                 <a:cs typeface="Arial" pitchFamily="34" charset="-120"/>
               </a:rPr>
-              <a:t>Fall</a:t>
-            </a:r>
-            <a:endParaRPr lang="en-US" sz="1050" dirty="0"/>
-          </a:p>
-        </p:txBody>
-      </p:sp>
-      <p:sp>
-        <p:nvSpPr>
-          <p:cNvPr id="6" name="Text 4"/>
-          <p:cNvSpPr/>
-          <p:nvPr/>
-        </p:nvSpPr>
-        <p:spPr>
-          <a:xfrm>
-            <a:off x="2761488" y="1627632"/>
-            <a:ext cx="1645920" cy="274320"/>
-          </a:xfrm>
-          <a:prstGeom prst="rect">
-            <a:avLst/>
-          </a:prstGeom>
-          <a:noFill/>
-          <a:ln/>
-        </p:spPr>
-        <p:txBody>
-          <a:bodyPr wrap="square" lIns="0" tIns="0" rIns="0" bIns="0" rtlCol="0" anchor="ctr"/>
-          <a:lstStyle/>
-          <a:p>
-            <a:pPr indent="0" marL="0">
-              <a:buNone/>
-            </a:pPr>
-            <a:r>
-              <a:rPr lang="en-US" sz="1050" b="1" spc="80" kern="0" dirty="0">
+              <a:t>▸   </a:t>
+            </a:r>
+            <a:pPr indent="0" marL="0">
+              <a:lnSpc>
+                <a:spcPct val="92000"/>
+              </a:lnSpc>
+              <a:spcAft>
+                <a:spcPts val="900"/>
+              </a:spcAft>
+              <a:buNone/>
+            </a:pPr>
+            <a:r>
+              <a:rPr lang="en-US" sz="1350" b="1" dirty="0">
+                <a:solidFill>
+                  <a:srgbClr val="434A63"/>
+                </a:solidFill>
+                <a:latin typeface="Arial" pitchFamily="34" charset="0"/>
+                <a:ea typeface="Arial" pitchFamily="34" charset="-122"/>
+                <a:cs typeface="Arial" pitchFamily="34" charset="-120"/>
+              </a:rPr>
+              <a:t>Dieselben Daten heißen je nach Schicht Frame, Paket oder Segment.</a:t>
+            </a:r>
+            <a:endParaRPr lang="en-US" sz="1350" dirty="0"/>
+          </a:p>
+          <a:p>
+            <a:pPr indent="0" marL="0">
+              <a:lnSpc>
+                <a:spcPct val="92000"/>
+              </a:lnSpc>
+              <a:buNone/>
+            </a:pPr>
+            <a:r>
+              <a:rPr lang="en-US" sz="1350" b="1" dirty="0">
                 <a:solidFill>
                   <a:srgbClr val="3843AF"/>
                 </a:solidFill>
@@ -12829,38 +13254,39 @@
                 <a:ea typeface="Arial" pitchFamily="34" charset="-122"/>
                 <a:cs typeface="Arial" pitchFamily="34" charset="-120"/>
               </a:rPr>
-              <a:t>Schicht</a:t>
-            </a:r>
-            <a:endParaRPr lang="en-US" sz="1050" dirty="0"/>
-          </a:p>
-        </p:txBody>
-      </p:sp>
-      <p:sp>
-        <p:nvSpPr>
-          <p:cNvPr id="7" name="Text 5"/>
-          <p:cNvSpPr/>
-          <p:nvPr/>
-        </p:nvSpPr>
-        <p:spPr>
-          <a:xfrm>
-            <a:off x="4590288" y="1627632"/>
-            <a:ext cx="3895344" cy="274320"/>
-          </a:xfrm>
-          <a:prstGeom prst="rect">
-            <a:avLst/>
-          </a:prstGeom>
-          <a:noFill/>
-          <a:ln/>
-        </p:spPr>
-        <p:txBody>
-          <a:bodyPr wrap="square" lIns="0" tIns="0" rIns="0" bIns="0" rtlCol="0" anchor="ctr"/>
-          <a:lstStyle/>
-          <a:p>
-            <a:pPr indent="0" marL="0">
-              <a:buNone/>
-            </a:pPr>
-            <a:r>
-              <a:rPr lang="en-US" sz="1050" b="1" spc="80" kern="0" dirty="0">
+              <a:t>▸   </a:t>
+            </a:r>
+            <a:pPr indent="0" marL="0">
+              <a:lnSpc>
+                <a:spcPct val="92000"/>
+              </a:lnSpc>
+              <a:spcAft>
+                <a:spcPts val="900"/>
+              </a:spcAft>
+              <a:buNone/>
+            </a:pPr>
+            <a:r>
+              <a:rPr lang="en-US" sz="1350" b="1" dirty="0">
+                <a:solidFill>
+                  <a:srgbClr val="434A63"/>
+                </a:solidFill>
+                <a:latin typeface="Arial" pitchFamily="34" charset="0"/>
+                <a:ea typeface="Arial" pitchFamily="34" charset="-122"/>
+                <a:cs typeface="Arial" pitchFamily="34" charset="-120"/>
+              </a:rPr>
+              <a:t>Kapselung: nichts wird ersetzt, es kommt nur außen etwas dazu.</a:t>
+            </a:r>
+            <a:endParaRPr lang="en-US" sz="1350" dirty="0"/>
+          </a:p>
+          <a:p>
+            <a:pPr indent="0" marL="0">
+              <a:lnSpc>
+                <a:spcPct val="92000"/>
+              </a:lnSpc>
+              <a:buNone/>
+            </a:pPr>
+            <a:r>
+              <a:rPr lang="en-US" sz="1350" b="1" dirty="0">
                 <a:solidFill>
                   <a:srgbClr val="3843AF"/>
                 </a:solidFill>
@@ -12868,690 +13294,142 @@
                 <a:ea typeface="Arial" pitchFamily="34" charset="-122"/>
                 <a:cs typeface="Arial" pitchFamily="34" charset="-120"/>
               </a:rPr>
-              <a:t>Nachweis</a:t>
-            </a:r>
-            <a:endParaRPr lang="en-US" sz="1050" dirty="0"/>
-          </a:p>
-        </p:txBody>
-      </p:sp>
-      <p:sp>
-        <p:nvSpPr>
-          <p:cNvPr id="8" name="Shape 6"/>
-          <p:cNvSpPr/>
-          <p:nvPr/>
-        </p:nvSpPr>
-        <p:spPr>
-          <a:xfrm>
-            <a:off x="566928" y="1920240"/>
-            <a:ext cx="8010144" cy="0"/>
-          </a:xfrm>
-          <a:prstGeom prst="line">
-            <a:avLst/>
-          </a:prstGeom>
-          <a:noFill/>
-          <a:ln w="12700">
-            <a:solidFill>
-              <a:srgbClr val="DFE3F0"/>
-            </a:solidFill>
-            <a:prstDash val="solid"/>
-          </a:ln>
-        </p:spPr>
-      </p:sp>
-      <p:sp>
-        <p:nvSpPr>
-          <p:cNvPr id="9" name="Shape 7"/>
-          <p:cNvSpPr/>
-          <p:nvPr/>
-        </p:nvSpPr>
-        <p:spPr>
-          <a:xfrm>
-            <a:off x="475488" y="1993392"/>
-            <a:ext cx="8193024" cy="384048"/>
+              <a:t>▸   </a:t>
+            </a:r>
+            <a:pPr indent="0" marL="0">
+              <a:lnSpc>
+                <a:spcPct val="92000"/>
+              </a:lnSpc>
+              <a:spcAft>
+                <a:spcPts val="900"/>
+              </a:spcAft>
+              <a:buNone/>
+            </a:pPr>
+            <a:r>
+              <a:rPr lang="en-US" sz="1350" b="1" dirty="0">
+                <a:solidFill>
+                  <a:srgbClr val="434A63"/>
+                </a:solidFill>
+                <a:latin typeface="Arial" pitchFamily="34" charset="0"/>
+                <a:ea typeface="Arial" pitchFamily="34" charset="-122"/>
+                <a:cs typeface="Arial" pitchFamily="34" charset="-120"/>
+              </a:rPr>
+              <a:t>OSI sieben Schichten, TCP/IP vier. Gearbeitet wird auf 2, 3 und 4.</a:t>
+            </a:r>
+            <a:endParaRPr lang="en-US" sz="1350" dirty="0"/>
+          </a:p>
+          <a:p>
+            <a:pPr indent="0" marL="0">
+              <a:lnSpc>
+                <a:spcPct val="92000"/>
+              </a:lnSpc>
+              <a:buNone/>
+            </a:pPr>
+            <a:r>
+              <a:rPr lang="en-US" sz="1350" b="1" dirty="0">
+                <a:solidFill>
+                  <a:srgbClr val="3843AF"/>
+                </a:solidFill>
+                <a:latin typeface="Arial" pitchFamily="34" charset="0"/>
+                <a:ea typeface="Arial" pitchFamily="34" charset="-122"/>
+                <a:cs typeface="Arial" pitchFamily="34" charset="-120"/>
+              </a:rPr>
+              <a:t>▸   </a:t>
+            </a:r>
+            <a:pPr indent="0" marL="0">
+              <a:lnSpc>
+                <a:spcPct val="92000"/>
+              </a:lnSpc>
+              <a:spcAft>
+                <a:spcPts val="900"/>
+              </a:spcAft>
+              <a:buNone/>
+            </a:pPr>
+            <a:r>
+              <a:rPr lang="en-US" sz="1350" b="1" dirty="0">
+                <a:solidFill>
+                  <a:srgbClr val="434A63"/>
+                </a:solidFill>
+                <a:latin typeface="Arial" pitchFamily="34" charset="0"/>
+                <a:ea typeface="Arial" pitchFamily="34" charset="-122"/>
+                <a:cs typeface="Arial" pitchFamily="34" charset="-120"/>
+              </a:rPr>
+              <a:t>Bandbreite ist nicht Geschwindigkeit. Latenz ist die andere Hälfte.</a:t>
+            </a:r>
+            <a:endParaRPr lang="en-US" sz="1350" dirty="0"/>
+          </a:p>
+          <a:p>
+            <a:pPr indent="0" marL="0">
+              <a:lnSpc>
+                <a:spcPct val="92000"/>
+              </a:lnSpc>
+              <a:buNone/>
+            </a:pPr>
+            <a:r>
+              <a:rPr lang="en-US" sz="1350" b="1" dirty="0">
+                <a:solidFill>
+                  <a:srgbClr val="3843AF"/>
+                </a:solidFill>
+                <a:latin typeface="Arial" pitchFamily="34" charset="0"/>
+                <a:ea typeface="Arial" pitchFamily="34" charset="-122"/>
+                <a:cs typeface="Arial" pitchFamily="34" charset="-120"/>
+              </a:rPr>
+              <a:t>▸   </a:t>
+            </a:r>
+            <a:pPr indent="0" marL="0">
+              <a:lnSpc>
+                <a:spcPct val="92000"/>
+              </a:lnSpc>
+              <a:spcAft>
+                <a:spcPts val="900"/>
+              </a:spcAft>
+              <a:buNone/>
+            </a:pPr>
+            <a:r>
+              <a:rPr lang="en-US" sz="1350" b="1" dirty="0">
+                <a:solidFill>
+                  <a:srgbClr val="434A63"/>
+                </a:solidFill>
+                <a:latin typeface="Arial" pitchFamily="34" charset="0"/>
+                <a:ea typeface="Arial" pitchFamily="34" charset="-122"/>
+                <a:cs typeface="Arial" pitchFamily="34" charset="-120"/>
+              </a:rPr>
+              <a:t>Fehlersuche: von unten nach oben, und jeder Befehl beweist nur seine Schicht.</a:t>
+            </a:r>
+            <a:endParaRPr lang="en-US" sz="1350" dirty="0"/>
+          </a:p>
+        </p:txBody>
+      </p:sp>
+      <p:sp>
+        <p:nvSpPr>
+          <p:cNvPr id="6" name="Shape 4"/>
+          <p:cNvSpPr/>
+          <p:nvPr/>
+        </p:nvSpPr>
+        <p:spPr>
+          <a:xfrm>
+            <a:off x="566928" y="3566160"/>
+            <a:ext cx="8010144" cy="960120"/>
           </a:xfrm>
           <a:prstGeom prst="rect">
             <a:avLst/>
           </a:prstGeom>
           <a:solidFill>
-            <a:srgbClr val="F5F6FC"/>
+            <a:srgbClr val="EEF0FB"/>
           </a:solidFill>
           <a:ln/>
         </p:spPr>
       </p:sp>
       <p:sp>
         <p:nvSpPr>
-          <p:cNvPr id="10" name="Text 8"/>
-          <p:cNvSpPr/>
-          <p:nvPr/>
-        </p:nvSpPr>
-        <p:spPr>
-          <a:xfrm>
-            <a:off x="658368" y="1993392"/>
-            <a:ext cx="1920240" cy="384048"/>
-          </a:xfrm>
-          <a:prstGeom prst="rect">
-            <a:avLst/>
-          </a:prstGeom>
-          <a:noFill/>
-          <a:ln/>
-        </p:spPr>
-        <p:txBody>
-          <a:bodyPr wrap="square" lIns="0" tIns="0" rIns="0" bIns="0" rtlCol="0" anchor="ctr"/>
-          <a:lstStyle/>
-          <a:p>
-            <a:pPr indent="0" marL="0">
-              <a:buNone/>
-            </a:pPr>
-            <a:r>
-              <a:rPr lang="en-US" sz="1150" b="1" dirty="0">
-                <a:solidFill>
-                  <a:srgbClr val="272E52"/>
-                </a:solidFill>
-                <a:latin typeface="Arial" pitchFamily="34" charset="0"/>
-                <a:ea typeface="Arial" pitchFamily="34" charset="-122"/>
-                <a:cs typeface="Arial" pitchFamily="34" charset="-120"/>
-              </a:rPr>
-              <a:t>Kein Kabel</a:t>
-            </a:r>
-            <a:endParaRPr lang="en-US" sz="1150" dirty="0"/>
-          </a:p>
-        </p:txBody>
-      </p:sp>
-      <p:sp>
-        <p:nvSpPr>
-          <p:cNvPr id="11" name="Text 9"/>
-          <p:cNvSpPr/>
-          <p:nvPr/>
-        </p:nvSpPr>
-        <p:spPr>
-          <a:xfrm>
-            <a:off x="2761488" y="1993392"/>
-            <a:ext cx="1645920" cy="384048"/>
-          </a:xfrm>
-          <a:prstGeom prst="rect">
-            <a:avLst/>
-          </a:prstGeom>
-          <a:noFill/>
-          <a:ln/>
-        </p:spPr>
-        <p:txBody>
-          <a:bodyPr wrap="square" lIns="0" tIns="0" rIns="0" bIns="0" rtlCol="0" anchor="ctr"/>
-          <a:lstStyle/>
-          <a:p>
-            <a:pPr indent="0" marL="0">
-              <a:buNone/>
-            </a:pPr>
-            <a:r>
-              <a:rPr lang="en-US" sz="1150" dirty="0">
-                <a:solidFill>
-                  <a:srgbClr val="434A63"/>
-                </a:solidFill>
-                <a:latin typeface="Arial" pitchFamily="34" charset="0"/>
-                <a:ea typeface="Arial" pitchFamily="34" charset="-122"/>
-                <a:cs typeface="Arial" pitchFamily="34" charset="-120"/>
-              </a:rPr>
-              <a:t>1</a:t>
-            </a:r>
-            <a:endParaRPr lang="en-US" sz="1150" dirty="0"/>
-          </a:p>
-        </p:txBody>
-      </p:sp>
-      <p:sp>
-        <p:nvSpPr>
-          <p:cNvPr id="12" name="Text 10"/>
-          <p:cNvSpPr/>
-          <p:nvPr/>
-        </p:nvSpPr>
-        <p:spPr>
-          <a:xfrm>
-            <a:off x="4590288" y="1993392"/>
-            <a:ext cx="3895344" cy="384048"/>
-          </a:xfrm>
-          <a:prstGeom prst="rect">
-            <a:avLst/>
-          </a:prstGeom>
-          <a:noFill/>
-          <a:ln/>
-        </p:spPr>
-        <p:txBody>
-          <a:bodyPr wrap="square" lIns="0" tIns="0" rIns="0" bIns="0" rtlCol="0" anchor="ctr"/>
-          <a:lstStyle/>
-          <a:p>
-            <a:pPr indent="0" marL="0">
-              <a:buNone/>
-            </a:pPr>
-            <a:r>
-              <a:rPr lang="en-US" sz="1150" dirty="0">
-                <a:solidFill>
-                  <a:srgbClr val="434A63"/>
-                </a:solidFill>
-                <a:latin typeface="Arial" pitchFamily="34" charset="0"/>
-                <a:ea typeface="Arial" pitchFamily="34" charset="-122"/>
-                <a:cs typeface="Arial" pitchFamily="34" charset="-120"/>
-              </a:rPr>
-              <a:t>ipconfig: Medium getrennt</a:t>
-            </a:r>
-            <a:endParaRPr lang="en-US" sz="1150" dirty="0"/>
-          </a:p>
-        </p:txBody>
-      </p:sp>
-      <p:sp>
-        <p:nvSpPr>
-          <p:cNvPr id="13" name="Text 11"/>
-          <p:cNvSpPr/>
-          <p:nvPr/>
-        </p:nvSpPr>
-        <p:spPr>
-          <a:xfrm>
-            <a:off x="658368" y="2377440"/>
-            <a:ext cx="1920240" cy="384048"/>
-          </a:xfrm>
-          <a:prstGeom prst="rect">
-            <a:avLst/>
-          </a:prstGeom>
-          <a:noFill/>
-          <a:ln/>
-        </p:spPr>
-        <p:txBody>
-          <a:bodyPr wrap="square" lIns="0" tIns="0" rIns="0" bIns="0" rtlCol="0" anchor="ctr"/>
-          <a:lstStyle/>
-          <a:p>
-            <a:pPr indent="0" marL="0">
-              <a:buNone/>
-            </a:pPr>
-            <a:r>
-              <a:rPr lang="en-US" sz="1150" b="1" dirty="0">
-                <a:solidFill>
-                  <a:srgbClr val="272E52"/>
-                </a:solidFill>
-                <a:latin typeface="Arial" pitchFamily="34" charset="0"/>
-                <a:ea typeface="Arial" pitchFamily="34" charset="-122"/>
-                <a:cs typeface="Arial" pitchFamily="34" charset="-120"/>
-              </a:rPr>
-              <a:t>169.254.x.x</a:t>
-            </a:r>
-            <a:endParaRPr lang="en-US" sz="1150" dirty="0"/>
-          </a:p>
-        </p:txBody>
-      </p:sp>
-      <p:sp>
-        <p:nvSpPr>
-          <p:cNvPr id="14" name="Text 12"/>
-          <p:cNvSpPr/>
-          <p:nvPr/>
-        </p:nvSpPr>
-        <p:spPr>
-          <a:xfrm>
-            <a:off x="2761488" y="2377440"/>
-            <a:ext cx="1645920" cy="384048"/>
-          </a:xfrm>
-          <a:prstGeom prst="rect">
-            <a:avLst/>
-          </a:prstGeom>
-          <a:noFill/>
-          <a:ln/>
-        </p:spPr>
-        <p:txBody>
-          <a:bodyPr wrap="square" lIns="0" tIns="0" rIns="0" bIns="0" rtlCol="0" anchor="ctr"/>
-          <a:lstStyle/>
-          <a:p>
-            <a:pPr indent="0" marL="0">
-              <a:buNone/>
-            </a:pPr>
-            <a:r>
-              <a:rPr lang="en-US" sz="1150" dirty="0">
-                <a:solidFill>
-                  <a:srgbClr val="434A63"/>
-                </a:solidFill>
-                <a:latin typeface="Arial" pitchFamily="34" charset="0"/>
-                <a:ea typeface="Arial" pitchFamily="34" charset="-122"/>
-                <a:cs typeface="Arial" pitchFamily="34" charset="-120"/>
-              </a:rPr>
-              <a:t>Symptom auf 3</a:t>
-            </a:r>
-            <a:endParaRPr lang="en-US" sz="1150" dirty="0"/>
-          </a:p>
-        </p:txBody>
-      </p:sp>
-      <p:sp>
-        <p:nvSpPr>
-          <p:cNvPr id="15" name="Text 13"/>
-          <p:cNvSpPr/>
-          <p:nvPr/>
-        </p:nvSpPr>
-        <p:spPr>
-          <a:xfrm>
-            <a:off x="4590288" y="2377440"/>
-            <a:ext cx="3895344" cy="384048"/>
-          </a:xfrm>
-          <a:prstGeom prst="rect">
-            <a:avLst/>
-          </a:prstGeom>
-          <a:noFill/>
-          <a:ln/>
-        </p:spPr>
-        <p:txBody>
-          <a:bodyPr wrap="square" lIns="0" tIns="0" rIns="0" bIns="0" rtlCol="0" anchor="ctr"/>
-          <a:lstStyle/>
-          <a:p>
-            <a:pPr indent="0" marL="0">
-              <a:buNone/>
-            </a:pPr>
-            <a:r>
-              <a:rPr lang="en-US" sz="1150" dirty="0">
-                <a:solidFill>
-                  <a:srgbClr val="434A63"/>
-                </a:solidFill>
-                <a:latin typeface="Arial" pitchFamily="34" charset="0"/>
-                <a:ea typeface="Arial" pitchFamily="34" charset="-122"/>
-                <a:cs typeface="Arial" pitchFamily="34" charset="-120"/>
-              </a:rPr>
-              <a:t>Ursache: kein DHCP erreichbar – oder Schicht 1</a:t>
-            </a:r>
-            <a:endParaRPr lang="en-US" sz="1150" dirty="0"/>
-          </a:p>
-        </p:txBody>
-      </p:sp>
-      <p:sp>
-        <p:nvSpPr>
-          <p:cNvPr id="16" name="Shape 14"/>
-          <p:cNvSpPr/>
-          <p:nvPr/>
-        </p:nvSpPr>
-        <p:spPr>
-          <a:xfrm>
-            <a:off x="475488" y="2761488"/>
-            <a:ext cx="8193024" cy="384048"/>
-          </a:xfrm>
-          <a:prstGeom prst="rect">
-            <a:avLst/>
-          </a:prstGeom>
-          <a:solidFill>
-            <a:srgbClr val="F5F6FC"/>
-          </a:solidFill>
-          <a:ln/>
-        </p:spPr>
-      </p:sp>
-      <p:sp>
-        <p:nvSpPr>
-          <p:cNvPr id="17" name="Text 15"/>
-          <p:cNvSpPr/>
-          <p:nvPr/>
-        </p:nvSpPr>
-        <p:spPr>
-          <a:xfrm>
-            <a:off x="658368" y="2761488"/>
-            <a:ext cx="1920240" cy="384048"/>
-          </a:xfrm>
-          <a:prstGeom prst="rect">
-            <a:avLst/>
-          </a:prstGeom>
-          <a:noFill/>
-          <a:ln/>
-        </p:spPr>
-        <p:txBody>
-          <a:bodyPr wrap="square" lIns="0" tIns="0" rIns="0" bIns="0" rtlCol="0" anchor="ctr"/>
-          <a:lstStyle/>
-          <a:p>
-            <a:pPr indent="0" marL="0">
-              <a:buNone/>
-            </a:pPr>
-            <a:r>
-              <a:rPr lang="en-US" sz="1150" b="1" dirty="0">
-                <a:solidFill>
-                  <a:srgbClr val="272E52"/>
-                </a:solidFill>
-                <a:latin typeface="Arial" pitchFamily="34" charset="0"/>
-                <a:ea typeface="Arial" pitchFamily="34" charset="-122"/>
-                <a:cs typeface="Arial" pitchFamily="34" charset="-120"/>
-              </a:rPr>
-              <a:t>Nur Name geht nicht</a:t>
-            </a:r>
-            <a:endParaRPr lang="en-US" sz="1150" dirty="0"/>
-          </a:p>
-        </p:txBody>
-      </p:sp>
-      <p:sp>
-        <p:nvSpPr>
-          <p:cNvPr id="18" name="Text 16"/>
-          <p:cNvSpPr/>
-          <p:nvPr/>
-        </p:nvSpPr>
-        <p:spPr>
-          <a:xfrm>
-            <a:off x="2761488" y="2761488"/>
-            <a:ext cx="1645920" cy="384048"/>
-          </a:xfrm>
-          <a:prstGeom prst="rect">
-            <a:avLst/>
-          </a:prstGeom>
-          <a:noFill/>
-          <a:ln/>
-        </p:spPr>
-        <p:txBody>
-          <a:bodyPr wrap="square" lIns="0" tIns="0" rIns="0" bIns="0" rtlCol="0" anchor="ctr"/>
-          <a:lstStyle/>
-          <a:p>
-            <a:pPr indent="0" marL="0">
-              <a:buNone/>
-            </a:pPr>
-            <a:r>
-              <a:rPr lang="en-US" sz="1150" dirty="0">
-                <a:solidFill>
-                  <a:srgbClr val="434A63"/>
-                </a:solidFill>
-                <a:latin typeface="Arial" pitchFamily="34" charset="0"/>
-                <a:ea typeface="Arial" pitchFamily="34" charset="-122"/>
-                <a:cs typeface="Arial" pitchFamily="34" charset="-120"/>
-              </a:rPr>
-              <a:t>7 – DNS</a:t>
-            </a:r>
-            <a:endParaRPr lang="en-US" sz="1150" dirty="0"/>
-          </a:p>
-        </p:txBody>
-      </p:sp>
-      <p:sp>
-        <p:nvSpPr>
-          <p:cNvPr id="19" name="Text 17"/>
-          <p:cNvSpPr/>
-          <p:nvPr/>
-        </p:nvSpPr>
-        <p:spPr>
-          <a:xfrm>
-            <a:off x="4590288" y="2761488"/>
-            <a:ext cx="3895344" cy="384048"/>
-          </a:xfrm>
-          <a:prstGeom prst="rect">
-            <a:avLst/>
-          </a:prstGeom>
-          <a:noFill/>
-          <a:ln/>
-        </p:spPr>
-        <p:txBody>
-          <a:bodyPr wrap="square" lIns="0" tIns="0" rIns="0" bIns="0" rtlCol="0" anchor="ctr"/>
-          <a:lstStyle/>
-          <a:p>
-            <a:pPr indent="0" marL="0">
-              <a:buNone/>
-            </a:pPr>
-            <a:r>
-              <a:rPr lang="en-US" sz="1150" dirty="0">
-                <a:solidFill>
-                  <a:srgbClr val="434A63"/>
-                </a:solidFill>
-                <a:latin typeface="Arial" pitchFamily="34" charset="0"/>
-                <a:ea typeface="Arial" pitchFamily="34" charset="-122"/>
-                <a:cs typeface="Arial" pitchFamily="34" charset="-120"/>
-              </a:rPr>
-              <a:t>nslookup scheitert, ping auf die IP läuft</a:t>
-            </a:r>
-            <a:endParaRPr lang="en-US" sz="1150" dirty="0"/>
-          </a:p>
-        </p:txBody>
-      </p:sp>
-      <p:sp>
-        <p:nvSpPr>
-          <p:cNvPr id="20" name="Text 18"/>
-          <p:cNvSpPr/>
-          <p:nvPr/>
-        </p:nvSpPr>
-        <p:spPr>
-          <a:xfrm>
-            <a:off x="658368" y="3145536"/>
-            <a:ext cx="1920240" cy="384048"/>
-          </a:xfrm>
-          <a:prstGeom prst="rect">
-            <a:avLst/>
-          </a:prstGeom>
-          <a:noFill/>
-          <a:ln/>
-        </p:spPr>
-        <p:txBody>
-          <a:bodyPr wrap="square" lIns="0" tIns="0" rIns="0" bIns="0" rtlCol="0" anchor="ctr"/>
-          <a:lstStyle/>
-          <a:p>
-            <a:pPr indent="0" marL="0">
-              <a:buNone/>
-            </a:pPr>
-            <a:r>
-              <a:rPr lang="en-US" sz="1150" b="1" dirty="0">
-                <a:solidFill>
-                  <a:srgbClr val="272E52"/>
-                </a:solidFill>
-                <a:latin typeface="Arial" pitchFamily="34" charset="0"/>
-                <a:ea typeface="Arial" pitchFamily="34" charset="-122"/>
-                <a:cs typeface="Arial" pitchFamily="34" charset="-120"/>
-              </a:rPr>
-              <a:t>ping ja, Web nein</a:t>
-            </a:r>
-            <a:endParaRPr lang="en-US" sz="1150" dirty="0"/>
-          </a:p>
-        </p:txBody>
-      </p:sp>
-      <p:sp>
-        <p:nvSpPr>
-          <p:cNvPr id="21" name="Text 19"/>
-          <p:cNvSpPr/>
-          <p:nvPr/>
-        </p:nvSpPr>
-        <p:spPr>
-          <a:xfrm>
-            <a:off x="2761488" y="3145536"/>
-            <a:ext cx="1645920" cy="384048"/>
-          </a:xfrm>
-          <a:prstGeom prst="rect">
-            <a:avLst/>
-          </a:prstGeom>
-          <a:noFill/>
-          <a:ln/>
-        </p:spPr>
-        <p:txBody>
-          <a:bodyPr wrap="square" lIns="0" tIns="0" rIns="0" bIns="0" rtlCol="0" anchor="ctr"/>
-          <a:lstStyle/>
-          <a:p>
-            <a:pPr indent="0" marL="0">
-              <a:buNone/>
-            </a:pPr>
-            <a:r>
-              <a:rPr lang="en-US" sz="1150" dirty="0">
-                <a:solidFill>
-                  <a:srgbClr val="434A63"/>
-                </a:solidFill>
-                <a:latin typeface="Arial" pitchFamily="34" charset="0"/>
-                <a:ea typeface="Arial" pitchFamily="34" charset="-122"/>
-                <a:cs typeface="Arial" pitchFamily="34" charset="-120"/>
-              </a:rPr>
-              <a:t>4 oder 7</a:t>
-            </a:r>
-            <a:endParaRPr lang="en-US" sz="1150" dirty="0"/>
-          </a:p>
-        </p:txBody>
-      </p:sp>
-      <p:sp>
-        <p:nvSpPr>
-          <p:cNvPr id="22" name="Text 20"/>
-          <p:cNvSpPr/>
-          <p:nvPr/>
-        </p:nvSpPr>
-        <p:spPr>
-          <a:xfrm>
-            <a:off x="4590288" y="3145536"/>
-            <a:ext cx="3895344" cy="384048"/>
-          </a:xfrm>
-          <a:prstGeom prst="rect">
-            <a:avLst/>
-          </a:prstGeom>
-          <a:noFill/>
-          <a:ln/>
-        </p:spPr>
-        <p:txBody>
-          <a:bodyPr wrap="square" lIns="0" tIns="0" rIns="0" bIns="0" rtlCol="0" anchor="ctr"/>
-          <a:lstStyle/>
-          <a:p>
-            <a:pPr indent="0" marL="0">
-              <a:buNone/>
-            </a:pPr>
-            <a:r>
-              <a:rPr lang="en-US" sz="1150" dirty="0">
-                <a:solidFill>
-                  <a:srgbClr val="434A63"/>
-                </a:solidFill>
-                <a:latin typeface="Arial" pitchFamily="34" charset="0"/>
-                <a:ea typeface="Arial" pitchFamily="34" charset="-122"/>
-                <a:cs typeface="Arial" pitchFamily="34" charset="-120"/>
-              </a:rPr>
-              <a:t>Test-NetConnection auf Port 443</a:t>
-            </a:r>
-            <a:endParaRPr lang="en-US" sz="1150" dirty="0"/>
-          </a:p>
-        </p:txBody>
-      </p:sp>
-      <p:sp>
-        <p:nvSpPr>
-          <p:cNvPr id="23" name="Shape 21"/>
-          <p:cNvSpPr/>
-          <p:nvPr/>
-        </p:nvSpPr>
-        <p:spPr>
-          <a:xfrm>
-            <a:off x="475488" y="3529584"/>
-            <a:ext cx="8193024" cy="384048"/>
-          </a:xfrm>
-          <a:prstGeom prst="rect">
-            <a:avLst/>
-          </a:prstGeom>
-          <a:solidFill>
-            <a:srgbClr val="F5F6FC"/>
-          </a:solidFill>
-          <a:ln/>
-        </p:spPr>
-      </p:sp>
-      <p:sp>
-        <p:nvSpPr>
-          <p:cNvPr id="24" name="Text 22"/>
-          <p:cNvSpPr/>
-          <p:nvPr/>
-        </p:nvSpPr>
-        <p:spPr>
-          <a:xfrm>
-            <a:off x="658368" y="3529584"/>
-            <a:ext cx="1920240" cy="384048"/>
-          </a:xfrm>
-          <a:prstGeom prst="rect">
-            <a:avLst/>
-          </a:prstGeom>
-          <a:noFill/>
-          <a:ln/>
-        </p:spPr>
-        <p:txBody>
-          <a:bodyPr wrap="square" lIns="0" tIns="0" rIns="0" bIns="0" rtlCol="0" anchor="ctr"/>
-          <a:lstStyle/>
-          <a:p>
-            <a:pPr indent="0" marL="0">
-              <a:buNone/>
-            </a:pPr>
-            <a:r>
-              <a:rPr lang="en-US" sz="1150" b="1" dirty="0">
-                <a:solidFill>
-                  <a:srgbClr val="272E52"/>
-                </a:solidFill>
-                <a:latin typeface="Arial" pitchFamily="34" charset="0"/>
-                <a:ea typeface="Arial" pitchFamily="34" charset="-122"/>
-                <a:cs typeface="Arial" pitchFamily="34" charset="-120"/>
-              </a:rPr>
-              <a:t>Alles langsam</a:t>
-            </a:r>
-            <a:endParaRPr lang="en-US" sz="1150" dirty="0"/>
-          </a:p>
-        </p:txBody>
-      </p:sp>
-      <p:sp>
-        <p:nvSpPr>
-          <p:cNvPr id="25" name="Text 23"/>
-          <p:cNvSpPr/>
-          <p:nvPr/>
-        </p:nvSpPr>
-        <p:spPr>
-          <a:xfrm>
-            <a:off x="2761488" y="3529584"/>
-            <a:ext cx="1645920" cy="384048"/>
-          </a:xfrm>
-          <a:prstGeom prst="rect">
-            <a:avLst/>
-          </a:prstGeom>
-          <a:noFill/>
-          <a:ln/>
-        </p:spPr>
-        <p:txBody>
-          <a:bodyPr wrap="square" lIns="0" tIns="0" rIns="0" bIns="0" rtlCol="0" anchor="ctr"/>
-          <a:lstStyle/>
-          <a:p>
-            <a:pPr indent="0" marL="0">
-              <a:buNone/>
-            </a:pPr>
-            <a:r>
-              <a:rPr lang="en-US" sz="1150" dirty="0">
-                <a:solidFill>
-                  <a:srgbClr val="434A63"/>
-                </a:solidFill>
-                <a:latin typeface="Arial" pitchFamily="34" charset="0"/>
-                <a:ea typeface="Arial" pitchFamily="34" charset="-122"/>
-                <a:cs typeface="Arial" pitchFamily="34" charset="-120"/>
-              </a:rPr>
-              <a:t>kein Ausfall</a:t>
-            </a:r>
-            <a:endParaRPr lang="en-US" sz="1150" dirty="0"/>
-          </a:p>
-        </p:txBody>
-      </p:sp>
-      <p:sp>
-        <p:nvSpPr>
-          <p:cNvPr id="26" name="Text 24"/>
-          <p:cNvSpPr/>
-          <p:nvPr/>
-        </p:nvSpPr>
-        <p:spPr>
-          <a:xfrm>
-            <a:off x="4590288" y="3529584"/>
-            <a:ext cx="3895344" cy="384048"/>
-          </a:xfrm>
-          <a:prstGeom prst="rect">
-            <a:avLst/>
-          </a:prstGeom>
-          <a:noFill/>
-          <a:ln/>
-        </p:spPr>
-        <p:txBody>
-          <a:bodyPr wrap="square" lIns="0" tIns="0" rIns="0" bIns="0" rtlCol="0" anchor="ctr"/>
-          <a:lstStyle/>
-          <a:p>
-            <a:pPr indent="0" marL="0">
-              <a:buNone/>
-            </a:pPr>
-            <a:r>
-              <a:rPr lang="en-US" sz="1150" dirty="0">
-                <a:solidFill>
-                  <a:srgbClr val="434A63"/>
-                </a:solidFill>
-                <a:latin typeface="Arial" pitchFamily="34" charset="0"/>
-                <a:ea typeface="Arial" pitchFamily="34" charset="-122"/>
-                <a:cs typeface="Arial" pitchFamily="34" charset="-120"/>
-              </a:rPr>
-              <a:t>Zeit und Verlust in der ping-Ausgabe</a:t>
-            </a:r>
-            <a:endParaRPr lang="en-US" sz="1150" dirty="0"/>
-          </a:p>
-        </p:txBody>
-      </p:sp>
-      <p:sp>
-        <p:nvSpPr>
-          <p:cNvPr id="27" name="Shape 25"/>
-          <p:cNvSpPr/>
-          <p:nvPr/>
-        </p:nvSpPr>
-        <p:spPr>
-          <a:xfrm>
-            <a:off x="566928" y="4160520"/>
-            <a:ext cx="32004" cy="256032"/>
+          <p:cNvPr id="7" name="Shape 5"/>
+          <p:cNvSpPr/>
+          <p:nvPr/>
+        </p:nvSpPr>
+        <p:spPr>
+          <a:xfrm>
+            <a:off x="566928" y="3566160"/>
+            <a:ext cx="41148" cy="960120"/>
           </a:xfrm>
           <a:prstGeom prst="rect">
             <a:avLst/>
@@ -13564,30 +13442,72 @@
       </p:sp>
       <p:sp>
         <p:nvSpPr>
-          <p:cNvPr id="28" name="Text 26"/>
-          <p:cNvSpPr/>
-          <p:nvPr/>
-        </p:nvSpPr>
-        <p:spPr>
-          <a:xfrm>
-            <a:off x="749808" y="4114800"/>
-            <a:ext cx="7827264" cy="402336"/>
-          </a:xfrm>
-          <a:prstGeom prst="rect">
-            <a:avLst/>
-          </a:prstGeom>
-          <a:noFill/>
-          <a:ln/>
-        </p:spPr>
-        <p:txBody>
-          <a:bodyPr wrap="square" lIns="0" tIns="0" rIns="0" bIns="0" rtlCol="0" anchor="ctr"/>
-          <a:lstStyle/>
-          <a:p>
-            <a:pPr indent="0" marL="0">
-              <a:buNone/>
-            </a:pPr>
-            <a:r>
-              <a:rPr lang="en-US" sz="1200" b="1" dirty="0">
+          <p:cNvPr id="8" name="Text 6"/>
+          <p:cNvSpPr/>
+          <p:nvPr/>
+        </p:nvSpPr>
+        <p:spPr>
+          <a:xfrm>
+            <a:off x="804672" y="3712464"/>
+            <a:ext cx="7607808" cy="237744"/>
+          </a:xfrm>
+          <a:prstGeom prst="rect">
+            <a:avLst/>
+          </a:prstGeom>
+          <a:noFill/>
+          <a:ln/>
+        </p:spPr>
+        <p:txBody>
+          <a:bodyPr wrap="square" lIns="0" tIns="0" rIns="0" bIns="0" rtlCol="0" anchor="t"/>
+          <a:lstStyle/>
+          <a:p>
+            <a:pPr indent="0" marL="0">
+              <a:buNone/>
+            </a:pPr>
+            <a:r>
+              <a:rPr lang="en-US" sz="1300" b="1" dirty="0">
+                <a:solidFill>
+                  <a:srgbClr val="272E52"/>
+                </a:solidFill>
+                <a:latin typeface="Arial" pitchFamily="34" charset="0"/>
+                <a:ea typeface="Arial" pitchFamily="34" charset="-122"/>
+                <a:cs typeface="Arial" pitchFamily="34" charset="-120"/>
+              </a:rPr>
+              <a:t>Die Begriffe von heute</a:t>
+            </a:r>
+            <a:endParaRPr lang="en-US" sz="1300" dirty="0"/>
+          </a:p>
+        </p:txBody>
+      </p:sp>
+      <p:sp>
+        <p:nvSpPr>
+          <p:cNvPr id="9" name="Text 7"/>
+          <p:cNvSpPr/>
+          <p:nvPr/>
+        </p:nvSpPr>
+        <p:spPr>
+          <a:xfrm>
+            <a:off x="804672" y="3995928"/>
+            <a:ext cx="7607808" cy="411480"/>
+          </a:xfrm>
+          <a:prstGeom prst="rect">
+            <a:avLst/>
+          </a:prstGeom>
+          <a:noFill/>
+          <a:ln/>
+        </p:spPr>
+        <p:txBody>
+          <a:bodyPr wrap="square" lIns="0" tIns="0" rIns="0" bIns="0" rtlCol="0" anchor="t"/>
+          <a:lstStyle/>
+          <a:p>
+            <a:pPr indent="0" marL="0">
+              <a:lnSpc>
+                <a:spcPct val="92000"/>
+              </a:lnSpc>
+              <a:buNone/>
+            </a:pPr>
+            <a:r>
+              <a:rPr lang="en-US" sz="1100" dirty="0">
                 <a:solidFill>
                   <a:srgbClr val="434A63"/>
                 </a:solidFill>
@@ -13595,15 +13515,15 @@
                 <a:ea typeface="Arial" pitchFamily="34" charset="-122"/>
                 <a:cs typeface="Arial" pitchFamily="34" charset="-120"/>
               </a:rPr>
-              <a:t>Von unten nach oben. Die unterste stumme Schicht sagt euch, wo ihr weitersucht – nicht immer, woran es liegt.</a:t>
-            </a:r>
-            <a:endParaRPr lang="en-US" sz="1200" dirty="0"/>
-          </a:p>
-        </p:txBody>
-      </p:sp>
-      <p:sp>
-        <p:nvSpPr>
-          <p:cNvPr id="29" name="Shape 27"/>
+              <a:t>Schichtenmodell · OSI · TCP/IP · Topologie · Latenz · Bandbreite · Jitter · Frame, Paket, Segment · Kapselung. Die Begriffe begleiten euch bis zum Schluss – im Kurs wie in der Prüfung.</a:t>
+            </a:r>
+            <a:endParaRPr lang="en-US" sz="1100" dirty="0"/>
+          </a:p>
+        </p:txBody>
+      </p:sp>
+      <p:sp>
+        <p:nvSpPr>
+          <p:cNvPr id="10" name="Shape 8"/>
           <p:cNvSpPr/>
           <p:nvPr/>
         </p:nvSpPr>
@@ -13626,7 +13546,7 @@
       </p:sp>
       <p:sp>
         <p:nvSpPr>
-          <p:cNvPr id="30" name="Text 28"/>
+          <p:cNvPr id="11" name="Text 9"/>
           <p:cNvSpPr/>
           <p:nvPr/>
         </p:nvSpPr>
@@ -13657,7 +13577,7 @@
                 <a:ea typeface="Arial" pitchFamily="34" charset="-122"/>
                 <a:cs typeface="Arial" pitchFamily="34" charset="-120"/>
               </a:rPr>
-              <a:t>Auswertung</a:t>
+              <a:t>Abschluss</a:t>
             </a:r>
             <a:endParaRPr lang="en-US" sz="1050" dirty="0"/>
           </a:p>
@@ -13665,7 +13585,7 @@
       </p:sp>
       <p:sp>
         <p:nvSpPr>
-          <p:cNvPr id="31" name="Text 29"/>
+          <p:cNvPr id="12" name="Text 10"/>
           <p:cNvSpPr/>
           <p:nvPr/>
         </p:nvSpPr>
@@ -13696,7 +13616,7 @@
                 <a:ea typeface="Arial" pitchFamily="34" charset="-122"/>
                 <a:cs typeface="Arial" pitchFamily="34" charset="-120"/>
               </a:rPr>
-              <a:t>20/22</a:t>
+              <a:t>20/21</a:t>
             </a:r>
             <a:endParaRPr lang="en-US" sz="1050" dirty="0"/>
           </a:p>
@@ -13787,7 +13707,7 @@
                 <a:ea typeface="Arial" pitchFamily="34" charset="-122"/>
                 <a:cs typeface="Arial" pitchFamily="34" charset="-120"/>
               </a:rPr>
-              <a:t>KERN DES ABENDS</a:t>
+              <a:t>NACHARBEIT</a:t>
             </a:r>
             <a:endParaRPr lang="en-US" sz="1150" dirty="0"/>
           </a:p>
@@ -13826,7 +13746,7 @@
                 <a:ea typeface="Arial" pitchFamily="34" charset="-122"/>
                 <a:cs typeface="Arial" pitchFamily="34" charset="-120"/>
               </a:rPr>
-              <a:t>Das nehmt ihr heute mit</a:t>
+              <a:t>Bis Montag</a:t>
             </a:r>
             <a:endParaRPr lang="en-US" sz="2600" dirty="0"/>
           </a:p>
@@ -13840,8 +13760,126 @@
         </p:nvSpPr>
         <p:spPr>
           <a:xfrm>
-            <a:off x="566928" y="1691640"/>
-            <a:ext cx="8010144" cy="1828800"/>
+            <a:off x="566928" y="1444752"/>
+            <a:ext cx="8010144" cy="438912"/>
+          </a:xfrm>
+          <a:prstGeom prst="rect">
+            <a:avLst/>
+          </a:prstGeom>
+          <a:noFill/>
+          <a:ln/>
+        </p:spPr>
+        <p:txBody>
+          <a:bodyPr wrap="square" lIns="0" tIns="0" rIns="0" bIns="0" rtlCol="0" anchor="t"/>
+          <a:lstStyle/>
+          <a:p>
+            <a:pPr indent="0" marL="0">
+              <a:buNone/>
+            </a:pPr>
+            <a:r>
+              <a:rPr lang="en-US" sz="1300" dirty="0">
+                <a:solidFill>
+                  <a:srgbClr val="5C6377"/>
+                </a:solidFill>
+                <a:latin typeface="Arial" pitchFamily="34" charset="0"/>
+                <a:ea typeface="Arial" pitchFamily="34" charset="-122"/>
+                <a:cs typeface="Arial" pitchFamily="34" charset="-120"/>
+              </a:rPr>
+              <a:t>Alles freiwillig – aber der Montag wird deutlich leichter, wenn ihr das gemacht habt.</a:t>
+            </a:r>
+            <a:endParaRPr lang="en-US" sz="1300" dirty="0"/>
+          </a:p>
+        </p:txBody>
+      </p:sp>
+      <p:sp>
+        <p:nvSpPr>
+          <p:cNvPr id="6" name="Shape 4"/>
+          <p:cNvSpPr/>
+          <p:nvPr/>
+        </p:nvSpPr>
+        <p:spPr>
+          <a:xfrm>
+            <a:off x="566928" y="1975104"/>
+            <a:ext cx="2523744" cy="1920240"/>
+          </a:xfrm>
+          <a:prstGeom prst="rect">
+            <a:avLst/>
+          </a:prstGeom>
+          <a:solidFill>
+            <a:srgbClr val="F5F6FC"/>
+          </a:solidFill>
+          <a:ln/>
+        </p:spPr>
+      </p:sp>
+      <p:sp>
+        <p:nvSpPr>
+          <p:cNvPr id="7" name="Shape 5"/>
+          <p:cNvSpPr/>
+          <p:nvPr/>
+        </p:nvSpPr>
+        <p:spPr>
+          <a:xfrm>
+            <a:off x="566928" y="1975104"/>
+            <a:ext cx="41148" cy="1920240"/>
+          </a:xfrm>
+          <a:prstGeom prst="rect">
+            <a:avLst/>
+          </a:prstGeom>
+          <a:solidFill>
+            <a:srgbClr val="3843AF"/>
+          </a:solidFill>
+          <a:ln/>
+        </p:spPr>
+      </p:sp>
+      <p:sp>
+        <p:nvSpPr>
+          <p:cNvPr id="8" name="Text 6"/>
+          <p:cNvSpPr/>
+          <p:nvPr/>
+        </p:nvSpPr>
+        <p:spPr>
+          <a:xfrm>
+            <a:off x="804672" y="2121408"/>
+            <a:ext cx="2121408" cy="256032"/>
+          </a:xfrm>
+          <a:prstGeom prst="rect">
+            <a:avLst/>
+          </a:prstGeom>
+          <a:noFill/>
+          <a:ln/>
+        </p:spPr>
+        <p:txBody>
+          <a:bodyPr wrap="square" lIns="0" tIns="0" rIns="0" bIns="0" rtlCol="0" anchor="t"/>
+          <a:lstStyle/>
+          <a:p>
+            <a:pPr indent="0" marL="0">
+              <a:buNone/>
+            </a:pPr>
+            <a:r>
+              <a:rPr lang="en-US" sz="1300" b="1" dirty="0">
+                <a:solidFill>
+                  <a:srgbClr val="272E52"/>
+                </a:solidFill>
+                <a:latin typeface="Arial" pitchFamily="34" charset="0"/>
+                <a:ea typeface="Arial" pitchFamily="34" charset="-122"/>
+                <a:cs typeface="Arial" pitchFamily="34" charset="-120"/>
+              </a:rPr>
+              <a:t>Nur wenn etwas hakte</a:t>
+            </a:r>
+            <a:endParaRPr lang="en-US" sz="1300" dirty="0"/>
+          </a:p>
+        </p:txBody>
+      </p:sp>
+      <p:sp>
+        <p:nvSpPr>
+          <p:cNvPr id="9" name="Text 7"/>
+          <p:cNvSpPr/>
+          <p:nvPr/>
+        </p:nvSpPr>
+        <p:spPr>
+          <a:xfrm>
+            <a:off x="804672" y="2423160"/>
+            <a:ext cx="2121408" cy="1353312"/>
           </a:xfrm>
           <a:prstGeom prst="rect">
             <a:avLst/>
@@ -13860,27 +13898,128 @@
               <a:buNone/>
             </a:pPr>
             <a:r>
-              <a:rPr lang="en-US" sz="1350" b="1" dirty="0">
-                <a:solidFill>
-                  <a:srgbClr val="3843AF"/>
-                </a:solidFill>
-                <a:latin typeface="Arial" pitchFamily="34" charset="0"/>
-                <a:ea typeface="Arial" pitchFamily="34" charset="-122"/>
-                <a:cs typeface="Arial" pitchFamily="34" charset="-120"/>
-              </a:rPr>
-              <a:t>▸   </a:t>
-            </a:r>
+              <a:rPr lang="en-US" sz="1150" dirty="0">
+                <a:solidFill>
+                  <a:srgbClr val="434A63"/>
+                </a:solidFill>
+                <a:latin typeface="Arial" pitchFamily="34" charset="0"/>
+                <a:ea typeface="Arial" pitchFamily="34" charset="-122"/>
+                <a:cs typeface="Arial" pitchFamily="34" charset="-120"/>
+              </a:rPr>
+              <a:t>Die Seiten „Grundbegriffe“ und „OSI- und TCP/IP-Modell“ stehen auf der Kursseite. Gedacht für die Stellen, an denen ihr heute gestockt habt – nicht zum Durchlesen.</a:t>
+            </a:r>
+            <a:endParaRPr lang="en-US" sz="1150" dirty="0"/>
+          </a:p>
+        </p:txBody>
+      </p:sp>
+      <p:sp>
+        <p:nvSpPr>
+          <p:cNvPr id="10" name="Shape 8"/>
+          <p:cNvSpPr/>
+          <p:nvPr/>
+        </p:nvSpPr>
+        <p:spPr>
+          <a:xfrm>
+            <a:off x="3310128" y="1975104"/>
+            <a:ext cx="2523744" cy="1920240"/>
+          </a:xfrm>
+          <a:prstGeom prst="rect">
+            <a:avLst/>
+          </a:prstGeom>
+          <a:solidFill>
+            <a:srgbClr val="F5F6FC"/>
+          </a:solidFill>
+          <a:ln/>
+        </p:spPr>
+      </p:sp>
+      <p:sp>
+        <p:nvSpPr>
+          <p:cNvPr id="11" name="Shape 9"/>
+          <p:cNvSpPr/>
+          <p:nvPr/>
+        </p:nvSpPr>
+        <p:spPr>
+          <a:xfrm>
+            <a:off x="3310128" y="1975104"/>
+            <a:ext cx="41148" cy="1920240"/>
+          </a:xfrm>
+          <a:prstGeom prst="rect">
+            <a:avLst/>
+          </a:prstGeom>
+          <a:solidFill>
+            <a:srgbClr val="3843AF"/>
+          </a:solidFill>
+          <a:ln/>
+        </p:spPr>
+      </p:sp>
+      <p:sp>
+        <p:nvSpPr>
+          <p:cNvPr id="12" name="Text 10"/>
+          <p:cNvSpPr/>
+          <p:nvPr/>
+        </p:nvSpPr>
+        <p:spPr>
+          <a:xfrm>
+            <a:off x="3547872" y="2121408"/>
+            <a:ext cx="2121408" cy="256032"/>
+          </a:xfrm>
+          <a:prstGeom prst="rect">
+            <a:avLst/>
+          </a:prstGeom>
+          <a:noFill/>
+          <a:ln/>
+        </p:spPr>
+        <p:txBody>
+          <a:bodyPr wrap="square" lIns="0" tIns="0" rIns="0" bIns="0" rtlCol="0" anchor="t"/>
+          <a:lstStyle/>
+          <a:p>
+            <a:pPr indent="0" marL="0">
+              <a:buNone/>
+            </a:pPr>
+            <a:r>
+              <a:rPr lang="en-US" sz="1300" b="1" dirty="0">
+                <a:solidFill>
+                  <a:srgbClr val="272E52"/>
+                </a:solidFill>
+                <a:latin typeface="Arial" pitchFamily="34" charset="0"/>
+                <a:ea typeface="Arial" pitchFamily="34" charset="-122"/>
+                <a:cs typeface="Arial" pitchFamily="34" charset="-120"/>
+              </a:rPr>
+              <a:t>Nachholen</a:t>
+            </a:r>
+            <a:endParaRPr lang="en-US" sz="1300" dirty="0"/>
+          </a:p>
+        </p:txBody>
+      </p:sp>
+      <p:sp>
+        <p:nvSpPr>
+          <p:cNvPr id="13" name="Text 11"/>
+          <p:cNvSpPr/>
+          <p:nvPr/>
+        </p:nvSpPr>
+        <p:spPr>
+          <a:xfrm>
+            <a:off x="3547872" y="2423160"/>
+            <a:ext cx="2121408" cy="1353312"/>
+          </a:xfrm>
+          <a:prstGeom prst="rect">
+            <a:avLst/>
+          </a:prstGeom>
+          <a:noFill/>
+          <a:ln/>
+        </p:spPr>
+        <p:txBody>
+          <a:bodyPr wrap="square" lIns="0" tIns="0" rIns="0" bIns="0" rtlCol="0" anchor="t"/>
+          <a:lstStyle/>
+          <a:p>
             <a:pPr indent="0" marL="0">
               <a:lnSpc>
                 <a:spcPct val="92000"/>
               </a:lnSpc>
-              <a:spcAft>
-                <a:spcPts val="900"/>
-              </a:spcAft>
-              <a:buNone/>
-            </a:pPr>
-            <a:r>
-              <a:rPr lang="en-US" sz="1350" b="1" dirty="0">
+              <a:buNone/>
+            </a:pPr>
+            <a:r>
+              <a:rPr lang="en-US" sz="1150" dirty="0">
                 <a:solidFill>
                   <a:srgbClr val="434A63"/>
                 </a:solidFill>
@@ -13888,10 +14027,111 @@
                 <a:ea typeface="Arial" pitchFamily="34" charset="-122"/>
                 <a:cs typeface="Arial" pitchFamily="34" charset="-120"/>
               </a:rPr>
-              <a:t>Dieselben Daten heißen je nach Schicht Frame, Paket oder Segment.</a:t>
-            </a:r>
-            <a:endParaRPr lang="en-US" sz="1350" dirty="0"/>
-          </a:p>
+              <a:t>Wer nicht bis zu den Störungen gekommen ist: Station 3 lohnt sich. Die Auflösungen stehen zum Aufklappen darunter.</a:t>
+            </a:r>
+            <a:endParaRPr lang="en-US" sz="1150" dirty="0"/>
+          </a:p>
+        </p:txBody>
+      </p:sp>
+      <p:sp>
+        <p:nvSpPr>
+          <p:cNvPr id="14" name="Shape 12"/>
+          <p:cNvSpPr/>
+          <p:nvPr/>
+        </p:nvSpPr>
+        <p:spPr>
+          <a:xfrm>
+            <a:off x="6053328" y="1975104"/>
+            <a:ext cx="2523744" cy="1920240"/>
+          </a:xfrm>
+          <a:prstGeom prst="rect">
+            <a:avLst/>
+          </a:prstGeom>
+          <a:solidFill>
+            <a:srgbClr val="F5F6FC"/>
+          </a:solidFill>
+          <a:ln/>
+        </p:spPr>
+      </p:sp>
+      <p:sp>
+        <p:nvSpPr>
+          <p:cNvPr id="15" name="Shape 13"/>
+          <p:cNvSpPr/>
+          <p:nvPr/>
+        </p:nvSpPr>
+        <p:spPr>
+          <a:xfrm>
+            <a:off x="6053328" y="1975104"/>
+            <a:ext cx="41148" cy="1920240"/>
+          </a:xfrm>
+          <a:prstGeom prst="rect">
+            <a:avLst/>
+          </a:prstGeom>
+          <a:solidFill>
+            <a:srgbClr val="3843AF"/>
+          </a:solidFill>
+          <a:ln/>
+        </p:spPr>
+      </p:sp>
+      <p:sp>
+        <p:nvSpPr>
+          <p:cNvPr id="16" name="Text 14"/>
+          <p:cNvSpPr/>
+          <p:nvPr/>
+        </p:nvSpPr>
+        <p:spPr>
+          <a:xfrm>
+            <a:off x="6291072" y="2121408"/>
+            <a:ext cx="2121408" cy="256032"/>
+          </a:xfrm>
+          <a:prstGeom prst="rect">
+            <a:avLst/>
+          </a:prstGeom>
+          <a:noFill/>
+          <a:ln/>
+        </p:spPr>
+        <p:txBody>
+          <a:bodyPr wrap="square" lIns="0" tIns="0" rIns="0" bIns="0" rtlCol="0" anchor="t"/>
+          <a:lstStyle/>
+          <a:p>
+            <a:pPr indent="0" marL="0">
+              <a:buNone/>
+            </a:pPr>
+            <a:r>
+              <a:rPr lang="en-US" sz="1300" b="1" dirty="0">
+                <a:solidFill>
+                  <a:srgbClr val="272E52"/>
+                </a:solidFill>
+                <a:latin typeface="Arial" pitchFamily="34" charset="0"/>
+                <a:ea typeface="Arial" pitchFamily="34" charset="-122"/>
+                <a:cs typeface="Arial" pitchFamily="34" charset="-120"/>
+              </a:rPr>
+              <a:t>Vorbereiten</a:t>
+            </a:r>
+            <a:endParaRPr lang="en-US" sz="1300" dirty="0"/>
+          </a:p>
+        </p:txBody>
+      </p:sp>
+      <p:sp>
+        <p:nvSpPr>
+          <p:cNvPr id="17" name="Text 15"/>
+          <p:cNvSpPr/>
+          <p:nvPr/>
+        </p:nvSpPr>
+        <p:spPr>
+          <a:xfrm>
+            <a:off x="6291072" y="2423160"/>
+            <a:ext cx="2121408" cy="1353312"/>
+          </a:xfrm>
+          <a:prstGeom prst="rect">
+            <a:avLst/>
+          </a:prstGeom>
+          <a:noFill/>
+          <a:ln/>
+        </p:spPr>
+        <p:txBody>
+          <a:bodyPr wrap="square" lIns="0" tIns="0" rIns="0" bIns="0" rtlCol="0" anchor="t"/>
+          <a:lstStyle/>
           <a:p>
             <a:pPr indent="0" marL="0">
               <a:lnSpc>
@@ -13900,27 +14140,7 @@
               <a:buNone/>
             </a:pPr>
             <a:r>
-              <a:rPr lang="en-US" sz="1350" b="1" dirty="0">
-                <a:solidFill>
-                  <a:srgbClr val="3843AF"/>
-                </a:solidFill>
-                <a:latin typeface="Arial" pitchFamily="34" charset="0"/>
-                <a:ea typeface="Arial" pitchFamily="34" charset="-122"/>
-                <a:cs typeface="Arial" pitchFamily="34" charset="-120"/>
-              </a:rPr>
-              <a:t>▸   </a:t>
-            </a:r>
-            <a:pPr indent="0" marL="0">
-              <a:lnSpc>
-                <a:spcPct val="92000"/>
-              </a:lnSpc>
-              <a:spcAft>
-                <a:spcPts val="900"/>
-              </a:spcAft>
-              <a:buNone/>
-            </a:pPr>
-            <a:r>
-              <a:rPr lang="en-US" sz="1350" b="1" dirty="0">
+              <a:rPr lang="en-US" sz="1150" dirty="0">
                 <a:solidFill>
                   <a:srgbClr val="434A63"/>
                 </a:solidFill>
@@ -13928,162 +14148,22 @@
                 <a:ea typeface="Arial" pitchFamily="34" charset="-122"/>
                 <a:cs typeface="Arial" pitchFamily="34" charset="-120"/>
               </a:rPr>
-              <a:t>Kapselung: nichts wird ersetzt, es kommt nur außen etwas dazu.</a:t>
-            </a:r>
-            <a:endParaRPr lang="en-US" sz="1350" dirty="0"/>
-          </a:p>
-          <a:p>
-            <a:pPr indent="0" marL="0">
-              <a:lnSpc>
-                <a:spcPct val="92000"/>
-              </a:lnSpc>
-              <a:buNone/>
-            </a:pPr>
-            <a:r>
-              <a:rPr lang="en-US" sz="1350" b="1" dirty="0">
-                <a:solidFill>
-                  <a:srgbClr val="3843AF"/>
-                </a:solidFill>
-                <a:latin typeface="Arial" pitchFamily="34" charset="0"/>
-                <a:ea typeface="Arial" pitchFamily="34" charset="-122"/>
-                <a:cs typeface="Arial" pitchFamily="34" charset="-120"/>
-              </a:rPr>
-              <a:t>▸   </a:t>
-            </a:r>
-            <a:pPr indent="0" marL="0">
-              <a:lnSpc>
-                <a:spcPct val="92000"/>
-              </a:lnSpc>
-              <a:spcAft>
-                <a:spcPts val="900"/>
-              </a:spcAft>
-              <a:buNone/>
-            </a:pPr>
-            <a:r>
-              <a:rPr lang="en-US" sz="1350" b="1" dirty="0">
-                <a:solidFill>
-                  <a:srgbClr val="434A63"/>
-                </a:solidFill>
-                <a:latin typeface="Arial" pitchFamily="34" charset="0"/>
-                <a:ea typeface="Arial" pitchFamily="34" charset="-122"/>
-                <a:cs typeface="Arial" pitchFamily="34" charset="-120"/>
-              </a:rPr>
-              <a:t>OSI sieben Schichten, TCP/IP vier. Gearbeitet wird auf 2, 3 und 4.</a:t>
-            </a:r>
-            <a:endParaRPr lang="en-US" sz="1350" dirty="0"/>
-          </a:p>
-          <a:p>
-            <a:pPr indent="0" marL="0">
-              <a:lnSpc>
-                <a:spcPct val="92000"/>
-              </a:lnSpc>
-              <a:buNone/>
-            </a:pPr>
-            <a:r>
-              <a:rPr lang="en-US" sz="1350" b="1" dirty="0">
-                <a:solidFill>
-                  <a:srgbClr val="3843AF"/>
-                </a:solidFill>
-                <a:latin typeface="Arial" pitchFamily="34" charset="0"/>
-                <a:ea typeface="Arial" pitchFamily="34" charset="-122"/>
-                <a:cs typeface="Arial" pitchFamily="34" charset="-120"/>
-              </a:rPr>
-              <a:t>▸   </a:t>
-            </a:r>
-            <a:pPr indent="0" marL="0">
-              <a:lnSpc>
-                <a:spcPct val="92000"/>
-              </a:lnSpc>
-              <a:spcAft>
-                <a:spcPts val="900"/>
-              </a:spcAft>
-              <a:buNone/>
-            </a:pPr>
-            <a:r>
-              <a:rPr lang="en-US" sz="1350" b="1" dirty="0">
-                <a:solidFill>
-                  <a:srgbClr val="434A63"/>
-                </a:solidFill>
-                <a:latin typeface="Arial" pitchFamily="34" charset="0"/>
-                <a:ea typeface="Arial" pitchFamily="34" charset="-122"/>
-                <a:cs typeface="Arial" pitchFamily="34" charset="-120"/>
-              </a:rPr>
-              <a:t>Bandbreite ist nicht Geschwindigkeit. Latenz ist die andere Hälfte.</a:t>
-            </a:r>
-            <a:endParaRPr lang="en-US" sz="1350" dirty="0"/>
-          </a:p>
-          <a:p>
-            <a:pPr indent="0" marL="0">
-              <a:lnSpc>
-                <a:spcPct val="92000"/>
-              </a:lnSpc>
-              <a:buNone/>
-            </a:pPr>
-            <a:r>
-              <a:rPr lang="en-US" sz="1350" b="1" dirty="0">
-                <a:solidFill>
-                  <a:srgbClr val="3843AF"/>
-                </a:solidFill>
-                <a:latin typeface="Arial" pitchFamily="34" charset="0"/>
-                <a:ea typeface="Arial" pitchFamily="34" charset="-122"/>
-                <a:cs typeface="Arial" pitchFamily="34" charset="-120"/>
-              </a:rPr>
-              <a:t>▸   </a:t>
-            </a:r>
-            <a:pPr indent="0" marL="0">
-              <a:lnSpc>
-                <a:spcPct val="92000"/>
-              </a:lnSpc>
-              <a:spcAft>
-                <a:spcPts val="900"/>
-              </a:spcAft>
-              <a:buNone/>
-            </a:pPr>
-            <a:r>
-              <a:rPr lang="en-US" sz="1350" b="1" dirty="0">
-                <a:solidFill>
-                  <a:srgbClr val="434A63"/>
-                </a:solidFill>
-                <a:latin typeface="Arial" pitchFamily="34" charset="0"/>
-                <a:ea typeface="Arial" pitchFamily="34" charset="-122"/>
-                <a:cs typeface="Arial" pitchFamily="34" charset="-120"/>
-              </a:rPr>
-              <a:t>Fehlersuche: von unten nach oben, und jeder Befehl beweist nur seine Schicht.</a:t>
-            </a:r>
-            <a:endParaRPr lang="en-US" sz="1350" dirty="0"/>
-          </a:p>
-        </p:txBody>
-      </p:sp>
-      <p:sp>
-        <p:nvSpPr>
-          <p:cNvPr id="6" name="Shape 4"/>
-          <p:cNvSpPr/>
-          <p:nvPr/>
-        </p:nvSpPr>
-        <p:spPr>
-          <a:xfrm>
-            <a:off x="566928" y="3566160"/>
-            <a:ext cx="8010144" cy="960120"/>
-          </a:xfrm>
-          <a:prstGeom prst="rect">
-            <a:avLst/>
-          </a:prstGeom>
-          <a:solidFill>
-            <a:srgbClr val="EEF0FB"/>
-          </a:solidFill>
-          <a:ln/>
-        </p:spPr>
-      </p:sp>
-      <p:sp>
-        <p:nvSpPr>
-          <p:cNvPr id="7" name="Shape 5"/>
-          <p:cNvSpPr/>
-          <p:nvPr/>
-        </p:nvSpPr>
-        <p:spPr>
-          <a:xfrm>
-            <a:off x="566928" y="3566160"/>
-            <a:ext cx="41148" cy="960120"/>
+              <a:t>Am Montag rechnen wir Subnetze. Bringt Papier, Stift und einen wachen Kopf mit – Taschenrechner braucht ihr nicht.</a:t>
+            </a:r>
+            <a:endParaRPr lang="en-US" sz="1150" dirty="0"/>
+          </a:p>
+        </p:txBody>
+      </p:sp>
+      <p:sp>
+        <p:nvSpPr>
+          <p:cNvPr id="18" name="Shape 16"/>
+          <p:cNvSpPr/>
+          <p:nvPr/>
+        </p:nvSpPr>
+        <p:spPr>
+          <a:xfrm>
+            <a:off x="566928" y="4160520"/>
+            <a:ext cx="32004" cy="256032"/>
           </a:xfrm>
           <a:prstGeom prst="rect">
             <a:avLst/>
@@ -14096,72 +14176,30 @@
       </p:sp>
       <p:sp>
         <p:nvSpPr>
-          <p:cNvPr id="8" name="Text 6"/>
-          <p:cNvSpPr/>
-          <p:nvPr/>
-        </p:nvSpPr>
-        <p:spPr>
-          <a:xfrm>
-            <a:off x="804672" y="3712464"/>
-            <a:ext cx="7607808" cy="237744"/>
-          </a:xfrm>
-          <a:prstGeom prst="rect">
-            <a:avLst/>
-          </a:prstGeom>
-          <a:noFill/>
-          <a:ln/>
-        </p:spPr>
-        <p:txBody>
-          <a:bodyPr wrap="square" lIns="0" tIns="0" rIns="0" bIns="0" rtlCol="0" anchor="t"/>
-          <a:lstStyle/>
-          <a:p>
-            <a:pPr indent="0" marL="0">
-              <a:buNone/>
-            </a:pPr>
-            <a:r>
-              <a:rPr lang="en-US" sz="1300" b="1" dirty="0">
-                <a:solidFill>
-                  <a:srgbClr val="272E52"/>
-                </a:solidFill>
-                <a:latin typeface="Arial" pitchFamily="34" charset="0"/>
-                <a:ea typeface="Arial" pitchFamily="34" charset="-122"/>
-                <a:cs typeface="Arial" pitchFamily="34" charset="-120"/>
-              </a:rPr>
-              <a:t>Die Begriffe von heute</a:t>
-            </a:r>
-            <a:endParaRPr lang="en-US" sz="1300" dirty="0"/>
-          </a:p>
-        </p:txBody>
-      </p:sp>
-      <p:sp>
-        <p:nvSpPr>
-          <p:cNvPr id="9" name="Text 7"/>
-          <p:cNvSpPr/>
-          <p:nvPr/>
-        </p:nvSpPr>
-        <p:spPr>
-          <a:xfrm>
-            <a:off x="804672" y="3995928"/>
-            <a:ext cx="7607808" cy="411480"/>
-          </a:xfrm>
-          <a:prstGeom prst="rect">
-            <a:avLst/>
-          </a:prstGeom>
-          <a:noFill/>
-          <a:ln/>
-        </p:spPr>
-        <p:txBody>
-          <a:bodyPr wrap="square" lIns="0" tIns="0" rIns="0" bIns="0" rtlCol="0" anchor="t"/>
-          <a:lstStyle/>
-          <a:p>
-            <a:pPr indent="0" marL="0">
-              <a:lnSpc>
-                <a:spcPct val="92000"/>
-              </a:lnSpc>
-              <a:buNone/>
-            </a:pPr>
-            <a:r>
-              <a:rPr lang="en-US" sz="1100" dirty="0">
+          <p:cNvPr id="19" name="Text 17"/>
+          <p:cNvSpPr/>
+          <p:nvPr/>
+        </p:nvSpPr>
+        <p:spPr>
+          <a:xfrm>
+            <a:off x="749808" y="4114800"/>
+            <a:ext cx="7827264" cy="402336"/>
+          </a:xfrm>
+          <a:prstGeom prst="rect">
+            <a:avLst/>
+          </a:prstGeom>
+          <a:noFill/>
+          <a:ln/>
+        </p:spPr>
+        <p:txBody>
+          <a:bodyPr wrap="square" lIns="0" tIns="0" rIns="0" bIns="0" rtlCol="0" anchor="ctr"/>
+          <a:lstStyle/>
+          <a:p>
+            <a:pPr indent="0" marL="0">
+              <a:buNone/>
+            </a:pPr>
+            <a:r>
+              <a:rPr lang="en-US" sz="1200" b="1" dirty="0">
                 <a:solidFill>
                   <a:srgbClr val="434A63"/>
                 </a:solidFill>
@@ -14169,15 +14207,15 @@
                 <a:ea typeface="Arial" pitchFamily="34" charset="-122"/>
                 <a:cs typeface="Arial" pitchFamily="34" charset="-120"/>
               </a:rPr>
-              <a:t>Schichtenmodell · OSI · TCP/IP · Topologie · Latenz · Bandbreite · Jitter · Frame, Paket, Segment · Kapselung. Die Begriffe begleiten euch bis zum Schluss – im Kurs wie in der Prüfung.</a:t>
-            </a:r>
-            <a:endParaRPr lang="en-US" sz="1100" dirty="0"/>
-          </a:p>
-        </p:txBody>
-      </p:sp>
-      <p:sp>
-        <p:nvSpPr>
-          <p:cNvPr id="10" name="Shape 8"/>
+              <a:t>Nächster Termin: Montag, 31. August, 18:00 Uhr – Adressierung und Subnetting.</a:t>
+            </a:r>
+            <a:endParaRPr lang="en-US" sz="1200" dirty="0"/>
+          </a:p>
+        </p:txBody>
+      </p:sp>
+      <p:sp>
+        <p:nvSpPr>
+          <p:cNvPr id="20" name="Shape 18"/>
           <p:cNvSpPr/>
           <p:nvPr/>
         </p:nvSpPr>
@@ -14200,7 +14238,7 @@
       </p:sp>
       <p:sp>
         <p:nvSpPr>
-          <p:cNvPr id="11" name="Text 9"/>
+          <p:cNvPr id="21" name="Text 19"/>
           <p:cNvSpPr/>
           <p:nvPr/>
         </p:nvSpPr>
@@ -14239,7 +14277,7 @@
       </p:sp>
       <p:sp>
         <p:nvSpPr>
-          <p:cNvPr id="12" name="Text 10"/>
+          <p:cNvPr id="22" name="Text 20"/>
           <p:cNvSpPr/>
           <p:nvPr/>
         </p:nvSpPr>
@@ -14270,7 +14308,7 @@
                 <a:ea typeface="Arial" pitchFamily="34" charset="-122"/>
                 <a:cs typeface="Arial" pitchFamily="34" charset="-120"/>
               </a:rPr>
-              <a:t>21/22</a:t>
+              <a:t>21/21</a:t>
             </a:r>
             <a:endParaRPr lang="en-US" sz="1050" dirty="0"/>
           </a:p>
@@ -14287,698 +14325,6 @@
 <file path=ppt/slides/slide28.xml><?xml version="1.0" encoding="utf-8"?>
 <p:sld xmlns:a="http://schemas.openxmlformats.org/drawingml/2006/main" xmlns:r="http://schemas.openxmlformats.org/officeDocument/2006/relationships" xmlns:p="http://schemas.openxmlformats.org/presentationml/2006/main">
   <p:cSld name="Slide 28">
-    <p:bg>
-      <p:bgPr>
-        <a:solidFill>
-          <a:srgbClr val="FFFFFF"/>
-        </a:solidFill>
-      </p:bgPr>
-    </p:bg>
-    <p:spTree>
-      <p:nvGrpSpPr>
-        <p:cNvPr id="1" name=""/>
-        <p:cNvGrpSpPr/>
-        <p:nvPr/>
-      </p:nvGrpSpPr>
-      <p:grpSpPr>
-        <a:xfrm>
-          <a:off x="0" y="0"/>
-          <a:ext cx="0" cy="0"/>
-          <a:chOff x="0" y="0"/>
-          <a:chExt cx="0" cy="0"/>
-        </a:xfrm>
-      </p:grpSpPr>
-      <p:sp>
-        <p:nvSpPr>
-          <p:cNvPr id="2" name="Shape 0"/>
-          <p:cNvSpPr/>
-          <p:nvPr/>
-        </p:nvSpPr>
-        <p:spPr>
-          <a:xfrm>
-            <a:off x="566928" y="201168"/>
-            <a:ext cx="475488" cy="50292"/>
-          </a:xfrm>
-          <a:prstGeom prst="rect">
-            <a:avLst/>
-          </a:prstGeom>
-          <a:solidFill>
-            <a:srgbClr val="3843AF"/>
-          </a:solidFill>
-          <a:ln/>
-        </p:spPr>
-      </p:sp>
-      <p:sp>
-        <p:nvSpPr>
-          <p:cNvPr id="3" name="Text 1"/>
-          <p:cNvSpPr/>
-          <p:nvPr/>
-        </p:nvSpPr>
-        <p:spPr>
-          <a:xfrm>
-            <a:off x="566928" y="384048"/>
-            <a:ext cx="8010144" cy="237744"/>
-          </a:xfrm>
-          <a:prstGeom prst="rect">
-            <a:avLst/>
-          </a:prstGeom>
-          <a:noFill/>
-          <a:ln/>
-        </p:spPr>
-        <p:txBody>
-          <a:bodyPr wrap="square" lIns="0" tIns="0" rIns="0" bIns="0" rtlCol="0" anchor="ctr"/>
-          <a:lstStyle/>
-          <a:p>
-            <a:pPr indent="0" marL="0">
-              <a:buNone/>
-            </a:pPr>
-            <a:r>
-              <a:rPr lang="en-US" sz="1150" b="1" spc="180" kern="0" dirty="0">
-                <a:solidFill>
-                  <a:srgbClr val="3843AF"/>
-                </a:solidFill>
-                <a:latin typeface="Arial" pitchFamily="34" charset="0"/>
-                <a:ea typeface="Arial" pitchFamily="34" charset="-122"/>
-                <a:cs typeface="Arial" pitchFamily="34" charset="-120"/>
-              </a:rPr>
-              <a:t>NACHARBEIT</a:t>
-            </a:r>
-            <a:endParaRPr lang="en-US" sz="1150" dirty="0"/>
-          </a:p>
-        </p:txBody>
-      </p:sp>
-      <p:sp>
-        <p:nvSpPr>
-          <p:cNvPr id="4" name="Text 2"/>
-          <p:cNvSpPr/>
-          <p:nvPr/>
-        </p:nvSpPr>
-        <p:spPr>
-          <a:xfrm>
-            <a:off x="566928" y="731520"/>
-            <a:ext cx="8010144" cy="603504"/>
-          </a:xfrm>
-          <a:prstGeom prst="rect">
-            <a:avLst/>
-          </a:prstGeom>
-          <a:noFill/>
-          <a:ln/>
-        </p:spPr>
-        <p:txBody>
-          <a:bodyPr wrap="square" lIns="0" tIns="0" rIns="0" bIns="0" rtlCol="0" anchor="t"/>
-          <a:lstStyle/>
-          <a:p>
-            <a:pPr indent="0" marL="0">
-              <a:buNone/>
-            </a:pPr>
-            <a:r>
-              <a:rPr lang="en-US" sz="2600" b="1" dirty="0">
-                <a:solidFill>
-                  <a:srgbClr val="272E52"/>
-                </a:solidFill>
-                <a:latin typeface="Arial" pitchFamily="34" charset="0"/>
-                <a:ea typeface="Arial" pitchFamily="34" charset="-122"/>
-                <a:cs typeface="Arial" pitchFamily="34" charset="-120"/>
-              </a:rPr>
-              <a:t>Bis Montag</a:t>
-            </a:r>
-            <a:endParaRPr lang="en-US" sz="2600" dirty="0"/>
-          </a:p>
-        </p:txBody>
-      </p:sp>
-      <p:sp>
-        <p:nvSpPr>
-          <p:cNvPr id="5" name="Text 3"/>
-          <p:cNvSpPr/>
-          <p:nvPr/>
-        </p:nvSpPr>
-        <p:spPr>
-          <a:xfrm>
-            <a:off x="566928" y="1444752"/>
-            <a:ext cx="8010144" cy="438912"/>
-          </a:xfrm>
-          <a:prstGeom prst="rect">
-            <a:avLst/>
-          </a:prstGeom>
-          <a:noFill/>
-          <a:ln/>
-        </p:spPr>
-        <p:txBody>
-          <a:bodyPr wrap="square" lIns="0" tIns="0" rIns="0" bIns="0" rtlCol="0" anchor="t"/>
-          <a:lstStyle/>
-          <a:p>
-            <a:pPr indent="0" marL="0">
-              <a:buNone/>
-            </a:pPr>
-            <a:r>
-              <a:rPr lang="en-US" sz="1300" dirty="0">
-                <a:solidFill>
-                  <a:srgbClr val="5C6377"/>
-                </a:solidFill>
-                <a:latin typeface="Arial" pitchFamily="34" charset="0"/>
-                <a:ea typeface="Arial" pitchFamily="34" charset="-122"/>
-                <a:cs typeface="Arial" pitchFamily="34" charset="-120"/>
-              </a:rPr>
-              <a:t>Alles freiwillig – aber der Montag wird deutlich leichter, wenn ihr das gemacht habt.</a:t>
-            </a:r>
-            <a:endParaRPr lang="en-US" sz="1300" dirty="0"/>
-          </a:p>
-        </p:txBody>
-      </p:sp>
-      <p:sp>
-        <p:nvSpPr>
-          <p:cNvPr id="6" name="Shape 4"/>
-          <p:cNvSpPr/>
-          <p:nvPr/>
-        </p:nvSpPr>
-        <p:spPr>
-          <a:xfrm>
-            <a:off x="566928" y="1975104"/>
-            <a:ext cx="2523744" cy="1920240"/>
-          </a:xfrm>
-          <a:prstGeom prst="rect">
-            <a:avLst/>
-          </a:prstGeom>
-          <a:solidFill>
-            <a:srgbClr val="F5F6FC"/>
-          </a:solidFill>
-          <a:ln/>
-        </p:spPr>
-      </p:sp>
-      <p:sp>
-        <p:nvSpPr>
-          <p:cNvPr id="7" name="Shape 5"/>
-          <p:cNvSpPr/>
-          <p:nvPr/>
-        </p:nvSpPr>
-        <p:spPr>
-          <a:xfrm>
-            <a:off x="566928" y="1975104"/>
-            <a:ext cx="41148" cy="1920240"/>
-          </a:xfrm>
-          <a:prstGeom prst="rect">
-            <a:avLst/>
-          </a:prstGeom>
-          <a:solidFill>
-            <a:srgbClr val="3843AF"/>
-          </a:solidFill>
-          <a:ln/>
-        </p:spPr>
-      </p:sp>
-      <p:sp>
-        <p:nvSpPr>
-          <p:cNvPr id="8" name="Text 6"/>
-          <p:cNvSpPr/>
-          <p:nvPr/>
-        </p:nvSpPr>
-        <p:spPr>
-          <a:xfrm>
-            <a:off x="804672" y="2121408"/>
-            <a:ext cx="2121408" cy="256032"/>
-          </a:xfrm>
-          <a:prstGeom prst="rect">
-            <a:avLst/>
-          </a:prstGeom>
-          <a:noFill/>
-          <a:ln/>
-        </p:spPr>
-        <p:txBody>
-          <a:bodyPr wrap="square" lIns="0" tIns="0" rIns="0" bIns="0" rtlCol="0" anchor="t"/>
-          <a:lstStyle/>
-          <a:p>
-            <a:pPr indent="0" marL="0">
-              <a:buNone/>
-            </a:pPr>
-            <a:r>
-              <a:rPr lang="en-US" sz="1300" b="1" dirty="0">
-                <a:solidFill>
-                  <a:srgbClr val="272E52"/>
-                </a:solidFill>
-                <a:latin typeface="Arial" pitchFamily="34" charset="0"/>
-                <a:ea typeface="Arial" pitchFamily="34" charset="-122"/>
-                <a:cs typeface="Arial" pitchFamily="34" charset="-120"/>
-              </a:rPr>
-              <a:t>Nur wenn etwas hakte</a:t>
-            </a:r>
-            <a:endParaRPr lang="en-US" sz="1300" dirty="0"/>
-          </a:p>
-        </p:txBody>
-      </p:sp>
-      <p:sp>
-        <p:nvSpPr>
-          <p:cNvPr id="9" name="Text 7"/>
-          <p:cNvSpPr/>
-          <p:nvPr/>
-        </p:nvSpPr>
-        <p:spPr>
-          <a:xfrm>
-            <a:off x="804672" y="2423160"/>
-            <a:ext cx="2121408" cy="1353312"/>
-          </a:xfrm>
-          <a:prstGeom prst="rect">
-            <a:avLst/>
-          </a:prstGeom>
-          <a:noFill/>
-          <a:ln/>
-        </p:spPr>
-        <p:txBody>
-          <a:bodyPr wrap="square" lIns="0" tIns="0" rIns="0" bIns="0" rtlCol="0" anchor="t"/>
-          <a:lstStyle/>
-          <a:p>
-            <a:pPr indent="0" marL="0">
-              <a:lnSpc>
-                <a:spcPct val="92000"/>
-              </a:lnSpc>
-              <a:buNone/>
-            </a:pPr>
-            <a:r>
-              <a:rPr lang="en-US" sz="1150" dirty="0">
-                <a:solidFill>
-                  <a:srgbClr val="434A63"/>
-                </a:solidFill>
-                <a:latin typeface="Arial" pitchFamily="34" charset="0"/>
-                <a:ea typeface="Arial" pitchFamily="34" charset="-122"/>
-                <a:cs typeface="Arial" pitchFamily="34" charset="-120"/>
-              </a:rPr>
-              <a:t>Die Seiten „Grundbegriffe“ und „OSI- und TCP/IP-Modell“ stehen auf der Kursseite. Gedacht für die Stellen, an denen ihr heute gestockt habt – nicht zum Durchlesen.</a:t>
-            </a:r>
-            <a:endParaRPr lang="en-US" sz="1150" dirty="0"/>
-          </a:p>
-        </p:txBody>
-      </p:sp>
-      <p:sp>
-        <p:nvSpPr>
-          <p:cNvPr id="10" name="Shape 8"/>
-          <p:cNvSpPr/>
-          <p:nvPr/>
-        </p:nvSpPr>
-        <p:spPr>
-          <a:xfrm>
-            <a:off x="3310128" y="1975104"/>
-            <a:ext cx="2523744" cy="1920240"/>
-          </a:xfrm>
-          <a:prstGeom prst="rect">
-            <a:avLst/>
-          </a:prstGeom>
-          <a:solidFill>
-            <a:srgbClr val="F5F6FC"/>
-          </a:solidFill>
-          <a:ln/>
-        </p:spPr>
-      </p:sp>
-      <p:sp>
-        <p:nvSpPr>
-          <p:cNvPr id="11" name="Shape 9"/>
-          <p:cNvSpPr/>
-          <p:nvPr/>
-        </p:nvSpPr>
-        <p:spPr>
-          <a:xfrm>
-            <a:off x="3310128" y="1975104"/>
-            <a:ext cx="41148" cy="1920240"/>
-          </a:xfrm>
-          <a:prstGeom prst="rect">
-            <a:avLst/>
-          </a:prstGeom>
-          <a:solidFill>
-            <a:srgbClr val="3843AF"/>
-          </a:solidFill>
-          <a:ln/>
-        </p:spPr>
-      </p:sp>
-      <p:sp>
-        <p:nvSpPr>
-          <p:cNvPr id="12" name="Text 10"/>
-          <p:cNvSpPr/>
-          <p:nvPr/>
-        </p:nvSpPr>
-        <p:spPr>
-          <a:xfrm>
-            <a:off x="3547872" y="2121408"/>
-            <a:ext cx="2121408" cy="256032"/>
-          </a:xfrm>
-          <a:prstGeom prst="rect">
-            <a:avLst/>
-          </a:prstGeom>
-          <a:noFill/>
-          <a:ln/>
-        </p:spPr>
-        <p:txBody>
-          <a:bodyPr wrap="square" lIns="0" tIns="0" rIns="0" bIns="0" rtlCol="0" anchor="t"/>
-          <a:lstStyle/>
-          <a:p>
-            <a:pPr indent="0" marL="0">
-              <a:buNone/>
-            </a:pPr>
-            <a:r>
-              <a:rPr lang="en-US" sz="1300" b="1" dirty="0">
-                <a:solidFill>
-                  <a:srgbClr val="272E52"/>
-                </a:solidFill>
-                <a:latin typeface="Arial" pitchFamily="34" charset="0"/>
-                <a:ea typeface="Arial" pitchFamily="34" charset="-122"/>
-                <a:cs typeface="Arial" pitchFamily="34" charset="-120"/>
-              </a:rPr>
-              <a:t>Nachholen</a:t>
-            </a:r>
-            <a:endParaRPr lang="en-US" sz="1300" dirty="0"/>
-          </a:p>
-        </p:txBody>
-      </p:sp>
-      <p:sp>
-        <p:nvSpPr>
-          <p:cNvPr id="13" name="Text 11"/>
-          <p:cNvSpPr/>
-          <p:nvPr/>
-        </p:nvSpPr>
-        <p:spPr>
-          <a:xfrm>
-            <a:off x="3547872" y="2423160"/>
-            <a:ext cx="2121408" cy="1353312"/>
-          </a:xfrm>
-          <a:prstGeom prst="rect">
-            <a:avLst/>
-          </a:prstGeom>
-          <a:noFill/>
-          <a:ln/>
-        </p:spPr>
-        <p:txBody>
-          <a:bodyPr wrap="square" lIns="0" tIns="0" rIns="0" bIns="0" rtlCol="0" anchor="t"/>
-          <a:lstStyle/>
-          <a:p>
-            <a:pPr indent="0" marL="0">
-              <a:lnSpc>
-                <a:spcPct val="92000"/>
-              </a:lnSpc>
-              <a:buNone/>
-            </a:pPr>
-            <a:r>
-              <a:rPr lang="en-US" sz="1150" dirty="0">
-                <a:solidFill>
-                  <a:srgbClr val="434A63"/>
-                </a:solidFill>
-                <a:latin typeface="Arial" pitchFamily="34" charset="0"/>
-                <a:ea typeface="Arial" pitchFamily="34" charset="-122"/>
-                <a:cs typeface="Arial" pitchFamily="34" charset="-120"/>
-              </a:rPr>
-              <a:t>Wer nicht bis zu den Störungen gekommen ist: Station 3 lohnt sich. Die Auflösungen stehen zum Aufklappen darunter.</a:t>
-            </a:r>
-            <a:endParaRPr lang="en-US" sz="1150" dirty="0"/>
-          </a:p>
-        </p:txBody>
-      </p:sp>
-      <p:sp>
-        <p:nvSpPr>
-          <p:cNvPr id="14" name="Shape 12"/>
-          <p:cNvSpPr/>
-          <p:nvPr/>
-        </p:nvSpPr>
-        <p:spPr>
-          <a:xfrm>
-            <a:off x="6053328" y="1975104"/>
-            <a:ext cx="2523744" cy="1920240"/>
-          </a:xfrm>
-          <a:prstGeom prst="rect">
-            <a:avLst/>
-          </a:prstGeom>
-          <a:solidFill>
-            <a:srgbClr val="F5F6FC"/>
-          </a:solidFill>
-          <a:ln/>
-        </p:spPr>
-      </p:sp>
-      <p:sp>
-        <p:nvSpPr>
-          <p:cNvPr id="15" name="Shape 13"/>
-          <p:cNvSpPr/>
-          <p:nvPr/>
-        </p:nvSpPr>
-        <p:spPr>
-          <a:xfrm>
-            <a:off x="6053328" y="1975104"/>
-            <a:ext cx="41148" cy="1920240"/>
-          </a:xfrm>
-          <a:prstGeom prst="rect">
-            <a:avLst/>
-          </a:prstGeom>
-          <a:solidFill>
-            <a:srgbClr val="3843AF"/>
-          </a:solidFill>
-          <a:ln/>
-        </p:spPr>
-      </p:sp>
-      <p:sp>
-        <p:nvSpPr>
-          <p:cNvPr id="16" name="Text 14"/>
-          <p:cNvSpPr/>
-          <p:nvPr/>
-        </p:nvSpPr>
-        <p:spPr>
-          <a:xfrm>
-            <a:off x="6291072" y="2121408"/>
-            <a:ext cx="2121408" cy="256032"/>
-          </a:xfrm>
-          <a:prstGeom prst="rect">
-            <a:avLst/>
-          </a:prstGeom>
-          <a:noFill/>
-          <a:ln/>
-        </p:spPr>
-        <p:txBody>
-          <a:bodyPr wrap="square" lIns="0" tIns="0" rIns="0" bIns="0" rtlCol="0" anchor="t"/>
-          <a:lstStyle/>
-          <a:p>
-            <a:pPr indent="0" marL="0">
-              <a:buNone/>
-            </a:pPr>
-            <a:r>
-              <a:rPr lang="en-US" sz="1300" b="1" dirty="0">
-                <a:solidFill>
-                  <a:srgbClr val="272E52"/>
-                </a:solidFill>
-                <a:latin typeface="Arial" pitchFamily="34" charset="0"/>
-                <a:ea typeface="Arial" pitchFamily="34" charset="-122"/>
-                <a:cs typeface="Arial" pitchFamily="34" charset="-120"/>
-              </a:rPr>
-              <a:t>Vorbereiten</a:t>
-            </a:r>
-            <a:endParaRPr lang="en-US" sz="1300" dirty="0"/>
-          </a:p>
-        </p:txBody>
-      </p:sp>
-      <p:sp>
-        <p:nvSpPr>
-          <p:cNvPr id="17" name="Text 15"/>
-          <p:cNvSpPr/>
-          <p:nvPr/>
-        </p:nvSpPr>
-        <p:spPr>
-          <a:xfrm>
-            <a:off x="6291072" y="2423160"/>
-            <a:ext cx="2121408" cy="1353312"/>
-          </a:xfrm>
-          <a:prstGeom prst="rect">
-            <a:avLst/>
-          </a:prstGeom>
-          <a:noFill/>
-          <a:ln/>
-        </p:spPr>
-        <p:txBody>
-          <a:bodyPr wrap="square" lIns="0" tIns="0" rIns="0" bIns="0" rtlCol="0" anchor="t"/>
-          <a:lstStyle/>
-          <a:p>
-            <a:pPr indent="0" marL="0">
-              <a:lnSpc>
-                <a:spcPct val="92000"/>
-              </a:lnSpc>
-              <a:buNone/>
-            </a:pPr>
-            <a:r>
-              <a:rPr lang="en-US" sz="1150" dirty="0">
-                <a:solidFill>
-                  <a:srgbClr val="434A63"/>
-                </a:solidFill>
-                <a:latin typeface="Arial" pitchFamily="34" charset="0"/>
-                <a:ea typeface="Arial" pitchFamily="34" charset="-122"/>
-                <a:cs typeface="Arial" pitchFamily="34" charset="-120"/>
-              </a:rPr>
-              <a:t>Am Montag rechnen wir Subnetze. Bringt Papier, Stift und einen wachen Kopf mit – Taschenrechner braucht ihr nicht.</a:t>
-            </a:r>
-            <a:endParaRPr lang="en-US" sz="1150" dirty="0"/>
-          </a:p>
-        </p:txBody>
-      </p:sp>
-      <p:sp>
-        <p:nvSpPr>
-          <p:cNvPr id="18" name="Shape 16"/>
-          <p:cNvSpPr/>
-          <p:nvPr/>
-        </p:nvSpPr>
-        <p:spPr>
-          <a:xfrm>
-            <a:off x="566928" y="4160520"/>
-            <a:ext cx="32004" cy="256032"/>
-          </a:xfrm>
-          <a:prstGeom prst="rect">
-            <a:avLst/>
-          </a:prstGeom>
-          <a:solidFill>
-            <a:srgbClr val="3843AF"/>
-          </a:solidFill>
-          <a:ln/>
-        </p:spPr>
-      </p:sp>
-      <p:sp>
-        <p:nvSpPr>
-          <p:cNvPr id="19" name="Text 17"/>
-          <p:cNvSpPr/>
-          <p:nvPr/>
-        </p:nvSpPr>
-        <p:spPr>
-          <a:xfrm>
-            <a:off x="749808" y="4114800"/>
-            <a:ext cx="7827264" cy="402336"/>
-          </a:xfrm>
-          <a:prstGeom prst="rect">
-            <a:avLst/>
-          </a:prstGeom>
-          <a:noFill/>
-          <a:ln/>
-        </p:spPr>
-        <p:txBody>
-          <a:bodyPr wrap="square" lIns="0" tIns="0" rIns="0" bIns="0" rtlCol="0" anchor="ctr"/>
-          <a:lstStyle/>
-          <a:p>
-            <a:pPr indent="0" marL="0">
-              <a:buNone/>
-            </a:pPr>
-            <a:r>
-              <a:rPr lang="en-US" sz="1200" b="1" dirty="0">
-                <a:solidFill>
-                  <a:srgbClr val="434A63"/>
-                </a:solidFill>
-                <a:latin typeface="Arial" pitchFamily="34" charset="0"/>
-                <a:ea typeface="Arial" pitchFamily="34" charset="-122"/>
-                <a:cs typeface="Arial" pitchFamily="34" charset="-120"/>
-              </a:rPr>
-              <a:t>Nächster Termin: Montag, 31. August, 18:00 Uhr – Adressierung und Subnetting.</a:t>
-            </a:r>
-            <a:endParaRPr lang="en-US" sz="1200" dirty="0"/>
-          </a:p>
-        </p:txBody>
-      </p:sp>
-      <p:sp>
-        <p:nvSpPr>
-          <p:cNvPr id="20" name="Shape 18"/>
-          <p:cNvSpPr/>
-          <p:nvPr/>
-        </p:nvSpPr>
-        <p:spPr>
-          <a:xfrm>
-            <a:off x="566928" y="4631436"/>
-            <a:ext cx="8010144" cy="0"/>
-          </a:xfrm>
-          <a:prstGeom prst="line">
-            <a:avLst/>
-          </a:prstGeom>
-          <a:noFill/>
-          <a:ln w="9525">
-            <a:solidFill>
-              <a:srgbClr val="DFE3F0"/>
-            </a:solidFill>
-            <a:prstDash val="solid"/>
-          </a:ln>
-        </p:spPr>
-      </p:sp>
-      <p:sp>
-        <p:nvSpPr>
-          <p:cNvPr id="21" name="Text 19"/>
-          <p:cNvSpPr/>
-          <p:nvPr/>
-        </p:nvSpPr>
-        <p:spPr>
-          <a:xfrm>
-            <a:off x="566928" y="4722876"/>
-            <a:ext cx="5029200" cy="237744"/>
-          </a:xfrm>
-          <a:prstGeom prst="rect">
-            <a:avLst/>
-          </a:prstGeom>
-          <a:noFill/>
-          <a:ln/>
-        </p:spPr>
-        <p:txBody>
-          <a:bodyPr wrap="square" lIns="0" tIns="0" rIns="0" bIns="0" rtlCol="0" anchor="ctr"/>
-          <a:lstStyle/>
-          <a:p>
-            <a:pPr indent="0" marL="0">
-              <a:buNone/>
-            </a:pPr>
-            <a:r>
-              <a:rPr lang="en-US" sz="1050" spc="30" kern="0" dirty="0">
-                <a:solidFill>
-                  <a:srgbClr val="5C6377"/>
-                </a:solidFill>
-                <a:latin typeface="Arial" pitchFamily="34" charset="0"/>
-                <a:ea typeface="Arial" pitchFamily="34" charset="-122"/>
-                <a:cs typeface="Arial" pitchFamily="34" charset="-120"/>
-              </a:rPr>
-              <a:t>Abschluss</a:t>
-            </a:r>
-            <a:endParaRPr lang="en-US" sz="1050" dirty="0"/>
-          </a:p>
-        </p:txBody>
-      </p:sp>
-      <p:sp>
-        <p:nvSpPr>
-          <p:cNvPr id="22" name="Text 20"/>
-          <p:cNvSpPr/>
-          <p:nvPr/>
-        </p:nvSpPr>
-        <p:spPr>
-          <a:xfrm>
-            <a:off x="8028432" y="4722876"/>
-            <a:ext cx="548640" cy="237744"/>
-          </a:xfrm>
-          <a:prstGeom prst="rect">
-            <a:avLst/>
-          </a:prstGeom>
-          <a:noFill/>
-          <a:ln/>
-        </p:spPr>
-        <p:txBody>
-          <a:bodyPr wrap="square" lIns="0" tIns="0" rIns="0" bIns="0" rtlCol="0" anchor="ctr"/>
-          <a:lstStyle/>
-          <a:p>
-            <a:pPr algn="r" indent="0" marL="0">
-              <a:buNone/>
-            </a:pPr>
-            <a:r>
-              <a:rPr lang="en-US" sz="1050" dirty="0">
-                <a:solidFill>
-                  <a:srgbClr val="5C6377"/>
-                </a:solidFill>
-                <a:latin typeface="Arial" pitchFamily="34" charset="0"/>
-                <a:ea typeface="Arial" pitchFamily="34" charset="-122"/>
-                <a:cs typeface="Arial" pitchFamily="34" charset="-120"/>
-              </a:rPr>
-              <a:t>22/22</a:t>
-            </a:r>
-            <a:endParaRPr lang="en-US" sz="1050" dirty="0"/>
-          </a:p>
-        </p:txBody>
-      </p:sp>
-    </p:spTree>
-  </p:cSld>
-  <p:clrMapOvr>
-    <a:masterClrMapping/>
-  </p:clrMapOvr>
-</p:sld>
-</file>
-
-<file path=ppt/slides/slide29.xml><?xml version="1.0" encoding="utf-8"?>
-<p:sld xmlns:a="http://schemas.openxmlformats.org/drawingml/2006/main" xmlns:r="http://schemas.openxmlformats.org/officeDocument/2006/relationships" xmlns:p="http://schemas.openxmlformats.org/presentationml/2006/main">
-  <p:cSld name="Slide 29">
     <p:bg>
       <p:bgPr>
         <a:solidFill>
@@ -15598,7 +14944,7 @@
                 <a:ea typeface="Arial" pitchFamily="34" charset="-122"/>
                 <a:cs typeface="Arial" pitchFamily="34" charset="-120"/>
               </a:rPr>
-              <a:t>2/22</a:t>
+              <a:t>2/21</a:t>
             </a:r>
             <a:endParaRPr lang="en-US" sz="1050" dirty="0"/>
           </a:p>
@@ -15850,7 +15196,7 @@
                 <a:ea typeface="Arial" pitchFamily="34" charset="-122"/>
                 <a:cs typeface="Arial" pitchFamily="34" charset="-120"/>
               </a:rPr>
-              <a:t>Ohne Netzwerkwissen fehlt euch später die Sprache für Container-Netze, Cloud-Architekturen und Sicherheitszonen.</a:t>
+              <a:t>Container-Netze, Cloud-Subnetze, Sicherheitszonen: dieselben Begriffe, anderer Ort.</a:t>
             </a:r>
             <a:endParaRPr lang="en-US" sz="1200" dirty="0"/>
           </a:p>
@@ -15951,7 +15297,7 @@
                 <a:ea typeface="Arial" pitchFamily="34" charset="-122"/>
                 <a:cs typeface="Arial" pitchFamily="34" charset="-120"/>
               </a:rPr>
-              <a:t>3/22</a:t>
+              <a:t>3/21</a:t>
             </a:r>
             <a:endParaRPr lang="en-US" sz="1050" dirty="0"/>
           </a:p>
@@ -16969,7 +16315,7 @@
                 <a:ea typeface="Arial" pitchFamily="34" charset="-122"/>
                 <a:cs typeface="Arial" pitchFamily="34" charset="-120"/>
               </a:rPr>
-              <a:t>4/22</a:t>
+              <a:t>4/21</a:t>
             </a:r>
             <a:endParaRPr lang="en-US" sz="1050" dirty="0"/>
           </a:p>
@@ -17733,7 +17079,7 @@
                 <a:ea typeface="Arial" pitchFamily="34" charset="-122"/>
                 <a:cs typeface="Arial" pitchFamily="34" charset="-120"/>
               </a:rPr>
-              <a:t>5/22</a:t>
+              <a:t>5/21</a:t>
             </a:r>
             <a:endParaRPr lang="en-US" sz="1050" dirty="0"/>
           </a:p>
@@ -18836,7 +18182,7 @@
                 <a:ea typeface="Arial" pitchFamily="34" charset="-122"/>
                 <a:cs typeface="Arial" pitchFamily="34" charset="-120"/>
               </a:rPr>
-              <a:t>6/22</a:t>
+              <a:t>6/21</a:t>
             </a:r>
             <a:endParaRPr lang="en-US" sz="1050" dirty="0"/>
           </a:p>
@@ -19744,7 +19090,7 @@
                 <a:ea typeface="Arial" pitchFamily="34" charset="-122"/>
                 <a:cs typeface="Arial" pitchFamily="34" charset="-120"/>
               </a:rPr>
-              <a:t>7/22</a:t>
+              <a:t>7/21</a:t>
             </a:r>
             <a:endParaRPr lang="en-US" sz="1050" dirty="0"/>
           </a:p>

--- a/folien/dist/01-netzwerke-grundlagen.pptx
+++ b/folien/dist/01-netzwerke-grundlagen.pptx
@@ -3433,7 +3433,7 @@
                 <a:ea typeface="Arial" pitchFamily="34" charset="-122"/>
                 <a:cs typeface="Arial" pitchFamily="34" charset="-120"/>
               </a:rPr>
-              <a:t>Auffrischung auf gemeinsamen Stand – und der Blick auf das, was in der Ausbildung fehlte</a:t>
+              <a:t>Auffrischung auf gemeinsamen Stand – und der Blick auf das, was in der Ausbildung nicht vorkam</a:t>
             </a:r>
             <a:endParaRPr lang="en-US" sz="1700" dirty="0"/>
           </a:p>
@@ -3704,7 +3704,7 @@
                 <a:ea typeface="Arial" pitchFamily="34" charset="-122"/>
                 <a:cs typeface="Arial" pitchFamily="34" charset="-120"/>
               </a:rPr>
-              <a:t>Die Begriffe, bei denen es erfahrungsgemäß auseinandergeht</a:t>
+              <a:t>Die Begriffe, bei denen es gern auseinandergeht</a:t>
             </a:r>
             <a:endParaRPr lang="en-US" sz="1350" dirty="0"/>
           </a:p>
@@ -14477,7 +14477,7 @@
                 <a:ea typeface="Arial" pitchFamily="34" charset="-122"/>
                 <a:cs typeface="Arial" pitchFamily="34" charset="-120"/>
               </a:rPr>
-              <a:t>Montag, 31. August · Adressierung und Subnetting</a:t>
+              <a:t>Montag, 31. August · Adressierung und Subnetting · Papier und Stift mitbringen</a:t>
             </a:r>
             <a:endParaRPr lang="en-US" sz="1600" dirty="0"/>
           </a:p>

--- a/folien/dist/01-netzwerke-grundlagen.pptx
+++ b/folien/dist/01-netzwerke-grundlagen.pptx
@@ -13785,7 +13785,7 @@
                 <a:ea typeface="Arial" pitchFamily="34" charset="-122"/>
                 <a:cs typeface="Arial" pitchFamily="34" charset="-120"/>
               </a:rPr>
-              <a:t>Alles freiwillig – aber der Montag wird deutlich leichter, wenn ihr das gemacht habt.</a:t>
+              <a:t>Eine Bitte und drei Angebote – die Bitte zuerst.</a:t>
             </a:r>
             <a:endParaRPr lang="en-US" sz="1300" dirty="0"/>
           </a:p>
@@ -13800,7 +13800,7 @@
         <p:spPr>
           <a:xfrm>
             <a:off x="566928" y="1975104"/>
-            <a:ext cx="2523744" cy="1920240"/>
+            <a:ext cx="1879092" cy="1920240"/>
           </a:xfrm>
           <a:prstGeom prst="rect">
             <a:avLst/>
@@ -13826,7 +13826,7 @@
             <a:avLst/>
           </a:prstGeom>
           <a:solidFill>
-            <a:srgbClr val="3843AF"/>
+            <a:srgbClr val="9A6310"/>
           </a:solidFill>
           <a:ln/>
         </p:spPr>
@@ -13840,7 +13840,7 @@
         <p:spPr>
           <a:xfrm>
             <a:off x="804672" y="2121408"/>
-            <a:ext cx="2121408" cy="256032"/>
+            <a:ext cx="1476756" cy="384048"/>
           </a:xfrm>
           <a:prstGeom prst="rect">
             <a:avLst/>
@@ -13856,7 +13856,7 @@
               <a:buNone/>
             </a:pPr>
             <a:r>
-              <a:rPr lang="en-US" sz="1300" b="1" dirty="0">
+              <a:rPr lang="en-US" sz="1200" b="1" dirty="0">
                 <a:solidFill>
                   <a:srgbClr val="272E52"/>
                 </a:solidFill>
@@ -13864,9 +13864,9 @@
                 <a:ea typeface="Arial" pitchFamily="34" charset="-122"/>
                 <a:cs typeface="Arial" pitchFamily="34" charset="-120"/>
               </a:rPr>
-              <a:t>Nur wenn etwas hakte</a:t>
-            </a:r>
-            <a:endParaRPr lang="en-US" sz="1300" dirty="0"/>
+              <a:t>Standortbestimmung</a:t>
+            </a:r>
+            <a:endParaRPr lang="en-US" sz="1200" dirty="0"/>
           </a:p>
         </p:txBody>
       </p:sp>
@@ -13878,8 +13878,8 @@
         </p:nvSpPr>
         <p:spPr>
           <a:xfrm>
-            <a:off x="804672" y="2423160"/>
-            <a:ext cx="2121408" cy="1353312"/>
+            <a:off x="804672" y="2551176"/>
+            <a:ext cx="1476756" cy="1225296"/>
           </a:xfrm>
           <a:prstGeom prst="rect">
             <a:avLst/>
@@ -13898,7 +13898,7 @@
               <a:buNone/>
             </a:pPr>
             <a:r>
-              <a:rPr lang="en-US" sz="1150" dirty="0">
+              <a:rPr lang="en-US" sz="1050" dirty="0">
                 <a:solidFill>
                   <a:srgbClr val="434A63"/>
                 </a:solidFill>
@@ -13906,9 +13906,9 @@
                 <a:ea typeface="Arial" pitchFamily="34" charset="-122"/>
                 <a:cs typeface="Arial" pitchFamily="34" charset="-120"/>
               </a:rPr>
-              <a:t>Die Seiten „Grundbegriffe“ und „OSI- und TCP/IP-Modell“ stehen auf der Kursseite. Gedacht für die Stellen, an denen ihr heute gestockt habt – nicht zum Durchlesen.</a:t>
-            </a:r>
-            <a:endParaRPr lang="en-US" sz="1150" dirty="0"/>
+              <a:t>Das Formular aus dem Chat: gut 20 Minuten, bis Montag. Kein Test – es zeigt mir, wo wir gründlich einsteigen müssen.</a:t>
+            </a:r>
+            <a:endParaRPr lang="en-US" sz="1050" dirty="0"/>
           </a:p>
         </p:txBody>
       </p:sp>
@@ -13920,8 +13920,8 @@
         </p:nvSpPr>
         <p:spPr>
           <a:xfrm>
-            <a:off x="3310128" y="1975104"/>
-            <a:ext cx="2523744" cy="1920240"/>
+            <a:off x="2610612" y="1975104"/>
+            <a:ext cx="1879092" cy="1920240"/>
           </a:xfrm>
           <a:prstGeom prst="rect">
             <a:avLst/>
@@ -13940,7 +13940,7 @@
         </p:nvSpPr>
         <p:spPr>
           <a:xfrm>
-            <a:off x="3310128" y="1975104"/>
+            <a:off x="2610612" y="1975104"/>
             <a:ext cx="41148" cy="1920240"/>
           </a:xfrm>
           <a:prstGeom prst="rect">
@@ -13960,8 +13960,8 @@
         </p:nvSpPr>
         <p:spPr>
           <a:xfrm>
-            <a:off x="3547872" y="2121408"/>
-            <a:ext cx="2121408" cy="256032"/>
+            <a:off x="2848356" y="2121408"/>
+            <a:ext cx="1476756" cy="384048"/>
           </a:xfrm>
           <a:prstGeom prst="rect">
             <a:avLst/>
@@ -13977,7 +13977,7 @@
               <a:buNone/>
             </a:pPr>
             <a:r>
-              <a:rPr lang="en-US" sz="1300" b="1" dirty="0">
+              <a:rPr lang="en-US" sz="1200" b="1" dirty="0">
                 <a:solidFill>
                   <a:srgbClr val="272E52"/>
                 </a:solidFill>
@@ -13985,9 +13985,9 @@
                 <a:ea typeface="Arial" pitchFamily="34" charset="-122"/>
                 <a:cs typeface="Arial" pitchFamily="34" charset="-120"/>
               </a:rPr>
-              <a:t>Nachholen</a:t>
-            </a:r>
-            <a:endParaRPr lang="en-US" sz="1300" dirty="0"/>
+              <a:t>Nur wenn etwas hakte</a:t>
+            </a:r>
+            <a:endParaRPr lang="en-US" sz="1200" dirty="0"/>
           </a:p>
         </p:txBody>
       </p:sp>
@@ -13999,8 +13999,8 @@
         </p:nvSpPr>
         <p:spPr>
           <a:xfrm>
-            <a:off x="3547872" y="2423160"/>
-            <a:ext cx="2121408" cy="1353312"/>
+            <a:off x="2848356" y="2551176"/>
+            <a:ext cx="1476756" cy="1225296"/>
           </a:xfrm>
           <a:prstGeom prst="rect">
             <a:avLst/>
@@ -14019,7 +14019,7 @@
               <a:buNone/>
             </a:pPr>
             <a:r>
-              <a:rPr lang="en-US" sz="1150" dirty="0">
+              <a:rPr lang="en-US" sz="1050" dirty="0">
                 <a:solidFill>
                   <a:srgbClr val="434A63"/>
                 </a:solidFill>
@@ -14027,9 +14027,9 @@
                 <a:ea typeface="Arial" pitchFamily="34" charset="-122"/>
                 <a:cs typeface="Arial" pitchFamily="34" charset="-120"/>
               </a:rPr>
-              <a:t>Wer nicht bis zu den Störungen gekommen ist: Station 3 lohnt sich. Die Auflösungen stehen zum Aufklappen darunter.</a:t>
-            </a:r>
-            <a:endParaRPr lang="en-US" sz="1150" dirty="0"/>
+              <a:t>„Grundbegriffe“ und „OSI- und TCP/IP-Modell“ stehen auf der Kursseite – für die Stellen, an denen ihr heute gestockt habt.</a:t>
+            </a:r>
+            <a:endParaRPr lang="en-US" sz="1050" dirty="0"/>
           </a:p>
         </p:txBody>
       </p:sp>
@@ -14041,8 +14041,8 @@
         </p:nvSpPr>
         <p:spPr>
           <a:xfrm>
-            <a:off x="6053328" y="1975104"/>
-            <a:ext cx="2523744" cy="1920240"/>
+            <a:off x="4654296" y="1975104"/>
+            <a:ext cx="1879092" cy="1920240"/>
           </a:xfrm>
           <a:prstGeom prst="rect">
             <a:avLst/>
@@ -14061,7 +14061,7 @@
         </p:nvSpPr>
         <p:spPr>
           <a:xfrm>
-            <a:off x="6053328" y="1975104"/>
+            <a:off x="4654296" y="1975104"/>
             <a:ext cx="41148" cy="1920240"/>
           </a:xfrm>
           <a:prstGeom prst="rect">
@@ -14081,8 +14081,8 @@
         </p:nvSpPr>
         <p:spPr>
           <a:xfrm>
-            <a:off x="6291072" y="2121408"/>
-            <a:ext cx="2121408" cy="256032"/>
+            <a:off x="4892040" y="2121408"/>
+            <a:ext cx="1476756" cy="384048"/>
           </a:xfrm>
           <a:prstGeom prst="rect">
             <a:avLst/>
@@ -14098,7 +14098,7 @@
               <a:buNone/>
             </a:pPr>
             <a:r>
-              <a:rPr lang="en-US" sz="1300" b="1" dirty="0">
+              <a:rPr lang="en-US" sz="1200" b="1" dirty="0">
                 <a:solidFill>
                   <a:srgbClr val="272E52"/>
                 </a:solidFill>
@@ -14106,9 +14106,9 @@
                 <a:ea typeface="Arial" pitchFamily="34" charset="-122"/>
                 <a:cs typeface="Arial" pitchFamily="34" charset="-120"/>
               </a:rPr>
-              <a:t>Vorbereiten</a:t>
-            </a:r>
-            <a:endParaRPr lang="en-US" sz="1300" dirty="0"/>
+              <a:t>Nachholen</a:t>
+            </a:r>
+            <a:endParaRPr lang="en-US" sz="1200" dirty="0"/>
           </a:p>
         </p:txBody>
       </p:sp>
@@ -14120,8 +14120,8 @@
         </p:nvSpPr>
         <p:spPr>
           <a:xfrm>
-            <a:off x="6291072" y="2423160"/>
-            <a:ext cx="2121408" cy="1353312"/>
+            <a:off x="4892040" y="2551176"/>
+            <a:ext cx="1476756" cy="1225296"/>
           </a:xfrm>
           <a:prstGeom prst="rect">
             <a:avLst/>
@@ -14140,7 +14140,7 @@
               <a:buNone/>
             </a:pPr>
             <a:r>
-              <a:rPr lang="en-US" sz="1150" dirty="0">
+              <a:rPr lang="en-US" sz="1050" dirty="0">
                 <a:solidFill>
                   <a:srgbClr val="434A63"/>
                 </a:solidFill>
@@ -14148,9 +14148,9 @@
                 <a:ea typeface="Arial" pitchFamily="34" charset="-122"/>
                 <a:cs typeface="Arial" pitchFamily="34" charset="-120"/>
               </a:rPr>
-              <a:t>Am Montag rechnen wir Subnetze. Bringt Papier, Stift und einen wachen Kopf mit – Taschenrechner braucht ihr nicht.</a:t>
-            </a:r>
-            <a:endParaRPr lang="en-US" sz="1150" dirty="0"/>
+              <a:t>Wer nicht bis zu den Störungen kam: Station 3 lohnt sich. Die Auflösungen stehen zum Aufklappen darunter.</a:t>
+            </a:r>
+            <a:endParaRPr lang="en-US" sz="1050" dirty="0"/>
           </a:p>
         </p:txBody>
       </p:sp>
@@ -14162,8 +14162,28 @@
         </p:nvSpPr>
         <p:spPr>
           <a:xfrm>
-            <a:off x="566928" y="4160520"/>
-            <a:ext cx="32004" cy="256032"/>
+            <a:off x="6697980" y="1975104"/>
+            <a:ext cx="1879092" cy="1920240"/>
+          </a:xfrm>
+          <a:prstGeom prst="rect">
+            <a:avLst/>
+          </a:prstGeom>
+          <a:solidFill>
+            <a:srgbClr val="F5F6FC"/>
+          </a:solidFill>
+          <a:ln/>
+        </p:spPr>
+      </p:sp>
+      <p:sp>
+        <p:nvSpPr>
+          <p:cNvPr id="19" name="Shape 17"/>
+          <p:cNvSpPr/>
+          <p:nvPr/>
+        </p:nvSpPr>
+        <p:spPr>
+          <a:xfrm>
+            <a:off x="6697980" y="1975104"/>
+            <a:ext cx="41148" cy="1920240"/>
           </a:xfrm>
           <a:prstGeom prst="rect">
             <a:avLst/>
@@ -14176,7 +14196,108 @@
       </p:sp>
       <p:sp>
         <p:nvSpPr>
-          <p:cNvPr id="19" name="Text 17"/>
+          <p:cNvPr id="20" name="Text 18"/>
+          <p:cNvSpPr/>
+          <p:nvPr/>
+        </p:nvSpPr>
+        <p:spPr>
+          <a:xfrm>
+            <a:off x="6935724" y="2121408"/>
+            <a:ext cx="1476756" cy="384048"/>
+          </a:xfrm>
+          <a:prstGeom prst="rect">
+            <a:avLst/>
+          </a:prstGeom>
+          <a:noFill/>
+          <a:ln/>
+        </p:spPr>
+        <p:txBody>
+          <a:bodyPr wrap="square" lIns="0" tIns="0" rIns="0" bIns="0" rtlCol="0" anchor="t"/>
+          <a:lstStyle/>
+          <a:p>
+            <a:pPr indent="0" marL="0">
+              <a:buNone/>
+            </a:pPr>
+            <a:r>
+              <a:rPr lang="en-US" sz="1200" b="1" dirty="0">
+                <a:solidFill>
+                  <a:srgbClr val="272E52"/>
+                </a:solidFill>
+                <a:latin typeface="Arial" pitchFamily="34" charset="0"/>
+                <a:ea typeface="Arial" pitchFamily="34" charset="-122"/>
+                <a:cs typeface="Arial" pitchFamily="34" charset="-120"/>
+              </a:rPr>
+              <a:t>Vorbereiten</a:t>
+            </a:r>
+            <a:endParaRPr lang="en-US" sz="1200" dirty="0"/>
+          </a:p>
+        </p:txBody>
+      </p:sp>
+      <p:sp>
+        <p:nvSpPr>
+          <p:cNvPr id="21" name="Text 19"/>
+          <p:cNvSpPr/>
+          <p:nvPr/>
+        </p:nvSpPr>
+        <p:spPr>
+          <a:xfrm>
+            <a:off x="6935724" y="2551176"/>
+            <a:ext cx="1476756" cy="1225296"/>
+          </a:xfrm>
+          <a:prstGeom prst="rect">
+            <a:avLst/>
+          </a:prstGeom>
+          <a:noFill/>
+          <a:ln/>
+        </p:spPr>
+        <p:txBody>
+          <a:bodyPr wrap="square" lIns="0" tIns="0" rIns="0" bIns="0" rtlCol="0" anchor="t"/>
+          <a:lstStyle/>
+          <a:p>
+            <a:pPr indent="0" marL="0">
+              <a:lnSpc>
+                <a:spcPct val="92000"/>
+              </a:lnSpc>
+              <a:buNone/>
+            </a:pPr>
+            <a:r>
+              <a:rPr lang="en-US" sz="1050" dirty="0">
+                <a:solidFill>
+                  <a:srgbClr val="434A63"/>
+                </a:solidFill>
+                <a:latin typeface="Arial" pitchFamily="34" charset="0"/>
+                <a:ea typeface="Arial" pitchFamily="34" charset="-122"/>
+                <a:cs typeface="Arial" pitchFamily="34" charset="-120"/>
+              </a:rPr>
+              <a:t>Montag rechnen wir Subnetze. Papier und Stift reichen – Taschenrechner braucht ihr nicht.</a:t>
+            </a:r>
+            <a:endParaRPr lang="en-US" sz="1050" dirty="0"/>
+          </a:p>
+        </p:txBody>
+      </p:sp>
+      <p:sp>
+        <p:nvSpPr>
+          <p:cNvPr id="22" name="Shape 20"/>
+          <p:cNvSpPr/>
+          <p:nvPr/>
+        </p:nvSpPr>
+        <p:spPr>
+          <a:xfrm>
+            <a:off x="566928" y="4160520"/>
+            <a:ext cx="32004" cy="256032"/>
+          </a:xfrm>
+          <a:prstGeom prst="rect">
+            <a:avLst/>
+          </a:prstGeom>
+          <a:solidFill>
+            <a:srgbClr val="3843AF"/>
+          </a:solidFill>
+          <a:ln/>
+        </p:spPr>
+      </p:sp>
+      <p:sp>
+        <p:nvSpPr>
+          <p:cNvPr id="23" name="Text 21"/>
           <p:cNvSpPr/>
           <p:nvPr/>
         </p:nvSpPr>
@@ -14215,7 +14336,7 @@
       </p:sp>
       <p:sp>
         <p:nvSpPr>
-          <p:cNvPr id="20" name="Shape 18"/>
+          <p:cNvPr id="24" name="Shape 22"/>
           <p:cNvSpPr/>
           <p:nvPr/>
         </p:nvSpPr>
@@ -14238,7 +14359,7 @@
       </p:sp>
       <p:sp>
         <p:nvSpPr>
-          <p:cNvPr id="21" name="Text 19"/>
+          <p:cNvPr id="25" name="Text 23"/>
           <p:cNvSpPr/>
           <p:nvPr/>
         </p:nvSpPr>
@@ -14277,7 +14398,7 @@
       </p:sp>
       <p:sp>
         <p:nvSpPr>
-          <p:cNvPr id="22" name="Text 20"/>
+          <p:cNvPr id="26" name="Text 24"/>
           <p:cNvSpPr/>
           <p:nvPr/>
         </p:nvSpPr>

--- a/folien/dist/01-netzwerke-grundlagen.pptx
+++ b/folien/dist/01-netzwerke-grundlagen.pptx
@@ -3386,7 +3386,7 @@
               <a:buNone/>
             </a:pPr>
             <a:r>
-              <a:rPr lang="en-US" sz="4200" b="1" dirty="0">
+              <a:rPr lang="en-US" sz="3300" b="1" dirty="0">
                 <a:solidFill>
                   <a:srgbClr val="272E52"/>
                 </a:solidFill>
@@ -3396,7 +3396,7 @@
               </a:rPr>
               <a:t>Netzwerke – das Fundament</a:t>
             </a:r>
-            <a:endParaRPr lang="en-US" sz="4200" dirty="0"/>
+            <a:endParaRPr lang="en-US" sz="3300" dirty="0"/>
           </a:p>
         </p:txBody>
       </p:sp>
@@ -3433,7 +3433,7 @@
                 <a:ea typeface="Arial" pitchFamily="34" charset="-122"/>
                 <a:cs typeface="Arial" pitchFamily="34" charset="-120"/>
               </a:rPr>
-              <a:t>Auffrischung auf gemeinsamen Stand – und der Blick auf das, was in der Ausbildung nicht vorkam</a:t>
+              <a:t>Auffrischung auf gemeinsamen Stand – und der Blick auf das, was dort meist zu kurz kam</a:t>
             </a:r>
             <a:endParaRPr lang="en-US" sz="1700" dirty="0"/>
           </a:p>
@@ -3913,7 +3913,7 @@
         <p:spPr>
           <a:xfrm>
             <a:off x="804672" y="3666744"/>
-            <a:ext cx="7607808" cy="237744"/>
+            <a:ext cx="7607808" cy="242062"/>
           </a:xfrm>
           <a:prstGeom prst="rect">
             <a:avLst/>
@@ -3951,8 +3951,8 @@
         </p:nvSpPr>
         <p:spPr>
           <a:xfrm>
-            <a:off x="804672" y="3950208"/>
-            <a:ext cx="7607808" cy="320040"/>
+            <a:off x="804672" y="3954526"/>
+            <a:ext cx="7607808" cy="315722"/>
           </a:xfrm>
           <a:prstGeom prst="rect">
             <a:avLst/>
@@ -5324,7 +5324,7 @@
                 <a:ea typeface="Arial" pitchFamily="34" charset="-122"/>
                 <a:cs typeface="Arial" pitchFamily="34" charset="-120"/>
               </a:rPr>
-              <a:t>Bandbreite ist nicht gleich Geschwindigkeit</a:t>
+              <a:t>Bandbreite ist nicht Geschwindigkeit</a:t>
             </a:r>
             <a:endParaRPr lang="en-US" sz="2600" dirty="0"/>
           </a:p>
@@ -5403,7 +5403,7 @@
         <p:spPr>
           <a:xfrm>
             <a:off x="804672" y="3493008"/>
-            <a:ext cx="2121408" cy="237744"/>
+            <a:ext cx="2121408" cy="242062"/>
           </a:xfrm>
           <a:prstGeom prst="rect">
             <a:avLst/>
@@ -5441,8 +5441,8 @@
         </p:nvSpPr>
         <p:spPr>
           <a:xfrm>
-            <a:off x="804672" y="3776472"/>
-            <a:ext cx="2121408" cy="548640"/>
+            <a:off x="804672" y="3780790"/>
+            <a:ext cx="2121408" cy="544322"/>
           </a:xfrm>
           <a:prstGeom prst="rect">
             <a:avLst/>
@@ -5469,7 +5469,7 @@
                 <a:ea typeface="Arial" pitchFamily="34" charset="-122"/>
                 <a:cs typeface="Arial" pitchFamily="34" charset="-120"/>
               </a:rPr>
-              <a:t>Wie stark die Latenz schwankt. Killt Sprache und Video, nicht Downloads.</a:t>
+              <a:t>Schwankende Latenz. Stört Sprache und Video.</a:t>
             </a:r>
             <a:endParaRPr lang="en-US" sz="1100" dirty="0"/>
           </a:p>
@@ -5524,7 +5524,7 @@
         <p:spPr>
           <a:xfrm>
             <a:off x="3547872" y="3493008"/>
-            <a:ext cx="2121408" cy="237744"/>
+            <a:ext cx="2121408" cy="242062"/>
           </a:xfrm>
           <a:prstGeom prst="rect">
             <a:avLst/>
@@ -5562,8 +5562,8 @@
         </p:nvSpPr>
         <p:spPr>
           <a:xfrm>
-            <a:off x="3547872" y="3776472"/>
-            <a:ext cx="2121408" cy="548640"/>
+            <a:off x="3547872" y="3780790"/>
+            <a:ext cx="2121408" cy="544322"/>
           </a:xfrm>
           <a:prstGeom prst="rect">
             <a:avLst/>
@@ -5645,7 +5645,7 @@
         <p:spPr>
           <a:xfrm>
             <a:off x="6291072" y="3493008"/>
-            <a:ext cx="2121408" cy="237744"/>
+            <a:ext cx="2121408" cy="242062"/>
           </a:xfrm>
           <a:prstGeom prst="rect">
             <a:avLst/>
@@ -5683,8 +5683,8 @@
         </p:nvSpPr>
         <p:spPr>
           <a:xfrm>
-            <a:off x="6291072" y="3776472"/>
-            <a:ext cx="2121408" cy="548640"/>
+            <a:off x="6291072" y="3780790"/>
+            <a:ext cx="2121408" cy="544322"/>
           </a:xfrm>
           <a:prstGeom prst="rect">
             <a:avLst/>
@@ -6427,7 +6427,7 @@
         <p:spPr>
           <a:xfrm>
             <a:off x="804672" y="3666744"/>
-            <a:ext cx="7607808" cy="237744"/>
+            <a:ext cx="7607808" cy="242062"/>
           </a:xfrm>
           <a:prstGeom prst="rect">
             <a:avLst/>
@@ -6465,8 +6465,8 @@
         </p:nvSpPr>
         <p:spPr>
           <a:xfrm>
-            <a:off x="804672" y="3950208"/>
-            <a:ext cx="7607808" cy="320040"/>
+            <a:off x="804672" y="3954526"/>
+            <a:ext cx="7607808" cy="315722"/>
           </a:xfrm>
           <a:prstGeom prst="rect">
             <a:avLst/>
@@ -6807,7 +6807,7 @@
                 <a:ea typeface="Arial" pitchFamily="34" charset="-122"/>
                 <a:cs typeface="Arial" pitchFamily="34" charset="-120"/>
               </a:rPr>
-              <a:t>Faustregel: OSI zum Erklären, TCP/IP zum Arbeiten. Gerechnet und gemessen wird auf 2, 3 und 4.</a:t>
+              <a:t>Faustregel: OSI zum Erklären, TCP/IP zum Arbeiten – die Schicht-Nummern nimmt trotzdem jeder aus OSI.</a:t>
             </a:r>
             <a:endParaRPr lang="en-US" sz="1200" dirty="0"/>
           </a:p>
@@ -8162,7 +8162,7 @@
                 <a:ea typeface="Arial" pitchFamily="34" charset="-122"/>
                 <a:cs typeface="Arial" pitchFamily="34" charset="-120"/>
               </a:rPr>
-              <a:t>Warum Netzwerke – und was in der Ausbildung nicht vorkam</a:t>
+              <a:t>Warum Netzwerke – und was bisher meist zu kurz kam</a:t>
             </a:r>
             <a:endParaRPr lang="en-US" sz="1050" dirty="0"/>
           </a:p>
@@ -9524,7 +9524,7 @@
         <p:spPr>
           <a:xfrm>
             <a:off x="804672" y="3675888"/>
-            <a:ext cx="7607808" cy="219456"/>
+            <a:ext cx="7607808" cy="242062"/>
           </a:xfrm>
           <a:prstGeom prst="rect">
             <a:avLst/>
@@ -9562,8 +9562,8 @@
         </p:nvSpPr>
         <p:spPr>
           <a:xfrm>
-            <a:off x="804672" y="3941064"/>
-            <a:ext cx="7607808" cy="347472"/>
+            <a:off x="804672" y="3963670"/>
+            <a:ext cx="7607808" cy="324866"/>
           </a:xfrm>
           <a:prstGeom prst="rect">
             <a:avLst/>
@@ -10124,7 +10124,7 @@
         <p:spPr>
           <a:xfrm>
             <a:off x="804672" y="3749040"/>
-            <a:ext cx="7607808" cy="237744"/>
+            <a:ext cx="7607808" cy="242062"/>
           </a:xfrm>
           <a:prstGeom prst="rect">
             <a:avLst/>
@@ -10162,8 +10162,8 @@
         </p:nvSpPr>
         <p:spPr>
           <a:xfrm>
-            <a:off x="804672" y="4032504"/>
-            <a:ext cx="7607808" cy="274320"/>
+            <a:off x="804672" y="4036822"/>
+            <a:ext cx="7607808" cy="270002"/>
           </a:xfrm>
           <a:prstGeom prst="rect">
             <a:avLst/>
@@ -13314,7 +13314,7 @@
                 <a:ea typeface="Arial" pitchFamily="34" charset="-122"/>
                 <a:cs typeface="Arial" pitchFamily="34" charset="-120"/>
               </a:rPr>
-              <a:t>OSI sieben Schichten, TCP/IP vier. Gearbeitet wird auf 2, 3 und 4.</a:t>
+              <a:t>OSI sieben Schichten, TCP/IP vier – gemessen habt ihr heute auf allen außer 5 und 6.</a:t>
             </a:r>
             <a:endParaRPr lang="en-US" sz="1350" dirty="0"/>
           </a:p>
@@ -13449,7 +13449,7 @@
         <p:spPr>
           <a:xfrm>
             <a:off x="804672" y="3712464"/>
-            <a:ext cx="7607808" cy="237744"/>
+            <a:ext cx="7607808" cy="242062"/>
           </a:xfrm>
           <a:prstGeom prst="rect">
             <a:avLst/>
@@ -13487,8 +13487,8 @@
         </p:nvSpPr>
         <p:spPr>
           <a:xfrm>
-            <a:off x="804672" y="3995928"/>
-            <a:ext cx="7607808" cy="411480"/>
+            <a:off x="804672" y="4000246"/>
+            <a:ext cx="7607808" cy="407162"/>
           </a:xfrm>
           <a:prstGeom prst="rect">
             <a:avLst/>
@@ -13785,7 +13785,7 @@
                 <a:ea typeface="Arial" pitchFamily="34" charset="-122"/>
                 <a:cs typeface="Arial" pitchFamily="34" charset="-120"/>
               </a:rPr>
-              <a:t>Eine Bitte und drei Angebote – die Bitte zuerst.</a:t>
+              <a:t>Eine Bitte und zwei Angebote – die Bitte zuerst.</a:t>
             </a:r>
             <a:endParaRPr lang="en-US" sz="1300" dirty="0"/>
           </a:p>
@@ -13800,7 +13800,7 @@
         <p:spPr>
           <a:xfrm>
             <a:off x="566928" y="1975104"/>
-            <a:ext cx="1879092" cy="1920240"/>
+            <a:ext cx="2523744" cy="1920240"/>
           </a:xfrm>
           <a:prstGeom prst="rect">
             <a:avLst/>
@@ -13840,7 +13840,7 @@
         <p:spPr>
           <a:xfrm>
             <a:off x="804672" y="2121408"/>
-            <a:ext cx="1476756" cy="384048"/>
+            <a:ext cx="2121408" cy="256032"/>
           </a:xfrm>
           <a:prstGeom prst="rect">
             <a:avLst/>
@@ -13856,7 +13856,7 @@
               <a:buNone/>
             </a:pPr>
             <a:r>
-              <a:rPr lang="en-US" sz="1200" b="1" dirty="0">
+              <a:rPr lang="en-US" sz="1300" b="1" dirty="0">
                 <a:solidFill>
                   <a:srgbClr val="272E52"/>
                 </a:solidFill>
@@ -13866,7 +13866,7 @@
               </a:rPr>
               <a:t>Standortbestimmung</a:t>
             </a:r>
-            <a:endParaRPr lang="en-US" sz="1200" dirty="0"/>
+            <a:endParaRPr lang="en-US" sz="1300" dirty="0"/>
           </a:p>
         </p:txBody>
       </p:sp>
@@ -13878,8 +13878,8 @@
         </p:nvSpPr>
         <p:spPr>
           <a:xfrm>
-            <a:off x="804672" y="2551176"/>
-            <a:ext cx="1476756" cy="1225296"/>
+            <a:off x="804672" y="2423160"/>
+            <a:ext cx="2121408" cy="1353312"/>
           </a:xfrm>
           <a:prstGeom prst="rect">
             <a:avLst/>
@@ -13898,7 +13898,7 @@
               <a:buNone/>
             </a:pPr>
             <a:r>
-              <a:rPr lang="en-US" sz="1050" dirty="0">
+              <a:rPr lang="en-US" sz="1150" dirty="0">
                 <a:solidFill>
                   <a:srgbClr val="434A63"/>
                 </a:solidFill>
@@ -13908,7 +13908,7 @@
               </a:rPr>
               <a:t>Das Formular aus dem Chat: gut 20 Minuten, bis Montag. Kein Test – es zeigt mir, wo wir gründlich einsteigen müssen.</a:t>
             </a:r>
-            <a:endParaRPr lang="en-US" sz="1050" dirty="0"/>
+            <a:endParaRPr lang="en-US" sz="1150" dirty="0"/>
           </a:p>
         </p:txBody>
       </p:sp>
@@ -13920,8 +13920,8 @@
         </p:nvSpPr>
         <p:spPr>
           <a:xfrm>
-            <a:off x="2610612" y="1975104"/>
-            <a:ext cx="1879092" cy="1920240"/>
+            <a:off x="3310128" y="1975104"/>
+            <a:ext cx="2523744" cy="1920240"/>
           </a:xfrm>
           <a:prstGeom prst="rect">
             <a:avLst/>
@@ -13940,7 +13940,7 @@
         </p:nvSpPr>
         <p:spPr>
           <a:xfrm>
-            <a:off x="2610612" y="1975104"/>
+            <a:off x="3310128" y="1975104"/>
             <a:ext cx="41148" cy="1920240"/>
           </a:xfrm>
           <a:prstGeom prst="rect">
@@ -13960,8 +13960,8 @@
         </p:nvSpPr>
         <p:spPr>
           <a:xfrm>
-            <a:off x="2848356" y="2121408"/>
-            <a:ext cx="1476756" cy="384048"/>
+            <a:off x="3547872" y="2121408"/>
+            <a:ext cx="2121408" cy="256032"/>
           </a:xfrm>
           <a:prstGeom prst="rect">
             <a:avLst/>
@@ -13977,7 +13977,7 @@
               <a:buNone/>
             </a:pPr>
             <a:r>
-              <a:rPr lang="en-US" sz="1200" b="1" dirty="0">
+              <a:rPr lang="en-US" sz="1300" b="1" dirty="0">
                 <a:solidFill>
                   <a:srgbClr val="272E52"/>
                 </a:solidFill>
@@ -13985,9 +13985,9 @@
                 <a:ea typeface="Arial" pitchFamily="34" charset="-122"/>
                 <a:cs typeface="Arial" pitchFamily="34" charset="-120"/>
               </a:rPr>
-              <a:t>Nur wenn etwas hakte</a:t>
-            </a:r>
-            <a:endParaRPr lang="en-US" sz="1200" dirty="0"/>
+              <a:t>Wenn etwas hakte</a:t>
+            </a:r>
+            <a:endParaRPr lang="en-US" sz="1300" dirty="0"/>
           </a:p>
         </p:txBody>
       </p:sp>
@@ -13999,8 +13999,8 @@
         </p:nvSpPr>
         <p:spPr>
           <a:xfrm>
-            <a:off x="2848356" y="2551176"/>
-            <a:ext cx="1476756" cy="1225296"/>
+            <a:off x="3547872" y="2423160"/>
+            <a:ext cx="2121408" cy="1353312"/>
           </a:xfrm>
           <a:prstGeom prst="rect">
             <a:avLst/>
@@ -14019,7 +14019,7 @@
               <a:buNone/>
             </a:pPr>
             <a:r>
-              <a:rPr lang="en-US" sz="1050" dirty="0">
+              <a:rPr lang="en-US" sz="1150" dirty="0">
                 <a:solidFill>
                   <a:srgbClr val="434A63"/>
                 </a:solidFill>
@@ -14027,9 +14027,9 @@
                 <a:ea typeface="Arial" pitchFamily="34" charset="-122"/>
                 <a:cs typeface="Arial" pitchFamily="34" charset="-120"/>
               </a:rPr>
-              <a:t>„Grundbegriffe“ und „OSI- und TCP/IP-Modell“ stehen auf der Kursseite – für die Stellen, an denen ihr heute gestockt habt.</a:t>
-            </a:r>
-            <a:endParaRPr lang="en-US" sz="1050" dirty="0"/>
+              <a:t>„Grundbegriffe“ und „OSI und TCP/IP“ stehen auf der Kursseite. Und wer nicht bis zu den Störungen kam: Station 3 lohnt sich.</a:t>
+            </a:r>
+            <a:endParaRPr lang="en-US" sz="1150" dirty="0"/>
           </a:p>
         </p:txBody>
       </p:sp>
@@ -14041,8 +14041,8 @@
         </p:nvSpPr>
         <p:spPr>
           <a:xfrm>
-            <a:off x="4654296" y="1975104"/>
-            <a:ext cx="1879092" cy="1920240"/>
+            <a:off x="6053328" y="1975104"/>
+            <a:ext cx="2523744" cy="1920240"/>
           </a:xfrm>
           <a:prstGeom prst="rect">
             <a:avLst/>
@@ -14061,7 +14061,7 @@
         </p:nvSpPr>
         <p:spPr>
           <a:xfrm>
-            <a:off x="4654296" y="1975104"/>
+            <a:off x="6053328" y="1975104"/>
             <a:ext cx="41148" cy="1920240"/>
           </a:xfrm>
           <a:prstGeom prst="rect">
@@ -14081,8 +14081,8 @@
         </p:nvSpPr>
         <p:spPr>
           <a:xfrm>
-            <a:off x="4892040" y="2121408"/>
-            <a:ext cx="1476756" cy="384048"/>
+            <a:off x="6291072" y="2121408"/>
+            <a:ext cx="2121408" cy="256032"/>
           </a:xfrm>
           <a:prstGeom prst="rect">
             <a:avLst/>
@@ -14098,7 +14098,7 @@
               <a:buNone/>
             </a:pPr>
             <a:r>
-              <a:rPr lang="en-US" sz="1200" b="1" dirty="0">
+              <a:rPr lang="en-US" sz="1300" b="1" dirty="0">
                 <a:solidFill>
                   <a:srgbClr val="272E52"/>
                 </a:solidFill>
@@ -14106,9 +14106,9 @@
                 <a:ea typeface="Arial" pitchFamily="34" charset="-122"/>
                 <a:cs typeface="Arial" pitchFamily="34" charset="-120"/>
               </a:rPr>
-              <a:t>Nachholen</a:t>
-            </a:r>
-            <a:endParaRPr lang="en-US" sz="1200" dirty="0"/>
+              <a:t>Vorbereiten</a:t>
+            </a:r>
+            <a:endParaRPr lang="en-US" sz="1300" dirty="0"/>
           </a:p>
         </p:txBody>
       </p:sp>
@@ -14120,8 +14120,8 @@
         </p:nvSpPr>
         <p:spPr>
           <a:xfrm>
-            <a:off x="4892040" y="2551176"/>
-            <a:ext cx="1476756" cy="1225296"/>
+            <a:off x="6291072" y="2423160"/>
+            <a:ext cx="2121408" cy="1353312"/>
           </a:xfrm>
           <a:prstGeom prst="rect">
             <a:avLst/>
@@ -14140,7 +14140,7 @@
               <a:buNone/>
             </a:pPr>
             <a:r>
-              <a:rPr lang="en-US" sz="1050" dirty="0">
+              <a:rPr lang="en-US" sz="1150" dirty="0">
                 <a:solidFill>
                   <a:srgbClr val="434A63"/>
                 </a:solidFill>
@@ -14148,9 +14148,9 @@
                 <a:ea typeface="Arial" pitchFamily="34" charset="-122"/>
                 <a:cs typeface="Arial" pitchFamily="34" charset="-120"/>
               </a:rPr>
-              <a:t>Wer nicht bis zu den Störungen kam: Station 3 lohnt sich. Die Auflösungen stehen zum Aufklappen darunter.</a:t>
-            </a:r>
-            <a:endParaRPr lang="en-US" sz="1050" dirty="0"/>
+              <a:t>Montag rechnen wir Subnetze. Papier und Stift reichen – Taschenrechner braucht ihr nicht.</a:t>
+            </a:r>
+            <a:endParaRPr lang="en-US" sz="1150" dirty="0"/>
           </a:p>
         </p:txBody>
       </p:sp>
@@ -14162,28 +14162,8 @@
         </p:nvSpPr>
         <p:spPr>
           <a:xfrm>
-            <a:off x="6697980" y="1975104"/>
-            <a:ext cx="1879092" cy="1920240"/>
-          </a:xfrm>
-          <a:prstGeom prst="rect">
-            <a:avLst/>
-          </a:prstGeom>
-          <a:solidFill>
-            <a:srgbClr val="F5F6FC"/>
-          </a:solidFill>
-          <a:ln/>
-        </p:spPr>
-      </p:sp>
-      <p:sp>
-        <p:nvSpPr>
-          <p:cNvPr id="19" name="Shape 17"/>
-          <p:cNvSpPr/>
-          <p:nvPr/>
-        </p:nvSpPr>
-        <p:spPr>
-          <a:xfrm>
-            <a:off x="6697980" y="1975104"/>
-            <a:ext cx="41148" cy="1920240"/>
+            <a:off x="566928" y="4160520"/>
+            <a:ext cx="32004" cy="256032"/>
           </a:xfrm>
           <a:prstGeom prst="rect">
             <a:avLst/>
@@ -14196,108 +14176,7 @@
       </p:sp>
       <p:sp>
         <p:nvSpPr>
-          <p:cNvPr id="20" name="Text 18"/>
-          <p:cNvSpPr/>
-          <p:nvPr/>
-        </p:nvSpPr>
-        <p:spPr>
-          <a:xfrm>
-            <a:off x="6935724" y="2121408"/>
-            <a:ext cx="1476756" cy="384048"/>
-          </a:xfrm>
-          <a:prstGeom prst="rect">
-            <a:avLst/>
-          </a:prstGeom>
-          <a:noFill/>
-          <a:ln/>
-        </p:spPr>
-        <p:txBody>
-          <a:bodyPr wrap="square" lIns="0" tIns="0" rIns="0" bIns="0" rtlCol="0" anchor="t"/>
-          <a:lstStyle/>
-          <a:p>
-            <a:pPr indent="0" marL="0">
-              <a:buNone/>
-            </a:pPr>
-            <a:r>
-              <a:rPr lang="en-US" sz="1200" b="1" dirty="0">
-                <a:solidFill>
-                  <a:srgbClr val="272E52"/>
-                </a:solidFill>
-                <a:latin typeface="Arial" pitchFamily="34" charset="0"/>
-                <a:ea typeface="Arial" pitchFamily="34" charset="-122"/>
-                <a:cs typeface="Arial" pitchFamily="34" charset="-120"/>
-              </a:rPr>
-              <a:t>Vorbereiten</a:t>
-            </a:r>
-            <a:endParaRPr lang="en-US" sz="1200" dirty="0"/>
-          </a:p>
-        </p:txBody>
-      </p:sp>
-      <p:sp>
-        <p:nvSpPr>
-          <p:cNvPr id="21" name="Text 19"/>
-          <p:cNvSpPr/>
-          <p:nvPr/>
-        </p:nvSpPr>
-        <p:spPr>
-          <a:xfrm>
-            <a:off x="6935724" y="2551176"/>
-            <a:ext cx="1476756" cy="1225296"/>
-          </a:xfrm>
-          <a:prstGeom prst="rect">
-            <a:avLst/>
-          </a:prstGeom>
-          <a:noFill/>
-          <a:ln/>
-        </p:spPr>
-        <p:txBody>
-          <a:bodyPr wrap="square" lIns="0" tIns="0" rIns="0" bIns="0" rtlCol="0" anchor="t"/>
-          <a:lstStyle/>
-          <a:p>
-            <a:pPr indent="0" marL="0">
-              <a:lnSpc>
-                <a:spcPct val="92000"/>
-              </a:lnSpc>
-              <a:buNone/>
-            </a:pPr>
-            <a:r>
-              <a:rPr lang="en-US" sz="1050" dirty="0">
-                <a:solidFill>
-                  <a:srgbClr val="434A63"/>
-                </a:solidFill>
-                <a:latin typeface="Arial" pitchFamily="34" charset="0"/>
-                <a:ea typeface="Arial" pitchFamily="34" charset="-122"/>
-                <a:cs typeface="Arial" pitchFamily="34" charset="-120"/>
-              </a:rPr>
-              <a:t>Montag rechnen wir Subnetze. Papier und Stift reichen – Taschenrechner braucht ihr nicht.</a:t>
-            </a:r>
-            <a:endParaRPr lang="en-US" sz="1050" dirty="0"/>
-          </a:p>
-        </p:txBody>
-      </p:sp>
-      <p:sp>
-        <p:nvSpPr>
-          <p:cNvPr id="22" name="Shape 20"/>
-          <p:cNvSpPr/>
-          <p:nvPr/>
-        </p:nvSpPr>
-        <p:spPr>
-          <a:xfrm>
-            <a:off x="566928" y="4160520"/>
-            <a:ext cx="32004" cy="256032"/>
-          </a:xfrm>
-          <a:prstGeom prst="rect">
-            <a:avLst/>
-          </a:prstGeom>
-          <a:solidFill>
-            <a:srgbClr val="3843AF"/>
-          </a:solidFill>
-          <a:ln/>
-        </p:spPr>
-      </p:sp>
-      <p:sp>
-        <p:nvSpPr>
-          <p:cNvPr id="23" name="Text 21"/>
+          <p:cNvPr id="19" name="Text 17"/>
           <p:cNvSpPr/>
           <p:nvPr/>
         </p:nvSpPr>
@@ -14336,7 +14215,7 @@
       </p:sp>
       <p:sp>
         <p:nvSpPr>
-          <p:cNvPr id="24" name="Shape 22"/>
+          <p:cNvPr id="20" name="Shape 18"/>
           <p:cNvSpPr/>
           <p:nvPr/>
         </p:nvSpPr>
@@ -14359,7 +14238,7 @@
       </p:sp>
       <p:sp>
         <p:nvSpPr>
-          <p:cNvPr id="25" name="Text 23"/>
+          <p:cNvPr id="21" name="Text 19"/>
           <p:cNvSpPr/>
           <p:nvPr/>
         </p:nvSpPr>
@@ -14398,7 +14277,7 @@
       </p:sp>
       <p:sp>
         <p:nvSpPr>
-          <p:cNvPr id="26" name="Text 24"/>
+          <p:cNvPr id="22" name="Text 20"/>
           <p:cNvSpPr/>
           <p:nvPr/>
         </p:nvSpPr>
@@ -15850,8 +15729,8 @@
         </p:nvSpPr>
         <p:spPr>
           <a:xfrm>
-            <a:off x="804672" y="2066544"/>
-            <a:ext cx="384048" cy="411480"/>
+            <a:off x="804672" y="2121408"/>
+            <a:ext cx="2121408" cy="274320"/>
           </a:xfrm>
           <a:prstGeom prst="rect">
             <a:avLst/>
@@ -15867,17 +15746,17 @@
               <a:buNone/>
             </a:pPr>
             <a:r>
-              <a:rPr lang="en-US" sz="2000" b="1" dirty="0">
-                <a:solidFill>
-                  <a:srgbClr val="3843AF"/>
-                </a:solidFill>
-                <a:latin typeface="Courier New" pitchFamily="34" charset="0"/>
-                <a:ea typeface="Courier New" pitchFamily="34" charset="-122"/>
-                <a:cs typeface="Courier New" pitchFamily="34" charset="-120"/>
-              </a:rPr>
-              <a:t>1</a:t>
-            </a:r>
-            <a:endParaRPr lang="en-US" sz="2000" dirty="0"/>
+              <a:rPr lang="en-US" sz="1300" b="1" dirty="0">
+                <a:solidFill>
+                  <a:srgbClr val="272E52"/>
+                </a:solidFill>
+                <a:latin typeface="Arial" pitchFamily="34" charset="0"/>
+                <a:ea typeface="Arial" pitchFamily="34" charset="-122"/>
+                <a:cs typeface="Arial" pitchFamily="34" charset="-120"/>
+              </a:rPr>
+              <a:t>Gemeinsame Sprache</a:t>
+            </a:r>
+            <a:endParaRPr lang="en-US" sz="1300" dirty="0"/>
           </a:p>
         </p:txBody>
       </p:sp>
@@ -15889,47 +15768,8 @@
         </p:nvSpPr>
         <p:spPr>
           <a:xfrm>
-            <a:off x="1298448" y="2121408"/>
-            <a:ext cx="1627632" cy="274320"/>
-          </a:xfrm>
-          <a:prstGeom prst="rect">
-            <a:avLst/>
-          </a:prstGeom>
-          <a:noFill/>
-          <a:ln/>
-        </p:spPr>
-        <p:txBody>
-          <a:bodyPr wrap="square" lIns="0" tIns="0" rIns="0" bIns="0" rtlCol="0" anchor="t"/>
-          <a:lstStyle/>
-          <a:p>
-            <a:pPr indent="0" marL="0">
-              <a:buNone/>
-            </a:pPr>
-            <a:r>
-              <a:rPr lang="en-US" sz="1300" b="1" dirty="0">
-                <a:solidFill>
-                  <a:srgbClr val="272E52"/>
-                </a:solidFill>
-                <a:latin typeface="Arial" pitchFamily="34" charset="0"/>
-                <a:ea typeface="Arial" pitchFamily="34" charset="-122"/>
-                <a:cs typeface="Arial" pitchFamily="34" charset="-120"/>
-              </a:rPr>
-              <a:t>Gemeinsame Sprache</a:t>
-            </a:r>
-            <a:endParaRPr lang="en-US" sz="1300" dirty="0"/>
-          </a:p>
-        </p:txBody>
-      </p:sp>
-      <p:sp>
-        <p:nvSpPr>
-          <p:cNvPr id="10" name="Text 8"/>
-          <p:cNvSpPr/>
-          <p:nvPr/>
-        </p:nvSpPr>
-        <p:spPr>
-          <a:xfrm>
-            <a:off x="1298448" y="2441448"/>
-            <a:ext cx="1627632" cy="1335024"/>
+            <a:off x="804672" y="2441448"/>
+            <a:ext cx="2121408" cy="1335024"/>
           </a:xfrm>
           <a:prstGeom prst="rect">
             <a:avLst/>
@@ -15964,7 +15804,7 @@
       </p:sp>
       <p:sp>
         <p:nvSpPr>
-          <p:cNvPr id="11" name="Shape 9"/>
+          <p:cNvPr id="10" name="Shape 8"/>
           <p:cNvSpPr/>
           <p:nvPr/>
         </p:nvSpPr>
@@ -15984,7 +15824,7 @@
       </p:sp>
       <p:sp>
         <p:nvSpPr>
-          <p:cNvPr id="12" name="Shape 10"/>
+          <p:cNvPr id="11" name="Shape 9"/>
           <p:cNvSpPr/>
           <p:nvPr/>
         </p:nvSpPr>
@@ -16004,92 +15844,53 @@
       </p:sp>
       <p:sp>
         <p:nvSpPr>
+          <p:cNvPr id="12" name="Text 10"/>
+          <p:cNvSpPr/>
+          <p:nvPr/>
+        </p:nvSpPr>
+        <p:spPr>
+          <a:xfrm>
+            <a:off x="3547872" y="2121408"/>
+            <a:ext cx="2121408" cy="274320"/>
+          </a:xfrm>
+          <a:prstGeom prst="rect">
+            <a:avLst/>
+          </a:prstGeom>
+          <a:noFill/>
+          <a:ln/>
+        </p:spPr>
+        <p:txBody>
+          <a:bodyPr wrap="square" lIns="0" tIns="0" rIns="0" bIns="0" rtlCol="0" anchor="t"/>
+          <a:lstStyle/>
+          <a:p>
+            <a:pPr indent="0" marL="0">
+              <a:buNone/>
+            </a:pPr>
+            <a:r>
+              <a:rPr lang="en-US" sz="1300" b="1" dirty="0">
+                <a:solidFill>
+                  <a:srgbClr val="272E52"/>
+                </a:solidFill>
+                <a:latin typeface="Arial" pitchFamily="34" charset="0"/>
+                <a:ea typeface="Arial" pitchFamily="34" charset="-122"/>
+                <a:cs typeface="Arial" pitchFamily="34" charset="-120"/>
+              </a:rPr>
+              <a:t>Standortbestimmung</a:t>
+            </a:r>
+            <a:endParaRPr lang="en-US" sz="1300" dirty="0"/>
+          </a:p>
+        </p:txBody>
+      </p:sp>
+      <p:sp>
+        <p:nvSpPr>
           <p:cNvPr id="13" name="Text 11"/>
           <p:cNvSpPr/>
           <p:nvPr/>
         </p:nvSpPr>
         <p:spPr>
           <a:xfrm>
-            <a:off x="3547872" y="2066544"/>
-            <a:ext cx="384048" cy="411480"/>
-          </a:xfrm>
-          <a:prstGeom prst="rect">
-            <a:avLst/>
-          </a:prstGeom>
-          <a:noFill/>
-          <a:ln/>
-        </p:spPr>
-        <p:txBody>
-          <a:bodyPr wrap="square" lIns="0" tIns="0" rIns="0" bIns="0" rtlCol="0" anchor="t"/>
-          <a:lstStyle/>
-          <a:p>
-            <a:pPr indent="0" marL="0">
-              <a:buNone/>
-            </a:pPr>
-            <a:r>
-              <a:rPr lang="en-US" sz="2000" b="1" dirty="0">
-                <a:solidFill>
-                  <a:srgbClr val="3843AF"/>
-                </a:solidFill>
-                <a:latin typeface="Courier New" pitchFamily="34" charset="0"/>
-                <a:ea typeface="Courier New" pitchFamily="34" charset="-122"/>
-                <a:cs typeface="Courier New" pitchFamily="34" charset="-120"/>
-              </a:rPr>
-              <a:t>2</a:t>
-            </a:r>
-            <a:endParaRPr lang="en-US" sz="2000" dirty="0"/>
-          </a:p>
-        </p:txBody>
-      </p:sp>
-      <p:sp>
-        <p:nvSpPr>
-          <p:cNvPr id="14" name="Text 12"/>
-          <p:cNvSpPr/>
-          <p:nvPr/>
-        </p:nvSpPr>
-        <p:spPr>
-          <a:xfrm>
-            <a:off x="4041648" y="2121408"/>
-            <a:ext cx="1627632" cy="274320"/>
-          </a:xfrm>
-          <a:prstGeom prst="rect">
-            <a:avLst/>
-          </a:prstGeom>
-          <a:noFill/>
-          <a:ln/>
-        </p:spPr>
-        <p:txBody>
-          <a:bodyPr wrap="square" lIns="0" tIns="0" rIns="0" bIns="0" rtlCol="0" anchor="t"/>
-          <a:lstStyle/>
-          <a:p>
-            <a:pPr indent="0" marL="0">
-              <a:buNone/>
-            </a:pPr>
-            <a:r>
-              <a:rPr lang="en-US" sz="1300" b="1" dirty="0">
-                <a:solidFill>
-                  <a:srgbClr val="272E52"/>
-                </a:solidFill>
-                <a:latin typeface="Arial" pitchFamily="34" charset="0"/>
-                <a:ea typeface="Arial" pitchFamily="34" charset="-122"/>
-                <a:cs typeface="Arial" pitchFamily="34" charset="-120"/>
-              </a:rPr>
-              <a:t>Standortbestimmung</a:t>
-            </a:r>
-            <a:endParaRPr lang="en-US" sz="1300" dirty="0"/>
-          </a:p>
-        </p:txBody>
-      </p:sp>
-      <p:sp>
-        <p:nvSpPr>
-          <p:cNvPr id="15" name="Text 13"/>
-          <p:cNvSpPr/>
-          <p:nvPr/>
-        </p:nvSpPr>
-        <p:spPr>
-          <a:xfrm>
-            <a:off x="4041648" y="2441448"/>
-            <a:ext cx="1627632" cy="1335024"/>
+            <a:off x="3547872" y="2441448"/>
+            <a:ext cx="2121408" cy="1335024"/>
           </a:xfrm>
           <a:prstGeom prst="rect">
             <a:avLst/>
@@ -16124,7 +15925,7 @@
       </p:sp>
       <p:sp>
         <p:nvSpPr>
-          <p:cNvPr id="16" name="Shape 14"/>
+          <p:cNvPr id="14" name="Shape 12"/>
           <p:cNvSpPr/>
           <p:nvPr/>
         </p:nvSpPr>
@@ -16144,7 +15945,7 @@
       </p:sp>
       <p:sp>
         <p:nvSpPr>
-          <p:cNvPr id="17" name="Shape 15"/>
+          <p:cNvPr id="15" name="Shape 13"/>
           <p:cNvSpPr/>
           <p:nvPr/>
         </p:nvSpPr>
@@ -16164,14 +15965,14 @@
       </p:sp>
       <p:sp>
         <p:nvSpPr>
-          <p:cNvPr id="18" name="Text 16"/>
-          <p:cNvSpPr/>
-          <p:nvPr/>
-        </p:nvSpPr>
-        <p:spPr>
-          <a:xfrm>
-            <a:off x="6291072" y="2066544"/>
-            <a:ext cx="384048" cy="411480"/>
+          <p:cNvPr id="16" name="Text 14"/>
+          <p:cNvSpPr/>
+          <p:nvPr/>
+        </p:nvSpPr>
+        <p:spPr>
+          <a:xfrm>
+            <a:off x="6291072" y="2121408"/>
+            <a:ext cx="2121408" cy="274320"/>
           </a:xfrm>
           <a:prstGeom prst="rect">
             <a:avLst/>
@@ -16187,45 +15988,6 @@
               <a:buNone/>
             </a:pPr>
             <a:r>
-              <a:rPr lang="en-US" sz="2000" b="1" dirty="0">
-                <a:solidFill>
-                  <a:srgbClr val="3843AF"/>
-                </a:solidFill>
-                <a:latin typeface="Courier New" pitchFamily="34" charset="0"/>
-                <a:ea typeface="Courier New" pitchFamily="34" charset="-122"/>
-                <a:cs typeface="Courier New" pitchFamily="34" charset="-120"/>
-              </a:rPr>
-              <a:t>3</a:t>
-            </a:r>
-            <a:endParaRPr lang="en-US" sz="2000" dirty="0"/>
-          </a:p>
-        </p:txBody>
-      </p:sp>
-      <p:sp>
-        <p:nvSpPr>
-          <p:cNvPr id="19" name="Text 17"/>
-          <p:cNvSpPr/>
-          <p:nvPr/>
-        </p:nvSpPr>
-        <p:spPr>
-          <a:xfrm>
-            <a:off x="6784848" y="2121408"/>
-            <a:ext cx="1627632" cy="274320"/>
-          </a:xfrm>
-          <a:prstGeom prst="rect">
-            <a:avLst/>
-          </a:prstGeom>
-          <a:noFill/>
-          <a:ln/>
-        </p:spPr>
-        <p:txBody>
-          <a:bodyPr wrap="square" lIns="0" tIns="0" rIns="0" bIns="0" rtlCol="0" anchor="t"/>
-          <a:lstStyle/>
-          <a:p>
-            <a:pPr indent="0" marL="0">
-              <a:buNone/>
-            </a:pPr>
-            <a:r>
               <a:rPr lang="en-US" sz="1300" b="1" dirty="0">
                 <a:solidFill>
                   <a:srgbClr val="272E52"/>
@@ -16242,14 +16004,14 @@
       </p:sp>
       <p:sp>
         <p:nvSpPr>
-          <p:cNvPr id="20" name="Text 18"/>
-          <p:cNvSpPr/>
-          <p:nvPr/>
-        </p:nvSpPr>
-        <p:spPr>
-          <a:xfrm>
-            <a:off x="6784848" y="2441448"/>
-            <a:ext cx="1627632" cy="1335024"/>
+          <p:cNvPr id="17" name="Text 15"/>
+          <p:cNvSpPr/>
+          <p:nvPr/>
+        </p:nvSpPr>
+        <p:spPr>
+          <a:xfrm>
+            <a:off x="6291072" y="2441448"/>
+            <a:ext cx="2121408" cy="1335024"/>
           </a:xfrm>
           <a:prstGeom prst="rect">
             <a:avLst/>
@@ -16276,7 +16038,7 @@
                 <a:ea typeface="Arial" pitchFamily="34" charset="-122"/>
                 <a:cs typeface="Arial" pitchFamily="34" charset="-120"/>
               </a:rPr>
-              <a:t>Die Industrie- und Anlagenvernetzung stand in keiner FISI-Ausbildung. Genau dort liegt der Kern dieser Fortbildung.</a:t>
+              <a:t>Industrie- und Anlagenvernetzung kam in den meisten Ausbildungen höchstens am Rand vor. Dort liegt der Kern dieser Fortbildung.</a:t>
             </a:r>
             <a:endParaRPr lang="en-US" sz="1150" dirty="0"/>
           </a:p>
@@ -16284,7 +16046,7 @@
       </p:sp>
       <p:sp>
         <p:nvSpPr>
-          <p:cNvPr id="21" name="Shape 19"/>
+          <p:cNvPr id="18" name="Shape 16"/>
           <p:cNvSpPr/>
           <p:nvPr/>
         </p:nvSpPr>
@@ -16304,7 +16066,7 @@
       </p:sp>
       <p:sp>
         <p:nvSpPr>
-          <p:cNvPr id="22" name="Text 20"/>
+          <p:cNvPr id="19" name="Text 17"/>
           <p:cNvSpPr/>
           <p:nvPr/>
         </p:nvSpPr>
@@ -16343,7 +16105,7 @@
       </p:sp>
       <p:sp>
         <p:nvSpPr>
-          <p:cNvPr id="23" name="Shape 21"/>
+          <p:cNvPr id="20" name="Shape 18"/>
           <p:cNvSpPr/>
           <p:nvPr/>
         </p:nvSpPr>
@@ -16366,7 +16128,7 @@
       </p:sp>
       <p:sp>
         <p:nvSpPr>
-          <p:cNvPr id="24" name="Text 22"/>
+          <p:cNvPr id="21" name="Text 19"/>
           <p:cNvSpPr/>
           <p:nvPr/>
         </p:nvSpPr>
@@ -16405,7 +16167,7 @@
       </p:sp>
       <p:sp>
         <p:nvSpPr>
-          <p:cNvPr id="25" name="Text 23"/>
+          <p:cNvPr id="22" name="Text 20"/>
           <p:cNvSpPr/>
           <p:nvPr/>
         </p:nvSpPr>
@@ -16684,7 +16446,7 @@
         <p:spPr>
           <a:xfrm>
             <a:off x="804672" y="2121408"/>
-            <a:ext cx="2121408" cy="274320"/>
+            <a:ext cx="1591056" cy="456692"/>
           </a:xfrm>
           <a:prstGeom prst="rect">
             <a:avLst/>
@@ -16722,8 +16484,8 @@
         </p:nvSpPr>
         <p:spPr>
           <a:xfrm>
-            <a:off x="804672" y="2441448"/>
-            <a:ext cx="2121408" cy="1335024"/>
+            <a:off x="804672" y="2623820"/>
+            <a:ext cx="2121408" cy="1152652"/>
           </a:xfrm>
           <a:prstGeom prst="rect">
             <a:avLst/>
@@ -16829,7 +16591,7 @@
         <p:spPr>
           <a:xfrm>
             <a:off x="3547872" y="2121408"/>
-            <a:ext cx="2121408" cy="274320"/>
+            <a:ext cx="1591056" cy="274320"/>
           </a:xfrm>
           <a:prstGeom prst="rect">
             <a:avLst/>
@@ -16868,7 +16630,7 @@
         <p:spPr>
           <a:xfrm>
             <a:off x="3547872" y="2441448"/>
-            <a:ext cx="2121408" cy="1335024"/>
+            <a:ext cx="1591056" cy="1335024"/>
           </a:xfrm>
           <a:prstGeom prst="rect">
             <a:avLst/>
@@ -16974,7 +16736,7 @@
         <p:spPr>
           <a:xfrm>
             <a:off x="6291072" y="2121408"/>
-            <a:ext cx="2121408" cy="274320"/>
+            <a:ext cx="1591056" cy="274320"/>
           </a:xfrm>
           <a:prstGeom prst="rect">
             <a:avLst/>
@@ -17013,7 +16775,7 @@
         <p:spPr>
           <a:xfrm>
             <a:off x="6291072" y="2441448"/>
-            <a:ext cx="2121408" cy="1335024"/>
+            <a:ext cx="1591056" cy="1335024"/>
           </a:xfrm>
           <a:prstGeom prst="rect">
             <a:avLst/>
@@ -18433,7 +18195,7 @@
                 <a:ea typeface="Arial" pitchFamily="34" charset="-122"/>
                 <a:cs typeface="Arial" pitchFamily="34" charset="-120"/>
               </a:rPr>
-              <a:t>Was in der Ausbildung nicht vorkam</a:t>
+              <a:t>Was bisher meist zu kurz kam</a:t>
             </a:r>
             <a:endParaRPr lang="en-US" sz="2600" dirty="0"/>
           </a:p>
@@ -18959,7 +18721,7 @@
         <p:spPr>
           <a:xfrm>
             <a:off x="6291072" y="2121408"/>
-            <a:ext cx="2121408" cy="274320"/>
+            <a:ext cx="2121408" cy="456692"/>
           </a:xfrm>
           <a:prstGeom prst="rect">
             <a:avLst/>
@@ -18997,8 +18759,8 @@
         </p:nvSpPr>
         <p:spPr>
           <a:xfrm>
-            <a:off x="6291072" y="2441448"/>
-            <a:ext cx="2121408" cy="1335024"/>
+            <a:off x="6291072" y="2623820"/>
+            <a:ext cx="2121408" cy="1152652"/>
           </a:xfrm>
           <a:prstGeom prst="rect">
             <a:avLst/>
@@ -19110,7 +18872,7 @@
                 <a:ea typeface="Arial" pitchFamily="34" charset="-122"/>
                 <a:cs typeface="Arial" pitchFamily="34" charset="-120"/>
               </a:rPr>
-              <a:t>Die Netzwerkabende sind der einzige größere Wiederholungsteil. Ab Abend 7 wird es für alle neu.</a:t>
+              <a:t>Die Netzwerkabende sind der einzige größere Wiederholungsteil. Ab Abend 7 wird es für die meisten neu.</a:t>
             </a:r>
             <a:endParaRPr lang="en-US" sz="1200" dirty="0"/>
           </a:p>

--- a/folien/dist/01-netzwerke-grundlagen.pptx
+++ b/folien/dist/01-netzwerke-grundlagen.pptx
@@ -8073,7 +8073,7 @@
         <p:spPr>
           <a:xfrm>
             <a:off x="566928" y="3346704"/>
-            <a:ext cx="2523744" cy="1097280"/>
+            <a:ext cx="3895344" cy="1097280"/>
           </a:xfrm>
           <a:prstGeom prst="rect">
             <a:avLst/>
@@ -8113,7 +8113,7 @@
         <p:spPr>
           <a:xfrm>
             <a:off x="804672" y="3493008"/>
-            <a:ext cx="2121408" cy="242062"/>
+            <a:ext cx="3493008" cy="242062"/>
           </a:xfrm>
           <a:prstGeom prst="rect">
             <a:avLst/>
@@ -8152,7 +8152,7 @@
         <p:spPr>
           <a:xfrm>
             <a:off x="804672" y="3780790"/>
-            <a:ext cx="2121408" cy="544322"/>
+            <a:ext cx="3493008" cy="544322"/>
           </a:xfrm>
           <a:prstGeom prst="rect">
             <a:avLst/>
@@ -8179,7 +8179,7 @@
                 <a:ea typeface="Arial" pitchFamily="34" charset="-122"/>
                 <a:cs typeface="Arial" pitchFamily="34" charset="-120"/>
               </a:rPr>
-              <a:t>Schwankende Latenz. Stört Sprache und Video.</a:t>
+              <a:t>Schwankende Latenz. Stört Telefonie und Video – ein Download merkt davon nichts.</a:t>
             </a:r>
             <a:endParaRPr lang="en-US" sz="1100" dirty="0"/>
           </a:p>
@@ -8193,8 +8193,8 @@
         </p:nvSpPr>
         <p:spPr>
           <a:xfrm>
-            <a:off x="3310128" y="3346704"/>
-            <a:ext cx="2523744" cy="1097280"/>
+            <a:off x="4681728" y="3346704"/>
+            <a:ext cx="3895344" cy="1097280"/>
           </a:xfrm>
           <a:prstGeom prst="rect">
             <a:avLst/>
@@ -8213,7 +8213,7 @@
         </p:nvSpPr>
         <p:spPr>
           <a:xfrm>
-            <a:off x="3310128" y="3346704"/>
+            <a:off x="4681728" y="3346704"/>
             <a:ext cx="41148" cy="1097280"/>
           </a:xfrm>
           <a:prstGeom prst="rect">
@@ -8233,8 +8233,8 @@
         </p:nvSpPr>
         <p:spPr>
           <a:xfrm>
-            <a:off x="3547872" y="3493008"/>
-            <a:ext cx="2121408" cy="242062"/>
+            <a:off x="4919472" y="3493008"/>
+            <a:ext cx="3493008" cy="242062"/>
           </a:xfrm>
           <a:prstGeom prst="rect">
             <a:avLst/>
@@ -8272,8 +8272,8 @@
         </p:nvSpPr>
         <p:spPr>
           <a:xfrm>
-            <a:off x="3547872" y="3780790"/>
-            <a:ext cx="2121408" cy="544322"/>
+            <a:off x="4919472" y="3780790"/>
+            <a:ext cx="3493008" cy="544322"/>
           </a:xfrm>
           <a:prstGeom prst="rect">
             <a:avLst/>
@@ -8300,7 +8300,7 @@
                 <a:ea typeface="Arial" pitchFamily="34" charset="-122"/>
                 <a:cs typeface="Arial" pitchFamily="34" charset="-120"/>
               </a:rPr>
-              <a:t>Was unterwegs verloren geht. TCP holt es nach – das kostet Zeit.</a:t>
+              <a:t>Was unterwegs verloren geht. TCP schickt es nach – und das Nachschicken kostet die Zeit.</a:t>
             </a:r>
             <a:endParaRPr lang="en-US" sz="1100" dirty="0"/>
           </a:p>
@@ -8309,127 +8309,6 @@
       <p:sp>
         <p:nvSpPr>
           <p:cNvPr id="14" name="Shape 11"/>
-          <p:cNvSpPr/>
-          <p:nvPr/>
-        </p:nvSpPr>
-        <p:spPr>
-          <a:xfrm>
-            <a:off x="6053328" y="3346704"/>
-            <a:ext cx="2523744" cy="1097280"/>
-          </a:xfrm>
-          <a:prstGeom prst="rect">
-            <a:avLst/>
-          </a:prstGeom>
-          <a:solidFill>
-            <a:srgbClr val="F5F6FC"/>
-          </a:solidFill>
-          <a:ln/>
-        </p:spPr>
-      </p:sp>
-      <p:sp>
-        <p:nvSpPr>
-          <p:cNvPr id="15" name="Shape 12"/>
-          <p:cNvSpPr/>
-          <p:nvPr/>
-        </p:nvSpPr>
-        <p:spPr>
-          <a:xfrm>
-            <a:off x="6053328" y="3346704"/>
-            <a:ext cx="41148" cy="1097280"/>
-          </a:xfrm>
-          <a:prstGeom prst="rect">
-            <a:avLst/>
-          </a:prstGeom>
-          <a:solidFill>
-            <a:srgbClr val="3843AF"/>
-          </a:solidFill>
-          <a:ln/>
-        </p:spPr>
-      </p:sp>
-      <p:sp>
-        <p:nvSpPr>
-          <p:cNvPr id="16" name="Text 13"/>
-          <p:cNvSpPr/>
-          <p:nvPr/>
-        </p:nvSpPr>
-        <p:spPr>
-          <a:xfrm>
-            <a:off x="6291072" y="3493008"/>
-            <a:ext cx="2121408" cy="242062"/>
-          </a:xfrm>
-          <a:prstGeom prst="rect">
-            <a:avLst/>
-          </a:prstGeom>
-          <a:noFill/>
-          <a:ln/>
-        </p:spPr>
-        <p:txBody>
-          <a:bodyPr wrap="square" lIns="0" tIns="0" rIns="0" bIns="0" rtlCol="0" anchor="t"/>
-          <a:lstStyle/>
-          <a:p>
-            <a:pPr indent="0" marL="0">
-              <a:buNone/>
-            </a:pPr>
-            <a:r>
-              <a:rPr lang="en-US" sz="1300" b="1" dirty="0">
-                <a:solidFill>
-                  <a:srgbClr val="272E52"/>
-                </a:solidFill>
-                <a:latin typeface="Arial" pitchFamily="34" charset="0"/>
-                <a:ea typeface="Arial" pitchFamily="34" charset="-122"/>
-                <a:cs typeface="Arial" pitchFamily="34" charset="-120"/>
-              </a:rPr>
-              <a:t>Der Alltagsfall</a:t>
-            </a:r>
-            <a:endParaRPr lang="en-US" sz="1300" dirty="0"/>
-          </a:p>
-        </p:txBody>
-      </p:sp>
-      <p:sp>
-        <p:nvSpPr>
-          <p:cNvPr id="17" name="Text 14"/>
-          <p:cNvSpPr/>
-          <p:nvPr/>
-        </p:nvSpPr>
-        <p:spPr>
-          <a:xfrm>
-            <a:off x="6291072" y="3780790"/>
-            <a:ext cx="2121408" cy="544322"/>
-          </a:xfrm>
-          <a:prstGeom prst="rect">
-            <a:avLst/>
-          </a:prstGeom>
-          <a:noFill/>
-          <a:ln/>
-        </p:spPr>
-        <p:txBody>
-          <a:bodyPr wrap="square" lIns="0" tIns="0" rIns="0" bIns="0" rtlCol="0" anchor="t"/>
-          <a:lstStyle/>
-          <a:p>
-            <a:pPr indent="0" marL="0">
-              <a:lnSpc>
-                <a:spcPct val="92000"/>
-              </a:lnSpc>
-              <a:buNone/>
-            </a:pPr>
-            <a:r>
-              <a:rPr lang="en-US" sz="1100" dirty="0">
-                <a:solidFill>
-                  <a:srgbClr val="434A63"/>
-                </a:solidFill>
-                <a:latin typeface="Arial" pitchFamily="34" charset="0"/>
-                <a:ea typeface="Arial" pitchFamily="34" charset="-122"/>
-                <a:cs typeface="Arial" pitchFamily="34" charset="-120"/>
-              </a:rPr>
-              <a:t>„Die Leitung ist zu klein" stimmt selten. Meist wartet etwas anderes.</a:t>
-            </a:r>
-            <a:endParaRPr lang="en-US" sz="1100" dirty="0"/>
-          </a:p>
-        </p:txBody>
-      </p:sp>
-      <p:sp>
-        <p:nvSpPr>
-          <p:cNvPr id="18" name="Shape 15"/>
           <p:cNvSpPr/>
           <p:nvPr/>
         </p:nvSpPr>
@@ -8452,7 +8331,7 @@
       </p:sp>
       <p:sp>
         <p:nvSpPr>
-          <p:cNvPr id="19" name="Text 16"/>
+          <p:cNvPr id="15" name="Text 12"/>
           <p:cNvSpPr/>
           <p:nvPr/>
         </p:nvSpPr>
@@ -8491,7 +8370,7 @@
       </p:sp>
       <p:sp>
         <p:nvSpPr>
-          <p:cNvPr id="20" name="Text 17"/>
+          <p:cNvPr id="16" name="Text 13"/>
           <p:cNvSpPr/>
           <p:nvPr/>
         </p:nvSpPr>

--- a/folien/dist/01-netzwerke-grundlagen.pptx
+++ b/folien/dist/01-netzwerke-grundlagen.pptx
@@ -10780,8 +10780,8 @@
         </p:blipFill>
         <p:spPr>
           <a:xfrm>
-            <a:off x="566928" y="1554480"/>
-            <a:ext cx="8010144" cy="1874520"/>
+            <a:off x="566928" y="1536192"/>
+            <a:ext cx="8010144" cy="2304288"/>
           </a:xfrm>
           <a:prstGeom prst="rect">
             <a:avLst/>
@@ -10796,28 +10796,8 @@
         </p:nvSpPr>
         <p:spPr>
           <a:xfrm>
-            <a:off x="566928" y="3584448"/>
-            <a:ext cx="8010144" cy="804672"/>
-          </a:xfrm>
-          <a:prstGeom prst="rect">
-            <a:avLst/>
-          </a:prstGeom>
-          <a:solidFill>
-            <a:srgbClr val="EEF0FB"/>
-          </a:solidFill>
-          <a:ln/>
-        </p:spPr>
-      </p:sp>
-      <p:sp>
-        <p:nvSpPr>
-          <p:cNvPr id="7" name="Shape 4"/>
-          <p:cNvSpPr/>
-          <p:nvPr/>
-        </p:nvSpPr>
-        <p:spPr>
-          <a:xfrm>
-            <a:off x="566928" y="3584448"/>
-            <a:ext cx="41148" cy="804672"/>
+            <a:off x="566928" y="4105656"/>
+            <a:ext cx="32004" cy="256032"/>
           </a:xfrm>
           <a:prstGeom prst="rect">
             <a:avLst/>
@@ -10830,33 +10810,30 @@
       </p:sp>
       <p:sp>
         <p:nvSpPr>
-          <p:cNvPr id="8" name="Text 5"/>
-          <p:cNvSpPr/>
-          <p:nvPr/>
-        </p:nvSpPr>
-        <p:spPr>
-          <a:xfrm>
-            <a:off x="804672" y="3730752"/>
-            <a:ext cx="7607808" cy="539496"/>
-          </a:xfrm>
-          <a:prstGeom prst="rect">
-            <a:avLst/>
-          </a:prstGeom>
-          <a:noFill/>
-          <a:ln/>
-        </p:spPr>
-        <p:txBody>
-          <a:bodyPr wrap="square" lIns="0" tIns="0" rIns="0" bIns="0" rtlCol="0" anchor="t"/>
-          <a:lstStyle/>
-          <a:p>
-            <a:pPr indent="0" marL="0">
-              <a:lnSpc>
-                <a:spcPct val="92000"/>
-              </a:lnSpc>
-              <a:buNone/>
-            </a:pPr>
-            <a:r>
-              <a:rPr lang="en-US" sz="1150" dirty="0">
+          <p:cNvPr id="7" name="Text 4"/>
+          <p:cNvSpPr/>
+          <p:nvPr/>
+        </p:nvSpPr>
+        <p:spPr>
+          <a:xfrm>
+            <a:off x="749808" y="4059936"/>
+            <a:ext cx="7827264" cy="402336"/>
+          </a:xfrm>
+          <a:prstGeom prst="rect">
+            <a:avLst/>
+          </a:prstGeom>
+          <a:noFill/>
+          <a:ln/>
+        </p:spPr>
+        <p:txBody>
+          <a:bodyPr wrap="square" lIns="0" tIns="0" rIns="0" bIns="0" rtlCol="0" anchor="ctr"/>
+          <a:lstStyle/>
+          <a:p>
+            <a:pPr indent="0" marL="0">
+              <a:buNone/>
+            </a:pPr>
+            <a:r>
+              <a:rPr lang="en-US" sz="1200" b="1" dirty="0">
                 <a:solidFill>
                   <a:srgbClr val="434A63"/>
                 </a:solidFill>
@@ -10864,15 +10841,15 @@
                 <a:ea typeface="Arial" pitchFamily="34" charset="-122"/>
                 <a:cs typeface="Arial" pitchFamily="34" charset="-120"/>
               </a:rPr>
-              <a:t>Deshalb kann ein Router die IP lesen, ohne die Anwendung zu kennen: Er packt nur bis Schicht 3 aus, entscheidet, wohin es weitergeht, und verpackt wieder. Was darin steckt, geht ihn nichts an.</a:t>
-            </a:r>
-            <a:endParaRPr lang="en-US" sz="1150" dirty="0"/>
-          </a:p>
-        </p:txBody>
-      </p:sp>
-      <p:sp>
-        <p:nvSpPr>
-          <p:cNvPr id="9" name="Shape 6"/>
+              <a:t>Ein Router packt nur bis Schicht 3 aus – was in der HTTP-Nachricht steht, geht ihn nichts an.</a:t>
+            </a:r>
+            <a:endParaRPr lang="en-US" sz="1200" dirty="0"/>
+          </a:p>
+        </p:txBody>
+      </p:sp>
+      <p:sp>
+        <p:nvSpPr>
+          <p:cNvPr id="8" name="Shape 5"/>
           <p:cNvSpPr/>
           <p:nvPr/>
         </p:nvSpPr>
@@ -10895,7 +10872,7 @@
       </p:sp>
       <p:sp>
         <p:nvSpPr>
-          <p:cNvPr id="10" name="Text 7"/>
+          <p:cNvPr id="9" name="Text 6"/>
           <p:cNvSpPr/>
           <p:nvPr/>
         </p:nvSpPr>
@@ -10934,7 +10911,7 @@
       </p:sp>
       <p:sp>
         <p:nvSpPr>
-          <p:cNvPr id="11" name="Text 8"/>
+          <p:cNvPr id="10" name="Text 7"/>
           <p:cNvSpPr/>
           <p:nvPr/>
         </p:nvSpPr>

--- a/folien/dist/01-netzwerke-grundlagen.pptx
+++ b/folien/dist/01-netzwerke-grundlagen.pptx
@@ -11094,8 +11094,8 @@
         </p:blipFill>
         <p:spPr>
           <a:xfrm>
-            <a:off x="566928" y="1517904"/>
-            <a:ext cx="8010144" cy="2331720"/>
+            <a:off x="566928" y="1481328"/>
+            <a:ext cx="8010144" cy="2468880"/>
           </a:xfrm>
           <a:prstGeom prst="rect">
             <a:avLst/>
@@ -11110,8 +11110,8 @@
         </p:nvSpPr>
         <p:spPr>
           <a:xfrm>
-            <a:off x="566928" y="3858768"/>
-            <a:ext cx="8010144" cy="548640"/>
+            <a:off x="566928" y="4023360"/>
+            <a:ext cx="8010144" cy="438912"/>
           </a:xfrm>
           <a:prstGeom prst="rect">
             <a:avLst/>
@@ -11130,8 +11130,8 @@
         </p:nvSpPr>
         <p:spPr>
           <a:xfrm>
-            <a:off x="566928" y="3858768"/>
-            <a:ext cx="41148" cy="548640"/>
+            <a:off x="566928" y="4023360"/>
+            <a:ext cx="41148" cy="438912"/>
           </a:xfrm>
           <a:prstGeom prst="rect">
             <a:avLst/>
@@ -11150,8 +11150,8 @@
         </p:nvSpPr>
         <p:spPr>
           <a:xfrm>
-            <a:off x="804672" y="4005072"/>
-            <a:ext cx="7607808" cy="283464"/>
+            <a:off x="804672" y="4169664"/>
+            <a:ext cx="7607808" cy="173736"/>
           </a:xfrm>
           <a:prstGeom prst="rect">
             <a:avLst/>
@@ -11167,9 +11167,6 @@
               <a:lnSpc>
                 <a:spcPct val="92000"/>
               </a:lnSpc>
-              <a:spcAft>
-                <a:spcPts val="500"/>
-              </a:spcAft>
               <a:buNone/>
             </a:pPr>
             <a:r>
@@ -11181,30 +11178,7 @@
                 <a:ea typeface="Arial" pitchFamily="34" charset="-122"/>
                 <a:cs typeface="Arial" pitchFamily="34" charset="-120"/>
               </a:rPr>
-              <a:t>macOS: ifconfig · arp -a · traceroute · dig</a:t>
-            </a:r>
-            <a:endParaRPr lang="en-US" sz="1050" dirty="0"/>
-          </a:p>
-          <a:p>
-            <a:pPr indent="0" marL="0">
-              <a:lnSpc>
-                <a:spcPct val="92000"/>
-              </a:lnSpc>
-              <a:spcAft>
-                <a:spcPts val="500"/>
-              </a:spcAft>
-              <a:buNone/>
-            </a:pPr>
-            <a:r>
-              <a:rPr lang="en-US" sz="1050" dirty="0">
-                <a:solidFill>
-                  <a:srgbClr val="434A63"/>
-                </a:solidFill>
-                <a:latin typeface="Arial" pitchFamily="34" charset="0"/>
-                <a:ea typeface="Arial" pitchFamily="34" charset="-122"/>
-                <a:cs typeface="Arial" pitchFamily="34" charset="-120"/>
-              </a:rPr>
-              <a:t>Linux: ip -brief addr · ip neigh · tracepath · resolvectl query</a:t>
+              <a:t>macOS: ifconfig · arp -a · traceroute · dig · nc -vz host port</a:t>
             </a:r>
             <a:endParaRPr lang="en-US" sz="1050" dirty="0"/>
           </a:p>
